--- a/deliverables/vk-tech-columns.pptx
+++ b/deliverables/vk-tech-columns.pptx
@@ -1476,7 +1476,7 @@
           <a:lstStyle/>
           <a:p>
             <a:r>
-              <a:t>Слайд вводит инициативу по внедрению ИИ-помощника для автоматизации ответов на вопросы по регламентам и сокращения времени поиска инструкций.</a:t>
+              <a:t>Слайд представляет инициативу по внедрению ИИ-помощника для ускорения работы сотрудников и снижения нагрузки на поддержку.</a:t>
             </a:r>
           </a:p>
         </p:txBody>
@@ -1546,7 +1546,7 @@
           <a:lstStyle/>
           <a:p>
             <a:r>
-              <a:t>Сейчас поиск регламентов занимает до 30 минут, что существенно замедляет работу сотрудников.</a:t>
+              <a:t>Сейчас сотрудникам требуется до 30 минут, чтобы найти нужную инструкцию, что замедляет их работу и снижает общую эффективность отдела.</a:t>
             </a:r>
           </a:p>
         </p:txBody>
@@ -1616,7 +1616,7 @@
           <a:lstStyle/>
           <a:p>
             <a:r>
-              <a:t>Значительная часть нагрузки поддержки приходится на рутинные вопросы, которые можно автоматизировать.</a:t>
+              <a:t>Сейчас треть обращений в поддержку — это повторяющиеся вопросы, которые занимают время и ресурсы.</a:t>
             </a:r>
           </a:p>
         </p:txBody>
@@ -1686,7 +1686,7 @@
           <a:lstStyle/>
           <a:p>
             <a:r>
-              <a:t>Текущий процесс поиска инструкций отнимает до 30 минут у каждого сотрудника, а треть обращений дублируются, что создает лишнюю нагрузку на поддержку.</a:t>
+              <a:t>ИИ-помощник одновременно ускоряет работу сотрудников и разгружает команду поддержки за счет автоматизации типовых запросов.</a:t>
             </a:r>
           </a:p>
         </p:txBody>
@@ -1756,7 +1756,7 @@
           <a:lstStyle/>
           <a:p>
             <a:r>
-              <a:t>Решение автоматически обрабатывает запросы по регламентам, выдавая ответ и ссылку на документ, а сложные вопросы направляет в поддержку.</a:t>
+              <a:t>ИИ-помощник автоматически отвечает на вопросы сотрудников и предоставляет ссылку на исходный документ.</a:t>
             </a:r>
           </a:p>
         </p:txBody>
@@ -1826,7 +1826,7 @@
           <a:lstStyle/>
           <a:p>
             <a:r>
-              <a:t>Если ИИ не находит подтверждённый ответ, система автоматически передаёт запрос в поддержку с полным контекстом для быстрого решения.</a:t>
+              <a:t>Модель работает внутри корпоративного контура, поэтому документы не покидают сеть компании, что исключает утечку данных при обучении или обработке запросов. Это обеспечивает безопасность внутренней информации сотрудников и регламентов. Мы используем только факты из брифа, чтобы избежать необоснованных заявлений о безопасности, так как в исходных данных сделан акцент именно на том, что документы не</a:t>
             </a:r>
           </a:p>
         </p:txBody>
@@ -1896,7 +1896,7 @@
           <a:lstStyle/>
           <a:p>
             <a:r>
-              <a:t>Архитектура обеспечивает полную безопасность данных, так как вся обработка происходит внутри корпоративной сети.</a:t>
+              <a:t>Если ИИ не находит подтверждённый ответ, вопрос автоматически перенаправляется специалисту с полным контекстом.</a:t>
             </a:r>
           </a:p>
         </p:txBody>
@@ -1966,7 +1966,7 @@
           <a:lstStyle/>
           <a:p>
             <a:r>
-              <a:t>ИИ-помощник мгновенно обрабатывает запросы по регламентам, передавая сложные случаи специалистам с полным контекстом.</a:t>
+              <a:t>Пилотный запуск охватывает два подразделения с общим количеством сотрудников 150 человек.</a:t>
             </a:r>
           </a:p>
         </p:txBody>
@@ -2036,7 +2036,7 @@
           <a:lstStyle/>
           <a:p>
             <a:r>
-              <a:t>Пилотный запуск охватывает два подразделения и 150 сотрудников в течение шести недель.</a:t>
+              <a:t>Срок пилота фиксирован на шесть недель для сбора достаточной статистики.</a:t>
             </a:r>
           </a:p>
         </p:txBody>
@@ -2106,7 +2106,7 @@
           <a:lstStyle/>
           <a:p>
             <a:r>
-              <a:t>Срок пилотного запуска составляет шесть недель, что позволит оценить эффективность внедрения.</a:t>
+              <a:t>Для оценки успеха пилота мы будем измерять время поиска ответа и долю обращений, закрытых без участия специалиста.</a:t>
             </a:r>
           </a:p>
         </p:txBody>
@@ -2176,7 +2176,7 @@
           <a:lstStyle/>
           <a:p>
             <a:r>
-              <a:t>Для оценки эффективности пилота мы будем измерять время поиска ответа и долю обращений, закрытых без участия специалиста.</a:t>
+              <a:t>Для реализации пилота необходимо выделить команду из трех человек.</a:t>
             </a:r>
           </a:p>
         </p:txBody>
@@ -2246,7 +2246,7 @@
           <a:lstStyle/>
           <a:p>
             <a:r>
-              <a:t>Для реализации пилота необходимо одобрить проект и выделить команду из трех человек. Мы будем измерять время поиска ответа и долю обращений, закрытых без специалиста.</a:t>
+              <a:t>После одобрения мы сразу начнем работу с двумя подразделениями и сформируем команду для реализации пилота.</a:t>
             </a:r>
           </a:p>
         </p:txBody>
@@ -3374,19 +3374,19 @@
 </p:sldLayout>
 </file>
 
-<file path=ppt/slideLayouts/slideLayout28.xml><?xml version="1.0" encoding="utf-8"?>
-<p:sldLayout xmlns:a="http://schemas.openxmlformats.org/drawingml/2006/main" xmlns:r="http://schemas.openxmlformats.org/officeDocument/2006/relationships" xmlns:mc="http://schemas.openxmlformats.org/markup-compatibility/2006" xmlns:mv="urn:schemas-microsoft-com:mac:vml" xmlns:p="http://schemas.openxmlformats.org/presentationml/2006/main" xmlns:c="http://schemas.openxmlformats.org/drawingml/2006/chart" xmlns:dgm="http://schemas.openxmlformats.org/drawingml/2006/diagram" xmlns:o="urn:schemas-microsoft-com:office:office" xmlns:v="urn:schemas-microsoft-com:vml" xmlns:pvml="urn:schemas-microsoft-com:office:powerpoint" xmlns:com="http://schemas.openxmlformats.org/drawingml/2006/compatibility" xmlns:p14="http://schemas.microsoft.com/office/powerpoint/2010/main" xmlns:p15="http://schemas.microsoft.com/office/powerpoint/2012/main" xmlns:ahyp="http://schemas.microsoft.com/office/drawing/2018/hyperlinkcolor" matchingName="4_Содержание">
-  <p:cSld name="4_Содержание">
+<file path=ppt/slideLayouts/slideLayout12.xml><?xml version="1.0" encoding="utf-8"?>
+<p:sldLayout xmlns:a="http://schemas.openxmlformats.org/drawingml/2006/main" xmlns:r="http://schemas.openxmlformats.org/officeDocument/2006/relationships" xmlns:mc="http://schemas.openxmlformats.org/markup-compatibility/2006" xmlns:mv="urn:schemas-microsoft-com:mac:vml" xmlns:p="http://schemas.openxmlformats.org/presentationml/2006/main" xmlns:c="http://schemas.openxmlformats.org/drawingml/2006/chart" xmlns:dgm="http://schemas.openxmlformats.org/drawingml/2006/diagram" xmlns:o="urn:schemas-microsoft-com:office:office" xmlns:v="urn:schemas-microsoft-com:vml" xmlns:pvml="urn:schemas-microsoft-com:office:powerpoint" xmlns:com="http://schemas.openxmlformats.org/drawingml/2006/compatibility" xmlns:p14="http://schemas.microsoft.com/office/powerpoint/2010/main" xmlns:p15="http://schemas.microsoft.com/office/powerpoint/2012/main" xmlns:ahyp="http://schemas.microsoft.com/office/drawing/2018/hyperlinkcolor" matchingName="1_Контент">
+  <p:cSld name="1_Контент">
     <p:bg>
       <p:bgPr>
         <a:solidFill>
-          <a:schemeClr val="dk1"/>
+          <a:schemeClr val="lt1"/>
         </a:solidFill>
       </p:bgPr>
     </p:bg>
     <p:spTree>
       <p:nvGrpSpPr>
-        <p:cNvPr id="305" name="Shape 305"/>
+        <p:cNvPr id="142" name="Shape 142"/>
         <p:cNvGrpSpPr/>
         <p:nvPr/>
       </p:nvGrpSpPr>
@@ -3400,7 +3400,7 @@
       </p:grpSpPr>
       <p:pic>
         <p:nvPicPr>
-          <p:cNvPr id="306" name="Google Shape;306;p30"/>
+          <p:cNvPr id="143" name="Google Shape;143;p14"/>
           <p:cNvPicPr preferRelativeResize="0"/>
           <p:nvPr/>
         </p:nvPicPr>
@@ -3427,7 +3427,7 @@
       </p:pic>
       <p:sp>
         <p:nvSpPr>
-          <p:cNvPr id="307" name="Google Shape;307;p30"/>
+          <p:cNvPr id="144" name="Google Shape;144;p14"/>
           <p:cNvSpPr txBox="1"/>
           <p:nvPr>
             <p:ph type="title"/>
@@ -3435,8 +3435,8 @@
         </p:nvSpPr>
         <p:spPr>
           <a:xfrm>
-            <a:off x="430360" y="338829"/>
-            <a:ext cx="3945697" cy="753371"/>
+            <a:off x="177971" y="282949"/>
+            <a:ext cx="4058749" cy="753371"/>
           </a:xfrm>
           <a:prstGeom prst="rect">
             <a:avLst/>
@@ -3462,14 +3462,14 @@
                 <a:spcPts val="0"/>
               </a:spcAft>
               <a:buClr>
-                <a:schemeClr val="lt1"/>
+                <a:schemeClr val="dk1"/>
               </a:buClr>
               <a:buSzPts val="2400"/>
               <a:buFont typeface="Play"/>
               <a:buNone/>
               <a:defRPr b="0" i="0" sz="2400" u="none" cap="none" strike="noStrike">
                 <a:solidFill>
-                  <a:schemeClr val="lt1"/>
+                  <a:schemeClr val="dk1"/>
                 </a:solidFill>
                 <a:latin typeface="Play"/>
                 <a:ea typeface="Play"/>
@@ -3571,7 +3571,7 @@
       </p:sp>
       <p:grpSp>
         <p:nvGrpSpPr>
-          <p:cNvPr id="308" name="Google Shape;308;p30"/>
+          <p:cNvPr id="145" name="Google Shape;145;p14"/>
           <p:cNvGrpSpPr/>
           <p:nvPr/>
         </p:nvGrpSpPr>
@@ -3585,7 +3585,7 @@
         </p:grpSpPr>
         <p:sp>
           <p:nvSpPr>
-            <p:cNvPr id="309" name="Google Shape;309;p30"/>
+            <p:cNvPr id="146" name="Google Shape;146;p14"/>
             <p:cNvSpPr/>
             <p:nvPr/>
           </p:nvSpPr>
@@ -3626,7 +3626,7 @@
         </p:sp>
         <p:pic>
           <p:nvPicPr>
-            <p:cNvPr descr=" " id="310" name="Google Shape;310;p30"/>
+            <p:cNvPr descr=" " id="147" name="Google Shape;147;p14"/>
             <p:cNvPicPr preferRelativeResize="0"/>
             <p:nvPr/>
           </p:nvPicPr>
@@ -3653,7 +3653,7 @@
         </p:pic>
         <p:pic>
           <p:nvPicPr>
-            <p:cNvPr descr=" " id="311" name="Google Shape;311;p30"/>
+            <p:cNvPr descr=" " id="148" name="Google Shape;148;p14"/>
             <p:cNvPicPr preferRelativeResize="0"/>
             <p:nvPr/>
           </p:nvPicPr>
@@ -3679,575 +3679,6 @@
           </p:spPr>
         </p:pic>
       </p:grpSp>
-      <p:sp>
-        <p:nvSpPr>
-          <p:cNvPr id="312" name="Google Shape;312;p30"/>
-          <p:cNvSpPr/>
-          <p:nvPr/>
-        </p:nvSpPr>
-        <p:spPr>
-          <a:xfrm>
-            <a:off x="1270160" y="1092200"/>
-            <a:ext cx="2781410" cy="257153"/>
-          </a:xfrm>
-          <a:prstGeom prst="rect">
-            <a:avLst/>
-          </a:prstGeom>
-          <a:noFill/>
-          <a:ln>
-            <a:noFill/>
-          </a:ln>
-        </p:spPr>
-        <p:txBody>
-          <a:bodyPr anchorCtr="0" anchor="ctr" bIns="91425" lIns="91425" spcFirstLastPara="1" rIns="91425" wrap="square" tIns="91425">
-            <a:noAutofit/>
-          </a:bodyPr>
-          <a:lstStyle/>
-          <a:p>
-            <a:pPr indent="0" lvl="0" marL="0" rtl="0" algn="l">
-              <a:spcBef>
-                <a:spcPts val="0"/>
-              </a:spcBef>
-              <a:spcAft>
-                <a:spcPts val="0"/>
-              </a:spcAft>
-              <a:buNone/>
-            </a:pPr>
-            <a:r>
-              <a:t/>
-            </a:r>
-            <a:endParaRPr/>
-          </a:p>
-        </p:txBody>
-      </p:sp>
-      <p:sp>
-        <p:nvSpPr>
-          <p:cNvPr id="313" name="Google Shape;313;p30"/>
-          <p:cNvSpPr txBox="1"/>
-          <p:nvPr>
-            <p:ph idx="1" type="body"/>
-          </p:nvPr>
-        </p:nvSpPr>
-        <p:spPr>
-          <a:xfrm>
-            <a:off x="4637088" y="338139"/>
-            <a:ext cx="3862387" cy="246062"/>
-          </a:xfrm>
-          <a:prstGeom prst="rect">
-            <a:avLst/>
-          </a:prstGeom>
-          <a:noFill/>
-          <a:ln>
-            <a:noFill/>
-          </a:ln>
-        </p:spPr>
-        <p:txBody>
-          <a:bodyPr anchorCtr="0" anchor="t" bIns="45700" lIns="91425" spcFirstLastPara="1" rIns="91425" wrap="square" tIns="45700">
-            <a:noAutofit/>
-          </a:bodyPr>
-          <a:lstStyle>
-            <a:lvl1pPr indent="-228600" lvl="0" marL="457200" marR="0" rtl="0" algn="l">
-              <a:lnSpc>
-                <a:spcPct val="90000"/>
-              </a:lnSpc>
-              <a:spcBef>
-                <a:spcPts val="750"/>
-              </a:spcBef>
-              <a:spcAft>
-                <a:spcPts val="0"/>
-              </a:spcAft>
-              <a:buClr>
-                <a:schemeClr val="accent1"/>
-              </a:buClr>
-              <a:buSzPts val="1200"/>
-              <a:buFont typeface="Arial"/>
-              <a:buNone/>
-              <a:defRPr b="0" i="0" sz="1200" u="none" cap="none" strike="noStrike">
-                <a:solidFill>
-                  <a:schemeClr val="accent1"/>
-                </a:solidFill>
-                <a:latin typeface="Play"/>
-                <a:ea typeface="Play"/>
-                <a:cs typeface="Play"/>
-                <a:sym typeface="Play"/>
-              </a:defRPr>
-            </a:lvl1pPr>
-            <a:lvl2pPr indent="-342900" lvl="1" marL="914400" marR="0" rtl="0" algn="l">
-              <a:lnSpc>
-                <a:spcPct val="90000"/>
-              </a:lnSpc>
-              <a:spcBef>
-                <a:spcPts val="375"/>
-              </a:spcBef>
-              <a:spcAft>
-                <a:spcPts val="0"/>
-              </a:spcAft>
-              <a:buClr>
-                <a:schemeClr val="lt1"/>
-              </a:buClr>
-              <a:buSzPts val="1800"/>
-              <a:buFont typeface="Arial"/>
-              <a:buChar char="•"/>
-              <a:defRPr b="0" i="0" sz="1800" u="none" cap="none" strike="noStrike">
-                <a:solidFill>
-                  <a:schemeClr val="lt1"/>
-                </a:solidFill>
-                <a:latin typeface="Calibri"/>
-                <a:ea typeface="Calibri"/>
-                <a:cs typeface="Calibri"/>
-                <a:sym typeface="Calibri"/>
-              </a:defRPr>
-            </a:lvl2pPr>
-            <a:lvl3pPr indent="-323850" lvl="2" marL="1371600" marR="0" rtl="0" algn="l">
-              <a:lnSpc>
-                <a:spcPct val="90000"/>
-              </a:lnSpc>
-              <a:spcBef>
-                <a:spcPts val="375"/>
-              </a:spcBef>
-              <a:spcAft>
-                <a:spcPts val="0"/>
-              </a:spcAft>
-              <a:buClr>
-                <a:schemeClr val="lt1"/>
-              </a:buClr>
-              <a:buSzPts val="1500"/>
-              <a:buFont typeface="Arial"/>
-              <a:buChar char="•"/>
-              <a:defRPr b="0" i="0" sz="1500" u="none" cap="none" strike="noStrike">
-                <a:solidFill>
-                  <a:schemeClr val="lt1"/>
-                </a:solidFill>
-                <a:latin typeface="Calibri"/>
-                <a:ea typeface="Calibri"/>
-                <a:cs typeface="Calibri"/>
-                <a:sym typeface="Calibri"/>
-              </a:defRPr>
-            </a:lvl3pPr>
-            <a:lvl4pPr indent="-314325" lvl="3" marL="1828800" marR="0" rtl="0" algn="l">
-              <a:lnSpc>
-                <a:spcPct val="90000"/>
-              </a:lnSpc>
-              <a:spcBef>
-                <a:spcPts val="375"/>
-              </a:spcBef>
-              <a:spcAft>
-                <a:spcPts val="0"/>
-              </a:spcAft>
-              <a:buClr>
-                <a:schemeClr val="lt1"/>
-              </a:buClr>
-              <a:buSzPts val="1350"/>
-              <a:buFont typeface="Arial"/>
-              <a:buChar char="•"/>
-              <a:defRPr b="0" i="0" sz="1350" u="none" cap="none" strike="noStrike">
-                <a:solidFill>
-                  <a:schemeClr val="lt1"/>
-                </a:solidFill>
-                <a:latin typeface="Calibri"/>
-                <a:ea typeface="Calibri"/>
-                <a:cs typeface="Calibri"/>
-                <a:sym typeface="Calibri"/>
-              </a:defRPr>
-            </a:lvl4pPr>
-            <a:lvl5pPr indent="-314325" lvl="4" marL="2286000" marR="0" rtl="0" algn="l">
-              <a:lnSpc>
-                <a:spcPct val="90000"/>
-              </a:lnSpc>
-              <a:spcBef>
-                <a:spcPts val="375"/>
-              </a:spcBef>
-              <a:spcAft>
-                <a:spcPts val="0"/>
-              </a:spcAft>
-              <a:buClr>
-                <a:schemeClr val="lt1"/>
-              </a:buClr>
-              <a:buSzPts val="1350"/>
-              <a:buFont typeface="Arial"/>
-              <a:buChar char="•"/>
-              <a:defRPr b="0" i="0" sz="1350" u="none" cap="none" strike="noStrike">
-                <a:solidFill>
-                  <a:schemeClr val="lt1"/>
-                </a:solidFill>
-                <a:latin typeface="Calibri"/>
-                <a:ea typeface="Calibri"/>
-                <a:cs typeface="Calibri"/>
-                <a:sym typeface="Calibri"/>
-              </a:defRPr>
-            </a:lvl5pPr>
-            <a:lvl6pPr indent="-314325" lvl="5" marL="2743200" marR="0" rtl="0" algn="l">
-              <a:lnSpc>
-                <a:spcPct val="90000"/>
-              </a:lnSpc>
-              <a:spcBef>
-                <a:spcPts val="375"/>
-              </a:spcBef>
-              <a:spcAft>
-                <a:spcPts val="0"/>
-              </a:spcAft>
-              <a:buClr>
-                <a:schemeClr val="lt1"/>
-              </a:buClr>
-              <a:buSzPts val="1350"/>
-              <a:buFont typeface="Arial"/>
-              <a:buChar char="•"/>
-              <a:defRPr b="0" i="0" sz="1350" u="none" cap="none" strike="noStrike">
-                <a:solidFill>
-                  <a:schemeClr val="lt1"/>
-                </a:solidFill>
-                <a:latin typeface="Calibri"/>
-                <a:ea typeface="Calibri"/>
-                <a:cs typeface="Calibri"/>
-                <a:sym typeface="Calibri"/>
-              </a:defRPr>
-            </a:lvl6pPr>
-            <a:lvl7pPr indent="-314325" lvl="6" marL="3200400" marR="0" rtl="0" algn="l">
-              <a:lnSpc>
-                <a:spcPct val="90000"/>
-              </a:lnSpc>
-              <a:spcBef>
-                <a:spcPts val="375"/>
-              </a:spcBef>
-              <a:spcAft>
-                <a:spcPts val="0"/>
-              </a:spcAft>
-              <a:buClr>
-                <a:schemeClr val="lt1"/>
-              </a:buClr>
-              <a:buSzPts val="1350"/>
-              <a:buFont typeface="Arial"/>
-              <a:buChar char="•"/>
-              <a:defRPr b="0" i="0" sz="1350" u="none" cap="none" strike="noStrike">
-                <a:solidFill>
-                  <a:schemeClr val="lt1"/>
-                </a:solidFill>
-                <a:latin typeface="Calibri"/>
-                <a:ea typeface="Calibri"/>
-                <a:cs typeface="Calibri"/>
-                <a:sym typeface="Calibri"/>
-              </a:defRPr>
-            </a:lvl7pPr>
-            <a:lvl8pPr indent="-314325" lvl="7" marL="3657600" marR="0" rtl="0" algn="l">
-              <a:lnSpc>
-                <a:spcPct val="90000"/>
-              </a:lnSpc>
-              <a:spcBef>
-                <a:spcPts val="375"/>
-              </a:spcBef>
-              <a:spcAft>
-                <a:spcPts val="0"/>
-              </a:spcAft>
-              <a:buClr>
-                <a:schemeClr val="lt1"/>
-              </a:buClr>
-              <a:buSzPts val="1350"/>
-              <a:buFont typeface="Arial"/>
-              <a:buChar char="•"/>
-              <a:defRPr b="0" i="0" sz="1350" u="none" cap="none" strike="noStrike">
-                <a:solidFill>
-                  <a:schemeClr val="lt1"/>
-                </a:solidFill>
-                <a:latin typeface="Calibri"/>
-                <a:ea typeface="Calibri"/>
-                <a:cs typeface="Calibri"/>
-                <a:sym typeface="Calibri"/>
-              </a:defRPr>
-            </a:lvl8pPr>
-            <a:lvl9pPr indent="-314325" lvl="8" marL="4114800" marR="0" rtl="0" algn="l">
-              <a:lnSpc>
-                <a:spcPct val="90000"/>
-              </a:lnSpc>
-              <a:spcBef>
-                <a:spcPts val="375"/>
-              </a:spcBef>
-              <a:spcAft>
-                <a:spcPts val="0"/>
-              </a:spcAft>
-              <a:buClr>
-                <a:schemeClr val="lt1"/>
-              </a:buClr>
-              <a:buSzPts val="1350"/>
-              <a:buFont typeface="Arial"/>
-              <a:buChar char="•"/>
-              <a:defRPr b="0" i="0" sz="1350" u="none" cap="none" strike="noStrike">
-                <a:solidFill>
-                  <a:schemeClr val="lt1"/>
-                </a:solidFill>
-                <a:latin typeface="Calibri"/>
-                <a:ea typeface="Calibri"/>
-                <a:cs typeface="Calibri"/>
-                <a:sym typeface="Calibri"/>
-              </a:defRPr>
-            </a:lvl9pPr>
-          </a:lstStyle>
-          <a:p/>
-        </p:txBody>
-      </p:sp>
-      <p:sp>
-        <p:nvSpPr>
-          <p:cNvPr id="314" name="Google Shape;314;p30"/>
-          <p:cNvSpPr txBox="1"/>
-          <p:nvPr>
-            <p:ph idx="2" type="body"/>
-          </p:nvPr>
-        </p:nvSpPr>
-        <p:spPr>
-          <a:xfrm>
-            <a:off x="4637088" y="676278"/>
-            <a:ext cx="3862387" cy="3737102"/>
-          </a:xfrm>
-          <a:prstGeom prst="rect">
-            <a:avLst/>
-          </a:prstGeom>
-          <a:noFill/>
-          <a:ln>
-            <a:noFill/>
-          </a:ln>
-        </p:spPr>
-        <p:txBody>
-          <a:bodyPr anchorCtr="0" anchor="t" bIns="45700" lIns="91425" spcFirstLastPara="1" rIns="91425" wrap="square" tIns="45700">
-            <a:noAutofit/>
-          </a:bodyPr>
-          <a:lstStyle>
-            <a:lvl1pPr indent="-292100" lvl="0" marL="457200" marR="0" rtl="0" algn="l">
-              <a:lnSpc>
-                <a:spcPct val="90000"/>
-              </a:lnSpc>
-              <a:spcBef>
-                <a:spcPts val="750"/>
-              </a:spcBef>
-              <a:spcAft>
-                <a:spcPts val="0"/>
-              </a:spcAft>
-              <a:buClr>
-                <a:schemeClr val="lt1"/>
-              </a:buClr>
-              <a:buSzPts val="1000"/>
-              <a:buFont typeface="Arial"/>
-              <a:buChar char="•"/>
-              <a:defRPr b="0" i="0" sz="1000" u="none" cap="none" strike="noStrike">
-                <a:solidFill>
-                  <a:schemeClr val="lt1"/>
-                </a:solidFill>
-                <a:latin typeface="Play"/>
-                <a:ea typeface="Play"/>
-                <a:cs typeface="Play"/>
-                <a:sym typeface="Play"/>
-              </a:defRPr>
-            </a:lvl1pPr>
-            <a:lvl2pPr indent="-342900" lvl="1" marL="914400" marR="0" rtl="0" algn="l">
-              <a:lnSpc>
-                <a:spcPct val="90000"/>
-              </a:lnSpc>
-              <a:spcBef>
-                <a:spcPts val="375"/>
-              </a:spcBef>
-              <a:spcAft>
-                <a:spcPts val="0"/>
-              </a:spcAft>
-              <a:buClr>
-                <a:schemeClr val="lt1"/>
-              </a:buClr>
-              <a:buSzPts val="1800"/>
-              <a:buFont typeface="Arial"/>
-              <a:buChar char="•"/>
-              <a:defRPr b="0" i="0" sz="1800" u="none" cap="none" strike="noStrike">
-                <a:solidFill>
-                  <a:schemeClr val="lt1"/>
-                </a:solidFill>
-                <a:latin typeface="Calibri"/>
-                <a:ea typeface="Calibri"/>
-                <a:cs typeface="Calibri"/>
-                <a:sym typeface="Calibri"/>
-              </a:defRPr>
-            </a:lvl2pPr>
-            <a:lvl3pPr indent="-323850" lvl="2" marL="1371600" marR="0" rtl="0" algn="l">
-              <a:lnSpc>
-                <a:spcPct val="90000"/>
-              </a:lnSpc>
-              <a:spcBef>
-                <a:spcPts val="375"/>
-              </a:spcBef>
-              <a:spcAft>
-                <a:spcPts val="0"/>
-              </a:spcAft>
-              <a:buClr>
-                <a:schemeClr val="lt1"/>
-              </a:buClr>
-              <a:buSzPts val="1500"/>
-              <a:buFont typeface="Arial"/>
-              <a:buChar char="•"/>
-              <a:defRPr b="0" i="0" sz="1500" u="none" cap="none" strike="noStrike">
-                <a:solidFill>
-                  <a:schemeClr val="lt1"/>
-                </a:solidFill>
-                <a:latin typeface="Calibri"/>
-                <a:ea typeface="Calibri"/>
-                <a:cs typeface="Calibri"/>
-                <a:sym typeface="Calibri"/>
-              </a:defRPr>
-            </a:lvl3pPr>
-            <a:lvl4pPr indent="-314325" lvl="3" marL="1828800" marR="0" rtl="0" algn="l">
-              <a:lnSpc>
-                <a:spcPct val="90000"/>
-              </a:lnSpc>
-              <a:spcBef>
-                <a:spcPts val="375"/>
-              </a:spcBef>
-              <a:spcAft>
-                <a:spcPts val="0"/>
-              </a:spcAft>
-              <a:buClr>
-                <a:schemeClr val="lt1"/>
-              </a:buClr>
-              <a:buSzPts val="1350"/>
-              <a:buFont typeface="Arial"/>
-              <a:buChar char="•"/>
-              <a:defRPr b="0" i="0" sz="1350" u="none" cap="none" strike="noStrike">
-                <a:solidFill>
-                  <a:schemeClr val="lt1"/>
-                </a:solidFill>
-                <a:latin typeface="Calibri"/>
-                <a:ea typeface="Calibri"/>
-                <a:cs typeface="Calibri"/>
-                <a:sym typeface="Calibri"/>
-              </a:defRPr>
-            </a:lvl4pPr>
-            <a:lvl5pPr indent="-314325" lvl="4" marL="2286000" marR="0" rtl="0" algn="l">
-              <a:lnSpc>
-                <a:spcPct val="90000"/>
-              </a:lnSpc>
-              <a:spcBef>
-                <a:spcPts val="375"/>
-              </a:spcBef>
-              <a:spcAft>
-                <a:spcPts val="0"/>
-              </a:spcAft>
-              <a:buClr>
-                <a:schemeClr val="lt1"/>
-              </a:buClr>
-              <a:buSzPts val="1350"/>
-              <a:buFont typeface="Arial"/>
-              <a:buChar char="•"/>
-              <a:defRPr b="0" i="0" sz="1350" u="none" cap="none" strike="noStrike">
-                <a:solidFill>
-                  <a:schemeClr val="lt1"/>
-                </a:solidFill>
-                <a:latin typeface="Calibri"/>
-                <a:ea typeface="Calibri"/>
-                <a:cs typeface="Calibri"/>
-                <a:sym typeface="Calibri"/>
-              </a:defRPr>
-            </a:lvl5pPr>
-            <a:lvl6pPr indent="-314325" lvl="5" marL="2743200" marR="0" rtl="0" algn="l">
-              <a:lnSpc>
-                <a:spcPct val="90000"/>
-              </a:lnSpc>
-              <a:spcBef>
-                <a:spcPts val="375"/>
-              </a:spcBef>
-              <a:spcAft>
-                <a:spcPts val="0"/>
-              </a:spcAft>
-              <a:buClr>
-                <a:schemeClr val="lt1"/>
-              </a:buClr>
-              <a:buSzPts val="1350"/>
-              <a:buFont typeface="Arial"/>
-              <a:buChar char="•"/>
-              <a:defRPr b="0" i="0" sz="1350" u="none" cap="none" strike="noStrike">
-                <a:solidFill>
-                  <a:schemeClr val="lt1"/>
-                </a:solidFill>
-                <a:latin typeface="Calibri"/>
-                <a:ea typeface="Calibri"/>
-                <a:cs typeface="Calibri"/>
-                <a:sym typeface="Calibri"/>
-              </a:defRPr>
-            </a:lvl6pPr>
-            <a:lvl7pPr indent="-314325" lvl="6" marL="3200400" marR="0" rtl="0" algn="l">
-              <a:lnSpc>
-                <a:spcPct val="90000"/>
-              </a:lnSpc>
-              <a:spcBef>
-                <a:spcPts val="375"/>
-              </a:spcBef>
-              <a:spcAft>
-                <a:spcPts val="0"/>
-              </a:spcAft>
-              <a:buClr>
-                <a:schemeClr val="lt1"/>
-              </a:buClr>
-              <a:buSzPts val="1350"/>
-              <a:buFont typeface="Arial"/>
-              <a:buChar char="•"/>
-              <a:defRPr b="0" i="0" sz="1350" u="none" cap="none" strike="noStrike">
-                <a:solidFill>
-                  <a:schemeClr val="lt1"/>
-                </a:solidFill>
-                <a:latin typeface="Calibri"/>
-                <a:ea typeface="Calibri"/>
-                <a:cs typeface="Calibri"/>
-                <a:sym typeface="Calibri"/>
-              </a:defRPr>
-            </a:lvl7pPr>
-            <a:lvl8pPr indent="-314325" lvl="7" marL="3657600" marR="0" rtl="0" algn="l">
-              <a:lnSpc>
-                <a:spcPct val="90000"/>
-              </a:lnSpc>
-              <a:spcBef>
-                <a:spcPts val="375"/>
-              </a:spcBef>
-              <a:spcAft>
-                <a:spcPts val="0"/>
-              </a:spcAft>
-              <a:buClr>
-                <a:schemeClr val="lt1"/>
-              </a:buClr>
-              <a:buSzPts val="1350"/>
-              <a:buFont typeface="Arial"/>
-              <a:buChar char="•"/>
-              <a:defRPr b="0" i="0" sz="1350" u="none" cap="none" strike="noStrike">
-                <a:solidFill>
-                  <a:schemeClr val="lt1"/>
-                </a:solidFill>
-                <a:latin typeface="Calibri"/>
-                <a:ea typeface="Calibri"/>
-                <a:cs typeface="Calibri"/>
-                <a:sym typeface="Calibri"/>
-              </a:defRPr>
-            </a:lvl8pPr>
-            <a:lvl9pPr indent="-314325" lvl="8" marL="4114800" marR="0" rtl="0" algn="l">
-              <a:lnSpc>
-                <a:spcPct val="90000"/>
-              </a:lnSpc>
-              <a:spcBef>
-                <a:spcPts val="375"/>
-              </a:spcBef>
-              <a:spcAft>
-                <a:spcPts val="0"/>
-              </a:spcAft>
-              <a:buClr>
-                <a:schemeClr val="lt1"/>
-              </a:buClr>
-              <a:buSzPts val="1350"/>
-              <a:buFont typeface="Arial"/>
-              <a:buChar char="•"/>
-              <a:defRPr b="0" i="0" sz="1350" u="none" cap="none" strike="noStrike">
-                <a:solidFill>
-                  <a:schemeClr val="lt1"/>
-                </a:solidFill>
-                <a:latin typeface="Calibri"/>
-                <a:ea typeface="Calibri"/>
-                <a:cs typeface="Calibri"/>
-                <a:sym typeface="Calibri"/>
-              </a:defRPr>
-            </a:lvl9pPr>
-          </a:lstStyle>
-          <a:p/>
-        </p:txBody>
-      </p:sp>
     </p:spTree>
   </p:cSld>
   <p:clrMapOvr>
@@ -5884,7 +5315,7 @@
   <p:sldLayoutIdLst>
     <p:sldLayoutId id="2147483655" r:id="rId5"/>
     <p:sldLayoutId id="2147483658" r:id="rId8"/>
-    <p:sldLayoutId id="2147483675" r:id="rId25"/>
+    <p:sldLayoutId id="2147483659" r:id="rId9"/>
   </p:sldLayoutIdLst>
   <p:hf dt="0" ftr="0" hdr="0" sldNum="0"/>
   <p:txStyles>
@@ -6635,7 +6066,7 @@
             </a:pPr>
             <a:r>
               <a:rPr sz="1800"/>
-              <a:t>Ускорение работы сотрудников за счет ИИ</a:t>
+              <a:t>Ускорение работы сотрудников через ИИ</a:t>
             </a:r>
             <a:endParaRPr/>
           </a:p>
@@ -6686,7 +6117,7 @@
             </a:pPr>
             <a:r>
               <a:rPr sz="1100"/>
-              <a:t>Автоматизация поддержки и ускорение работы сотрудников</a:t>
+              <a:t>Инициатива по внедрению ИИ-помощника во внутренний портал</a:t>
             </a:r>
             <a:endParaRPr/>
           </a:p>
@@ -6712,27 +6143,155 @@
       <p:grpSpPr/>
       <p:sp>
         <p:nvSpPr>
-          <p:cNvPr id="2" name="BrandDeck Text 2"/>
-          <p:cNvSpPr>
-            <a:spLocks noGrp="1"/>
-          </p:cNvSpPr>
+          <p:cNvPr id="851" name="Google Shape;851;p60"/>
+          <p:cNvSpPr/>
+          <p:nvPr/>
+        </p:nvSpPr>
+        <p:spPr>
+          <a:xfrm>
+            <a:off x="8667705" y="4666977"/>
+            <a:ext cx="190499" cy="190475"/>
+          </a:xfrm>
+          <a:prstGeom prst="rect">
+            <a:avLst/>
+          </a:prstGeom>
+          <a:noFill/>
+          <a:ln>
+            <a:noFill/>
+          </a:ln>
+        </p:spPr>
+        <p:txBody>
+          <a:bodyPr anchorCtr="0" anchor="ctr" bIns="91425" lIns="91425" spcFirstLastPara="1" rIns="91425" wrap="square" tIns="91425">
+            <a:noAutofit/>
+          </a:bodyPr>
+          <a:lstStyle/>
+          <a:p>
+            <a:pPr indent="0" lvl="0" marL="0" rtl="0" algn="l">
+              <a:spcBef>
+                <a:spcPts val="0"/>
+              </a:spcBef>
+              <a:spcAft>
+                <a:spcPts val="0"/>
+              </a:spcAft>
+              <a:buNone/>
+            </a:pPr>
+            <a:r>
+              <a:t/>
+            </a:r>
+            <a:endParaRPr/>
+          </a:p>
+        </p:txBody>
+      </p:sp>
+      <p:sp>
+        <p:nvSpPr>
+          <p:cNvPr id="852" name="Google Shape;852;p60"/>
+          <p:cNvSpPr/>
+          <p:nvPr/>
+        </p:nvSpPr>
+        <p:spPr>
+          <a:xfrm>
+            <a:off x="285748" y="286047"/>
+            <a:ext cx="8572456" cy="4176169"/>
+          </a:xfrm>
+          <a:prstGeom prst="rect">
+            <a:avLst/>
+          </a:prstGeom>
+          <a:noFill/>
+          <a:ln>
+            <a:noFill/>
+          </a:ln>
+        </p:spPr>
+        <p:txBody>
+          <a:bodyPr anchorCtr="0" anchor="ctr" bIns="91425" lIns="91425" spcFirstLastPara="1" rIns="91425" wrap="square" tIns="91425">
+            <a:noAutofit/>
+          </a:bodyPr>
+          <a:lstStyle/>
+          <a:p>
+            <a:pPr indent="0" lvl="0" marL="0" rtl="0" algn="l">
+              <a:spcBef>
+                <a:spcPts val="0"/>
+              </a:spcBef>
+              <a:spcAft>
+                <a:spcPts val="0"/>
+              </a:spcAft>
+              <a:buNone/>
+            </a:pPr>
+            <a:r>
+              <a:t/>
+            </a:r>
+            <a:endParaRPr/>
+          </a:p>
+        </p:txBody>
+      </p:sp>
+      <p:sp>
+        <p:nvSpPr>
+          <p:cNvPr id="853" name="Google Shape;853;p60"/>
+          <p:cNvSpPr/>
+          <p:nvPr/>
+        </p:nvSpPr>
+        <p:spPr>
+          <a:xfrm>
+            <a:off x="285749" y="1209852"/>
+            <a:ext cx="6648415" cy="3252364"/>
+          </a:xfrm>
+          <a:prstGeom prst="rect">
+            <a:avLst/>
+          </a:prstGeom>
+          <a:noFill/>
+          <a:ln>
+            <a:noFill/>
+          </a:ln>
+        </p:spPr>
+        <p:txBody>
+          <a:bodyPr anchorCtr="0" anchor="ctr" bIns="91425" lIns="91425" spcFirstLastPara="1" rIns="91425" wrap="square" tIns="91425">
+            <a:noAutofit/>
+          </a:bodyPr>
+          <a:lstStyle/>
+          <a:p>
+            <a:pPr indent="0" lvl="0" marL="0" rtl="0" algn="l">
+              <a:spcBef>
+                <a:spcPts val="0"/>
+              </a:spcBef>
+              <a:spcAft>
+                <a:spcPts val="0"/>
+              </a:spcAft>
+              <a:buNone/>
+            </a:pPr>
+            <a:r>
+              <a:t/>
+            </a:r>
+            <a:endParaRPr/>
+          </a:p>
+        </p:txBody>
+      </p:sp>
+      <p:sp>
+        <p:nvSpPr>
+          <p:cNvPr id="872" name="BrandDeck Text 872"/>
+          <p:cNvSpPr txBox="1"/>
           <p:nvPr>
             <p:ph type="title"/>
           </p:nvPr>
         </p:nvSpPr>
         <p:spPr>
           <a:xfrm>
-            <a:off x="430360" y="338829"/>
-            <a:ext cx="3945697" cy="753371"/>
+            <a:off x="177971" y="282949"/>
+            <a:ext cx="5025400" cy="753371"/>
           </a:xfrm>
+          <a:prstGeom prst="rect">
+            <a:avLst/>
+          </a:prstGeom>
+          <a:noFill/>
+          <a:ln>
+            <a:noFill/>
+          </a:ln>
         </p:spPr>
         <p:txBody>
-          <a:bodyPr wrap="square" anchor="t">
+          <a:bodyPr anchorCtr="0" anchor="t" bIns="45700" lIns="91425" spcFirstLastPara="1" rIns="91425" wrap="square" tIns="45700">
             <a:normAutofit/>
           </a:bodyPr>
           <a:lstStyle/>
           <a:p>
-            <a:pPr algn="l">
+            <a:pPr indent="0" marL="0" rtl="0" algn="l">
               <a:lnSpc>
                 <a:spcPct val="115000"/>
               </a:lnSpc>
@@ -6742,457 +6301,191 @@
               <a:spcAft>
                 <a:spcPts val="270"/>
               </a:spcAft>
+              <a:buClr>
+                <a:schemeClr val="dk1"/>
+              </a:buClr>
+              <a:buSzPts val="2400"/>
+              <a:buFont typeface="Play"/>
+              <a:buNone/>
             </a:pPr>
             <a:r>
               <a:rPr sz="1800"/>
-              <a:t>Срок пилота составляет 6 недель</a:t>
+              <a:t>Измеряем время поиска и долю закрытых обращений без специалиста</a:t>
             </a:r>
+            <a:endParaRPr/>
           </a:p>
         </p:txBody>
       </p:sp>
-      <p:grpSp>
-        <p:nvGrpSpPr>
-          <p:cNvPr id="3" name="BrandDeck Diagram process" descr="process: Старт пилота Запуск в 2 подразделения; Период работы Длительность 6 недель; Финал пилота Анализ результатов"/>
-          <p:cNvGrpSpPr/>
+      <p:graphicFrame>
+        <p:nvGraphicFramePr>
+          <p:cNvPr id="873" name="BrandDeck Table"/>
+          <p:cNvGraphicFramePr>
+            <a:graphicFrameLocks noGrp="1"/>
+          </p:cNvGraphicFramePr>
           <p:nvPr/>
-        </p:nvGrpSpPr>
-        <p:grpSpPr>
-          <a:xfrm>
-            <a:off x="4637088" y="703710"/>
-            <a:ext cx="3862387" cy="3682237"/>
-            <a:chOff x="4637088" y="703710"/>
-            <a:chExt cx="3862387" cy="3682237"/>
-          </a:xfrm>
-        </p:grpSpPr>
-        <p:sp>
-          <p:nvSpPr>
-            <p:cNvPr id="4" name="BrandDeck Diagram Connector"/>
-            <p:cNvSpPr/>
-            <p:nvPr/>
-          </p:nvSpPr>
-          <p:spPr>
-            <a:xfrm>
-              <a:off x="4876660" y="1299128"/>
-              <a:ext cx="32918" cy="2491401"/>
-            </a:xfrm>
-            <a:prstGeom prst="rect">
-              <a:avLst/>
-            </a:prstGeom>
-            <a:solidFill>
-              <a:srgbClr val="58A6FF"/>
-            </a:solidFill>
-            <a:ln>
-              <a:noFill/>
-            </a:ln>
-          </p:spPr>
-          <p:txBody>
-            <a:bodyPr rtlCol="0" anchor="ctr"/>
-            <a:lstStyle/>
-            <a:p>
-              <a:pPr algn="ctr"/>
-            </a:p>
-          </p:txBody>
-        </p:sp>
-        <p:sp>
-          <p:nvSpPr>
-            <p:cNvPr id="5" name="BrandDeck Diagram Step 1 Badge"/>
-            <p:cNvSpPr/>
-            <p:nvPr/>
-          </p:nvSpPr>
-          <p:spPr>
-            <a:xfrm>
-              <a:off x="4637088" y="1043096"/>
-              <a:ext cx="512064" cy="512064"/>
-            </a:xfrm>
-            <a:prstGeom prst="ellipse">
-              <a:avLst/>
-            </a:prstGeom>
-            <a:solidFill>
-              <a:srgbClr val="006DEB"/>
-            </a:solidFill>
-            <a:ln>
-              <a:noFill/>
-            </a:ln>
-          </p:spPr>
-          <p:txBody>
-            <a:bodyPr rtlCol="0" anchor="ctr" wrap="square" lIns="0" tIns="0" rIns="0" bIns="0">
-              <a:noAutofit/>
-            </a:bodyPr>
-            <a:lstStyle/>
-            <a:p>
-              <a:pPr algn="ctr">
-                <a:lnSpc>
-                  <a:spcPct val="110000"/>
-                </a:lnSpc>
-              </a:pPr>
-              <a:r>
-                <a:rPr sz="1410" b="1">
-                  <a:solidFill>
-                    <a:srgbClr val="FFFFFF"/>
-                  </a:solidFill>
-                  <a:latin typeface="Play"/>
-                </a:rPr>
-                <a:t>01</a:t>
-              </a:r>
-            </a:p>
-          </p:txBody>
-        </p:sp>
-        <p:sp>
-          <p:nvSpPr>
-            <p:cNvPr id="6" name="BrandDeck Diagram Detail Card 1"/>
-            <p:cNvSpPr/>
-            <p:nvPr/>
-          </p:nvSpPr>
-          <p:spPr>
-            <a:xfrm>
-              <a:off x="5258880" y="703710"/>
-              <a:ext cx="3240595" cy="1190836"/>
-            </a:xfrm>
-            <a:prstGeom prst="roundRect">
-              <a:avLst>
-                <a:gd name="adj" fmla="val 12000"/>
-              </a:avLst>
-            </a:prstGeom>
-            <a:solidFill>
-              <a:srgbClr val="E8F3FF"/>
-            </a:solidFill>
-            <a:ln>
-              <a:noFill/>
-            </a:ln>
-          </p:spPr>
-          <p:txBody>
-            <a:bodyPr rtlCol="0" anchor="ctr"/>
-            <a:lstStyle/>
-            <a:p>
-              <a:pPr algn="ctr"/>
-            </a:p>
-          </p:txBody>
-        </p:sp>
-        <p:sp>
-          <p:nvSpPr>
-            <p:cNvPr id="7" name="BrandDeck Diagram Text 1"/>
-            <p:cNvSpPr txBox="1"/>
-            <p:nvPr/>
-          </p:nvSpPr>
-          <p:spPr>
-            <a:xfrm>
-              <a:off x="5350320" y="703710"/>
-              <a:ext cx="3149155" cy="1190836"/>
-            </a:xfrm>
-            <a:prstGeom prst="rect">
-              <a:avLst/>
-            </a:prstGeom>
-            <a:noFill/>
-          </p:spPr>
-          <p:txBody>
-            <a:bodyPr wrap="square" anchor="ctr" lIns="36576" tIns="18288" rIns="36576" bIns="18288">
-              <a:noAutofit/>
-            </a:bodyPr>
-            <a:lstStyle/>
-            <a:p>
-              <a:pPr algn="l">
-                <a:lnSpc>
-                  <a:spcPct val="110000"/>
-                </a:lnSpc>
-              </a:pPr>
-              <a:r>
-                <a:rPr sz="1600" b="1">
-                  <a:solidFill>
-                    <a:srgbClr val="000000"/>
-                  </a:solidFill>
-                  <a:latin typeface="Play"/>
-                </a:rPr>
-                <a:t>Старт пилота</a:t>
-              </a:r>
-            </a:p>
-            <a:p>
-              <a:pPr algn="l">
-                <a:lnSpc>
-                  <a:spcPct val="110000"/>
-                </a:lnSpc>
-                <a:spcBef>
-                  <a:spcPts val="400"/>
-                </a:spcBef>
-              </a:pPr>
-              <a:r>
-                <a:rPr sz="1600" b="0">
-                  <a:solidFill>
-                    <a:srgbClr val="000000"/>
-                  </a:solidFill>
-                  <a:latin typeface="Play"/>
-                </a:rPr>
-                <a:t>Запуск в 2 подразделения</a:t>
-              </a:r>
-            </a:p>
-          </p:txBody>
-        </p:sp>
-        <p:sp>
-          <p:nvSpPr>
-            <p:cNvPr id="8" name="BrandDeck Diagram Step 2 Badge"/>
-            <p:cNvSpPr/>
-            <p:nvPr/>
-          </p:nvSpPr>
-          <p:spPr>
-            <a:xfrm>
-              <a:off x="4637088" y="2288797"/>
-              <a:ext cx="512064" cy="512064"/>
-            </a:xfrm>
-            <a:prstGeom prst="ellipse">
-              <a:avLst/>
-            </a:prstGeom>
-            <a:solidFill>
-              <a:srgbClr val="006DEB"/>
-            </a:solidFill>
-            <a:ln>
-              <a:noFill/>
-            </a:ln>
-          </p:spPr>
-          <p:txBody>
-            <a:bodyPr rtlCol="0" anchor="ctr" wrap="square" lIns="0" tIns="0" rIns="0" bIns="0">
-              <a:noAutofit/>
-            </a:bodyPr>
-            <a:lstStyle/>
-            <a:p>
-              <a:pPr algn="ctr">
-                <a:lnSpc>
-                  <a:spcPct val="110000"/>
-                </a:lnSpc>
-              </a:pPr>
-              <a:r>
-                <a:rPr sz="1410" b="1">
-                  <a:solidFill>
-                    <a:srgbClr val="FFFFFF"/>
-                  </a:solidFill>
-                  <a:latin typeface="Play"/>
-                </a:rPr>
-                <a:t>02</a:t>
-              </a:r>
-            </a:p>
-          </p:txBody>
-        </p:sp>
-        <p:sp>
-          <p:nvSpPr>
-            <p:cNvPr id="9" name="BrandDeck Diagram Detail Card 2"/>
-            <p:cNvSpPr/>
-            <p:nvPr/>
-          </p:nvSpPr>
-          <p:spPr>
-            <a:xfrm>
-              <a:off x="5258880" y="1949410"/>
-              <a:ext cx="3240595" cy="1190836"/>
-            </a:xfrm>
-            <a:prstGeom prst="roundRect">
-              <a:avLst>
-                <a:gd name="adj" fmla="val 12000"/>
-              </a:avLst>
-            </a:prstGeom>
-            <a:solidFill>
-              <a:srgbClr val="E8F3FF"/>
-            </a:solidFill>
-            <a:ln>
-              <a:noFill/>
-            </a:ln>
-          </p:spPr>
-          <p:txBody>
-            <a:bodyPr rtlCol="0" anchor="ctr"/>
-            <a:lstStyle/>
-            <a:p>
-              <a:pPr algn="ctr"/>
-            </a:p>
-          </p:txBody>
-        </p:sp>
-        <p:sp>
-          <p:nvSpPr>
-            <p:cNvPr id="10" name="BrandDeck Diagram Text 2"/>
-            <p:cNvSpPr txBox="1"/>
-            <p:nvPr/>
-          </p:nvSpPr>
-          <p:spPr>
-            <a:xfrm>
-              <a:off x="5350320" y="1949410"/>
-              <a:ext cx="3149155" cy="1190836"/>
-            </a:xfrm>
-            <a:prstGeom prst="rect">
-              <a:avLst/>
-            </a:prstGeom>
-            <a:noFill/>
-          </p:spPr>
-          <p:txBody>
-            <a:bodyPr wrap="square" anchor="ctr" lIns="36576" tIns="18288" rIns="36576" bIns="18288">
-              <a:noAutofit/>
-            </a:bodyPr>
-            <a:lstStyle/>
-            <a:p>
-              <a:pPr algn="l">
-                <a:lnSpc>
-                  <a:spcPct val="110000"/>
-                </a:lnSpc>
-              </a:pPr>
-              <a:r>
-                <a:rPr sz="1600" b="1">
-                  <a:solidFill>
-                    <a:srgbClr val="000000"/>
-                  </a:solidFill>
-                  <a:latin typeface="Play"/>
-                </a:rPr>
-                <a:t>Период работы</a:t>
-              </a:r>
-            </a:p>
-            <a:p>
-              <a:pPr algn="l">
-                <a:lnSpc>
-                  <a:spcPct val="110000"/>
-                </a:lnSpc>
-                <a:spcBef>
-                  <a:spcPts val="400"/>
-                </a:spcBef>
-              </a:pPr>
-              <a:r>
-                <a:rPr sz="1600" b="0">
-                  <a:solidFill>
-                    <a:srgbClr val="000000"/>
-                  </a:solidFill>
-                  <a:latin typeface="Play"/>
-                </a:rPr>
-                <a:t>Длительность 6 недель</a:t>
-              </a:r>
-            </a:p>
-          </p:txBody>
-        </p:sp>
-        <p:sp>
-          <p:nvSpPr>
-            <p:cNvPr id="11" name="BrandDeck Diagram Step 3 Badge"/>
-            <p:cNvSpPr/>
-            <p:nvPr/>
-          </p:nvSpPr>
-          <p:spPr>
-            <a:xfrm>
-              <a:off x="4637088" y="3534497"/>
-              <a:ext cx="512064" cy="512064"/>
-            </a:xfrm>
-            <a:prstGeom prst="ellipse">
-              <a:avLst/>
-            </a:prstGeom>
-            <a:solidFill>
-              <a:srgbClr val="006DEB"/>
-            </a:solidFill>
-            <a:ln>
-              <a:noFill/>
-            </a:ln>
-          </p:spPr>
-          <p:txBody>
-            <a:bodyPr rtlCol="0" anchor="ctr" wrap="square" lIns="0" tIns="0" rIns="0" bIns="0">
-              <a:noAutofit/>
-            </a:bodyPr>
-            <a:lstStyle/>
-            <a:p>
-              <a:pPr algn="ctr">
-                <a:lnSpc>
-                  <a:spcPct val="110000"/>
-                </a:lnSpc>
-              </a:pPr>
-              <a:r>
-                <a:rPr sz="1410" b="1">
-                  <a:solidFill>
-                    <a:srgbClr val="FFFFFF"/>
-                  </a:solidFill>
-                  <a:latin typeface="Play"/>
-                </a:rPr>
-                <a:t>03</a:t>
-              </a:r>
-            </a:p>
-          </p:txBody>
-        </p:sp>
-        <p:sp>
-          <p:nvSpPr>
-            <p:cNvPr id="12" name="BrandDeck Diagram Detail Card 3"/>
-            <p:cNvSpPr/>
-            <p:nvPr/>
-          </p:nvSpPr>
-          <p:spPr>
-            <a:xfrm>
-              <a:off x="5258880" y="3195111"/>
-              <a:ext cx="3240595" cy="1190836"/>
-            </a:xfrm>
-            <a:prstGeom prst="roundRect">
-              <a:avLst>
-                <a:gd name="adj" fmla="val 12000"/>
-              </a:avLst>
-            </a:prstGeom>
-            <a:solidFill>
-              <a:srgbClr val="E8F3FF"/>
-            </a:solidFill>
-            <a:ln>
-              <a:noFill/>
-            </a:ln>
-          </p:spPr>
-          <p:txBody>
-            <a:bodyPr rtlCol="0" anchor="ctr"/>
-            <a:lstStyle/>
-            <a:p>
-              <a:pPr algn="ctr"/>
-            </a:p>
-          </p:txBody>
-        </p:sp>
-        <p:sp>
-          <p:nvSpPr>
-            <p:cNvPr id="13" name="BrandDeck Diagram Text 3"/>
-            <p:cNvSpPr txBox="1"/>
-            <p:nvPr/>
-          </p:nvSpPr>
-          <p:spPr>
-            <a:xfrm>
-              <a:off x="5350320" y="3195111"/>
-              <a:ext cx="3149155" cy="1190836"/>
-            </a:xfrm>
-            <a:prstGeom prst="rect">
-              <a:avLst/>
-            </a:prstGeom>
-            <a:noFill/>
-          </p:spPr>
-          <p:txBody>
-            <a:bodyPr wrap="square" anchor="ctr" lIns="36576" tIns="18288" rIns="36576" bIns="18288">
-              <a:noAutofit/>
-            </a:bodyPr>
-            <a:lstStyle/>
-            <a:p>
-              <a:pPr algn="l">
-                <a:lnSpc>
-                  <a:spcPct val="110000"/>
-                </a:lnSpc>
-              </a:pPr>
-              <a:r>
-                <a:rPr sz="1600" b="1">
-                  <a:solidFill>
-                    <a:srgbClr val="000000"/>
-                  </a:solidFill>
-                  <a:latin typeface="Play"/>
-                </a:rPr>
-                <a:t>Финал пилота</a:t>
-              </a:r>
-            </a:p>
-            <a:p>
-              <a:pPr algn="l">
-                <a:lnSpc>
-                  <a:spcPct val="110000"/>
-                </a:lnSpc>
-                <a:spcBef>
-                  <a:spcPts val="400"/>
-                </a:spcBef>
-              </a:pPr>
-              <a:r>
-                <a:rPr sz="1600" b="0">
-                  <a:solidFill>
-                    <a:srgbClr val="000000"/>
-                  </a:solidFill>
-                  <a:latin typeface="Play"/>
-                </a:rPr>
-                <a:t>Анализ результатов</a:t>
-              </a:r>
-            </a:p>
-          </p:txBody>
-        </p:sp>
-      </p:grpSp>
+        </p:nvGraphicFramePr>
+        <p:xfrm>
+          <a:off x="438148" y="1819373"/>
+          <a:ext cx="6381717" cy="2528556"/>
+        </p:xfrm>
+        <a:graphic>
+          <a:graphicData uri="http://schemas.openxmlformats.org/drawingml/2006/table">
+            <a:tbl>
+              <a:tblPr firstRow="1" bandRow="1">
+                <a:tableStyleId>{5C22544A-7EE6-4342-B048-85BDC9FD1C3A}</a:tableStyleId>
+              </a:tblPr>
+              <a:tblGrid>
+                <a:gridCol w="3190858"/>
+                <a:gridCol w="3190859"/>
+              </a:tblGrid>
+              <a:tr h="697564">
+                <a:tc>
+                  <a:txBody>
+                    <a:bodyPr/>
+                    <a:lstStyle/>
+                    <a:p>
+                      <a:pPr algn="l"/>
+                      <a:r>
+                        <a:rPr sz="1320" b="1">
+                          <a:solidFill>
+                            <a:srgbClr val="FFFFFF"/>
+                          </a:solidFill>
+                          <a:latin typeface="Play"/>
+                        </a:rPr>
+                        <a:t>Метрика</a:t>
+                      </a:r>
+                    </a:p>
+                  </a:txBody>
+                  <a:tcPr marL="54864" marR="54864" anchor="ctr">
+                    <a:solidFill>
+                      <a:srgbClr val="006DEB"/>
+                    </a:solidFill>
+                  </a:tcPr>
+                </a:tc>
+                <a:tc>
+                  <a:txBody>
+                    <a:bodyPr/>
+                    <a:lstStyle/>
+                    <a:p>
+                      <a:pPr algn="l"/>
+                      <a:r>
+                        <a:rPr sz="1320" b="1">
+                          <a:solidFill>
+                            <a:srgbClr val="FFFFFF"/>
+                          </a:solidFill>
+                          <a:latin typeface="Play"/>
+                        </a:rPr>
+                        <a:t>Что измеряем</a:t>
+                      </a:r>
+                    </a:p>
+                  </a:txBody>
+                  <a:tcPr marL="54864" marR="54864" anchor="ctr">
+                    <a:solidFill>
+                      <a:srgbClr val="006DEB"/>
+                    </a:solidFill>
+                  </a:tcPr>
+                </a:tc>
+              </a:tr>
+              <a:tr h="915496">
+                <a:tc>
+                  <a:txBody>
+                    <a:bodyPr/>
+                    <a:lstStyle/>
+                    <a:p>
+                      <a:pPr algn="l"/>
+                      <a:r>
+                        <a:rPr sz="1320" b="0">
+                          <a:solidFill>
+                            <a:srgbClr val="111111"/>
+                          </a:solidFill>
+                          <a:latin typeface="Play"/>
+                        </a:rPr>
+                        <a:t>Время поиска ответа</a:t>
+                      </a:r>
+                    </a:p>
+                  </a:txBody>
+                  <a:tcPr marL="54864" marR="54864" anchor="ctr">
+                    <a:solidFill>
+                      <a:srgbClr val="FEFFFF"/>
+                    </a:solidFill>
+                  </a:tcPr>
+                </a:tc>
+                <a:tc>
+                  <a:txBody>
+                    <a:bodyPr/>
+                    <a:lstStyle/>
+                    <a:p>
+                      <a:pPr algn="l"/>
+                      <a:r>
+                        <a:rPr sz="1320" b="0">
+                          <a:solidFill>
+                            <a:srgbClr val="111111"/>
+                          </a:solidFill>
+                          <a:latin typeface="Play"/>
+                        </a:rPr>
+                        <a:t>Сколько минут тратит сотрудник на инструкцию</a:t>
+                      </a:r>
+                    </a:p>
+                  </a:txBody>
+                  <a:tcPr marL="54864" marR="54864" anchor="ctr">
+                    <a:solidFill>
+                      <a:srgbClr val="FEFFFF"/>
+                    </a:solidFill>
+                  </a:tcPr>
+                </a:tc>
+              </a:tr>
+              <a:tr h="915496">
+                <a:tc>
+                  <a:txBody>
+                    <a:bodyPr/>
+                    <a:lstStyle/>
+                    <a:p>
+                      <a:pPr algn="l"/>
+                      <a:r>
+                        <a:rPr sz="1320" b="0">
+                          <a:solidFill>
+                            <a:srgbClr val="111111"/>
+                          </a:solidFill>
+                          <a:latin typeface="Play"/>
+                        </a:rPr>
+                        <a:t>Доля закрытых обращений</a:t>
+                      </a:r>
+                    </a:p>
+                  </a:txBody>
+                  <a:tcPr marL="54864" marR="54864" anchor="ctr">
+                    <a:solidFill>
+                      <a:srgbClr val="FEFFFF"/>
+                    </a:solidFill>
+                  </a:tcPr>
+                </a:tc>
+                <a:tc>
+                  <a:txBody>
+                    <a:bodyPr/>
+                    <a:lstStyle/>
+                    <a:p>
+                      <a:pPr algn="l"/>
+                      <a:r>
+                        <a:rPr sz="1320" b="0">
+                          <a:solidFill>
+                            <a:srgbClr val="111111"/>
+                          </a:solidFill>
+                          <a:latin typeface="Play"/>
+                        </a:rPr>
+                        <a:t>Процент вопросов, решенных без специалиста</a:t>
+                      </a:r>
+                    </a:p>
+                  </a:txBody>
+                  <a:tcPr marL="54864" marR="54864" anchor="ctr">
+                    <a:solidFill>
+                      <a:srgbClr val="FEFFFF"/>
+                    </a:solidFill>
+                  </a:tcPr>
+                </a:tc>
+              </a:tr>
+            </a:tbl>
+          </a:graphicData>
+        </a:graphic>
+      </p:graphicFrame>
     </p:spTree>
   </p:cSld>
   <p:clrMapOvr>
@@ -7246,43 +6539,194 @@
             </a:pPr>
             <a:r>
               <a:rPr sz="1800"/>
-              <a:t>Измерим время поиска и долю закрытых обращений</a:t>
+              <a:t>Требуется команда из 3 человек для реализации</a:t>
             </a:r>
           </a:p>
         </p:txBody>
       </p:sp>
       <p:grpSp>
         <p:nvGrpSpPr>
-          <p:cNvPr id="3" name="BrandDeck Diagram icon_grid" descr="icon_grid: Время поиска Сокращение с 30 минут до минимума; Доля закрытых Процент вопросов без участия специалиста"/>
+          <p:cNvPr id="3" name="BrandDeck Diagram hierarchy" descr="hierarchy: Команда 3 специалиста для реализации пилота; Задача Выделение ресурсов для запуска проекта"/>
           <p:cNvGrpSpPr/>
           <p:nvPr/>
         </p:nvGrpSpPr>
         <p:grpSpPr>
           <a:xfrm>
-            <a:off x="4637088" y="824281"/>
-            <a:ext cx="3862387" cy="3347618"/>
-            <a:chOff x="4637088" y="824281"/>
-            <a:chExt cx="3862387" cy="3347618"/>
+            <a:off x="4637088" y="955527"/>
+            <a:ext cx="3862386" cy="3002234"/>
+            <a:chOff x="4637088" y="955527"/>
+            <a:chExt cx="3862386" cy="3002234"/>
           </a:xfrm>
         </p:grpSpPr>
         <p:sp>
           <p:nvSpPr>
-            <p:cNvPr id="4" name="BrandDeck Diagram Card 1"/>
+            <p:cNvPr id="4" name="BrandDeck Diagram Root"/>
             <p:cNvSpPr/>
             <p:nvPr/>
           </p:nvSpPr>
           <p:spPr>
             <a:xfrm>
-              <a:off x="4637088" y="824281"/>
-              <a:ext cx="3862387" cy="1618945"/>
+              <a:off x="5757180" y="955527"/>
+              <a:ext cx="1622202" cy="731520"/>
             </a:xfrm>
             <a:prstGeom prst="roundRect">
               <a:avLst>
-                <a:gd name="adj" fmla="val 8000"/>
+                <a:gd name="adj" fmla="val 18000"/>
               </a:avLst>
             </a:prstGeom>
             <a:solidFill>
-              <a:srgbClr val="1A1A1A"/>
+              <a:srgbClr val="006DEB"/>
+            </a:solidFill>
+            <a:ln>
+              <a:noFill/>
+            </a:ln>
+          </p:spPr>
+          <p:txBody>
+            <a:bodyPr rtlCol="0" anchor="ctr" wrap="square" lIns="109728" tIns="36576" rIns="109728" bIns="36576">
+              <a:noAutofit/>
+            </a:bodyPr>
+            <a:lstStyle/>
+            <a:p>
+              <a:pPr algn="ctr">
+                <a:lnSpc>
+                  <a:spcPct val="110000"/>
+                </a:lnSpc>
+              </a:pPr>
+              <a:r>
+                <a:rPr sz="1600" b="1">
+                  <a:solidFill>
+                    <a:srgbClr val="FFFFFF"/>
+                  </a:solidFill>
+                  <a:latin typeface="Play"/>
+                </a:rPr>
+                <a:t>Команда из 3 человек</a:t>
+              </a:r>
+            </a:p>
+          </p:txBody>
+        </p:sp>
+        <p:cxnSp>
+          <p:nvCxnSpPr>
+            <p:cNvPr id="5" name="BrandDeck Diagram Link Root"/>
+            <p:cNvCxnSpPr/>
+            <p:nvPr/>
+          </p:nvCxnSpPr>
+          <p:spPr>
+            <a:xfrm>
+              <a:off x="6568281" y="1687047"/>
+              <a:ext cx="0" cy="261597"/>
+            </a:xfrm>
+            <a:prstGeom prst="line">
+              <a:avLst/>
+            </a:prstGeom>
+            <a:ln w="19050">
+              <a:solidFill>
+                <a:srgbClr val="58A6FF"/>
+              </a:solidFill>
+            </a:ln>
+          </p:spPr>
+          <p:style>
+            <a:lnRef idx="2">
+              <a:schemeClr val="accent1"/>
+            </a:lnRef>
+            <a:fillRef idx="0">
+              <a:schemeClr val="accent1"/>
+            </a:fillRef>
+            <a:effectRef idx="1">
+              <a:schemeClr val="accent1"/>
+            </a:effectRef>
+            <a:fontRef idx="minor">
+              <a:schemeClr val="tx1"/>
+            </a:fontRef>
+          </p:style>
+        </p:cxnSp>
+        <p:cxnSp>
+          <p:nvCxnSpPr>
+            <p:cNvPr id="6" name="BrandDeck Diagram Link Bus"/>
+            <p:cNvCxnSpPr/>
+            <p:nvPr/>
+          </p:nvCxnSpPr>
+          <p:spPr>
+            <a:xfrm>
+              <a:off x="5575252" y="1948644"/>
+              <a:ext cx="1986058" cy="0"/>
+            </a:xfrm>
+            <a:prstGeom prst="line">
+              <a:avLst/>
+            </a:prstGeom>
+            <a:ln w="19050">
+              <a:solidFill>
+                <a:srgbClr val="58A6FF"/>
+              </a:solidFill>
+            </a:ln>
+          </p:spPr>
+          <p:style>
+            <a:lnRef idx="2">
+              <a:schemeClr val="accent1"/>
+            </a:lnRef>
+            <a:fillRef idx="0">
+              <a:schemeClr val="accent1"/>
+            </a:fillRef>
+            <a:effectRef idx="1">
+              <a:schemeClr val="accent1"/>
+            </a:effectRef>
+            <a:fontRef idx="minor">
+              <a:schemeClr val="tx1"/>
+            </a:fontRef>
+          </p:style>
+        </p:cxnSp>
+        <p:cxnSp>
+          <p:nvCxnSpPr>
+            <p:cNvPr id="7" name="BrandDeck Diagram Link 1"/>
+            <p:cNvCxnSpPr/>
+            <p:nvPr/>
+          </p:nvCxnSpPr>
+          <p:spPr>
+            <a:xfrm>
+              <a:off x="5575252" y="1948644"/>
+              <a:ext cx="0" cy="261598"/>
+            </a:xfrm>
+            <a:prstGeom prst="line">
+              <a:avLst/>
+            </a:prstGeom>
+            <a:ln w="19050">
+              <a:solidFill>
+                <a:srgbClr val="58A6FF"/>
+              </a:solidFill>
+            </a:ln>
+          </p:spPr>
+          <p:style>
+            <a:lnRef idx="2">
+              <a:schemeClr val="accent1"/>
+            </a:lnRef>
+            <a:fillRef idx="0">
+              <a:schemeClr val="accent1"/>
+            </a:fillRef>
+            <a:effectRef idx="1">
+              <a:schemeClr val="accent1"/>
+            </a:effectRef>
+            <a:fontRef idx="minor">
+              <a:schemeClr val="tx1"/>
+            </a:fontRef>
+          </p:style>
+        </p:cxnSp>
+        <p:sp>
+          <p:nvSpPr>
+            <p:cNvPr id="8" name="BrandDeck Diagram Card 1"/>
+            <p:cNvSpPr/>
+            <p:nvPr/>
+          </p:nvSpPr>
+          <p:spPr>
+            <a:xfrm>
+              <a:off x="4637088" y="2210242"/>
+              <a:ext cx="1876329" cy="1747519"/>
+            </a:xfrm>
+            <a:prstGeom prst="roundRect">
+              <a:avLst>
+                <a:gd name="adj" fmla="val 6000"/>
+              </a:avLst>
+            </a:prstGeom>
+            <a:solidFill>
+              <a:srgbClr val="E8F3FF"/>
             </a:solidFill>
             <a:ln>
               <a:noFill/>
@@ -7298,20 +6742,20 @@
         </p:sp>
         <p:sp>
           <p:nvSpPr>
-            <p:cNvPr id="5" name="BrandDeck Diagram Icon 1 Badge"/>
+            <p:cNvPr id="9" name="BrandDeck Diagram Marker 1"/>
             <p:cNvSpPr/>
             <p:nvPr/>
           </p:nvSpPr>
           <p:spPr>
             <a:xfrm>
-              <a:off x="4856544" y="1379838"/>
-              <a:ext cx="507832" cy="507832"/>
+              <a:off x="4765104" y="2319970"/>
+              <a:ext cx="548640" cy="45720"/>
             </a:xfrm>
-            <a:prstGeom prst="ellipse">
+            <a:prstGeom prst="rect">
               <a:avLst/>
             </a:prstGeom>
             <a:solidFill>
-              <a:srgbClr val="006DEB"/>
+              <a:srgbClr val="0077FF"/>
             </a:solidFill>
             <a:ln>
               <a:noFill/>
@@ -7327,87 +6771,14 @@
         </p:sp>
         <p:sp>
           <p:nvSpPr>
-            <p:cNvPr id="6" name="BrandDeck Icon clock"/>
-            <p:cNvSpPr/>
-            <p:nvPr/>
-          </p:nvSpPr>
-          <p:spPr>
-            <a:xfrm>
-              <a:off x="4968267" y="1491561"/>
-              <a:ext cx="284386" cy="284386"/>
-            </a:xfrm>
-            <a:custGeom>
-              <a:avLst/>
-              <a:gdLst/>
-              <a:ahLst/>
-              <a:cxnLst/>
-              <a:rect l="l" t="t" r="r" b="b"/>
-              <a:pathLst>
-                <a:path w="24000" h="24000" fill="none">
-                  <a:moveTo>
-                    <a:pt x="22000" y="12000"/>
-                  </a:moveTo>
-                  <a:cubicBezTo>
-                    <a:pt x="22000" y="17523"/>
-                    <a:pt x="17523" y="22000"/>
-                    <a:pt x="12000" y="22000"/>
-                  </a:cubicBezTo>
-                  <a:cubicBezTo>
-                    <a:pt x="6477" y="22000"/>
-                    <a:pt x="2000" y="17523"/>
-                    <a:pt x="2000" y="12000"/>
-                  </a:cubicBezTo>
-                  <a:cubicBezTo>
-                    <a:pt x="2000" y="6477"/>
-                    <a:pt x="6477" y="2000"/>
-                    <a:pt x="12000" y="2000"/>
-                  </a:cubicBezTo>
-                  <a:cubicBezTo>
-                    <a:pt x="17523" y="2000"/>
-                    <a:pt x="22000" y="6477"/>
-                    <a:pt x="22000" y="12000"/>
-                  </a:cubicBezTo>
-                  <a:close/>
-                </a:path>
-                <a:path w="24000" h="24000" fill="none">
-                  <a:moveTo>
-                    <a:pt x="12000" y="6000"/>
-                  </a:moveTo>
-                  <a:lnTo>
-                    <a:pt x="12000" y="12000"/>
-                  </a:lnTo>
-                  <a:lnTo>
-                    <a:pt x="16000" y="14000"/>
-                  </a:lnTo>
-                </a:path>
-              </a:pathLst>
-            </a:custGeom>
-            <a:noFill/>
-            <a:ln w="23698" cap="rnd">
-              <a:solidFill>
-                <a:srgbClr val="FFFFFF"/>
-              </a:solidFill>
-              <a:round/>
-            </a:ln>
-          </p:spPr>
-          <p:txBody>
-            <a:bodyPr rtlCol="0" anchor="ctr"/>
-            <a:lstStyle/>
-            <a:p>
-              <a:pPr algn="ctr"/>
-            </a:p>
-          </p:txBody>
-        </p:sp>
-        <p:sp>
-          <p:nvSpPr>
-            <p:cNvPr id="7" name="BrandDeck Diagram Text 1"/>
+            <p:cNvPr id="10" name="BrandDeck Diagram Text 1"/>
             <p:cNvSpPr txBox="1"/>
             <p:nvPr/>
           </p:nvSpPr>
           <p:spPr>
             <a:xfrm>
-              <a:off x="5496049" y="955955"/>
-              <a:ext cx="2783969" cy="1355598"/>
+              <a:off x="4728528" y="2447986"/>
+              <a:ext cx="1693449" cy="1418336"/>
             </a:xfrm>
             <a:prstGeom prst="rect">
               <a:avLst/>
@@ -7415,7 +6786,7 @@
             <a:noFill/>
           </p:spPr>
           <p:txBody>
-            <a:bodyPr wrap="square" anchor="ctr" lIns="36576" tIns="18288" rIns="36576" bIns="18288">
+            <a:bodyPr wrap="square" anchor="t" lIns="36576" tIns="18288" rIns="36576" bIns="18288">
               <a:noAutofit/>
             </a:bodyPr>
             <a:lstStyle/>
@@ -7426,13 +6797,13 @@
                 </a:lnSpc>
               </a:pPr>
               <a:r>
-                <a:rPr sz="1800" b="1">
+                <a:rPr sz="1600" b="1">
                   <a:solidFill>
-                    <a:srgbClr val="FFFFFF"/>
+                    <a:srgbClr val="000000"/>
                   </a:solidFill>
                   <a:latin typeface="Play"/>
                 </a:rPr>
-                <a:t>Время поиска</a:t>
+                <a:t>Команда</a:t>
               </a:r>
             </a:p>
             <a:p>
@@ -7441,39 +6812,74 @@
                   <a:spcPct val="110000"/>
                 </a:lnSpc>
                 <a:spcBef>
-                  <a:spcPts val="450"/>
+                  <a:spcPts val="400"/>
                 </a:spcBef>
               </a:pPr>
               <a:r>
-                <a:rPr sz="1800" b="0">
+                <a:rPr sz="1600" b="0">
                   <a:solidFill>
-                    <a:srgbClr val="FFFFFF"/>
+                    <a:srgbClr val="000000"/>
                   </a:solidFill>
                   <a:latin typeface="Play"/>
                 </a:rPr>
-                <a:t>Сокращение с 30 минут до минимума</a:t>
+                <a:t>3 специалиста для реализации пилота</a:t>
               </a:r>
             </a:p>
           </p:txBody>
         </p:sp>
+        <p:cxnSp>
+          <p:nvCxnSpPr>
+            <p:cNvPr id="11" name="BrandDeck Diagram Link 2"/>
+            <p:cNvCxnSpPr/>
+            <p:nvPr/>
+          </p:nvCxnSpPr>
+          <p:spPr>
+            <a:xfrm>
+              <a:off x="7561310" y="1948644"/>
+              <a:ext cx="0" cy="261598"/>
+            </a:xfrm>
+            <a:prstGeom prst="line">
+              <a:avLst/>
+            </a:prstGeom>
+            <a:ln w="19050">
+              <a:solidFill>
+                <a:srgbClr val="58A6FF"/>
+              </a:solidFill>
+            </a:ln>
+          </p:spPr>
+          <p:style>
+            <a:lnRef idx="2">
+              <a:schemeClr val="accent1"/>
+            </a:lnRef>
+            <a:fillRef idx="0">
+              <a:schemeClr val="accent1"/>
+            </a:fillRef>
+            <a:effectRef idx="1">
+              <a:schemeClr val="accent1"/>
+            </a:effectRef>
+            <a:fontRef idx="minor">
+              <a:schemeClr val="tx1"/>
+            </a:fontRef>
+          </p:style>
+        </p:cxnSp>
         <p:sp>
           <p:nvSpPr>
-            <p:cNvPr id="8" name="BrandDeck Diagram Card 2"/>
+            <p:cNvPr id="12" name="BrandDeck Diagram Card 2"/>
             <p:cNvSpPr/>
             <p:nvPr/>
           </p:nvSpPr>
           <p:spPr>
             <a:xfrm>
-              <a:off x="4637088" y="2552954"/>
-              <a:ext cx="3862387" cy="1618945"/>
+              <a:off x="6623145" y="2210242"/>
+              <a:ext cx="1876329" cy="1747519"/>
             </a:xfrm>
             <a:prstGeom prst="roundRect">
               <a:avLst>
-                <a:gd name="adj" fmla="val 8000"/>
+                <a:gd name="adj" fmla="val 6000"/>
               </a:avLst>
             </a:prstGeom>
             <a:solidFill>
-              <a:srgbClr val="1A1A1A"/>
+              <a:srgbClr val="E8F3FF"/>
             </a:solidFill>
             <a:ln>
               <a:noFill/>
@@ -7489,20 +6895,20 @@
         </p:sp>
         <p:sp>
           <p:nvSpPr>
-            <p:cNvPr id="9" name="BrandDeck Diagram Icon 2 Badge"/>
+            <p:cNvPr id="13" name="BrandDeck Diagram Marker 2"/>
             <p:cNvSpPr/>
             <p:nvPr/>
           </p:nvSpPr>
           <p:spPr>
             <a:xfrm>
-              <a:off x="4856544" y="3108511"/>
-              <a:ext cx="507832" cy="507832"/>
+              <a:off x="6751161" y="2319970"/>
+              <a:ext cx="548640" cy="45720"/>
             </a:xfrm>
-            <a:prstGeom prst="ellipse">
+            <a:prstGeom prst="rect">
               <a:avLst/>
             </a:prstGeom>
             <a:solidFill>
-              <a:srgbClr val="006DEB"/>
+              <a:srgbClr val="0077FF"/>
             </a:solidFill>
             <a:ln>
               <a:noFill/>
@@ -7518,99 +6924,14 @@
         </p:sp>
         <p:sp>
           <p:nvSpPr>
-            <p:cNvPr id="10" name="BrandDeck Icon chart-pie"/>
-            <p:cNvSpPr/>
-            <p:nvPr/>
-          </p:nvSpPr>
-          <p:spPr>
-            <a:xfrm>
-              <a:off x="4968267" y="3220234"/>
-              <a:ext cx="284386" cy="284386"/>
-            </a:xfrm>
-            <a:custGeom>
-              <a:avLst/>
-              <a:gdLst/>
-              <a:ahLst/>
-              <a:cxnLst/>
-              <a:rect l="l" t="t" r="r" b="b"/>
-              <a:pathLst>
-                <a:path w="24000" h="24000" fill="none">
-                  <a:moveTo>
-                    <a:pt x="21000" y="12000"/>
-                  </a:moveTo>
-                  <a:cubicBezTo>
-                    <a:pt x="21552" y="12000"/>
-                    <a:pt x="22005" y="11551"/>
-                    <a:pt x="21950" y="11002"/>
-                  </a:cubicBezTo>
-                  <a:cubicBezTo>
-                    <a:pt x="21475" y="6269"/>
-                    <a:pt x="17731" y="2525"/>
-                    <a:pt x="12997" y="2051"/>
-                  </a:cubicBezTo>
-                  <a:cubicBezTo>
-                    <a:pt x="12447" y="1996"/>
-                    <a:pt x="11999" y="2449"/>
-                    <a:pt x="11999" y="3001"/>
-                  </a:cubicBezTo>
-                  <a:lnTo>
-                    <a:pt x="11999" y="11001"/>
-                  </a:lnTo>
-                  <a:cubicBezTo>
-                    <a:pt x="11999" y="11553"/>
-                    <a:pt x="12447" y="12001"/>
-                    <a:pt x="12999" y="12001"/>
-                  </a:cubicBezTo>
-                  <a:close/>
-                </a:path>
-                <a:path w="24000" h="24000" fill="none">
-                  <a:moveTo>
-                    <a:pt x="21210" y="15890"/>
-                  </a:moveTo>
-                  <a:cubicBezTo>
-                    <a:pt x="19460" y="20029"/>
-                    <a:pt x="15164" y="22492"/>
-                    <a:pt x="10708" y="21912"/>
-                  </a:cubicBezTo>
-                  <a:cubicBezTo>
-                    <a:pt x="6252" y="21331"/>
-                    <a:pt x="2730" y="17849"/>
-                    <a:pt x="2099" y="13400"/>
-                  </a:cubicBezTo>
-                  <a:cubicBezTo>
-                    <a:pt x="1467" y="8951"/>
-                    <a:pt x="3881" y="4627"/>
-                    <a:pt x="8000" y="2830"/>
-                  </a:cubicBezTo>
-                </a:path>
-              </a:pathLst>
-            </a:custGeom>
-            <a:noFill/>
-            <a:ln w="23698" cap="rnd">
-              <a:solidFill>
-                <a:srgbClr val="FFFFFF"/>
-              </a:solidFill>
-              <a:round/>
-            </a:ln>
-          </p:spPr>
-          <p:txBody>
-            <a:bodyPr rtlCol="0" anchor="ctr"/>
-            <a:lstStyle/>
-            <a:p>
-              <a:pPr algn="ctr"/>
-            </a:p>
-          </p:txBody>
-        </p:sp>
-        <p:sp>
-          <p:nvSpPr>
-            <p:cNvPr id="11" name="BrandDeck Diagram Text 2"/>
+            <p:cNvPr id="14" name="BrandDeck Diagram Text 2"/>
             <p:cNvSpPr txBox="1"/>
             <p:nvPr/>
           </p:nvSpPr>
           <p:spPr>
             <a:xfrm>
-              <a:off x="5496049" y="2684628"/>
-              <a:ext cx="2783969" cy="1355598"/>
+              <a:off x="6714585" y="2447986"/>
+              <a:ext cx="1693449" cy="1418336"/>
             </a:xfrm>
             <a:prstGeom prst="rect">
               <a:avLst/>
@@ -7618,7 +6939,7 @@
             <a:noFill/>
           </p:spPr>
           <p:txBody>
-            <a:bodyPr wrap="square" anchor="ctr" lIns="36576" tIns="18288" rIns="36576" bIns="18288">
+            <a:bodyPr wrap="square" anchor="t" lIns="36576" tIns="18288" rIns="36576" bIns="18288">
               <a:noAutofit/>
             </a:bodyPr>
             <a:lstStyle/>
@@ -7629,13 +6950,13 @@
                 </a:lnSpc>
               </a:pPr>
               <a:r>
-                <a:rPr sz="1800" b="1">
+                <a:rPr sz="1600" b="1">
                   <a:solidFill>
-                    <a:srgbClr val="FFFFFF"/>
+                    <a:srgbClr val="000000"/>
                   </a:solidFill>
                   <a:latin typeface="Play"/>
                 </a:rPr>
-                <a:t>Доля закрытых</a:t>
+                <a:t>Задача</a:t>
               </a:r>
             </a:p>
             <a:p>
@@ -7644,17 +6965,17 @@
                   <a:spcPct val="110000"/>
                 </a:lnSpc>
                 <a:spcBef>
-                  <a:spcPts val="450"/>
+                  <a:spcPts val="400"/>
                 </a:spcBef>
               </a:pPr>
               <a:r>
-                <a:rPr sz="1800" b="0">
+                <a:rPr sz="1600" b="0">
                   <a:solidFill>
-                    <a:srgbClr val="FFFFFF"/>
+                    <a:srgbClr val="000000"/>
                   </a:solidFill>
                   <a:latin typeface="Play"/>
                 </a:rPr>
-                <a:t>Процент вопросов без участия специалиста</a:t>
+                <a:t>Выделение ресурсов для запуска проекта</a:t>
               </a:r>
             </a:p>
           </p:txBody>
@@ -7680,212 +7001,23 @@
       <p:grpSpPr/>
       <p:sp>
         <p:nvSpPr>
-          <p:cNvPr id="2" name="BrandDeck Text 2"/>
-          <p:cNvSpPr>
-            <a:spLocks noGrp="1"/>
-          </p:cNvSpPr>
-          <p:nvPr>
-            <p:ph type="title"/>
-          </p:nvPr>
-        </p:nvSpPr>
-        <p:spPr>
-          <a:xfrm>
-            <a:off x="430360" y="338829"/>
-            <a:ext cx="3945697" cy="753371"/>
-          </a:xfrm>
-        </p:spPr>
-        <p:txBody>
-          <a:bodyPr wrap="square" anchor="t">
-            <a:normAutofit/>
-          </a:bodyPr>
-          <a:lstStyle/>
-          <a:p>
-            <a:pPr algn="l">
-              <a:lnSpc>
-                <a:spcPct val="115000"/>
-              </a:lnSpc>
-              <a:spcBef>
-                <a:spcPts val="0"/>
-              </a:spcBef>
-              <a:spcAft>
-                <a:spcPts val="270"/>
-              </a:spcAft>
-            </a:pPr>
-            <a:r>
-              <a:rPr sz="1800"/>
-              <a:t>Одобрить пилот и выделить команду из 3 человек</a:t>
-            </a:r>
-          </a:p>
-        </p:txBody>
-      </p:sp>
-      <p:sp>
-        <p:nvSpPr>
-          <p:cNvPr id="3" name="Text Placeholder 2"/>
-          <p:cNvSpPr>
-            <a:spLocks noGrp="1"/>
-          </p:cNvSpPr>
-          <p:nvPr>
-            <p:ph type="body" idx="1"/>
-          </p:nvPr>
-        </p:nvSpPr>
-        <p:spPr/>
-        <p:txBody>
-          <a:bodyPr wrap="square" anchor="t">
-            <a:normAutofit/>
-          </a:bodyPr>
-          <a:lstStyle/>
-          <a:p>
-            <a:pPr/>
-          </a:p>
-        </p:txBody>
-      </p:sp>
-      <p:sp>
-        <p:nvSpPr>
-          <p:cNvPr id="4" name="BrandDeck Text 4"/>
-          <p:cNvSpPr>
-            <a:spLocks noGrp="1"/>
-          </p:cNvSpPr>
-          <p:nvPr>
-            <p:ph type="body" idx="2"/>
-          </p:nvPr>
-        </p:nvSpPr>
-        <p:spPr/>
-        <p:txBody>
-          <a:bodyPr wrap="square" anchor="t">
-            <a:normAutofit/>
-          </a:bodyPr>
-          <a:lstStyle/>
-          <a:p>
-            <a:pPr>
-              <a:lnSpc>
-                <a:spcPct val="115000"/>
-              </a:lnSpc>
-              <a:spcBef>
-                <a:spcPts val="0"/>
-              </a:spcBef>
-              <a:spcAft>
-                <a:spcPts val="240"/>
-              </a:spcAft>
-            </a:pPr>
-            <a:r>
-              <a:rPr sz="1600"/>
-              <a:t>Одобрить запуск пилота ИИ-помощника для 2 подразделений.</a:t>
-            </a:r>
-          </a:p>
-          <a:p>
-            <a:pPr>
-              <a:lnSpc>
-                <a:spcPct val="115000"/>
-              </a:lnSpc>
-              <a:spcBef>
-                <a:spcPts val="0"/>
-              </a:spcBef>
-              <a:spcAft>
-                <a:spcPts val="240"/>
-              </a:spcAft>
-            </a:pPr>
-            <a:r>
-              <a:rPr sz="1600"/>
-              <a:t>Выделить команду из 3 человек для реализации проекта.</a:t>
-            </a:r>
-          </a:p>
-          <a:p>
-            <a:pPr>
-              <a:lnSpc>
-                <a:spcPct val="115000"/>
-              </a:lnSpc>
-              <a:spcBef>
-                <a:spcPts val="0"/>
-              </a:spcBef>
-              <a:spcAft>
-                <a:spcPts val="240"/>
-              </a:spcAft>
-            </a:pPr>
-            <a:r>
-              <a:rPr sz="1600"/>
-              <a:t>Запустить пилот в течение 6 недель для оценки эффективности.</a:t>
-            </a:r>
-          </a:p>
-        </p:txBody>
-      </p:sp>
-      <p:sp>
-        <p:nvSpPr>
-          <p:cNvPr id="5" name="BrandDeck Subtitle"/>
-          <p:cNvSpPr txBox="1"/>
-          <p:nvPr/>
-        </p:nvSpPr>
-        <p:spPr>
-          <a:xfrm>
-            <a:off x="430360" y="1137920"/>
-            <a:ext cx="3945696" cy="457200"/>
-          </a:xfrm>
-          <a:prstGeom prst="rect">
-            <a:avLst/>
-          </a:prstGeom>
-          <a:noFill/>
-        </p:spPr>
-        <p:txBody>
-          <a:bodyPr wrap="square" anchor="t" lIns="36576" rIns="36576" tIns="18288" bIns="18288">
-            <a:normAutofit/>
-          </a:bodyPr>
-          <a:lstStyle/>
-          <a:p>
-            <a:pPr algn="l">
-              <a:lnSpc>
-                <a:spcPct val="115000"/>
-              </a:lnSpc>
-              <a:spcBef>
-                <a:spcPts val="0"/>
-              </a:spcBef>
-              <a:spcAft>
-                <a:spcPts val="165"/>
-              </a:spcAft>
-            </a:pPr>
-            <a:r>
-              <a:rPr sz="1100">
-                <a:solidFill>
-                  <a:srgbClr val="FAFCFF"/>
-                </a:solidFill>
-                <a:latin typeface="Play"/>
-              </a:rPr>
-              <a:t>Решение о запуске пилота и выделении команды</a:t>
-            </a:r>
-          </a:p>
-        </p:txBody>
-      </p:sp>
-    </p:spTree>
-  </p:cSld>
-  <p:clrMapOvr>
-    <a:masterClrMapping/>
-  </p:clrMapOvr>
-</p:sld>
-</file>
-
-<file path=ppt/slides/slide2.xml><?xml version="1.0" encoding="utf-8"?>
-<p:sld xmlns:a="http://schemas.openxmlformats.org/drawingml/2006/main" xmlns:p="http://schemas.openxmlformats.org/presentationml/2006/main" xmlns:r="http://schemas.openxmlformats.org/officeDocument/2006/relationships">
-  <p:cSld>
-    <p:spTree>
-      <p:nvGrpSpPr>
-        <p:cNvPr id="1" name=""/>
-        <p:cNvGrpSpPr/>
-        <p:nvPr/>
-      </p:nvGrpSpPr>
-      <p:grpSpPr/>
-      <p:sp>
-        <p:nvSpPr>
-          <p:cNvPr id="662" name="Google Shape;662;p55"/>
+          <p:cNvPr id="1027" name="Google Shape;1027;p65"/>
           <p:cNvSpPr/>
           <p:nvPr/>
         </p:nvSpPr>
         <p:spPr>
           <a:xfrm>
-            <a:off x="8667705" y="4666977"/>
-            <a:ext cx="190499" cy="190475"/>
+            <a:off x="6064222" y="1209852"/>
+            <a:ext cx="2793985" cy="3014270"/>
           </a:xfrm>
-          <a:prstGeom prst="rect">
-            <a:avLst/>
+          <a:prstGeom prst="roundRect">
+            <a:avLst>
+              <a:gd fmla="val 3436" name="adj"/>
+            </a:avLst>
           </a:prstGeom>
-          <a:noFill/>
+          <a:solidFill>
+            <a:schemeClr val="lt2"/>
+          </a:solidFill>
           <a:ln>
             <a:noFill/>
           </a:ln>
@@ -7914,7 +7046,97 @@
       </p:sp>
       <p:sp>
         <p:nvSpPr>
-          <p:cNvPr id="663" name="Google Shape;663;p55"/>
+          <p:cNvPr id="1029" name="Google Shape;1029;p65"/>
+          <p:cNvSpPr/>
+          <p:nvPr/>
+        </p:nvSpPr>
+        <p:spPr>
+          <a:xfrm>
+            <a:off x="3174981" y="1209852"/>
+            <a:ext cx="2793985" cy="3014270"/>
+          </a:xfrm>
+          <a:prstGeom prst="roundRect">
+            <a:avLst>
+              <a:gd fmla="val 3436" name="adj"/>
+            </a:avLst>
+          </a:prstGeom>
+          <a:solidFill>
+            <a:schemeClr val="lt2"/>
+          </a:solidFill>
+          <a:ln>
+            <a:noFill/>
+          </a:ln>
+        </p:spPr>
+        <p:txBody>
+          <a:bodyPr anchorCtr="0" anchor="ctr" bIns="91425" lIns="91425" spcFirstLastPara="1" rIns="91425" wrap="square" tIns="91425">
+            <a:noAutofit/>
+          </a:bodyPr>
+          <a:lstStyle/>
+          <a:p>
+            <a:pPr indent="0" lvl="0" marL="0" rtl="0" algn="l">
+              <a:spcBef>
+                <a:spcPts val="0"/>
+              </a:spcBef>
+              <a:spcAft>
+                <a:spcPts val="0"/>
+              </a:spcAft>
+              <a:buNone/>
+            </a:pPr>
+            <a:r>
+              <a:t/>
+            </a:r>
+            <a:endParaRPr/>
+          </a:p>
+        </p:txBody>
+      </p:sp>
+      <p:sp>
+        <p:nvSpPr>
+          <p:cNvPr id="1031" name="Google Shape;1031;p65"/>
+          <p:cNvSpPr/>
+          <p:nvPr/>
+        </p:nvSpPr>
+        <p:spPr>
+          <a:xfrm>
+            <a:off x="285749" y="1209852"/>
+            <a:ext cx="2793985" cy="3014270"/>
+          </a:xfrm>
+          <a:prstGeom prst="roundRect">
+            <a:avLst>
+              <a:gd fmla="val 3436" name="adj"/>
+            </a:avLst>
+          </a:prstGeom>
+          <a:solidFill>
+            <a:schemeClr val="lt2"/>
+          </a:solidFill>
+          <a:ln>
+            <a:noFill/>
+          </a:ln>
+        </p:spPr>
+        <p:txBody>
+          <a:bodyPr anchorCtr="0" anchor="ctr" bIns="91425" lIns="91425" spcFirstLastPara="1" rIns="91425" wrap="square" tIns="91425">
+            <a:noAutofit/>
+          </a:bodyPr>
+          <a:lstStyle/>
+          <a:p>
+            <a:pPr indent="0" lvl="0" marL="0" rtl="0" algn="l">
+              <a:spcBef>
+                <a:spcPts val="0"/>
+              </a:spcBef>
+              <a:spcAft>
+                <a:spcPts val="0"/>
+              </a:spcAft>
+              <a:buNone/>
+            </a:pPr>
+            <a:r>
+              <a:t/>
+            </a:r>
+            <a:endParaRPr/>
+          </a:p>
+        </p:txBody>
+      </p:sp>
+      <p:sp>
+        <p:nvSpPr>
+          <p:cNvPr id="1032" name="Google Shape;1032;p65"/>
           <p:cNvSpPr/>
           <p:nvPr/>
         </p:nvSpPr>
@@ -7955,7 +7177,7 @@
       </p:sp>
       <p:sp>
         <p:nvSpPr>
-          <p:cNvPr id="664" name="Google Shape;664;p55"/>
+          <p:cNvPr id="1033" name="Google Shape;1033;p65"/>
           <p:cNvSpPr/>
           <p:nvPr/>
         </p:nvSpPr>
@@ -7996,7 +7218,585 @@
       </p:sp>
       <p:sp>
         <p:nvSpPr>
-          <p:cNvPr id="685" name="BrandDeck Text 685"/>
+          <p:cNvPr id="1034" name="Google Shape;1034;p65"/>
+          <p:cNvSpPr/>
+          <p:nvPr/>
+        </p:nvSpPr>
+        <p:spPr>
+          <a:xfrm>
+            <a:off x="476248" y="1400327"/>
+            <a:ext cx="2412987" cy="1009519"/>
+          </a:xfrm>
+          <a:prstGeom prst="rect">
+            <a:avLst/>
+          </a:prstGeom>
+          <a:noFill/>
+          <a:ln>
+            <a:noFill/>
+          </a:ln>
+        </p:spPr>
+        <p:txBody>
+          <a:bodyPr anchorCtr="0" anchor="ctr" bIns="91425" lIns="91425" spcFirstLastPara="1" rIns="91425" wrap="square" tIns="91425">
+            <a:noAutofit/>
+          </a:bodyPr>
+          <a:lstStyle/>
+          <a:p>
+            <a:pPr indent="0" lvl="0" marL="0" rtl="0" algn="l">
+              <a:spcBef>
+                <a:spcPts val="0"/>
+              </a:spcBef>
+              <a:spcAft>
+                <a:spcPts val="0"/>
+              </a:spcAft>
+              <a:buNone/>
+            </a:pPr>
+            <a:r>
+              <a:t/>
+            </a:r>
+            <a:endParaRPr/>
+          </a:p>
+        </p:txBody>
+      </p:sp>
+      <p:sp>
+        <p:nvSpPr>
+          <p:cNvPr id="1035" name="Google Shape;1035;p65"/>
+          <p:cNvSpPr/>
+          <p:nvPr/>
+        </p:nvSpPr>
+        <p:spPr>
+          <a:xfrm>
+            <a:off x="476248" y="1400328"/>
+            <a:ext cx="76199" cy="76190"/>
+          </a:xfrm>
+          <a:prstGeom prst="roundRect">
+            <a:avLst>
+              <a:gd fmla="val 31500" name="adj"/>
+            </a:avLst>
+          </a:prstGeom>
+          <a:solidFill>
+            <a:srgbClr val="0077FF"/>
+          </a:solidFill>
+          <a:ln>
+            <a:noFill/>
+          </a:ln>
+        </p:spPr>
+        <p:txBody>
+          <a:bodyPr anchorCtr="0" anchor="ctr" bIns="91425" lIns="91425" spcFirstLastPara="1" rIns="91425" wrap="square" tIns="91425">
+            <a:noAutofit/>
+          </a:bodyPr>
+          <a:lstStyle/>
+          <a:p>
+            <a:pPr indent="0" lvl="0" marL="0" rtl="0" algn="l">
+              <a:spcBef>
+                <a:spcPts val="0"/>
+              </a:spcBef>
+              <a:spcAft>
+                <a:spcPts val="0"/>
+              </a:spcAft>
+              <a:buNone/>
+            </a:pPr>
+            <a:r>
+              <a:t/>
+            </a:r>
+            <a:endParaRPr/>
+          </a:p>
+        </p:txBody>
+      </p:sp>
+      <p:sp>
+        <p:nvSpPr>
+          <p:cNvPr id="1036" name="BrandDeck Text 1036"/>
+          <p:cNvSpPr/>
+          <p:nvPr/>
+        </p:nvSpPr>
+        <p:spPr>
+          <a:xfrm>
+            <a:off x="476248" y="1628898"/>
+            <a:ext cx="2463787" cy="831742"/>
+          </a:xfrm>
+          <a:prstGeom prst="rect">
+            <a:avLst/>
+          </a:prstGeom>
+          <a:noFill/>
+          <a:ln>
+            <a:noFill/>
+          </a:ln>
+        </p:spPr>
+        <p:txBody>
+          <a:bodyPr anchorCtr="0" anchor="t" bIns="0" lIns="0" spcFirstLastPara="1" rIns="0" wrap="square" tIns="0">
+            <a:normAutofit/>
+          </a:bodyPr>
+          <a:lstStyle/>
+          <a:p>
+            <a:pPr indent="0" marL="0" marR="0" rtl="0" algn="l">
+              <a:lnSpc>
+                <a:spcPct val="115000"/>
+              </a:lnSpc>
+              <a:spcBef>
+                <a:spcPts val="0"/>
+              </a:spcBef>
+              <a:spcAft>
+                <a:spcPts val="179"/>
+              </a:spcAft>
+              <a:buNone/>
+            </a:pPr>
+            <a:r>
+              <a:rPr sz="1200" b="0">
+                <a:latin typeface="Play"/>
+                <a:solidFill>
+                  <a:schemeClr val="dk1"/>
+                </a:solidFill>
+              </a:rPr>
+              <a:t>Следующие шаги после утверждения</a:t>
+            </a:r>
+            <a:endParaRPr b="0" i="0" sz="1200" u="none" cap="none" strike="noStrike">
+              <a:solidFill>
+                <a:schemeClr val="dk1"/>
+              </a:solidFill>
+              <a:latin typeface="Calibri"/>
+              <a:ea typeface="Calibri"/>
+              <a:cs typeface="Calibri"/>
+              <a:sym typeface="Calibri"/>
+            </a:endParaRPr>
+          </a:p>
+        </p:txBody>
+      </p:sp>
+      <p:sp>
+        <p:nvSpPr>
+          <p:cNvPr id="1037" name="Google Shape;1037;p65"/>
+          <p:cNvSpPr/>
+          <p:nvPr/>
+        </p:nvSpPr>
+        <p:spPr>
+          <a:xfrm>
+            <a:off x="2422509" y="3566983"/>
+            <a:ext cx="466723" cy="466664"/>
+          </a:xfrm>
+          <a:prstGeom prst="rect">
+            <a:avLst/>
+          </a:prstGeom>
+          <a:noFill/>
+          <a:ln>
+            <a:noFill/>
+          </a:ln>
+        </p:spPr>
+        <p:txBody>
+          <a:bodyPr anchorCtr="0" anchor="ctr" bIns="91425" lIns="91425" spcFirstLastPara="1" rIns="91425" wrap="square" tIns="91425">
+            <a:noAutofit/>
+          </a:bodyPr>
+          <a:lstStyle/>
+          <a:p>
+            <a:pPr indent="0" lvl="0" marL="0" rtl="0" algn="l">
+              <a:spcBef>
+                <a:spcPts val="0"/>
+              </a:spcBef>
+              <a:spcAft>
+                <a:spcPts val="0"/>
+              </a:spcAft>
+              <a:buNone/>
+            </a:pPr>
+            <a:r>
+              <a:t/>
+            </a:r>
+            <a:endParaRPr/>
+          </a:p>
+        </p:txBody>
+      </p:sp>
+      <p:sp>
+        <p:nvSpPr>
+          <p:cNvPr id="1040" name="Google Shape;1040;p65"/>
+          <p:cNvSpPr/>
+          <p:nvPr/>
+        </p:nvSpPr>
+        <p:spPr>
+          <a:xfrm>
+            <a:off x="3365480" y="1400327"/>
+            <a:ext cx="2412987" cy="1009519"/>
+          </a:xfrm>
+          <a:prstGeom prst="rect">
+            <a:avLst/>
+          </a:prstGeom>
+          <a:noFill/>
+          <a:ln>
+            <a:noFill/>
+          </a:ln>
+        </p:spPr>
+        <p:txBody>
+          <a:bodyPr anchorCtr="0" anchor="ctr" bIns="91425" lIns="91425" spcFirstLastPara="1" rIns="91425" wrap="square" tIns="91425">
+            <a:noAutofit/>
+          </a:bodyPr>
+          <a:lstStyle/>
+          <a:p>
+            <a:pPr indent="0" lvl="0" marL="0" rtl="0" algn="l">
+              <a:spcBef>
+                <a:spcPts val="0"/>
+              </a:spcBef>
+              <a:spcAft>
+                <a:spcPts val="0"/>
+              </a:spcAft>
+              <a:buNone/>
+            </a:pPr>
+            <a:r>
+              <a:t/>
+            </a:r>
+            <a:endParaRPr/>
+          </a:p>
+        </p:txBody>
+      </p:sp>
+      <p:sp>
+        <p:nvSpPr>
+          <p:cNvPr id="1041" name="Google Shape;1041;p65"/>
+          <p:cNvSpPr/>
+          <p:nvPr/>
+        </p:nvSpPr>
+        <p:spPr>
+          <a:xfrm>
+            <a:off x="3365480" y="1400328"/>
+            <a:ext cx="76199" cy="76190"/>
+          </a:xfrm>
+          <a:prstGeom prst="roundRect">
+            <a:avLst>
+              <a:gd fmla="val 31500" name="adj"/>
+            </a:avLst>
+          </a:prstGeom>
+          <a:solidFill>
+            <a:srgbClr val="0077FF"/>
+          </a:solidFill>
+          <a:ln>
+            <a:noFill/>
+          </a:ln>
+        </p:spPr>
+        <p:txBody>
+          <a:bodyPr anchorCtr="0" anchor="ctr" bIns="91425" lIns="91425" spcFirstLastPara="1" rIns="91425" wrap="square" tIns="91425">
+            <a:noAutofit/>
+          </a:bodyPr>
+          <a:lstStyle/>
+          <a:p>
+            <a:pPr indent="0" lvl="0" marL="0" rtl="0" algn="l">
+              <a:spcBef>
+                <a:spcPts val="0"/>
+              </a:spcBef>
+              <a:spcAft>
+                <a:spcPts val="0"/>
+              </a:spcAft>
+              <a:buNone/>
+            </a:pPr>
+            <a:r>
+              <a:t/>
+            </a:r>
+            <a:endParaRPr/>
+          </a:p>
+        </p:txBody>
+      </p:sp>
+      <p:sp>
+        <p:nvSpPr>
+          <p:cNvPr id="1042" name="BrandDeck Text 1042"/>
+          <p:cNvSpPr/>
+          <p:nvPr/>
+        </p:nvSpPr>
+        <p:spPr>
+          <a:xfrm>
+            <a:off x="3365479" y="1628898"/>
+            <a:ext cx="2463787" cy="831742"/>
+          </a:xfrm>
+          <a:prstGeom prst="rect">
+            <a:avLst/>
+          </a:prstGeom>
+          <a:noFill/>
+          <a:ln>
+            <a:noFill/>
+          </a:ln>
+        </p:spPr>
+        <p:txBody>
+          <a:bodyPr anchorCtr="0" anchor="t" bIns="0" lIns="0" spcFirstLastPara="1" rIns="0" wrap="square" tIns="0">
+            <a:normAutofit/>
+          </a:bodyPr>
+          <a:lstStyle/>
+          <a:p>
+            <a:pPr indent="0" marL="0" marR="0" rtl="0" algn="l">
+              <a:lnSpc>
+                <a:spcPct val="115000"/>
+              </a:lnSpc>
+              <a:spcBef>
+                <a:spcPts val="0"/>
+              </a:spcBef>
+              <a:spcAft>
+                <a:spcPts val="240"/>
+              </a:spcAft>
+              <a:buNone/>
+            </a:pPr>
+            <a:r>
+              <a:rPr sz="1600" b="0">
+                <a:latin typeface="Play"/>
+                <a:solidFill>
+                  <a:schemeClr val="dk1"/>
+                </a:solidFill>
+              </a:rPr>
+              <a:t>Запустить пилот в двух подразделениях.</a:t>
+            </a:r>
+            <a:endParaRPr b="0" i="0" sz="1200" u="none" cap="none" strike="noStrike">
+              <a:solidFill>
+                <a:schemeClr val="dk1"/>
+              </a:solidFill>
+              <a:latin typeface="Calibri"/>
+              <a:ea typeface="Calibri"/>
+              <a:cs typeface="Calibri"/>
+              <a:sym typeface="Calibri"/>
+            </a:endParaRPr>
+          </a:p>
+        </p:txBody>
+      </p:sp>
+      <p:sp>
+        <p:nvSpPr>
+          <p:cNvPr id="1043" name="Google Shape;1043;p65"/>
+          <p:cNvSpPr/>
+          <p:nvPr/>
+        </p:nvSpPr>
+        <p:spPr>
+          <a:xfrm>
+            <a:off x="5311741" y="3566983"/>
+            <a:ext cx="466723" cy="466664"/>
+          </a:xfrm>
+          <a:prstGeom prst="rect">
+            <a:avLst/>
+          </a:prstGeom>
+          <a:noFill/>
+          <a:ln>
+            <a:noFill/>
+          </a:ln>
+        </p:spPr>
+        <p:txBody>
+          <a:bodyPr anchorCtr="0" anchor="ctr" bIns="91425" lIns="91425" spcFirstLastPara="1" rIns="91425" wrap="square" tIns="91425">
+            <a:noAutofit/>
+          </a:bodyPr>
+          <a:lstStyle/>
+          <a:p>
+            <a:pPr indent="0" lvl="0" marL="0" rtl="0" algn="l">
+              <a:spcBef>
+                <a:spcPts val="0"/>
+              </a:spcBef>
+              <a:spcAft>
+                <a:spcPts val="0"/>
+              </a:spcAft>
+              <a:buNone/>
+            </a:pPr>
+            <a:r>
+              <a:t/>
+            </a:r>
+            <a:endParaRPr/>
+          </a:p>
+        </p:txBody>
+      </p:sp>
+      <p:sp>
+        <p:nvSpPr>
+          <p:cNvPr id="1045" name="Google Shape;1045;p65"/>
+          <p:cNvSpPr/>
+          <p:nvPr/>
+        </p:nvSpPr>
+        <p:spPr>
+          <a:xfrm>
+            <a:off x="6254721" y="1400327"/>
+            <a:ext cx="2412987" cy="1009519"/>
+          </a:xfrm>
+          <a:prstGeom prst="rect">
+            <a:avLst/>
+          </a:prstGeom>
+          <a:noFill/>
+          <a:ln>
+            <a:noFill/>
+          </a:ln>
+        </p:spPr>
+        <p:txBody>
+          <a:bodyPr anchorCtr="0" anchor="ctr" bIns="91425" lIns="91425" spcFirstLastPara="1" rIns="91425" wrap="square" tIns="91425">
+            <a:noAutofit/>
+          </a:bodyPr>
+          <a:lstStyle/>
+          <a:p>
+            <a:pPr indent="0" lvl="0" marL="0" rtl="0" algn="l">
+              <a:spcBef>
+                <a:spcPts val="0"/>
+              </a:spcBef>
+              <a:spcAft>
+                <a:spcPts val="0"/>
+              </a:spcAft>
+              <a:buNone/>
+            </a:pPr>
+            <a:r>
+              <a:t/>
+            </a:r>
+            <a:endParaRPr/>
+          </a:p>
+        </p:txBody>
+      </p:sp>
+      <p:sp>
+        <p:nvSpPr>
+          <p:cNvPr id="1046" name="Google Shape;1046;p65"/>
+          <p:cNvSpPr/>
+          <p:nvPr/>
+        </p:nvSpPr>
+        <p:spPr>
+          <a:xfrm>
+            <a:off x="6254721" y="1400328"/>
+            <a:ext cx="76199" cy="76190"/>
+          </a:xfrm>
+          <a:prstGeom prst="roundRect">
+            <a:avLst>
+              <a:gd fmla="val 31500" name="adj"/>
+            </a:avLst>
+          </a:prstGeom>
+          <a:solidFill>
+            <a:srgbClr val="0077FF"/>
+          </a:solidFill>
+          <a:ln>
+            <a:noFill/>
+          </a:ln>
+        </p:spPr>
+        <p:txBody>
+          <a:bodyPr anchorCtr="0" anchor="ctr" bIns="91425" lIns="91425" spcFirstLastPara="1" rIns="91425" wrap="square" tIns="91425">
+            <a:noAutofit/>
+          </a:bodyPr>
+          <a:lstStyle/>
+          <a:p>
+            <a:pPr indent="0" lvl="0" marL="0" rtl="0" algn="l">
+              <a:spcBef>
+                <a:spcPts val="0"/>
+              </a:spcBef>
+              <a:spcAft>
+                <a:spcPts val="0"/>
+              </a:spcAft>
+              <a:buNone/>
+            </a:pPr>
+            <a:r>
+              <a:t/>
+            </a:r>
+            <a:endParaRPr/>
+          </a:p>
+        </p:txBody>
+      </p:sp>
+      <p:sp>
+        <p:nvSpPr>
+          <p:cNvPr id="1047" name="BrandDeck Text 1047"/>
+          <p:cNvSpPr/>
+          <p:nvPr/>
+        </p:nvSpPr>
+        <p:spPr>
+          <a:xfrm>
+            <a:off x="6254721" y="1628898"/>
+            <a:ext cx="2463787" cy="831742"/>
+          </a:xfrm>
+          <a:prstGeom prst="rect">
+            <a:avLst/>
+          </a:prstGeom>
+          <a:noFill/>
+          <a:ln>
+            <a:noFill/>
+          </a:ln>
+        </p:spPr>
+        <p:txBody>
+          <a:bodyPr anchorCtr="0" anchor="t" bIns="0" lIns="0" spcFirstLastPara="1" rIns="0" wrap="square" tIns="0">
+            <a:normAutofit/>
+          </a:bodyPr>
+          <a:lstStyle/>
+          <a:p>
+            <a:pPr indent="0" marL="0" marR="0" rtl="0" algn="l">
+              <a:lnSpc>
+                <a:spcPct val="115000"/>
+              </a:lnSpc>
+              <a:spcBef>
+                <a:spcPts val="0"/>
+              </a:spcBef>
+              <a:spcAft>
+                <a:spcPts val="179"/>
+              </a:spcAft>
+              <a:buNone/>
+            </a:pPr>
+            <a:r>
+              <a:rPr sz="1200" b="0">
+                <a:latin typeface="Play"/>
+                <a:solidFill>
+                  <a:schemeClr val="dk1"/>
+                </a:solidFill>
+              </a:rPr>
+              <a:t>Назначить команду из трех человек.</a:t>
+            </a:r>
+            <a:endParaRPr b="0" i="0" sz="1200" u="none" cap="none" strike="noStrike">
+              <a:solidFill>
+                <a:schemeClr val="dk1"/>
+              </a:solidFill>
+              <a:latin typeface="Calibri"/>
+              <a:ea typeface="Calibri"/>
+              <a:cs typeface="Calibri"/>
+              <a:sym typeface="Calibri"/>
+            </a:endParaRPr>
+          </a:p>
+          <a:p>
+            <a:pPr indent="0" marL="0" marR="0" rtl="0" algn="l">
+              <a:lnSpc>
+                <a:spcPct val="115000"/>
+              </a:lnSpc>
+              <a:spcBef>
+                <a:spcPts val="0"/>
+              </a:spcBef>
+              <a:spcAft>
+                <a:spcPts val="179"/>
+              </a:spcAft>
+              <a:buNone/>
+            </a:pPr>
+            <a:r>
+              <a:rPr sz="1200" b="0">
+                <a:latin typeface="Play"/>
+                <a:solidFill>
+                  <a:schemeClr val="dk1"/>
+                </a:solidFill>
+              </a:rPr>
+              <a:t>Измерить время поиска и долю закрытых обращений.</a:t>
+            </a:r>
+          </a:p>
+        </p:txBody>
+      </p:sp>
+      <p:sp>
+        <p:nvSpPr>
+          <p:cNvPr id="1048" name="Google Shape;1048;p65"/>
+          <p:cNvSpPr/>
+          <p:nvPr/>
+        </p:nvSpPr>
+        <p:spPr>
+          <a:xfrm>
+            <a:off x="8200982" y="3566983"/>
+            <a:ext cx="466723" cy="466664"/>
+          </a:xfrm>
+          <a:prstGeom prst="rect">
+            <a:avLst/>
+          </a:prstGeom>
+          <a:noFill/>
+          <a:ln>
+            <a:noFill/>
+          </a:ln>
+        </p:spPr>
+        <p:txBody>
+          <a:bodyPr anchorCtr="0" anchor="ctr" bIns="91425" lIns="91425" spcFirstLastPara="1" rIns="91425" wrap="square" tIns="91425">
+            <a:noAutofit/>
+          </a:bodyPr>
+          <a:lstStyle/>
+          <a:p>
+            <a:pPr indent="0" lvl="0" marL="0" rtl="0" algn="l">
+              <a:spcBef>
+                <a:spcPts val="0"/>
+              </a:spcBef>
+              <a:spcAft>
+                <a:spcPts val="0"/>
+              </a:spcAft>
+              <a:buNone/>
+            </a:pPr>
+            <a:r>
+              <a:t/>
+            </a:r>
+            <a:endParaRPr/>
+          </a:p>
+        </p:txBody>
+      </p:sp>
+      <p:sp>
+        <p:nvSpPr>
+          <p:cNvPr id="1050" name="BrandDeck Text 1050"/>
           <p:cNvSpPr txBox="1"/>
           <p:nvPr>
             <p:ph type="title"/>
@@ -8040,6 +7840,76 @@
             </a:pPr>
             <a:r>
               <a:rPr sz="1800"/>
+              <a:t>Одобрить пилот и выделить команду из 3 человек</a:t>
+            </a:r>
+            <a:endParaRPr/>
+          </a:p>
+        </p:txBody>
+      </p:sp>
+    </p:spTree>
+  </p:cSld>
+  <p:clrMapOvr>
+    <a:masterClrMapping/>
+  </p:clrMapOvr>
+</p:sld>
+</file>
+
+<file path=ppt/slides/slide2.xml><?xml version="1.0" encoding="utf-8"?>
+<p:sld xmlns:a="http://schemas.openxmlformats.org/drawingml/2006/main" xmlns:p="http://schemas.openxmlformats.org/presentationml/2006/main" xmlns:r="http://schemas.openxmlformats.org/officeDocument/2006/relationships">
+  <p:cSld>
+    <p:spTree>
+      <p:nvGrpSpPr>
+        <p:cNvPr id="1" name=""/>
+        <p:cNvGrpSpPr/>
+        <p:nvPr/>
+      </p:nvGrpSpPr>
+      <p:grpSpPr/>
+      <p:sp>
+        <p:nvSpPr>
+          <p:cNvPr id="2251" name="BrandDeck Text 2251"/>
+          <p:cNvSpPr txBox="1"/>
+          <p:nvPr>
+            <p:ph type="title"/>
+          </p:nvPr>
+        </p:nvSpPr>
+        <p:spPr>
+          <a:xfrm>
+            <a:off x="177970" y="282949"/>
+            <a:ext cx="6792985" cy="724203"/>
+          </a:xfrm>
+          <a:prstGeom prst="rect">
+            <a:avLst/>
+          </a:prstGeom>
+          <a:noFill/>
+          <a:ln>
+            <a:noFill/>
+          </a:ln>
+        </p:spPr>
+        <p:txBody>
+          <a:bodyPr anchorCtr="0" anchor="t" bIns="45700" lIns="91425" spcFirstLastPara="1" rIns="91425" wrap="square" tIns="45700">
+            <a:normAutofit/>
+          </a:bodyPr>
+          <a:lstStyle/>
+          <a:p>
+            <a:pPr indent="0" marL="0" rtl="0" algn="l">
+              <a:lnSpc>
+                <a:spcPct val="115000"/>
+              </a:lnSpc>
+              <a:spcBef>
+                <a:spcPts val="0"/>
+              </a:spcBef>
+              <a:spcAft>
+                <a:spcPts val="270"/>
+              </a:spcAft>
+              <a:buClr>
+                <a:schemeClr val="dk1"/>
+              </a:buClr>
+              <a:buSzPts val="2400"/>
+              <a:buFont typeface="Play"/>
+              <a:buNone/>
+            </a:pPr>
+            <a:r>
+              <a:rPr sz="1800"/>
               <a:t>Поиск инструкции занимает до 30 минут</a:t>
             </a:r>
             <a:endParaRPr/>
@@ -8048,28 +7918,28 @@
       </p:sp>
       <p:grpSp>
         <p:nvGrpSpPr>
-          <p:cNvPr id="2" name="BrandDeck Diagram icon_grid" descr="icon_grid: Сотрудник тратит до 30 минут на поиск нужной инструкции.; Рутина по поиску документов отнимает значительное время.; Это замедляет решение рабочих задач и снижает эффективность."/>
+          <p:cNvPr id="2" name="BrandDeck Diagram icon_grid" descr="icon_grid: Сотрудники тратят до 30 минут на поиск нужной инструкции.; Время поиска напрямую влияет на общую эффективность отдела."/>
           <p:cNvGrpSpPr/>
           <p:nvPr/>
         </p:nvGrpSpPr>
         <p:grpSpPr>
           <a:xfrm>
-            <a:off x="438148" y="1819373"/>
-            <a:ext cx="8305756" cy="2290463"/>
-            <a:chOff x="438148" y="1819373"/>
-            <a:chExt cx="8305756" cy="2290463"/>
+            <a:off x="177970" y="1695736"/>
+            <a:ext cx="7285819" cy="2105863"/>
+            <a:chOff x="177970" y="1695736"/>
+            <a:chExt cx="7285819" cy="2105863"/>
           </a:xfrm>
         </p:grpSpPr>
         <p:sp>
           <p:nvSpPr>
-            <p:cNvPr id="686" name="BrandDeck Diagram Card 1"/>
+            <p:cNvPr id="2256" name="BrandDeck Diagram Card 1"/>
             <p:cNvSpPr/>
             <p:nvPr/>
           </p:nvSpPr>
           <p:spPr>
             <a:xfrm>
-              <a:off x="438148" y="1819373"/>
-              <a:ext cx="4069820" cy="1062174"/>
+              <a:off x="177970" y="1695736"/>
+              <a:ext cx="3570051" cy="2105863"/>
             </a:xfrm>
             <a:prstGeom prst="roundRect">
               <a:avLst>
@@ -8093,14 +7963,14 @@
         </p:sp>
         <p:sp>
           <p:nvSpPr>
-            <p:cNvPr id="687" name="BrandDeck Diagram Icon 1 Badge"/>
+            <p:cNvPr id="2257" name="BrandDeck Diagram Icon 1 Badge"/>
             <p:cNvSpPr/>
             <p:nvPr/>
           </p:nvSpPr>
           <p:spPr>
             <a:xfrm>
-              <a:off x="657604" y="2167580"/>
-              <a:ext cx="365760" cy="365760"/>
+              <a:off x="397426" y="1915192"/>
+              <a:ext cx="603504" cy="603504"/>
             </a:xfrm>
             <a:prstGeom prst="ellipse">
               <a:avLst/>
@@ -8122,14 +7992,14 @@
         </p:sp>
         <p:sp>
           <p:nvSpPr>
-            <p:cNvPr id="688" name="BrandDeck Icon users"/>
+            <p:cNvPr id="2258" name="BrandDeck Icon users"/>
             <p:cNvSpPr/>
             <p:nvPr/>
           </p:nvSpPr>
           <p:spPr>
             <a:xfrm>
-              <a:off x="738071" y="2248047"/>
-              <a:ext cx="204825" cy="204825"/>
+              <a:off x="530196" y="2047963"/>
+              <a:ext cx="337962" cy="337962"/>
             </a:xfrm>
             <a:custGeom>
               <a:avLst/>
@@ -8219,7 +8089,7 @@
               </a:pathLst>
             </a:custGeom>
             <a:noFill/>
-            <a:ln w="17068" cap="rnd">
+            <a:ln w="28163" cap="rnd">
               <a:solidFill>
                 <a:srgbClr val="FFFFFF"/>
               </a:solidFill>
@@ -8236,14 +8106,14 @@
         </p:sp>
         <p:sp>
           <p:nvSpPr>
-            <p:cNvPr id="689" name="BrandDeck Diagram Text 1"/>
+            <p:cNvPr id="2259" name="BrandDeck Diagram Text 1"/>
             <p:cNvSpPr txBox="1"/>
             <p:nvPr/>
           </p:nvSpPr>
           <p:spPr>
             <a:xfrm>
-              <a:off x="1155037" y="1951046"/>
-              <a:ext cx="3133475" cy="798827"/>
+              <a:off x="331589" y="2672316"/>
+              <a:ext cx="3262813" cy="1019555"/>
             </a:xfrm>
             <a:prstGeom prst="rect">
               <a:avLst/>
@@ -8251,7 +8121,7 @@
             <a:noFill/>
           </p:spPr>
           <p:txBody>
-            <a:bodyPr wrap="square" anchor="ctr" lIns="36576" tIns="18288" rIns="36576" bIns="18288">
+            <a:bodyPr wrap="square" anchor="t" lIns="36576" tIns="18288" rIns="36576" bIns="18288">
               <a:noAutofit/>
             </a:bodyPr>
             <a:lstStyle/>
@@ -8262,27 +8132,27 @@
                 </a:lnSpc>
               </a:pPr>
               <a:r>
-                <a:rPr sz="1410" b="0">
+                <a:rPr sz="1800" b="0">
                   <a:solidFill>
                     <a:srgbClr val="000000"/>
                   </a:solidFill>
                   <a:latin typeface="Play"/>
                 </a:rPr>
-                <a:t>Сотрудник тратит до 30 минут на поиск нужной инструкции.</a:t>
+                <a:t>Сотрудники тратят до 30 минут на поиск нужной инструкции.</a:t>
               </a:r>
             </a:p>
           </p:txBody>
         </p:sp>
         <p:sp>
           <p:nvSpPr>
-            <p:cNvPr id="690" name="BrandDeck Diagram Card 2"/>
+            <p:cNvPr id="2260" name="BrandDeck Diagram Card 2"/>
             <p:cNvSpPr/>
             <p:nvPr/>
           </p:nvSpPr>
           <p:spPr>
             <a:xfrm>
-              <a:off x="4674084" y="1819373"/>
-              <a:ext cx="4069820" cy="1062174"/>
+              <a:off x="3893738" y="1695736"/>
+              <a:ext cx="3570051" cy="2105863"/>
             </a:xfrm>
             <a:prstGeom prst="roundRect">
               <a:avLst>
@@ -8306,14 +8176,14 @@
         </p:sp>
         <p:sp>
           <p:nvSpPr>
-            <p:cNvPr id="691" name="BrandDeck Diagram Icon 2 Badge"/>
+            <p:cNvPr id="2261" name="BrandDeck Diagram Icon 2 Badge"/>
             <p:cNvSpPr/>
             <p:nvPr/>
           </p:nvSpPr>
           <p:spPr>
             <a:xfrm>
-              <a:off x="4893540" y="2167580"/>
-              <a:ext cx="365760" cy="365760"/>
+              <a:off x="4113194" y="1915192"/>
+              <a:ext cx="603504" cy="603504"/>
             </a:xfrm>
             <a:prstGeom prst="ellipse">
               <a:avLst/>
@@ -8335,14 +8205,14 @@
         </p:sp>
         <p:sp>
           <p:nvSpPr>
-            <p:cNvPr id="692" name="BrandDeck Icon search"/>
+            <p:cNvPr id="2262" name="BrandDeck Icon clock"/>
             <p:cNvSpPr/>
             <p:nvPr/>
           </p:nvSpPr>
           <p:spPr>
             <a:xfrm>
-              <a:off x="4974007" y="2248047"/>
-              <a:ext cx="204825" cy="204825"/>
+              <a:off x="4245965" y="2047963"/>
+              <a:ext cx="337962" cy="337962"/>
             </a:xfrm>
             <a:custGeom>
               <a:avLst/>
@@ -8353,42 +8223,45 @@
               <a:pathLst>
                 <a:path w="24000" h="24000" fill="none">
                   <a:moveTo>
-                    <a:pt x="19000" y="11000"/>
+                    <a:pt x="22000" y="12000"/>
                   </a:moveTo>
                   <a:cubicBezTo>
-                    <a:pt x="19000" y="15418"/>
-                    <a:pt x="15418" y="19000"/>
-                    <a:pt x="11000" y="19000"/>
+                    <a:pt x="22000" y="17523"/>
+                    <a:pt x="17523" y="22000"/>
+                    <a:pt x="12000" y="22000"/>
                   </a:cubicBezTo>
                   <a:cubicBezTo>
-                    <a:pt x="6582" y="19000"/>
-                    <a:pt x="3000" y="15418"/>
-                    <a:pt x="3000" y="11000"/>
+                    <a:pt x="6477" y="22000"/>
+                    <a:pt x="2000" y="17523"/>
+                    <a:pt x="2000" y="12000"/>
                   </a:cubicBezTo>
                   <a:cubicBezTo>
-                    <a:pt x="3000" y="6582"/>
-                    <a:pt x="6582" y="3000"/>
-                    <a:pt x="11000" y="3000"/>
+                    <a:pt x="2000" y="6477"/>
+                    <a:pt x="6477" y="2000"/>
+                    <a:pt x="12000" y="2000"/>
                   </a:cubicBezTo>
                   <a:cubicBezTo>
-                    <a:pt x="15418" y="3000"/>
-                    <a:pt x="19000" y="6582"/>
-                    <a:pt x="19000" y="11000"/>
+                    <a:pt x="17523" y="2000"/>
+                    <a:pt x="22000" y="6477"/>
+                    <a:pt x="22000" y="12000"/>
                   </a:cubicBezTo>
                   <a:close/>
                 </a:path>
                 <a:path w="24000" h="24000" fill="none">
                   <a:moveTo>
-                    <a:pt x="21000" y="21000"/>
+                    <a:pt x="12000" y="6000"/>
                   </a:moveTo>
                   <a:lnTo>
-                    <a:pt x="16700" y="16700"/>
+                    <a:pt x="12000" y="12000"/>
+                  </a:lnTo>
+                  <a:lnTo>
+                    <a:pt x="16000" y="14000"/>
                   </a:lnTo>
                 </a:path>
               </a:pathLst>
             </a:custGeom>
             <a:noFill/>
-            <a:ln w="17068" cap="rnd">
+            <a:ln w="28163" cap="rnd">
               <a:solidFill>
                 <a:srgbClr val="FFFFFF"/>
               </a:solidFill>
@@ -8405,14 +8278,14 @@
         </p:sp>
         <p:sp>
           <p:nvSpPr>
-            <p:cNvPr id="693" name="BrandDeck Diagram Text 2"/>
+            <p:cNvPr id="2263" name="BrandDeck Diagram Text 2"/>
             <p:cNvSpPr txBox="1"/>
             <p:nvPr/>
           </p:nvSpPr>
           <p:spPr>
             <a:xfrm>
-              <a:off x="5390973" y="1951046"/>
-              <a:ext cx="3133475" cy="798827"/>
+              <a:off x="4047357" y="2672316"/>
+              <a:ext cx="3262813" cy="1019555"/>
             </a:xfrm>
             <a:prstGeom prst="rect">
               <a:avLst/>
@@ -8420,7 +8293,7 @@
             <a:noFill/>
           </p:spPr>
           <p:txBody>
-            <a:bodyPr wrap="square" anchor="ctr" lIns="36576" tIns="18288" rIns="36576" bIns="18288">
+            <a:bodyPr wrap="square" anchor="t" lIns="36576" tIns="18288" rIns="36576" bIns="18288">
               <a:noAutofit/>
             </a:bodyPr>
             <a:lstStyle/>
@@ -8431,199 +8304,13 @@
                 </a:lnSpc>
               </a:pPr>
               <a:r>
-                <a:rPr sz="1410" b="0">
+                <a:rPr sz="1800" b="0">
                   <a:solidFill>
                     <a:srgbClr val="000000"/>
                   </a:solidFill>
                   <a:latin typeface="Play"/>
                 </a:rPr>
-                <a:t>Рутина по поиску документов отнимает значительное время.</a:t>
-              </a:r>
-            </a:p>
-          </p:txBody>
-        </p:sp>
-        <p:sp>
-          <p:nvSpPr>
-            <p:cNvPr id="694" name="BrandDeck Diagram Card 3"/>
-            <p:cNvSpPr/>
-            <p:nvPr/>
-          </p:nvSpPr>
-          <p:spPr>
-            <a:xfrm>
-              <a:off x="438148" y="3047662"/>
-              <a:ext cx="4069820" cy="1062174"/>
-            </a:xfrm>
-            <a:prstGeom prst="roundRect">
-              <a:avLst>
-                <a:gd name="adj" fmla="val 8000"/>
-              </a:avLst>
-            </a:prstGeom>
-            <a:solidFill>
-              <a:srgbClr val="E8F3FF"/>
-            </a:solidFill>
-            <a:ln>
-              <a:noFill/>
-            </a:ln>
-          </p:spPr>
-          <p:txBody>
-            <a:bodyPr rtlCol="0" anchor="ctr"/>
-            <a:lstStyle/>
-            <a:p>
-              <a:pPr algn="ctr"/>
-            </a:p>
-          </p:txBody>
-        </p:sp>
-        <p:sp>
-          <p:nvSpPr>
-            <p:cNvPr id="695" name="BrandDeck Diagram Icon 3 Badge"/>
-            <p:cNvSpPr/>
-            <p:nvPr/>
-          </p:nvSpPr>
-          <p:spPr>
-            <a:xfrm>
-              <a:off x="657604" y="3395869"/>
-              <a:ext cx="365760" cy="365760"/>
-            </a:xfrm>
-            <a:prstGeom prst="ellipse">
-              <a:avLst/>
-            </a:prstGeom>
-            <a:solidFill>
-              <a:srgbClr val="006DEB"/>
-            </a:solidFill>
-            <a:ln>
-              <a:noFill/>
-            </a:ln>
-          </p:spPr>
-          <p:txBody>
-            <a:bodyPr rtlCol="0" anchor="ctr"/>
-            <a:lstStyle/>
-            <a:p>
-              <a:pPr algn="ctr"/>
-            </a:p>
-          </p:txBody>
-        </p:sp>
-        <p:sp>
-          <p:nvSpPr>
-            <p:cNvPr id="696" name="BrandDeck Icon lightbulb"/>
-            <p:cNvSpPr/>
-            <p:nvPr/>
-          </p:nvSpPr>
-          <p:spPr>
-            <a:xfrm>
-              <a:off x="738071" y="3476336"/>
-              <a:ext cx="204825" cy="204825"/>
-            </a:xfrm>
-            <a:custGeom>
-              <a:avLst/>
-              <a:gdLst/>
-              <a:ahLst/>
-              <a:cxnLst/>
-              <a:rect l="l" t="t" r="r" b="b"/>
-              <a:pathLst>
-                <a:path w="24000" h="24000" fill="none">
-                  <a:moveTo>
-                    <a:pt x="15000" y="14000"/>
-                  </a:moveTo>
-                  <a:cubicBezTo>
-                    <a:pt x="15200" y="13000"/>
-                    <a:pt x="15700" y="12300"/>
-                    <a:pt x="16500" y="11500"/>
-                  </a:cubicBezTo>
-                  <a:cubicBezTo>
-                    <a:pt x="17500" y="10600"/>
-                    <a:pt x="18000" y="9300"/>
-                    <a:pt x="18000" y="8000"/>
-                  </a:cubicBezTo>
-                  <a:cubicBezTo>
-                    <a:pt x="18000" y="4686"/>
-                    <a:pt x="15314" y="2000"/>
-                    <a:pt x="12000" y="2000"/>
-                  </a:cubicBezTo>
-                  <a:cubicBezTo>
-                    <a:pt x="8686" y="2000"/>
-                    <a:pt x="6000" y="4686"/>
-                    <a:pt x="6000" y="8000"/>
-                  </a:cubicBezTo>
-                  <a:cubicBezTo>
-                    <a:pt x="6000" y="9000"/>
-                    <a:pt x="6200" y="10200"/>
-                    <a:pt x="7500" y="11500"/>
-                  </a:cubicBezTo>
-                  <a:cubicBezTo>
-                    <a:pt x="8200" y="12200"/>
-                    <a:pt x="8800" y="13000"/>
-                    <a:pt x="9000" y="14000"/>
-                  </a:cubicBezTo>
-                </a:path>
-                <a:path w="24000" h="24000" fill="none">
-                  <a:moveTo>
-                    <a:pt x="9000" y="18000"/>
-                  </a:moveTo>
-                  <a:lnTo>
-                    <a:pt x="15000" y="18000"/>
-                  </a:lnTo>
-                </a:path>
-                <a:path w="24000" h="24000" fill="none">
-                  <a:moveTo>
-                    <a:pt x="10000" y="22000"/>
-                  </a:moveTo>
-                  <a:lnTo>
-                    <a:pt x="14000" y="22000"/>
-                  </a:lnTo>
-                </a:path>
-              </a:pathLst>
-            </a:custGeom>
-            <a:noFill/>
-            <a:ln w="17068" cap="rnd">
-              <a:solidFill>
-                <a:srgbClr val="FFFFFF"/>
-              </a:solidFill>
-              <a:round/>
-            </a:ln>
-          </p:spPr>
-          <p:txBody>
-            <a:bodyPr rtlCol="0" anchor="ctr"/>
-            <a:lstStyle/>
-            <a:p>
-              <a:pPr algn="ctr"/>
-            </a:p>
-          </p:txBody>
-        </p:sp>
-        <p:sp>
-          <p:nvSpPr>
-            <p:cNvPr id="697" name="BrandDeck Diagram Text 3"/>
-            <p:cNvSpPr txBox="1"/>
-            <p:nvPr/>
-          </p:nvSpPr>
-          <p:spPr>
-            <a:xfrm>
-              <a:off x="1155037" y="3179336"/>
-              <a:ext cx="3133475" cy="798827"/>
-            </a:xfrm>
-            <a:prstGeom prst="rect">
-              <a:avLst/>
-            </a:prstGeom>
-            <a:noFill/>
-          </p:spPr>
-          <p:txBody>
-            <a:bodyPr wrap="square" anchor="ctr" lIns="36576" tIns="18288" rIns="36576" bIns="18288">
-              <a:noAutofit/>
-            </a:bodyPr>
-            <a:lstStyle/>
-            <a:p>
-              <a:pPr algn="l">
-                <a:lnSpc>
-                  <a:spcPct val="110000"/>
-                </a:lnSpc>
-              </a:pPr>
-              <a:r>
-                <a:rPr sz="1410" b="0">
-                  <a:solidFill>
-                    <a:srgbClr val="000000"/>
-                  </a:solidFill>
-                  <a:latin typeface="Play"/>
-                </a:rPr>
-                <a:t>Это замедляет решение рабочих задач и снижает эффективность.</a:t>
+                <a:t>Время поиска напрямую влияет на общую эффективность отдела.</a:t>
               </a:r>
             </a:p>
           </p:txBody>
@@ -8824,7 +8511,7 @@
       </p:sp>
       <p:grpSp>
         <p:nvGrpSpPr>
-          <p:cNvPr id="2" name="BrandDeck Diagram icon_grid" descr="icon_grid: Треть всех обращений в поддержку — повторяющиеся вопросы.; Эти запросы касаются стандартных регламентов и инструкций.; ИИ-помощник позволит закрыть их без участия специалиста."/>
+          <p:cNvPr id="2" name="BrandDeck Diagram icon_grid" descr="icon_grid: Треть всех обращений в поддержку — повторяющиеся вопросы.; Эти запросы требуют времени на поиск инструкций.; Рутинные вопросы отвлекают специалистов от сложных задач."/>
           <p:cNvGrpSpPr/>
           <p:nvPr/>
         </p:nvGrpSpPr>
@@ -9135,7 +8822,7 @@
         </p:sp>
         <p:sp>
           <p:nvSpPr>
-            <p:cNvPr id="692" name="BrandDeck Icon file-text"/>
+            <p:cNvPr id="692" name="BrandDeck Icon clock"/>
             <p:cNvSpPr/>
             <p:nvPr/>
           </p:nvSpPr>
@@ -9153,75 +8840,39 @@
               <a:pathLst>
                 <a:path w="24000" h="24000" fill="none">
                   <a:moveTo>
-                    <a:pt x="15000" y="2000"/>
+                    <a:pt x="22000" y="12000"/>
                   </a:moveTo>
-                  <a:lnTo>
-                    <a:pt x="6000" y="2000"/>
-                  </a:lnTo>
                   <a:cubicBezTo>
-                    <a:pt x="4895" y="2000"/>
-                    <a:pt x="4000" y="2895"/>
-                    <a:pt x="4000" y="4000"/>
+                    <a:pt x="22000" y="17523"/>
+                    <a:pt x="17523" y="22000"/>
+                    <a:pt x="12000" y="22000"/>
                   </a:cubicBezTo>
-                  <a:lnTo>
-                    <a:pt x="4000" y="20000"/>
-                  </a:lnTo>
                   <a:cubicBezTo>
-                    <a:pt x="4000" y="21105"/>
-                    <a:pt x="4895" y="22000"/>
-                    <a:pt x="6000" y="22000"/>
+                    <a:pt x="6477" y="22000"/>
+                    <a:pt x="2000" y="17523"/>
+                    <a:pt x="2000" y="12000"/>
                   </a:cubicBezTo>
-                  <a:lnTo>
-                    <a:pt x="18000" y="22000"/>
-                  </a:lnTo>
                   <a:cubicBezTo>
-                    <a:pt x="19105" y="22000"/>
-                    <a:pt x="20000" y="21105"/>
-                    <a:pt x="20000" y="20000"/>
+                    <a:pt x="2000" y="6477"/>
+                    <a:pt x="6477" y="2000"/>
+                    <a:pt x="12000" y="2000"/>
                   </a:cubicBezTo>
-                  <a:lnTo>
-                    <a:pt x="20000" y="7000"/>
-                  </a:lnTo>
+                  <a:cubicBezTo>
+                    <a:pt x="17523" y="2000"/>
+                    <a:pt x="22000" y="6477"/>
+                    <a:pt x="22000" y="12000"/>
+                  </a:cubicBezTo>
                   <a:close/>
                 </a:path>
                 <a:path w="24000" h="24000" fill="none">
                   <a:moveTo>
-                    <a:pt x="14000" y="2000"/>
+                    <a:pt x="12000" y="6000"/>
                   </a:moveTo>
                   <a:lnTo>
-                    <a:pt x="14000" y="6000"/>
+                    <a:pt x="12000" y="12000"/>
                   </a:lnTo>
-                  <a:cubicBezTo>
-                    <a:pt x="14000" y="7105"/>
-                    <a:pt x="14895" y="8000"/>
-                    <a:pt x="16000" y="8000"/>
-                  </a:cubicBezTo>
                   <a:lnTo>
-                    <a:pt x="20000" y="8000"/>
-                  </a:lnTo>
-                </a:path>
-                <a:path w="24000" h="24000" fill="none">
-                  <a:moveTo>
-                    <a:pt x="10000" y="9000"/>
-                  </a:moveTo>
-                  <a:lnTo>
-                    <a:pt x="8000" y="9000"/>
-                  </a:lnTo>
-                </a:path>
-                <a:path w="24000" h="24000" fill="none">
-                  <a:moveTo>
-                    <a:pt x="16000" y="13000"/>
-                  </a:moveTo>
-                  <a:lnTo>
-                    <a:pt x="8000" y="13000"/>
-                  </a:lnTo>
-                </a:path>
-                <a:path w="24000" h="24000" fill="none">
-                  <a:moveTo>
-                    <a:pt x="16000" y="17000"/>
-                  </a:moveTo>
-                  <a:lnTo>
-                    <a:pt x="8000" y="17000"/>
+                    <a:pt x="16000" y="14000"/>
                   </a:lnTo>
                 </a:path>
               </a:pathLst>
@@ -9276,7 +8927,7 @@
                   </a:solidFill>
                   <a:latin typeface="Play"/>
                 </a:rPr>
-                <a:t>Эти запросы касаются стандартных регламентов и инструкций.</a:t>
+                <a:t>Эти запросы требуют времени на поиск инструкций.</a:t>
               </a:r>
             </a:p>
           </p:txBody>
@@ -9343,7 +8994,7 @@
         </p:sp>
         <p:sp>
           <p:nvSpPr>
-            <p:cNvPr id="696" name="BrandDeck Icon lock"/>
+            <p:cNvPr id="696" name="BrandDeck Icon circle-help"/>
             <p:cNvSpPr/>
             <p:nvPr/>
           </p:nvSpPr>
@@ -9361,61 +9012,56 @@
               <a:pathLst>
                 <a:path w="24000" h="24000" fill="none">
                   <a:moveTo>
-                    <a:pt x="5000" y="11000"/>
+                    <a:pt x="22000" y="12000"/>
                   </a:moveTo>
-                  <a:lnTo>
-                    <a:pt x="19000" y="11000"/>
-                  </a:lnTo>
                   <a:cubicBezTo>
-                    <a:pt x="20105" y="11000"/>
-                    <a:pt x="21000" y="11895"/>
-                    <a:pt x="21000" y="13000"/>
+                    <a:pt x="22000" y="17523"/>
+                    <a:pt x="17523" y="22000"/>
+                    <a:pt x="12000" y="22000"/>
                   </a:cubicBezTo>
-                  <a:lnTo>
-                    <a:pt x="21000" y="20000"/>
-                  </a:lnTo>
                   <a:cubicBezTo>
-                    <a:pt x="21000" y="21105"/>
-                    <a:pt x="20105" y="22000"/>
-                    <a:pt x="19000" y="22000"/>
+                    <a:pt x="6477" y="22000"/>
+                    <a:pt x="2000" y="17523"/>
+                    <a:pt x="2000" y="12000"/>
                   </a:cubicBezTo>
-                  <a:lnTo>
-                    <a:pt x="5000" y="22000"/>
-                  </a:lnTo>
                   <a:cubicBezTo>
-                    <a:pt x="3895" y="22000"/>
-                    <a:pt x="3000" y="21105"/>
-                    <a:pt x="3000" y="20000"/>
+                    <a:pt x="2000" y="6477"/>
+                    <a:pt x="6477" y="2000"/>
+                    <a:pt x="12000" y="2000"/>
                   </a:cubicBezTo>
-                  <a:lnTo>
-                    <a:pt x="3000" y="13000"/>
-                  </a:lnTo>
                   <a:cubicBezTo>
-                    <a:pt x="3000" y="11895"/>
-                    <a:pt x="3895" y="11000"/>
-                    <a:pt x="5000" y="11000"/>
+                    <a:pt x="17523" y="2000"/>
+                    <a:pt x="22000" y="6477"/>
+                    <a:pt x="22000" y="12000"/>
                   </a:cubicBezTo>
                   <a:close/>
                 </a:path>
                 <a:path w="24000" h="24000" fill="none">
                   <a:moveTo>
-                    <a:pt x="7000" y="11000"/>
+                    <a:pt x="9090" y="9000"/>
+                  </a:moveTo>
+                  <a:cubicBezTo>
+                    <a:pt x="9575" y="7620"/>
+                    <a:pt x="10985" y="6791"/>
+                    <a:pt x="12427" y="7039"/>
+                  </a:cubicBezTo>
+                  <a:cubicBezTo>
+                    <a:pt x="13869" y="7286"/>
+                    <a:pt x="14922" y="8537"/>
+                    <a:pt x="14920" y="10000"/>
+                  </a:cubicBezTo>
+                  <a:cubicBezTo>
+                    <a:pt x="14920" y="12000"/>
+                    <a:pt x="11920" y="13000"/>
+                    <a:pt x="11920" y="13000"/>
+                  </a:cubicBezTo>
+                </a:path>
+                <a:path w="24000" h="24000" fill="none">
+                  <a:moveTo>
+                    <a:pt x="12000" y="17000"/>
                   </a:moveTo>
                   <a:lnTo>
-                    <a:pt x="7000" y="7000"/>
-                  </a:lnTo>
-                  <a:cubicBezTo>
-                    <a:pt x="7000" y="4239"/>
-                    <a:pt x="9239" y="2000"/>
-                    <a:pt x="12000" y="2000"/>
-                  </a:cubicBezTo>
-                  <a:cubicBezTo>
-                    <a:pt x="14761" y="2000"/>
-                    <a:pt x="17000" y="4239"/>
-                    <a:pt x="17000" y="7000"/>
-                  </a:cubicBezTo>
-                  <a:lnTo>
-                    <a:pt x="17000" y="11000"/>
+                    <a:pt x="12010" y="17000"/>
                   </a:lnTo>
                 </a:path>
               </a:pathLst>
@@ -9470,7 +9116,7 @@
                   </a:solidFill>
                   <a:latin typeface="Play"/>
                 </a:rPr>
-                <a:t>ИИ-помощник позволит закрыть их без участия специалиста.</a:t>
+                <a:t>Рутинные вопросы отвлекают специалистов от сложных задач.</a:t>
               </a:r>
             </a:p>
           </p:txBody>
@@ -9496,14 +9142,14 @@
       <p:grpSpPr/>
       <p:sp>
         <p:nvSpPr>
-          <p:cNvPr id="1032" name="Google Shape;1032;p65"/>
+          <p:cNvPr id="1119" name="Google Shape;1119;p69"/>
           <p:cNvSpPr/>
           <p:nvPr/>
         </p:nvSpPr>
         <p:spPr>
           <a:xfrm>
             <a:off x="285748" y="286047"/>
-            <a:ext cx="8572456" cy="3938075"/>
+            <a:ext cx="8572456" cy="4176169"/>
           </a:xfrm>
           <a:prstGeom prst="rect">
             <a:avLst/>
@@ -9537,14 +9183,14 @@
       </p:sp>
       <p:sp>
         <p:nvSpPr>
-          <p:cNvPr id="1033" name="Google Shape;1033;p65"/>
+          <p:cNvPr id="1120" name="Google Shape;1120;p69"/>
           <p:cNvSpPr/>
           <p:nvPr/>
         </p:nvSpPr>
         <p:spPr>
           <a:xfrm>
             <a:off x="285748" y="1209852"/>
-            <a:ext cx="8572456" cy="3014270"/>
+            <a:ext cx="8572456" cy="3252364"/>
           </a:xfrm>
           <a:prstGeom prst="rect">
             <a:avLst/>
@@ -9578,7 +9224,138 @@
       </p:sp>
       <p:sp>
         <p:nvSpPr>
-          <p:cNvPr id="1050" name="BrandDeck Text 1050"/>
+          <p:cNvPr id="1121" name="Google Shape;1121;p69"/>
+          <p:cNvSpPr/>
+          <p:nvPr/>
+        </p:nvSpPr>
+        <p:spPr>
+          <a:xfrm>
+            <a:off x="285748" y="1209852"/>
+            <a:ext cx="8572456" cy="3252364"/>
+          </a:xfrm>
+          <a:prstGeom prst="rect">
+            <a:avLst/>
+          </a:prstGeom>
+          <a:noFill/>
+          <a:ln>
+            <a:noFill/>
+          </a:ln>
+        </p:spPr>
+        <p:txBody>
+          <a:bodyPr anchorCtr="0" anchor="ctr" bIns="91425" lIns="91425" spcFirstLastPara="1" rIns="91425" wrap="square" tIns="91425">
+            <a:noAutofit/>
+          </a:bodyPr>
+          <a:lstStyle/>
+          <a:p>
+            <a:pPr indent="0" lvl="0" marL="0" rtl="0" algn="l">
+              <a:spcBef>
+                <a:spcPts val="0"/>
+              </a:spcBef>
+              <a:spcAft>
+                <a:spcPts val="0"/>
+              </a:spcAft>
+              <a:buNone/>
+            </a:pPr>
+            <a:r>
+              <a:t/>
+            </a:r>
+            <a:endParaRPr/>
+          </a:p>
+        </p:txBody>
+      </p:sp>
+      <p:sp>
+        <p:nvSpPr>
+          <p:cNvPr id="1123" name="Google Shape;1123;p69"/>
+          <p:cNvSpPr/>
+          <p:nvPr/>
+        </p:nvSpPr>
+        <p:spPr>
+          <a:xfrm>
+            <a:off x="500061" y="1424137"/>
+            <a:ext cx="2919397" cy="2895223"/>
+          </a:xfrm>
+          <a:prstGeom prst="rect">
+            <a:avLst/>
+          </a:prstGeom>
+          <a:noFill/>
+          <a:ln>
+            <a:noFill/>
+          </a:ln>
+        </p:spPr>
+        <p:txBody>
+          <a:bodyPr anchorCtr="0" anchor="t" bIns="0" lIns="0" spcFirstLastPara="1" rIns="0" wrap="square" tIns="0">
+            <a:normAutofit/>
+          </a:bodyPr>
+          <a:lstStyle/>
+          <a:p>
+            <a:pPr indent="0" lvl="0" marL="0" marR="0" rtl="0" algn="l">
+              <a:lnSpc>
+                <a:spcPct val="139988"/>
+              </a:lnSpc>
+              <a:spcBef>
+                <a:spcPts val="0"/>
+              </a:spcBef>
+              <a:spcAft>
+                <a:spcPts val="0"/>
+              </a:spcAft>
+              <a:buNone/>
+            </a:pPr>
+            <a:endParaRPr b="0" i="0" sz="1688" u="none" cap="none" strike="noStrike">
+              <a:solidFill>
+                <a:schemeClr val="dk1"/>
+              </a:solidFill>
+              <a:latin typeface="Calibri"/>
+              <a:ea typeface="Calibri"/>
+              <a:cs typeface="Calibri"/>
+              <a:sym typeface="Calibri"/>
+            </a:endParaRPr>
+          </a:p>
+        </p:txBody>
+      </p:sp>
+      <p:sp>
+        <p:nvSpPr>
+          <p:cNvPr id="1124" name="Google Shape;1124;p69"/>
+          <p:cNvSpPr/>
+          <p:nvPr/>
+        </p:nvSpPr>
+        <p:spPr>
+          <a:xfrm>
+            <a:off x="3657581" y="1209852"/>
+            <a:ext cx="5200623" cy="3252364"/>
+          </a:xfrm>
+          <a:prstGeom prst="rect">
+            <a:avLst/>
+          </a:prstGeom>
+          <a:noFill/>
+          <a:ln>
+            <a:noFill/>
+          </a:ln>
+        </p:spPr>
+        <p:txBody>
+          <a:bodyPr anchorCtr="0" anchor="ctr" bIns="91425" lIns="91425" spcFirstLastPara="1" rIns="91425" wrap="square" tIns="91425">
+            <a:noAutofit/>
+          </a:bodyPr>
+          <a:lstStyle/>
+          <a:p>
+            <a:pPr indent="0" lvl="0" marL="0" rtl="0" algn="l">
+              <a:spcBef>
+                <a:spcPts val="0"/>
+              </a:spcBef>
+              <a:spcAft>
+                <a:spcPts val="0"/>
+              </a:spcAft>
+              <a:buNone/>
+            </a:pPr>
+            <a:r>
+              <a:t/>
+            </a:r>
+            <a:endParaRPr/>
+          </a:p>
+        </p:txBody>
+      </p:sp>
+      <p:sp>
+        <p:nvSpPr>
+          <p:cNvPr id="1132" name="BrandDeck Text 1132"/>
           <p:cNvSpPr txBox="1"/>
           <p:nvPr>
             <p:ph type="title"/>
@@ -9611,7 +9388,7 @@
                 <a:spcPts val="0"/>
               </a:spcBef>
               <a:spcAft>
-                <a:spcPts val="359"/>
+                <a:spcPts val="270"/>
               </a:spcAft>
               <a:buClr>
                 <a:schemeClr val="dk1"/>
@@ -9621,647 +9398,127 @@
               <a:buNone/>
             </a:pPr>
             <a:r>
-              <a:rPr sz="2400"/>
-              <a:t>Затраты времени и ресурсов на рутину</a:t>
+              <a:rPr sz="1800"/>
+              <a:t>Влияет на всех сотрудников и специалистов поддержки</a:t>
             </a:r>
             <a:endParaRPr/>
           </a:p>
         </p:txBody>
       </p:sp>
-      <p:grpSp>
-        <p:nvGrpSpPr>
-          <p:cNvPr id="2" name="BrandDeck Diagram icon_grid" descr="icon_grid: Поиск инструкции занимает до 30 минут.; Треть обращений — повторяющиеся вопросы.; Сотрудники тратят время на рутинные задачи."/>
-          <p:cNvGrpSpPr/>
+      <p:sp>
+        <p:nvSpPr>
+          <p:cNvPr id="1133" name="BrandDeck Body"/>
+          <p:cNvSpPr txBox="1"/>
           <p:nvPr/>
-        </p:nvGrpSpPr>
-        <p:grpSpPr>
+        </p:nvSpPr>
+        <p:spPr>
           <a:xfrm>
-            <a:off x="585216" y="1144312"/>
-            <a:ext cx="5129783" cy="3583136"/>
-            <a:chOff x="585216" y="1144312"/>
-            <a:chExt cx="5129783" cy="3583136"/>
+            <a:off x="500060" y="1424137"/>
+            <a:ext cx="2558400" cy="2895223"/>
           </a:xfrm>
-        </p:grpSpPr>
-        <p:sp>
-          <p:nvSpPr>
-            <p:cNvPr id="1051" name="BrandDeck Diagram Card 1"/>
-            <p:cNvSpPr/>
-            <p:nvPr/>
-          </p:nvSpPr>
-          <p:spPr>
-            <a:xfrm>
-              <a:off x="585216" y="1144312"/>
-              <a:ext cx="2510027" cy="1736704"/>
-            </a:xfrm>
-            <a:prstGeom prst="roundRect">
-              <a:avLst>
-                <a:gd name="adj" fmla="val 8000"/>
-              </a:avLst>
-            </a:prstGeom>
-            <a:solidFill>
-              <a:srgbClr val="E8F3FF"/>
-            </a:solidFill>
-            <a:ln>
-              <a:noFill/>
-            </a:ln>
-          </p:spPr>
-          <p:txBody>
-            <a:bodyPr rtlCol="0" anchor="ctr"/>
-            <a:lstStyle/>
-            <a:p>
-              <a:pPr algn="ctr"/>
-            </a:p>
-          </p:txBody>
-        </p:sp>
-        <p:sp>
-          <p:nvSpPr>
-            <p:cNvPr id="1052" name="BrandDeck Diagram Icon 1 Badge"/>
-            <p:cNvSpPr/>
-            <p:nvPr/>
-          </p:nvSpPr>
-          <p:spPr>
-            <a:xfrm>
-              <a:off x="760917" y="1320013"/>
-              <a:ext cx="486277" cy="486277"/>
-            </a:xfrm>
-            <a:prstGeom prst="ellipse">
-              <a:avLst/>
-            </a:prstGeom>
-            <a:solidFill>
-              <a:srgbClr val="006DEB"/>
-            </a:solidFill>
-            <a:ln>
-              <a:noFill/>
-            </a:ln>
-          </p:spPr>
-          <p:txBody>
-            <a:bodyPr rtlCol="0" anchor="ctr"/>
-            <a:lstStyle/>
-            <a:p>
-              <a:pPr algn="ctr"/>
-            </a:p>
-          </p:txBody>
-        </p:sp>
-        <p:sp>
-          <p:nvSpPr>
-            <p:cNvPr id="1053" name="BrandDeck Icon search"/>
-            <p:cNvSpPr/>
-            <p:nvPr/>
-          </p:nvSpPr>
-          <p:spPr>
-            <a:xfrm>
-              <a:off x="867898" y="1426994"/>
-              <a:ext cx="272315" cy="272315"/>
-            </a:xfrm>
-            <a:custGeom>
-              <a:avLst/>
-              <a:gdLst/>
-              <a:ahLst/>
-              <a:cxnLst/>
-              <a:rect l="l" t="t" r="r" b="b"/>
-              <a:pathLst>
-                <a:path w="24000" h="24000" fill="none">
-                  <a:moveTo>
-                    <a:pt x="19000" y="11000"/>
-                  </a:moveTo>
-                  <a:cubicBezTo>
-                    <a:pt x="19000" y="15418"/>
-                    <a:pt x="15418" y="19000"/>
-                    <a:pt x="11000" y="19000"/>
-                  </a:cubicBezTo>
-                  <a:cubicBezTo>
-                    <a:pt x="6582" y="19000"/>
-                    <a:pt x="3000" y="15418"/>
-                    <a:pt x="3000" y="11000"/>
-                  </a:cubicBezTo>
-                  <a:cubicBezTo>
-                    <a:pt x="3000" y="6582"/>
-                    <a:pt x="6582" y="3000"/>
-                    <a:pt x="11000" y="3000"/>
-                  </a:cubicBezTo>
-                  <a:cubicBezTo>
-                    <a:pt x="15418" y="3000"/>
-                    <a:pt x="19000" y="6582"/>
-                    <a:pt x="19000" y="11000"/>
-                  </a:cubicBezTo>
-                  <a:close/>
-                </a:path>
-                <a:path w="24000" h="24000" fill="none">
-                  <a:moveTo>
-                    <a:pt x="21000" y="21000"/>
-                  </a:moveTo>
-                  <a:lnTo>
-                    <a:pt x="16700" y="16700"/>
-                  </a:lnTo>
-                </a:path>
-              </a:pathLst>
-            </a:custGeom>
-            <a:noFill/>
-            <a:ln w="22692" cap="rnd">
-              <a:solidFill>
-                <a:srgbClr val="FFFFFF"/>
-              </a:solidFill>
-              <a:round/>
-            </a:ln>
-          </p:spPr>
-          <p:txBody>
-            <a:bodyPr rtlCol="0" anchor="ctr"/>
-            <a:lstStyle/>
-            <a:p>
-              <a:pPr algn="ctr"/>
-            </a:p>
-          </p:txBody>
-        </p:sp>
-        <p:sp>
-          <p:nvSpPr>
-            <p:cNvPr id="1054" name="BrandDeck Diagram Text 1"/>
-            <p:cNvSpPr txBox="1"/>
-            <p:nvPr/>
-          </p:nvSpPr>
-          <p:spPr>
-            <a:xfrm>
-              <a:off x="708207" y="1929282"/>
-              <a:ext cx="2264045" cy="863882"/>
-            </a:xfrm>
-            <a:prstGeom prst="rect">
-              <a:avLst/>
-            </a:prstGeom>
-            <a:noFill/>
-          </p:spPr>
-          <p:txBody>
-            <a:bodyPr wrap="square" anchor="t" lIns="36576" tIns="18288" rIns="36576" bIns="18288">
-              <a:noAutofit/>
-            </a:bodyPr>
-            <a:lstStyle/>
-            <a:p>
-              <a:pPr algn="l">
-                <a:lnSpc>
-                  <a:spcPct val="110000"/>
-                </a:lnSpc>
-              </a:pPr>
-              <a:r>
-                <a:rPr sz="1600" b="0">
-                  <a:solidFill>
-                    <a:srgbClr val="000000"/>
-                  </a:solidFill>
-                  <a:latin typeface="Play"/>
-                </a:rPr>
-                <a:t>Поиск инструкции занимает до 30 минут.</a:t>
-              </a:r>
-            </a:p>
-          </p:txBody>
-        </p:sp>
-        <p:sp>
-          <p:nvSpPr>
-            <p:cNvPr id="1055" name="BrandDeck Diagram Card 2"/>
-            <p:cNvSpPr/>
-            <p:nvPr/>
-          </p:nvSpPr>
-          <p:spPr>
-            <a:xfrm>
-              <a:off x="3204972" y="1144312"/>
-              <a:ext cx="2510027" cy="1736704"/>
-            </a:xfrm>
-            <a:prstGeom prst="roundRect">
-              <a:avLst>
-                <a:gd name="adj" fmla="val 8000"/>
-              </a:avLst>
-            </a:prstGeom>
-            <a:solidFill>
-              <a:srgbClr val="E8F3FF"/>
-            </a:solidFill>
-            <a:ln>
-              <a:noFill/>
-            </a:ln>
-          </p:spPr>
-          <p:txBody>
-            <a:bodyPr rtlCol="0" anchor="ctr"/>
-            <a:lstStyle/>
-            <a:p>
-              <a:pPr algn="ctr"/>
-            </a:p>
-          </p:txBody>
-        </p:sp>
-        <p:sp>
-          <p:nvSpPr>
-            <p:cNvPr id="1056" name="BrandDeck Diagram Icon 2 Badge"/>
-            <p:cNvSpPr/>
-            <p:nvPr/>
-          </p:nvSpPr>
-          <p:spPr>
-            <a:xfrm>
-              <a:off x="3380673" y="1320013"/>
-              <a:ext cx="486277" cy="486277"/>
-            </a:xfrm>
-            <a:prstGeom prst="ellipse">
-              <a:avLst/>
-            </a:prstGeom>
-            <a:solidFill>
-              <a:srgbClr val="006DEB"/>
-            </a:solidFill>
-            <a:ln>
-              <a:noFill/>
-            </a:ln>
-          </p:spPr>
-          <p:txBody>
-            <a:bodyPr rtlCol="0" anchor="ctr"/>
-            <a:lstStyle/>
-            <a:p>
-              <a:pPr algn="ctr"/>
-            </a:p>
-          </p:txBody>
-        </p:sp>
-        <p:sp>
-          <p:nvSpPr>
-            <p:cNvPr id="1057" name="BrandDeck Icon headset"/>
-            <p:cNvSpPr/>
-            <p:nvPr/>
-          </p:nvSpPr>
-          <p:spPr>
-            <a:xfrm>
-              <a:off x="3487654" y="1426994"/>
-              <a:ext cx="272315" cy="272315"/>
-            </a:xfrm>
-            <a:custGeom>
-              <a:avLst/>
-              <a:gdLst/>
-              <a:ahLst/>
-              <a:cxnLst/>
-              <a:rect l="l" t="t" r="r" b="b"/>
-              <a:pathLst>
-                <a:path w="24000" h="24000" fill="none">
-                  <a:moveTo>
-                    <a:pt x="3000" y="11000"/>
-                  </a:moveTo>
-                  <a:lnTo>
-                    <a:pt x="6000" y="11000"/>
-                  </a:lnTo>
-                  <a:cubicBezTo>
-                    <a:pt x="7105" y="11000"/>
-                    <a:pt x="8000" y="11895"/>
-                    <a:pt x="8000" y="13000"/>
-                  </a:cubicBezTo>
-                  <a:lnTo>
-                    <a:pt x="8000" y="16000"/>
-                  </a:lnTo>
-                  <a:cubicBezTo>
-                    <a:pt x="8000" y="17105"/>
-                    <a:pt x="7105" y="18000"/>
-                    <a:pt x="6000" y="18000"/>
-                  </a:cubicBezTo>
-                  <a:lnTo>
-                    <a:pt x="5000" y="18000"/>
-                  </a:lnTo>
-                  <a:cubicBezTo>
-                    <a:pt x="3895" y="18000"/>
-                    <a:pt x="3000" y="17105"/>
-                    <a:pt x="3000" y="16000"/>
-                  </a:cubicBezTo>
-                  <a:lnTo>
-                    <a:pt x="3000" y="11000"/>
-                  </a:lnTo>
-                  <a:close/>
-                  <a:moveTo>
-                    <a:pt x="3000" y="11000"/>
-                  </a:moveTo>
-                  <a:cubicBezTo>
-                    <a:pt x="3000" y="6029"/>
-                    <a:pt x="7029" y="2000"/>
-                    <a:pt x="12000" y="2000"/>
-                  </a:cubicBezTo>
-                  <a:cubicBezTo>
-                    <a:pt x="16971" y="2000"/>
-                    <a:pt x="21000" y="6029"/>
-                    <a:pt x="21000" y="11000"/>
-                  </a:cubicBezTo>
-                  <a:moveTo>
-                    <a:pt x="21000" y="11000"/>
-                  </a:moveTo>
-                  <a:lnTo>
-                    <a:pt x="21000" y="16000"/>
-                  </a:lnTo>
-                  <a:cubicBezTo>
-                    <a:pt x="21000" y="17105"/>
-                    <a:pt x="20105" y="18000"/>
-                    <a:pt x="19000" y="18000"/>
-                  </a:cubicBezTo>
-                  <a:lnTo>
-                    <a:pt x="18000" y="18000"/>
-                  </a:lnTo>
-                  <a:cubicBezTo>
-                    <a:pt x="16895" y="18000"/>
-                    <a:pt x="16000" y="17105"/>
-                    <a:pt x="16000" y="16000"/>
-                  </a:cubicBezTo>
-                  <a:lnTo>
-                    <a:pt x="16000" y="13000"/>
-                  </a:lnTo>
-                  <a:cubicBezTo>
-                    <a:pt x="16000" y="11895"/>
-                    <a:pt x="16895" y="11000"/>
-                    <a:pt x="18000" y="11000"/>
-                  </a:cubicBezTo>
-                  <a:lnTo>
-                    <a:pt x="21000" y="11000"/>
-                  </a:lnTo>
-                  <a:close/>
-                </a:path>
-                <a:path w="24000" h="24000" fill="none">
-                  <a:moveTo>
-                    <a:pt x="21000" y="16000"/>
-                  </a:moveTo>
-                  <a:lnTo>
-                    <a:pt x="21000" y="18000"/>
-                  </a:lnTo>
-                  <a:cubicBezTo>
-                    <a:pt x="21000" y="20209"/>
-                    <a:pt x="19209" y="22000"/>
-                    <a:pt x="17000" y="22000"/>
-                  </a:cubicBezTo>
-                  <a:lnTo>
-                    <a:pt x="12000" y="22000"/>
-                  </a:lnTo>
-                </a:path>
-              </a:pathLst>
-            </a:custGeom>
-            <a:noFill/>
-            <a:ln w="22692" cap="rnd">
-              <a:solidFill>
-                <a:srgbClr val="FFFFFF"/>
-              </a:solidFill>
-              <a:round/>
-            </a:ln>
-          </p:spPr>
-          <p:txBody>
-            <a:bodyPr rtlCol="0" anchor="ctr"/>
-            <a:lstStyle/>
-            <a:p>
-              <a:pPr algn="ctr"/>
-            </a:p>
-          </p:txBody>
-        </p:sp>
-        <p:sp>
-          <p:nvSpPr>
-            <p:cNvPr id="1058" name="BrandDeck Diagram Text 2"/>
-            <p:cNvSpPr txBox="1"/>
-            <p:nvPr/>
-          </p:nvSpPr>
-          <p:spPr>
-            <a:xfrm>
-              <a:off x="3327963" y="1929282"/>
-              <a:ext cx="2264045" cy="863882"/>
-            </a:xfrm>
-            <a:prstGeom prst="rect">
-              <a:avLst/>
-            </a:prstGeom>
-            <a:noFill/>
-          </p:spPr>
-          <p:txBody>
-            <a:bodyPr wrap="square" anchor="t" lIns="36576" tIns="18288" rIns="36576" bIns="18288">
-              <a:noAutofit/>
-            </a:bodyPr>
-            <a:lstStyle/>
-            <a:p>
-              <a:pPr algn="l">
-                <a:lnSpc>
-                  <a:spcPct val="110000"/>
-                </a:lnSpc>
-              </a:pPr>
-              <a:r>
-                <a:rPr sz="1600" b="1">
-                  <a:solidFill>
-                    <a:srgbClr val="000000"/>
-                  </a:solidFill>
-                  <a:latin typeface="Play"/>
-                </a:rPr>
-                <a:t>Треть обращений —</a:t>
-              </a:r>
-              <a:r>
-                <a:rPr sz="1600" b="0">
-                  <a:solidFill>
-                    <a:srgbClr val="000000"/>
-                  </a:solidFill>
-                  <a:latin typeface="Play"/>
-                </a:rPr>
-                <a:t> повторяющиеся вопросы.</a:t>
-              </a:r>
-            </a:p>
-          </p:txBody>
-        </p:sp>
-        <p:sp>
-          <p:nvSpPr>
-            <p:cNvPr id="1059" name="BrandDeck Diagram Card 3"/>
-            <p:cNvSpPr/>
-            <p:nvPr/>
-          </p:nvSpPr>
-          <p:spPr>
-            <a:xfrm>
-              <a:off x="585216" y="2990744"/>
-              <a:ext cx="2510027" cy="1736704"/>
-            </a:xfrm>
-            <a:prstGeom prst="roundRect">
-              <a:avLst>
-                <a:gd name="adj" fmla="val 8000"/>
-              </a:avLst>
-            </a:prstGeom>
-            <a:solidFill>
-              <a:srgbClr val="E8F3FF"/>
-            </a:solidFill>
-            <a:ln>
-              <a:noFill/>
-            </a:ln>
-          </p:spPr>
-          <p:txBody>
-            <a:bodyPr rtlCol="0" anchor="ctr"/>
-            <a:lstStyle/>
-            <a:p>
-              <a:pPr algn="ctr"/>
-            </a:p>
-          </p:txBody>
-        </p:sp>
-        <p:sp>
-          <p:nvSpPr>
-            <p:cNvPr id="1060" name="BrandDeck Diagram Icon 3 Badge"/>
-            <p:cNvSpPr/>
-            <p:nvPr/>
-          </p:nvSpPr>
-          <p:spPr>
-            <a:xfrm>
-              <a:off x="760917" y="3166445"/>
-              <a:ext cx="486277" cy="486277"/>
-            </a:xfrm>
-            <a:prstGeom prst="ellipse">
-              <a:avLst/>
-            </a:prstGeom>
-            <a:solidFill>
-              <a:srgbClr val="006DEB"/>
-            </a:solidFill>
-            <a:ln>
-              <a:noFill/>
-            </a:ln>
-          </p:spPr>
-          <p:txBody>
-            <a:bodyPr rtlCol="0" anchor="ctr"/>
-            <a:lstStyle/>
-            <a:p>
-              <a:pPr algn="ctr"/>
-            </a:p>
-          </p:txBody>
-        </p:sp>
-        <p:sp>
-          <p:nvSpPr>
-            <p:cNvPr id="1061" name="BrandDeck Icon users"/>
-            <p:cNvSpPr/>
-            <p:nvPr/>
-          </p:nvSpPr>
-          <p:spPr>
-            <a:xfrm>
-              <a:off x="867898" y="3273426"/>
-              <a:ext cx="272315" cy="272315"/>
-            </a:xfrm>
-            <a:custGeom>
-              <a:avLst/>
-              <a:gdLst/>
-              <a:ahLst/>
-              <a:cxnLst/>
-              <a:rect l="l" t="t" r="r" b="b"/>
-              <a:pathLst>
-                <a:path w="24000" h="24000" fill="none">
-                  <a:moveTo>
-                    <a:pt x="16000" y="21000"/>
-                  </a:moveTo>
-                  <a:lnTo>
-                    <a:pt x="16000" y="19000"/>
-                  </a:lnTo>
-                  <a:cubicBezTo>
-                    <a:pt x="16000" y="16791"/>
-                    <a:pt x="14209" y="15000"/>
-                    <a:pt x="12000" y="15000"/>
-                  </a:cubicBezTo>
-                  <a:lnTo>
-                    <a:pt x="6000" y="15000"/>
-                  </a:lnTo>
-                  <a:cubicBezTo>
-                    <a:pt x="3791" y="15000"/>
-                    <a:pt x="2000" y="16791"/>
-                    <a:pt x="2000" y="19000"/>
-                  </a:cubicBezTo>
-                  <a:lnTo>
-                    <a:pt x="2000" y="21000"/>
-                  </a:lnTo>
-                </a:path>
-                <a:path w="24000" h="24000" fill="none">
-                  <a:moveTo>
-                    <a:pt x="13000" y="7000"/>
-                  </a:moveTo>
-                  <a:cubicBezTo>
-                    <a:pt x="13000" y="9209"/>
-                    <a:pt x="11209" y="11000"/>
-                    <a:pt x="9000" y="11000"/>
-                  </a:cubicBezTo>
-                  <a:cubicBezTo>
-                    <a:pt x="6791" y="11000"/>
-                    <a:pt x="5000" y="9209"/>
-                    <a:pt x="5000" y="7000"/>
-                  </a:cubicBezTo>
-                  <a:cubicBezTo>
-                    <a:pt x="5000" y="4791"/>
-                    <a:pt x="6791" y="3000"/>
-                    <a:pt x="9000" y="3000"/>
-                  </a:cubicBezTo>
-                  <a:cubicBezTo>
-                    <a:pt x="11209" y="3000"/>
-                    <a:pt x="13000" y="4791"/>
-                    <a:pt x="13000" y="7000"/>
-                  </a:cubicBezTo>
-                  <a:close/>
-                </a:path>
-                <a:path w="24000" h="24000" fill="none">
-                  <a:moveTo>
-                    <a:pt x="22000" y="21000"/>
-                  </a:moveTo>
-                  <a:lnTo>
-                    <a:pt x="22000" y="19000"/>
-                  </a:lnTo>
-                  <a:cubicBezTo>
-                    <a:pt x="21999" y="17177"/>
-                    <a:pt x="20765" y="15586"/>
-                    <a:pt x="19000" y="15130"/>
-                  </a:cubicBezTo>
-                </a:path>
-                <a:path w="24000" h="24000" fill="none">
-                  <a:moveTo>
-                    <a:pt x="16000" y="3130"/>
-                  </a:moveTo>
-                  <a:cubicBezTo>
-                    <a:pt x="17770" y="3583"/>
-                    <a:pt x="19008" y="5178"/>
-                    <a:pt x="19008" y="7005"/>
-                  </a:cubicBezTo>
-                  <a:cubicBezTo>
-                    <a:pt x="19008" y="8832"/>
-                    <a:pt x="17770" y="10427"/>
-                    <a:pt x="16000" y="10880"/>
-                  </a:cubicBezTo>
-                </a:path>
-              </a:pathLst>
-            </a:custGeom>
-            <a:noFill/>
-            <a:ln w="22692" cap="rnd">
-              <a:solidFill>
-                <a:srgbClr val="FFFFFF"/>
-              </a:solidFill>
-              <a:round/>
-            </a:ln>
-          </p:spPr>
-          <p:txBody>
-            <a:bodyPr rtlCol="0" anchor="ctr"/>
-            <a:lstStyle/>
-            <a:p>
-              <a:pPr algn="ctr"/>
-            </a:p>
-          </p:txBody>
-        </p:sp>
-        <p:sp>
-          <p:nvSpPr>
-            <p:cNvPr id="1062" name="BrandDeck Diagram Text 3"/>
-            <p:cNvSpPr txBox="1"/>
-            <p:nvPr/>
-          </p:nvSpPr>
-          <p:spPr>
-            <a:xfrm>
-              <a:off x="708207" y="3775714"/>
-              <a:ext cx="2264045" cy="863882"/>
-            </a:xfrm>
-            <a:prstGeom prst="rect">
-              <a:avLst/>
-            </a:prstGeom>
-            <a:noFill/>
-          </p:spPr>
-          <p:txBody>
-            <a:bodyPr wrap="square" anchor="t" lIns="36576" tIns="18288" rIns="36576" bIns="18288">
-              <a:noAutofit/>
-            </a:bodyPr>
-            <a:lstStyle/>
-            <a:p>
-              <a:pPr algn="l">
-                <a:lnSpc>
-                  <a:spcPct val="110000"/>
-                </a:lnSpc>
-              </a:pPr>
-              <a:r>
-                <a:rPr sz="1600" b="0">
-                  <a:solidFill>
-                    <a:srgbClr val="000000"/>
-                  </a:solidFill>
-                  <a:latin typeface="Play"/>
-                </a:rPr>
-                <a:t>Сотрудники тратят время на рутинные задачи.</a:t>
-              </a:r>
-            </a:p>
-          </p:txBody>
-        </p:sp>
-      </p:grpSp>
+          <a:prstGeom prst="rect">
+            <a:avLst/>
+          </a:prstGeom>
+          <a:noFill/>
+        </p:spPr>
+        <p:txBody>
+          <a:bodyPr wrap="square" anchor="t" lIns="36576" rIns="36576" tIns="18288" bIns="18288">
+            <a:normAutofit/>
+          </a:bodyPr>
+          <a:lstStyle/>
+          <a:p>
+            <a:pPr algn="l">
+              <a:lnSpc>
+                <a:spcPct val="115000"/>
+              </a:lnSpc>
+              <a:spcBef>
+                <a:spcPts val="0"/>
+              </a:spcBef>
+              <a:spcAft>
+                <a:spcPts val="253"/>
+              </a:spcAft>
+            </a:pPr>
+            <a:r>
+              <a:rPr sz="1689">
+                <a:solidFill>
+                  <a:srgbClr val="000000"/>
+                </a:solidFill>
+                <a:latin typeface="Play"/>
+              </a:rPr>
+              <a:t>• Сокращает время поиска инструкций для сотрудников.</a:t>
+            </a:r>
+          </a:p>
+          <a:p>
+            <a:pPr algn="l">
+              <a:lnSpc>
+                <a:spcPct val="115000"/>
+              </a:lnSpc>
+              <a:spcBef>
+                <a:spcPts val="0"/>
+              </a:spcBef>
+              <a:spcAft>
+                <a:spcPts val="253"/>
+              </a:spcAft>
+            </a:pPr>
+            <a:r>
+              <a:rPr sz="1689">
+                <a:solidFill>
+                  <a:srgbClr val="000000"/>
+                </a:solidFill>
+                <a:latin typeface="Play"/>
+              </a:rPr>
+              <a:t>• Снижает нагрузку на специалистов поддержки.</a:t>
+            </a:r>
+          </a:p>
+          <a:p>
+            <a:pPr algn="l">
+              <a:lnSpc>
+                <a:spcPct val="115000"/>
+              </a:lnSpc>
+              <a:spcBef>
+                <a:spcPts val="0"/>
+              </a:spcBef>
+              <a:spcAft>
+                <a:spcPts val="253"/>
+              </a:spcAft>
+            </a:pPr>
+            <a:r>
+              <a:rPr sz="1689">
+                <a:solidFill>
+                  <a:srgbClr val="000000"/>
+                </a:solidFill>
+                <a:latin typeface="Play"/>
+              </a:rPr>
+              <a:t>• Обеспечивает быстрый доступ к актуальным регламентам.</a:t>
+            </a:r>
+          </a:p>
+        </p:txBody>
+      </p:sp>
+      <p:pic>
+        <p:nvPicPr>
+          <p:cNvPr id="1134" name="BrandDeck Image" descr="сотрудник специалист поддержки"/>
+          <p:cNvPicPr>
+            <a:picLocks noChangeAspect="1"/>
+          </p:cNvPicPr>
+          <p:nvPr/>
+        </p:nvPicPr>
+        <p:blipFill>
+          <a:blip r:embed="rId7"/>
+          <a:srcRect l="18013" r="18013"/>
+          <a:stretch>
+            <a:fillRect/>
+          </a:stretch>
+        </p:blipFill>
+        <p:spPr>
+          <a:xfrm>
+            <a:off x="3314493" y="1424137"/>
+            <a:ext cx="3291060" cy="2895223"/>
+          </a:xfrm>
+          <a:prstGeom prst="rect">
+            <a:avLst/>
+          </a:prstGeom>
+        </p:spPr>
+      </p:pic>
     </p:spTree>
   </p:cSld>
   <p:clrMapOvr>
@@ -10449,7 +9706,7 @@
             </a:pPr>
             <a:r>
               <a:rPr sz="1800"/>
-              <a:t>ИИ-помощник отвечает на вопросы по регламентам</a:t>
+              <a:t>ИИ отвечает на вопросы и дает ссылку на документ</a:t>
             </a:r>
             <a:endParaRPr/>
           </a:p>
@@ -10457,7 +9714,7 @@
       </p:sp>
       <p:grpSp>
         <p:nvGrpSpPr>
-          <p:cNvPr id="2" name="BrandDeck Diagram icon_grid" descr="icon_grid: ИИ-помощник отвечает на вопросы по регламентам и инструкциям.; Система автоматически формирует ответ и ссылку на документ-источник.; При отсутствии подтверждённого ответа вопрос передаётся специалисту."/>
+          <p:cNvPr id="2" name="BrandDeck Diagram icon_grid" descr="icon_grid: ИИ отвечает на вопросы по регламентам и инструкциям.; Система автоматически добавляет ссылку на документ-источник.; Ответ формируется на основе внутренних знаний компании."/>
           <p:cNvGrpSpPr/>
           <p:nvPr/>
         </p:nvGrpSpPr>
@@ -10666,13 +9923,13 @@
                 </a:lnSpc>
               </a:pPr>
               <a:r>
-                <a:rPr sz="1320" b="0">
+                <a:rPr sz="1410" b="0">
                   <a:solidFill>
                     <a:srgbClr val="000000"/>
                   </a:solidFill>
                   <a:latin typeface="Play"/>
                 </a:rPr>
-                <a:t>ИИ-помощник отвечает на вопросы по регламентам и инструкциям.</a:t>
+                <a:t>ИИ отвечает на вопросы по регламентам и инструкциям.</a:t>
               </a:r>
             </a:p>
           </p:txBody>
@@ -10863,13 +10120,13 @@
                 </a:lnSpc>
               </a:pPr>
               <a:r>
-                <a:rPr sz="1320" b="0">
+                <a:rPr sz="1410" b="0">
                   <a:solidFill>
                     <a:srgbClr val="000000"/>
                   </a:solidFill>
                   <a:latin typeface="Play"/>
                 </a:rPr>
-                <a:t>Система автоматически формирует ответ и ссылку на документ-источник.</a:t>
+                <a:t>Система автоматически добавляет ссылку на документ-источник.</a:t>
               </a:r>
             </a:p>
           </p:txBody>
@@ -10936,7 +10193,7 @@
         </p:sp>
         <p:sp>
           <p:nvSpPr>
-            <p:cNvPr id="696" name="BrandDeck Icon circle-check"/>
+            <p:cNvPr id="696" name="BrandDeck Icon book-open"/>
             <p:cNvSpPr/>
             <p:nvPr/>
           </p:nvSpPr>
@@ -10954,40 +10211,72 @@
               <a:pathLst>
                 <a:path w="24000" h="24000" fill="none">
                   <a:moveTo>
-                    <a:pt x="22000" y="12000"/>
+                    <a:pt x="12000" y="7000"/>
                   </a:moveTo>
-                  <a:cubicBezTo>
-                    <a:pt x="22000" y="17523"/>
-                    <a:pt x="17523" y="22000"/>
-                    <a:pt x="12000" y="22000"/>
-                  </a:cubicBezTo>
-                  <a:cubicBezTo>
-                    <a:pt x="6477" y="22000"/>
-                    <a:pt x="2000" y="17523"/>
-                    <a:pt x="2000" y="12000"/>
-                  </a:cubicBezTo>
-                  <a:cubicBezTo>
-                    <a:pt x="2000" y="6477"/>
-                    <a:pt x="6477" y="2000"/>
-                    <a:pt x="12000" y="2000"/>
-                  </a:cubicBezTo>
-                  <a:cubicBezTo>
-                    <a:pt x="17523" y="2000"/>
-                    <a:pt x="22000" y="6477"/>
-                    <a:pt x="22000" y="12000"/>
-                  </a:cubicBezTo>
-                  <a:close/>
+                  <a:lnTo>
+                    <a:pt x="12000" y="21000"/>
+                  </a:lnTo>
                 </a:path>
                 <a:path w="24000" h="24000" fill="none">
                   <a:moveTo>
-                    <a:pt x="9000" y="12000"/>
+                    <a:pt x="3000" y="18000"/>
                   </a:moveTo>
+                  <a:cubicBezTo>
+                    <a:pt x="2448" y="18000"/>
+                    <a:pt x="2000" y="17552"/>
+                    <a:pt x="2000" y="17000"/>
+                  </a:cubicBezTo>
                   <a:lnTo>
-                    <a:pt x="11000" y="14000"/>
+                    <a:pt x="2000" y="4000"/>
                   </a:lnTo>
+                  <a:cubicBezTo>
+                    <a:pt x="2000" y="3448"/>
+                    <a:pt x="2448" y="3000"/>
+                    <a:pt x="3000" y="3000"/>
+                  </a:cubicBezTo>
                   <a:lnTo>
-                    <a:pt x="15000" y="10000"/>
+                    <a:pt x="8000" y="3000"/>
                   </a:lnTo>
+                  <a:cubicBezTo>
+                    <a:pt x="10209" y="3000"/>
+                    <a:pt x="12000" y="4791"/>
+                    <a:pt x="12000" y="7000"/>
+                  </a:cubicBezTo>
+                  <a:cubicBezTo>
+                    <a:pt x="12000" y="4791"/>
+                    <a:pt x="13791" y="3000"/>
+                    <a:pt x="16000" y="3000"/>
+                  </a:cubicBezTo>
+                  <a:lnTo>
+                    <a:pt x="21000" y="3000"/>
+                  </a:lnTo>
+                  <a:cubicBezTo>
+                    <a:pt x="21552" y="3000"/>
+                    <a:pt x="22000" y="3448"/>
+                    <a:pt x="22000" y="4000"/>
+                  </a:cubicBezTo>
+                  <a:lnTo>
+                    <a:pt x="22000" y="17000"/>
+                  </a:lnTo>
+                  <a:cubicBezTo>
+                    <a:pt x="22000" y="17552"/>
+                    <a:pt x="21552" y="18000"/>
+                    <a:pt x="21000" y="18000"/>
+                  </a:cubicBezTo>
+                  <a:lnTo>
+                    <a:pt x="15000" y="18000"/>
+                  </a:lnTo>
+                  <a:cubicBezTo>
+                    <a:pt x="13343" y="18000"/>
+                    <a:pt x="12000" y="19343"/>
+                    <a:pt x="12000" y="21000"/>
+                  </a:cubicBezTo>
+                  <a:cubicBezTo>
+                    <a:pt x="12000" y="19343"/>
+                    <a:pt x="10657" y="18000"/>
+                    <a:pt x="9000" y="18000"/>
+                  </a:cubicBezTo>
+                  <a:close/>
                 </a:path>
               </a:pathLst>
             </a:custGeom>
@@ -11035,13 +10324,13 @@
                 </a:lnSpc>
               </a:pPr>
               <a:r>
-                <a:rPr sz="1320" b="0">
+                <a:rPr sz="1410" b="0">
                   <a:solidFill>
                     <a:srgbClr val="000000"/>
                   </a:solidFill>
                   <a:latin typeface="Play"/>
                 </a:rPr>
-                <a:t>При отсутствии подтверждённого ответа вопрос передаётся специалисту.</a:t>
+                <a:t>Ответ формируется на основе внутренних знаний компании.</a:t>
               </a:r>
             </a:p>
           </p:txBody>
@@ -11067,220 +10356,7 @@
       <p:grpSpPr/>
       <p:sp>
         <p:nvSpPr>
-          <p:cNvPr id="1119" name="Google Shape;1119;p69"/>
-          <p:cNvSpPr/>
-          <p:nvPr/>
-        </p:nvSpPr>
-        <p:spPr>
-          <a:xfrm>
-            <a:off x="285748" y="286047"/>
-            <a:ext cx="8572456" cy="4176169"/>
-          </a:xfrm>
-          <a:prstGeom prst="rect">
-            <a:avLst/>
-          </a:prstGeom>
-          <a:noFill/>
-          <a:ln>
-            <a:noFill/>
-          </a:ln>
-        </p:spPr>
-        <p:txBody>
-          <a:bodyPr anchorCtr="0" anchor="ctr" bIns="91425" lIns="91425" spcFirstLastPara="1" rIns="91425" wrap="square" tIns="91425">
-            <a:noAutofit/>
-          </a:bodyPr>
-          <a:lstStyle/>
-          <a:p>
-            <a:pPr indent="0" lvl="0" marL="0" rtl="0" algn="l">
-              <a:spcBef>
-                <a:spcPts val="0"/>
-              </a:spcBef>
-              <a:spcAft>
-                <a:spcPts val="0"/>
-              </a:spcAft>
-              <a:buNone/>
-            </a:pPr>
-            <a:r>
-              <a:t/>
-            </a:r>
-            <a:endParaRPr/>
-          </a:p>
-        </p:txBody>
-      </p:sp>
-      <p:sp>
-        <p:nvSpPr>
-          <p:cNvPr id="1120" name="Google Shape;1120;p69"/>
-          <p:cNvSpPr/>
-          <p:nvPr/>
-        </p:nvSpPr>
-        <p:spPr>
-          <a:xfrm>
-            <a:off x="285748" y="1209852"/>
-            <a:ext cx="8572456" cy="3252364"/>
-          </a:xfrm>
-          <a:prstGeom prst="rect">
-            <a:avLst/>
-          </a:prstGeom>
-          <a:noFill/>
-          <a:ln>
-            <a:noFill/>
-          </a:ln>
-        </p:spPr>
-        <p:txBody>
-          <a:bodyPr anchorCtr="0" anchor="ctr" bIns="91425" lIns="91425" spcFirstLastPara="1" rIns="91425" wrap="square" tIns="91425">
-            <a:noAutofit/>
-          </a:bodyPr>
-          <a:lstStyle/>
-          <a:p>
-            <a:pPr indent="0" lvl="0" marL="0" rtl="0" algn="l">
-              <a:spcBef>
-                <a:spcPts val="0"/>
-              </a:spcBef>
-              <a:spcAft>
-                <a:spcPts val="0"/>
-              </a:spcAft>
-              <a:buNone/>
-            </a:pPr>
-            <a:r>
-              <a:t/>
-            </a:r>
-            <a:endParaRPr/>
-          </a:p>
-        </p:txBody>
-      </p:sp>
-      <p:sp>
-        <p:nvSpPr>
-          <p:cNvPr id="1121" name="Google Shape;1121;p69"/>
-          <p:cNvSpPr/>
-          <p:nvPr/>
-        </p:nvSpPr>
-        <p:spPr>
-          <a:xfrm>
-            <a:off x="285748" y="1209852"/>
-            <a:ext cx="8572456" cy="3252364"/>
-          </a:xfrm>
-          <a:prstGeom prst="rect">
-            <a:avLst/>
-          </a:prstGeom>
-          <a:noFill/>
-          <a:ln>
-            <a:noFill/>
-          </a:ln>
-        </p:spPr>
-        <p:txBody>
-          <a:bodyPr anchorCtr="0" anchor="ctr" bIns="91425" lIns="91425" spcFirstLastPara="1" rIns="91425" wrap="square" tIns="91425">
-            <a:noAutofit/>
-          </a:bodyPr>
-          <a:lstStyle/>
-          <a:p>
-            <a:pPr indent="0" lvl="0" marL="0" rtl="0" algn="l">
-              <a:spcBef>
-                <a:spcPts val="0"/>
-              </a:spcBef>
-              <a:spcAft>
-                <a:spcPts val="0"/>
-              </a:spcAft>
-              <a:buNone/>
-            </a:pPr>
-            <a:r>
-              <a:t/>
-            </a:r>
-            <a:endParaRPr/>
-          </a:p>
-        </p:txBody>
-      </p:sp>
-      <p:sp>
-        <p:nvSpPr>
-          <p:cNvPr id="1123" name="Google Shape;1123;p69"/>
-          <p:cNvSpPr/>
-          <p:nvPr/>
-        </p:nvSpPr>
-        <p:spPr>
-          <a:xfrm>
-            <a:off x="500061" y="1424137"/>
-            <a:ext cx="2919397" cy="2895223"/>
-          </a:xfrm>
-          <a:prstGeom prst="rect">
-            <a:avLst/>
-          </a:prstGeom>
-          <a:noFill/>
-          <a:ln>
-            <a:noFill/>
-          </a:ln>
-        </p:spPr>
-        <p:txBody>
-          <a:bodyPr anchorCtr="0" anchor="t" bIns="0" lIns="0" spcFirstLastPara="1" rIns="0" wrap="square" tIns="0">
-            <a:normAutofit/>
-          </a:bodyPr>
-          <a:lstStyle/>
-          <a:p>
-            <a:pPr indent="0" lvl="0" marL="0" marR="0" rtl="0" algn="l">
-              <a:lnSpc>
-                <a:spcPct val="139988"/>
-              </a:lnSpc>
-              <a:spcBef>
-                <a:spcPts val="0"/>
-              </a:spcBef>
-              <a:spcAft>
-                <a:spcPts val="0"/>
-              </a:spcAft>
-              <a:buNone/>
-            </a:pPr>
-            <a:endParaRPr b="0" i="0" sz="1688" u="none" cap="none" strike="noStrike">
-              <a:solidFill>
-                <a:schemeClr val="dk1"/>
-              </a:solidFill>
-              <a:latin typeface="Calibri"/>
-              <a:ea typeface="Calibri"/>
-              <a:cs typeface="Calibri"/>
-              <a:sym typeface="Calibri"/>
-            </a:endParaRPr>
-          </a:p>
-        </p:txBody>
-      </p:sp>
-      <p:sp>
-        <p:nvSpPr>
-          <p:cNvPr id="1124" name="Google Shape;1124;p69"/>
-          <p:cNvSpPr/>
-          <p:nvPr/>
-        </p:nvSpPr>
-        <p:spPr>
-          <a:xfrm>
-            <a:off x="3657581" y="1209852"/>
-            <a:ext cx="5200623" cy="3252364"/>
-          </a:xfrm>
-          <a:prstGeom prst="rect">
-            <a:avLst/>
-          </a:prstGeom>
-          <a:noFill/>
-          <a:ln>
-            <a:noFill/>
-          </a:ln>
-        </p:spPr>
-        <p:txBody>
-          <a:bodyPr anchorCtr="0" anchor="ctr" bIns="91425" lIns="91425" spcFirstLastPara="1" rIns="91425" wrap="square" tIns="91425">
-            <a:noAutofit/>
-          </a:bodyPr>
-          <a:lstStyle/>
-          <a:p>
-            <a:pPr indent="0" lvl="0" marL="0" rtl="0" algn="l">
-              <a:spcBef>
-                <a:spcPts val="0"/>
-              </a:spcBef>
-              <a:spcAft>
-                <a:spcPts val="0"/>
-              </a:spcAft>
-              <a:buNone/>
-            </a:pPr>
-            <a:r>
-              <a:t/>
-            </a:r>
-            <a:endParaRPr/>
-          </a:p>
-        </p:txBody>
-      </p:sp>
-      <p:sp>
-        <p:nvSpPr>
-          <p:cNvPr id="1132" name="BrandDeck Text 1132"/>
+          <p:cNvPr id="1351" name="BrandDeck Text 1351"/>
           <p:cNvSpPr txBox="1"/>
           <p:nvPr>
             <p:ph type="title"/>
@@ -11323,8 +10399,10 @@
               <a:buNone/>
             </a:pPr>
             <a:r>
-              <a:rPr sz="1800"/>
-              <a:t>Вопросы без ответа передаются специалисту</a:t>
+              <a:rPr sz="1800">
+                <a:latin typeface="Play"/>
+              </a:rPr>
+              <a:t>Модель с открытыми весами работает внутри контура</a:t>
             </a:r>
             <a:endParaRPr/>
           </a:p>
@@ -11332,14 +10410,14 @@
       </p:sp>
       <p:sp>
         <p:nvSpPr>
-          <p:cNvPr id="1133" name="BrandDeck Body"/>
+          <p:cNvPr id="1469" name="BrandDeck Body"/>
           <p:cNvSpPr txBox="1"/>
           <p:nvPr/>
         </p:nvSpPr>
         <p:spPr>
           <a:xfrm>
-            <a:off x="500060" y="1424137"/>
-            <a:ext cx="2558400" cy="2895223"/>
+            <a:off x="181435" y="1144312"/>
+            <a:ext cx="2375238" cy="1659436"/>
           </a:xfrm>
           <a:prstGeom prst="rect">
             <a:avLst/>
@@ -11360,17 +10438,17 @@
                 <a:spcPts val="0"/>
               </a:spcBef>
               <a:spcAft>
-                <a:spcPts val="253"/>
+                <a:spcPts val="210"/>
               </a:spcAft>
             </a:pPr>
             <a:r>
-              <a:rPr sz="1689">
+              <a:rPr sz="1400">
                 <a:solidFill>
                   <a:srgbClr val="000000"/>
                 </a:solidFill>
                 <a:latin typeface="Play"/>
               </a:rPr>
-              <a:t>• Отсутствующий ответ перенаправляет вопрос специалисту.</a:t>
+              <a:t>• Модель с открытыми весами работает внутри контура компании.</a:t>
             </a:r>
           </a:p>
           <a:p>
@@ -11382,62 +10460,40 @@
                 <a:spcPts val="0"/>
               </a:spcBef>
               <a:spcAft>
-                <a:spcPts val="253"/>
+                <a:spcPts val="210"/>
               </a:spcAft>
             </a:pPr>
             <a:r>
-              <a:rPr sz="1689">
+              <a:rPr sz="1400">
                 <a:solidFill>
                   <a:srgbClr val="000000"/>
                 </a:solidFill>
                 <a:latin typeface="Play"/>
               </a:rPr>
-              <a:t>• В запрос включается контекст предыдущих попыток.</a:t>
-            </a:r>
-          </a:p>
-          <a:p>
-            <a:pPr algn="l">
-              <a:lnSpc>
-                <a:spcPct val="115000"/>
-              </a:lnSpc>
-              <a:spcBef>
-                <a:spcPts val="0"/>
-              </a:spcBef>
-              <a:spcAft>
-                <a:spcPts val="253"/>
-              </a:spcAft>
-            </a:pPr>
-            <a:r>
-              <a:rPr sz="1689">
-                <a:solidFill>
-                  <a:srgbClr val="000000"/>
-                </a:solidFill>
-                <a:latin typeface="Play"/>
-              </a:rPr>
-              <a:t>• Сотрудник получает помощь без ожидания ответа.</a:t>
+              <a:t>• Документы не уходят наружу при обработке запросов.</a:t>
             </a:r>
           </a:p>
         </p:txBody>
       </p:sp>
       <p:pic>
         <p:nvPicPr>
-          <p:cNvPr id="1134" name="BrandDeck Image" descr="сотрудник специалист поддержки"/>
+          <p:cNvPr id="1470" name="BrandDeck Image" descr="внутренний контур серверная"/>
           <p:cNvPicPr>
             <a:picLocks noChangeAspect="1"/>
           </p:cNvPicPr>
           <p:nvPr/>
         </p:nvPicPr>
         <p:blipFill>
-          <a:blip r:embed="rId7"/>
-          <a:srcRect l="18013" r="18013"/>
+          <a:blip r:embed="rId4"/>
+          <a:srcRect l="2791" r="2791"/>
           <a:stretch>
             <a:fillRect/>
           </a:stretch>
         </p:blipFill>
         <p:spPr>
           <a:xfrm>
-            <a:off x="3314493" y="1424137"/>
-            <a:ext cx="3291060" cy="2895223"/>
+            <a:off x="2812705" y="1144312"/>
+            <a:ext cx="6011254" cy="3583136"/>
           </a:xfrm>
           <a:prstGeom prst="rect">
             <a:avLst/>
@@ -11464,220 +10520,7 @@
       <p:grpSpPr/>
       <p:sp>
         <p:nvSpPr>
-          <p:cNvPr id="1119" name="Google Shape;1119;p69"/>
-          <p:cNvSpPr/>
-          <p:nvPr/>
-        </p:nvSpPr>
-        <p:spPr>
-          <a:xfrm>
-            <a:off x="285748" y="286047"/>
-            <a:ext cx="8572456" cy="4176169"/>
-          </a:xfrm>
-          <a:prstGeom prst="rect">
-            <a:avLst/>
-          </a:prstGeom>
-          <a:noFill/>
-          <a:ln>
-            <a:noFill/>
-          </a:ln>
-        </p:spPr>
-        <p:txBody>
-          <a:bodyPr anchorCtr="0" anchor="ctr" bIns="91425" lIns="91425" spcFirstLastPara="1" rIns="91425" wrap="square" tIns="91425">
-            <a:noAutofit/>
-          </a:bodyPr>
-          <a:lstStyle/>
-          <a:p>
-            <a:pPr indent="0" lvl="0" marL="0" rtl="0" algn="l">
-              <a:spcBef>
-                <a:spcPts val="0"/>
-              </a:spcBef>
-              <a:spcAft>
-                <a:spcPts val="0"/>
-              </a:spcAft>
-              <a:buNone/>
-            </a:pPr>
-            <a:r>
-              <a:t/>
-            </a:r>
-            <a:endParaRPr/>
-          </a:p>
-        </p:txBody>
-      </p:sp>
-      <p:sp>
-        <p:nvSpPr>
-          <p:cNvPr id="1120" name="Google Shape;1120;p69"/>
-          <p:cNvSpPr/>
-          <p:nvPr/>
-        </p:nvSpPr>
-        <p:spPr>
-          <a:xfrm>
-            <a:off x="285748" y="1209852"/>
-            <a:ext cx="8572456" cy="3252364"/>
-          </a:xfrm>
-          <a:prstGeom prst="rect">
-            <a:avLst/>
-          </a:prstGeom>
-          <a:noFill/>
-          <a:ln>
-            <a:noFill/>
-          </a:ln>
-        </p:spPr>
-        <p:txBody>
-          <a:bodyPr anchorCtr="0" anchor="ctr" bIns="91425" lIns="91425" spcFirstLastPara="1" rIns="91425" wrap="square" tIns="91425">
-            <a:noAutofit/>
-          </a:bodyPr>
-          <a:lstStyle/>
-          <a:p>
-            <a:pPr indent="0" lvl="0" marL="0" rtl="0" algn="l">
-              <a:spcBef>
-                <a:spcPts val="0"/>
-              </a:spcBef>
-              <a:spcAft>
-                <a:spcPts val="0"/>
-              </a:spcAft>
-              <a:buNone/>
-            </a:pPr>
-            <a:r>
-              <a:t/>
-            </a:r>
-            <a:endParaRPr/>
-          </a:p>
-        </p:txBody>
-      </p:sp>
-      <p:sp>
-        <p:nvSpPr>
-          <p:cNvPr id="1121" name="Google Shape;1121;p69"/>
-          <p:cNvSpPr/>
-          <p:nvPr/>
-        </p:nvSpPr>
-        <p:spPr>
-          <a:xfrm>
-            <a:off x="285748" y="1209852"/>
-            <a:ext cx="8572456" cy="3252364"/>
-          </a:xfrm>
-          <a:prstGeom prst="rect">
-            <a:avLst/>
-          </a:prstGeom>
-          <a:noFill/>
-          <a:ln>
-            <a:noFill/>
-          </a:ln>
-        </p:spPr>
-        <p:txBody>
-          <a:bodyPr anchorCtr="0" anchor="ctr" bIns="91425" lIns="91425" spcFirstLastPara="1" rIns="91425" wrap="square" tIns="91425">
-            <a:noAutofit/>
-          </a:bodyPr>
-          <a:lstStyle/>
-          <a:p>
-            <a:pPr indent="0" lvl="0" marL="0" rtl="0" algn="l">
-              <a:spcBef>
-                <a:spcPts val="0"/>
-              </a:spcBef>
-              <a:spcAft>
-                <a:spcPts val="0"/>
-              </a:spcAft>
-              <a:buNone/>
-            </a:pPr>
-            <a:r>
-              <a:t/>
-            </a:r>
-            <a:endParaRPr/>
-          </a:p>
-        </p:txBody>
-      </p:sp>
-      <p:sp>
-        <p:nvSpPr>
-          <p:cNvPr id="1123" name="Google Shape;1123;p69"/>
-          <p:cNvSpPr/>
-          <p:nvPr/>
-        </p:nvSpPr>
-        <p:spPr>
-          <a:xfrm>
-            <a:off x="500061" y="1424137"/>
-            <a:ext cx="2919397" cy="2895223"/>
-          </a:xfrm>
-          <a:prstGeom prst="rect">
-            <a:avLst/>
-          </a:prstGeom>
-          <a:noFill/>
-          <a:ln>
-            <a:noFill/>
-          </a:ln>
-        </p:spPr>
-        <p:txBody>
-          <a:bodyPr anchorCtr="0" anchor="t" bIns="0" lIns="0" spcFirstLastPara="1" rIns="0" wrap="square" tIns="0">
-            <a:normAutofit/>
-          </a:bodyPr>
-          <a:lstStyle/>
-          <a:p>
-            <a:pPr indent="0" lvl="0" marL="0" marR="0" rtl="0" algn="l">
-              <a:lnSpc>
-                <a:spcPct val="139988"/>
-              </a:lnSpc>
-              <a:spcBef>
-                <a:spcPts val="0"/>
-              </a:spcBef>
-              <a:spcAft>
-                <a:spcPts val="0"/>
-              </a:spcAft>
-              <a:buNone/>
-            </a:pPr>
-            <a:endParaRPr b="0" i="0" sz="1688" u="none" cap="none" strike="noStrike">
-              <a:solidFill>
-                <a:schemeClr val="dk1"/>
-              </a:solidFill>
-              <a:latin typeface="Calibri"/>
-              <a:ea typeface="Calibri"/>
-              <a:cs typeface="Calibri"/>
-              <a:sym typeface="Calibri"/>
-            </a:endParaRPr>
-          </a:p>
-        </p:txBody>
-      </p:sp>
-      <p:sp>
-        <p:nvSpPr>
-          <p:cNvPr id="1124" name="Google Shape;1124;p69"/>
-          <p:cNvSpPr/>
-          <p:nvPr/>
-        </p:nvSpPr>
-        <p:spPr>
-          <a:xfrm>
-            <a:off x="3657581" y="1209852"/>
-            <a:ext cx="5200623" cy="3252364"/>
-          </a:xfrm>
-          <a:prstGeom prst="rect">
-            <a:avLst/>
-          </a:prstGeom>
-          <a:noFill/>
-          <a:ln>
-            <a:noFill/>
-          </a:ln>
-        </p:spPr>
-        <p:txBody>
-          <a:bodyPr anchorCtr="0" anchor="ctr" bIns="91425" lIns="91425" spcFirstLastPara="1" rIns="91425" wrap="square" tIns="91425">
-            <a:noAutofit/>
-          </a:bodyPr>
-          <a:lstStyle/>
-          <a:p>
-            <a:pPr indent="0" lvl="0" marL="0" rtl="0" algn="l">
-              <a:spcBef>
-                <a:spcPts val="0"/>
-              </a:spcBef>
-              <a:spcAft>
-                <a:spcPts val="0"/>
-              </a:spcAft>
-              <a:buNone/>
-            </a:pPr>
-            <a:r>
-              <a:t/>
-            </a:r>
-            <a:endParaRPr/>
-          </a:p>
-        </p:txBody>
-      </p:sp>
-      <p:sp>
-        <p:nvSpPr>
-          <p:cNvPr id="1132" name="BrandDeck Text 1132"/>
+          <p:cNvPr id="2251" name="BrandDeck Text 2251"/>
           <p:cNvSpPr txBox="1"/>
           <p:nvPr>
             <p:ph type="title"/>
@@ -11721,7 +10564,7 @@
             </a:pPr>
             <a:r>
               <a:rPr sz="1800"/>
-              <a:t>Модель работает внутри контура компании</a:t>
+              <a:t>Отсутствие подтвержденного ответа перенаправляет вопрос специалисту</a:t>
             </a:r>
             <a:endParaRPr/>
           </a:p>
@@ -11729,27 +10572,30 @@
       </p:sp>
       <p:sp>
         <p:nvSpPr>
-          <p:cNvPr id="1133" name="BrandDeck Body"/>
+          <p:cNvPr id="2252" name="BrandDeck Text 2252"/>
           <p:cNvSpPr txBox="1"/>
           <p:nvPr/>
         </p:nvSpPr>
         <p:spPr>
           <a:xfrm>
-            <a:off x="500060" y="1424137"/>
-            <a:ext cx="2558400" cy="2895223"/>
+            <a:off x="177970" y="1664110"/>
+            <a:ext cx="2381238" cy="2189092"/>
           </a:xfrm>
           <a:prstGeom prst="rect">
             <a:avLst/>
           </a:prstGeom>
           <a:noFill/>
+          <a:ln>
+            <a:noFill/>
+          </a:ln>
         </p:spPr>
         <p:txBody>
-          <a:bodyPr wrap="square" anchor="t" lIns="36576" rIns="36576" tIns="18288" bIns="18288">
+          <a:bodyPr anchorCtr="0" anchor="t" bIns="45700" lIns="91425" spcFirstLastPara="1" rIns="91425" wrap="square" tIns="45700">
             <a:normAutofit/>
           </a:bodyPr>
           <a:lstStyle/>
           <a:p>
-            <a:pPr algn="l">
+            <a:pPr indent="0" marL="0" marR="0" rtl="0" algn="l">
               <a:lnSpc>
                 <a:spcPct val="115000"/>
               </a:lnSpc>
@@ -11757,90 +10603,400 @@
                 <a:spcPts val="0"/>
               </a:spcBef>
               <a:spcAft>
-                <a:spcPts val="211"/>
-              </a:spcAft>
+                <a:spcPts val="406"/>
+              </a:spcAft>
+              <a:buClr>
+                <a:schemeClr val="accent1"/>
+              </a:buClr>
+              <a:buSzPts val="16600"/>
+              <a:buFont typeface="Play"/>
+              <a:buNone/>
             </a:pPr>
             <a:r>
-              <a:rPr sz="1410">
+              <a:rPr sz="2710" b="1">
+                <a:latin typeface="Play"/>
                 <a:solidFill>
-                  <a:srgbClr val="000000"/>
+                  <a:srgbClr val="001515"/>
                 </a:solidFill>
-                <a:latin typeface="Play"/>
               </a:rPr>
-              <a:t>• Модель с открытыми весами работает внутри контура компании.</a:t>
+              <a:t>Логика эскалации при неуверенности ИИ</a:t>
             </a:r>
-          </a:p>
-          <a:p>
-            <a:pPr algn="l">
-              <a:lnSpc>
-                <a:spcPct val="115000"/>
-              </a:lnSpc>
-              <a:spcBef>
-                <a:spcPts val="0"/>
-              </a:spcBef>
-              <a:spcAft>
-                <a:spcPts val="211"/>
-              </a:spcAft>
-            </a:pPr>
-            <a:r>
-              <a:rPr sz="1410">
-                <a:solidFill>
-                  <a:srgbClr val="000000"/>
-                </a:solidFill>
-                <a:latin typeface="Play"/>
-              </a:rPr>
-              <a:t>• Документы не покидают внутреннюю сеть и не уходят наружу.</a:t>
-            </a:r>
-          </a:p>
-          <a:p>
-            <a:pPr algn="l">
-              <a:lnSpc>
-                <a:spcPct val="115000"/>
-              </a:lnSpc>
-              <a:spcBef>
-                <a:spcPts val="0"/>
-              </a:spcBef>
-              <a:spcAft>
-                <a:spcPts val="211"/>
-              </a:spcAft>
-            </a:pPr>
-            <a:r>
-              <a:rPr sz="1410">
-                <a:solidFill>
-                  <a:srgbClr val="000000"/>
-                </a:solidFill>
-                <a:latin typeface="Play"/>
-              </a:rPr>
-              <a:t>• Обработка запросов происходит без передачи данных внешним сервисам.</a:t>
-            </a:r>
+            <a:endParaRPr b="1" i="0" sz="16600" u="none" cap="none" strike="noStrike">
+              <a:solidFill>
+                <a:schemeClr val="accent1"/>
+              </a:solidFill>
+              <a:latin typeface="Play"/>
+              <a:ea typeface="Play"/>
+              <a:cs typeface="Play"/>
+              <a:sym typeface="Play"/>
+            </a:endParaRPr>
           </a:p>
         </p:txBody>
       </p:sp>
-      <p:pic>
-        <p:nvPicPr>
-          <p:cNvPr id="1134" name="BrandDeck Image" descr="внутренний контур серверная"/>
-          <p:cNvPicPr>
-            <a:picLocks noChangeAspect="1"/>
-          </p:cNvPicPr>
+      <p:sp>
+        <p:nvSpPr>
+          <p:cNvPr id="2253" name="Google Shape;2253;p83"/>
+          <p:cNvSpPr txBox="1"/>
           <p:nvPr/>
-        </p:nvPicPr>
-        <p:blipFill>
-          <a:blip r:embed="rId7"/>
-          <a:srcRect l="18013" r="18013"/>
-          <a:stretch>
-            <a:fillRect/>
-          </a:stretch>
-        </p:blipFill>
+        </p:nvSpPr>
         <p:spPr>
           <a:xfrm>
-            <a:off x="3314493" y="1424137"/>
-            <a:ext cx="3291060" cy="2895223"/>
+            <a:off x="3143234" y="1664110"/>
+            <a:ext cx="4320556" cy="2189092"/>
           </a:xfrm>
           <a:prstGeom prst="rect">
             <a:avLst/>
           </a:prstGeom>
+          <a:noFill/>
+          <a:ln>
+            <a:noFill/>
+          </a:ln>
         </p:spPr>
-      </p:pic>
+        <p:txBody>
+          <a:bodyPr anchorCtr="0" anchor="t" bIns="45700" lIns="91425" spcFirstLastPara="1" rIns="91425" wrap="square" tIns="45700">
+            <a:normAutofit/>
+          </a:bodyPr>
+          <a:lstStyle/>
+          <a:p>
+            <a:pPr indent="0" lvl="0" marL="0" marR="0" rtl="0" algn="l">
+              <a:lnSpc>
+                <a:spcPct val="16150"/>
+              </a:lnSpc>
+              <a:spcBef>
+                <a:spcPts val="0"/>
+              </a:spcBef>
+              <a:spcAft>
+                <a:spcPts val="0"/>
+              </a:spcAft>
+              <a:buClr>
+                <a:schemeClr val="accent1"/>
+              </a:buClr>
+              <a:buSzPts val="16600"/>
+              <a:buFont typeface="Play"/>
+              <a:buNone/>
+            </a:pPr>
+            <a:endParaRPr b="1" i="0" sz="16600" u="none" cap="none" strike="noStrike">
+              <a:solidFill>
+                <a:schemeClr val="accent1"/>
+              </a:solidFill>
+              <a:latin typeface="Play"/>
+              <a:ea typeface="Play"/>
+              <a:cs typeface="Play"/>
+              <a:sym typeface="Play"/>
+            </a:endParaRPr>
+          </a:p>
+        </p:txBody>
+      </p:sp>
+      <p:grpSp>
+        <p:nvGrpSpPr>
+          <p:cNvPr id="2" name="BrandDeck Diagram process" descr="process: Вопрос сотрудника Отправлен ИИ-помощнику; Ответ не найден Перенаправляется специалисту"/>
+          <p:cNvGrpSpPr/>
+          <p:nvPr/>
+        </p:nvGrpSpPr>
+        <p:grpSpPr>
+          <a:xfrm>
+            <a:off x="3143233" y="1691542"/>
+            <a:ext cx="4320556" cy="2134226"/>
+            <a:chOff x="3143233" y="1691542"/>
+            <a:chExt cx="4320556" cy="2134226"/>
+          </a:xfrm>
+        </p:grpSpPr>
+        <p:sp>
+          <p:nvSpPr>
+            <p:cNvPr id="2256" name="BrandDeck Diagram Connector"/>
+            <p:cNvSpPr/>
+            <p:nvPr/>
+          </p:nvSpPr>
+          <p:spPr>
+            <a:xfrm>
+              <a:off x="3382806" y="2211383"/>
+              <a:ext cx="32918" cy="1094546"/>
+            </a:xfrm>
+            <a:prstGeom prst="rect">
+              <a:avLst/>
+            </a:prstGeom>
+            <a:solidFill>
+              <a:srgbClr val="58A6FF"/>
+            </a:solidFill>
+            <a:ln>
+              <a:noFill/>
+            </a:ln>
+          </p:spPr>
+          <p:txBody>
+            <a:bodyPr rtlCol="0" anchor="ctr"/>
+            <a:lstStyle/>
+            <a:p>
+              <a:pPr algn="ctr"/>
+            </a:p>
+          </p:txBody>
+        </p:sp>
+        <p:sp>
+          <p:nvSpPr>
+            <p:cNvPr id="2257" name="BrandDeck Diagram Step 1 Badge"/>
+            <p:cNvSpPr/>
+            <p:nvPr/>
+          </p:nvSpPr>
+          <p:spPr>
+            <a:xfrm>
+              <a:off x="3143233" y="1955350"/>
+              <a:ext cx="512064" cy="512064"/>
+            </a:xfrm>
+            <a:prstGeom prst="ellipse">
+              <a:avLst/>
+            </a:prstGeom>
+            <a:solidFill>
+              <a:srgbClr val="006DEB"/>
+            </a:solidFill>
+            <a:ln>
+              <a:noFill/>
+            </a:ln>
+          </p:spPr>
+          <p:txBody>
+            <a:bodyPr rtlCol="0" anchor="ctr" wrap="square" lIns="0" tIns="0" rIns="0" bIns="0">
+              <a:noAutofit/>
+            </a:bodyPr>
+            <a:lstStyle/>
+            <a:p>
+              <a:pPr algn="ctr">
+                <a:lnSpc>
+                  <a:spcPct val="110000"/>
+                </a:lnSpc>
+              </a:pPr>
+              <a:r>
+                <a:rPr sz="1410" b="1">
+                  <a:solidFill>
+                    <a:srgbClr val="FFFFFF"/>
+                  </a:solidFill>
+                  <a:latin typeface="Play"/>
+                </a:rPr>
+                <a:t>01</a:t>
+              </a:r>
+            </a:p>
+          </p:txBody>
+        </p:sp>
+        <p:sp>
+          <p:nvSpPr>
+            <p:cNvPr id="2258" name="BrandDeck Diagram Detail Card 1"/>
+            <p:cNvSpPr/>
+            <p:nvPr/>
+          </p:nvSpPr>
+          <p:spPr>
+            <a:xfrm>
+              <a:off x="3765026" y="1691542"/>
+              <a:ext cx="3698763" cy="1039681"/>
+            </a:xfrm>
+            <a:prstGeom prst="roundRect">
+              <a:avLst>
+                <a:gd name="adj" fmla="val 12000"/>
+              </a:avLst>
+            </a:prstGeom>
+            <a:solidFill>
+              <a:srgbClr val="E8F3FF"/>
+            </a:solidFill>
+            <a:ln>
+              <a:noFill/>
+            </a:ln>
+          </p:spPr>
+          <p:txBody>
+            <a:bodyPr rtlCol="0" anchor="ctr"/>
+            <a:lstStyle/>
+            <a:p>
+              <a:pPr algn="ctr"/>
+            </a:p>
+          </p:txBody>
+        </p:sp>
+        <p:sp>
+          <p:nvSpPr>
+            <p:cNvPr id="2259" name="BrandDeck Diagram Text 1"/>
+            <p:cNvSpPr txBox="1"/>
+            <p:nvPr/>
+          </p:nvSpPr>
+          <p:spPr>
+            <a:xfrm>
+              <a:off x="3856466" y="1691542"/>
+              <a:ext cx="3607323" cy="1039681"/>
+            </a:xfrm>
+            <a:prstGeom prst="rect">
+              <a:avLst/>
+            </a:prstGeom>
+            <a:noFill/>
+          </p:spPr>
+          <p:txBody>
+            <a:bodyPr wrap="square" anchor="ctr" lIns="36576" tIns="18288" rIns="36576" bIns="18288">
+              <a:noAutofit/>
+            </a:bodyPr>
+            <a:lstStyle/>
+            <a:p>
+              <a:pPr algn="l">
+                <a:lnSpc>
+                  <a:spcPct val="110000"/>
+                </a:lnSpc>
+              </a:pPr>
+              <a:r>
+                <a:rPr sz="1600" b="1">
+                  <a:solidFill>
+                    <a:srgbClr val="000000"/>
+                  </a:solidFill>
+                  <a:latin typeface="Play"/>
+                </a:rPr>
+                <a:t>Вопрос сотрудника</a:t>
+              </a:r>
+            </a:p>
+            <a:p>
+              <a:pPr algn="l">
+                <a:lnSpc>
+                  <a:spcPct val="110000"/>
+                </a:lnSpc>
+                <a:spcBef>
+                  <a:spcPts val="400"/>
+                </a:spcBef>
+              </a:pPr>
+              <a:r>
+                <a:rPr sz="1600" b="0">
+                  <a:solidFill>
+                    <a:srgbClr val="000000"/>
+                  </a:solidFill>
+                  <a:latin typeface="Play"/>
+                </a:rPr>
+                <a:t>Отправлен ИИ-помощнику</a:t>
+              </a:r>
+            </a:p>
+          </p:txBody>
+        </p:sp>
+        <p:sp>
+          <p:nvSpPr>
+            <p:cNvPr id="2260" name="BrandDeck Diagram Step 2 Badge"/>
+            <p:cNvSpPr/>
+            <p:nvPr/>
+          </p:nvSpPr>
+          <p:spPr>
+            <a:xfrm>
+              <a:off x="3143233" y="3049896"/>
+              <a:ext cx="512064" cy="512064"/>
+            </a:xfrm>
+            <a:prstGeom prst="ellipse">
+              <a:avLst/>
+            </a:prstGeom>
+            <a:solidFill>
+              <a:srgbClr val="006DEB"/>
+            </a:solidFill>
+            <a:ln>
+              <a:noFill/>
+            </a:ln>
+          </p:spPr>
+          <p:txBody>
+            <a:bodyPr rtlCol="0" anchor="ctr" wrap="square" lIns="0" tIns="0" rIns="0" bIns="0">
+              <a:noAutofit/>
+            </a:bodyPr>
+            <a:lstStyle/>
+            <a:p>
+              <a:pPr algn="ctr">
+                <a:lnSpc>
+                  <a:spcPct val="110000"/>
+                </a:lnSpc>
+              </a:pPr>
+              <a:r>
+                <a:rPr sz="1410" b="1">
+                  <a:solidFill>
+                    <a:srgbClr val="FFFFFF"/>
+                  </a:solidFill>
+                  <a:latin typeface="Play"/>
+                </a:rPr>
+                <a:t>02</a:t>
+              </a:r>
+            </a:p>
+          </p:txBody>
+        </p:sp>
+        <p:sp>
+          <p:nvSpPr>
+            <p:cNvPr id="2261" name="BrandDeck Diagram Detail Card 2"/>
+            <p:cNvSpPr/>
+            <p:nvPr/>
+          </p:nvSpPr>
+          <p:spPr>
+            <a:xfrm>
+              <a:off x="3765026" y="2786087"/>
+              <a:ext cx="3698763" cy="1039681"/>
+            </a:xfrm>
+            <a:prstGeom prst="roundRect">
+              <a:avLst>
+                <a:gd name="adj" fmla="val 12000"/>
+              </a:avLst>
+            </a:prstGeom>
+            <a:solidFill>
+              <a:srgbClr val="E8F3FF"/>
+            </a:solidFill>
+            <a:ln>
+              <a:noFill/>
+            </a:ln>
+          </p:spPr>
+          <p:txBody>
+            <a:bodyPr rtlCol="0" anchor="ctr"/>
+            <a:lstStyle/>
+            <a:p>
+              <a:pPr algn="ctr"/>
+            </a:p>
+          </p:txBody>
+        </p:sp>
+        <p:sp>
+          <p:nvSpPr>
+            <p:cNvPr id="2262" name="BrandDeck Diagram Text 2"/>
+            <p:cNvSpPr txBox="1"/>
+            <p:nvPr/>
+          </p:nvSpPr>
+          <p:spPr>
+            <a:xfrm>
+              <a:off x="3856466" y="2786087"/>
+              <a:ext cx="3607323" cy="1039681"/>
+            </a:xfrm>
+            <a:prstGeom prst="rect">
+              <a:avLst/>
+            </a:prstGeom>
+            <a:noFill/>
+          </p:spPr>
+          <p:txBody>
+            <a:bodyPr wrap="square" anchor="ctr" lIns="36576" tIns="18288" rIns="36576" bIns="18288">
+              <a:noAutofit/>
+            </a:bodyPr>
+            <a:lstStyle/>
+            <a:p>
+              <a:pPr algn="l">
+                <a:lnSpc>
+                  <a:spcPct val="110000"/>
+                </a:lnSpc>
+              </a:pPr>
+              <a:r>
+                <a:rPr sz="1600" b="1">
+                  <a:solidFill>
+                    <a:srgbClr val="000000"/>
+                  </a:solidFill>
+                  <a:latin typeface="Play"/>
+                </a:rPr>
+                <a:t>Ответ не найден</a:t>
+              </a:r>
+            </a:p>
+            <a:p>
+              <a:pPr algn="l">
+                <a:lnSpc>
+                  <a:spcPct val="110000"/>
+                </a:lnSpc>
+                <a:spcBef>
+                  <a:spcPts val="400"/>
+                </a:spcBef>
+              </a:pPr>
+              <a:r>
+                <a:rPr sz="1600" b="0">
+                  <a:solidFill>
+                    <a:srgbClr val="000000"/>
+                  </a:solidFill>
+                  <a:latin typeface="Play"/>
+                </a:rPr>
+                <a:t>Перенаправляется специалисту</a:t>
+              </a:r>
+            </a:p>
+          </p:txBody>
+        </p:sp>
+      </p:grpSp>
     </p:spTree>
   </p:cSld>
   <p:clrMapOvr>
@@ -11861,89 +11017,7 @@
       <p:grpSpPr/>
       <p:sp>
         <p:nvSpPr>
-          <p:cNvPr id="1032" name="Google Shape;1032;p65"/>
-          <p:cNvSpPr/>
-          <p:nvPr/>
-        </p:nvSpPr>
-        <p:spPr>
-          <a:xfrm>
-            <a:off x="285748" y="286047"/>
-            <a:ext cx="8572456" cy="3938075"/>
-          </a:xfrm>
-          <a:prstGeom prst="rect">
-            <a:avLst/>
-          </a:prstGeom>
-          <a:noFill/>
-          <a:ln>
-            <a:noFill/>
-          </a:ln>
-        </p:spPr>
-        <p:txBody>
-          <a:bodyPr anchorCtr="0" anchor="ctr" bIns="91425" lIns="91425" spcFirstLastPara="1" rIns="91425" wrap="square" tIns="91425">
-            <a:noAutofit/>
-          </a:bodyPr>
-          <a:lstStyle/>
-          <a:p>
-            <a:pPr indent="0" lvl="0" marL="0" rtl="0" algn="l">
-              <a:spcBef>
-                <a:spcPts val="0"/>
-              </a:spcBef>
-              <a:spcAft>
-                <a:spcPts val="0"/>
-              </a:spcAft>
-              <a:buNone/>
-            </a:pPr>
-            <a:r>
-              <a:t/>
-            </a:r>
-            <a:endParaRPr/>
-          </a:p>
-        </p:txBody>
-      </p:sp>
-      <p:sp>
-        <p:nvSpPr>
-          <p:cNvPr id="1033" name="Google Shape;1033;p65"/>
-          <p:cNvSpPr/>
-          <p:nvPr/>
-        </p:nvSpPr>
-        <p:spPr>
-          <a:xfrm>
-            <a:off x="285748" y="1209852"/>
-            <a:ext cx="8572456" cy="3014270"/>
-          </a:xfrm>
-          <a:prstGeom prst="rect">
-            <a:avLst/>
-          </a:prstGeom>
-          <a:noFill/>
-          <a:ln>
-            <a:noFill/>
-          </a:ln>
-        </p:spPr>
-        <p:txBody>
-          <a:bodyPr anchorCtr="0" anchor="ctr" bIns="91425" lIns="91425" spcFirstLastPara="1" rIns="91425" wrap="square" tIns="91425">
-            <a:noAutofit/>
-          </a:bodyPr>
-          <a:lstStyle/>
-          <a:p>
-            <a:pPr indent="0" lvl="0" marL="0" rtl="0" algn="l">
-              <a:spcBef>
-                <a:spcPts val="0"/>
-              </a:spcBef>
-              <a:spcAft>
-                <a:spcPts val="0"/>
-              </a:spcAft>
-              <a:buNone/>
-            </a:pPr>
-            <a:r>
-              <a:t/>
-            </a:r>
-            <a:endParaRPr/>
-          </a:p>
-        </p:txBody>
-      </p:sp>
-      <p:sp>
-        <p:nvSpPr>
-          <p:cNvPr id="1050" name="BrandDeck Text 1050"/>
+          <p:cNvPr id="2251" name="BrandDeck Text 2251"/>
           <p:cNvSpPr txBox="1"/>
           <p:nvPr>
             <p:ph type="title"/>
@@ -11987,96 +11061,153 @@
             </a:pPr>
             <a:r>
               <a:rPr sz="1800"/>
-              <a:t>Сотрудник получает мгновенный ответ и ссылку</a:t>
+              <a:t>Пилот охватывает 2 подразделения и 150 сотрудников</a:t>
             </a:r>
             <a:endParaRPr/>
           </a:p>
         </p:txBody>
       </p:sp>
+      <p:sp>
+        <p:nvSpPr>
+          <p:cNvPr id="2252" name="BrandDeck Text 2252"/>
+          <p:cNvSpPr txBox="1"/>
+          <p:nvPr/>
+        </p:nvSpPr>
+        <p:spPr>
+          <a:xfrm>
+            <a:off x="177970" y="1664110"/>
+            <a:ext cx="2381238" cy="2189092"/>
+          </a:xfrm>
+          <a:prstGeom prst="rect">
+            <a:avLst/>
+          </a:prstGeom>
+          <a:noFill/>
+          <a:ln>
+            <a:noFill/>
+          </a:ln>
+        </p:spPr>
+        <p:txBody>
+          <a:bodyPr anchorCtr="0" anchor="t" bIns="45700" lIns="91425" spcFirstLastPara="1" rIns="91425" wrap="square" tIns="45700">
+            <a:normAutofit/>
+          </a:bodyPr>
+          <a:lstStyle/>
+          <a:p>
+            <a:pPr indent="0" marL="0" marR="0" rtl="0" algn="l">
+              <a:lnSpc>
+                <a:spcPct val="115000"/>
+              </a:lnSpc>
+              <a:spcBef>
+                <a:spcPts val="0"/>
+              </a:spcBef>
+              <a:spcAft>
+                <a:spcPts val="480"/>
+              </a:spcAft>
+              <a:buClr>
+                <a:schemeClr val="accent1"/>
+              </a:buClr>
+              <a:buSzPts val="16600"/>
+              <a:buFont typeface="Play"/>
+              <a:buNone/>
+            </a:pPr>
+            <a:r>
+              <a:rPr sz="3200" b="1">
+                <a:latin typeface="Play"/>
+                <a:solidFill>
+                  <a:srgbClr val="001515"/>
+                </a:solidFill>
+              </a:rPr>
+              <a:t>Границы пилотного запуска</a:t>
+            </a:r>
+            <a:endParaRPr b="1" i="0" sz="16600" u="none" cap="none" strike="noStrike">
+              <a:solidFill>
+                <a:schemeClr val="accent1"/>
+              </a:solidFill>
+              <a:latin typeface="Play"/>
+              <a:ea typeface="Play"/>
+              <a:cs typeface="Play"/>
+              <a:sym typeface="Play"/>
+            </a:endParaRPr>
+          </a:p>
+        </p:txBody>
+      </p:sp>
+      <p:sp>
+        <p:nvSpPr>
+          <p:cNvPr id="2253" name="Google Shape;2253;p83"/>
+          <p:cNvSpPr txBox="1"/>
+          <p:nvPr/>
+        </p:nvSpPr>
+        <p:spPr>
+          <a:xfrm>
+            <a:off x="3143234" y="1664110"/>
+            <a:ext cx="4320556" cy="2189092"/>
+          </a:xfrm>
+          <a:prstGeom prst="rect">
+            <a:avLst/>
+          </a:prstGeom>
+          <a:noFill/>
+          <a:ln>
+            <a:noFill/>
+          </a:ln>
+        </p:spPr>
+        <p:txBody>
+          <a:bodyPr anchorCtr="0" anchor="t" bIns="45700" lIns="91425" spcFirstLastPara="1" rIns="91425" wrap="square" tIns="45700">
+            <a:normAutofit/>
+          </a:bodyPr>
+          <a:lstStyle/>
+          <a:p>
+            <a:pPr indent="0" lvl="0" marL="0" marR="0" rtl="0" algn="l">
+              <a:lnSpc>
+                <a:spcPct val="16150"/>
+              </a:lnSpc>
+              <a:spcBef>
+                <a:spcPts val="0"/>
+              </a:spcBef>
+              <a:spcAft>
+                <a:spcPts val="0"/>
+              </a:spcAft>
+              <a:buClr>
+                <a:schemeClr val="accent1"/>
+              </a:buClr>
+              <a:buSzPts val="16600"/>
+              <a:buFont typeface="Play"/>
+              <a:buNone/>
+            </a:pPr>
+            <a:endParaRPr b="1" i="0" sz="16600" u="none" cap="none" strike="noStrike">
+              <a:solidFill>
+                <a:schemeClr val="accent1"/>
+              </a:solidFill>
+              <a:latin typeface="Play"/>
+              <a:ea typeface="Play"/>
+              <a:cs typeface="Play"/>
+              <a:sym typeface="Play"/>
+            </a:endParaRPr>
+          </a:p>
+        </p:txBody>
+      </p:sp>
       <p:grpSp>
         <p:nvGrpSpPr>
-          <p:cNvPr id="2" name="BrandDeck Diagram icon_grid" descr="icon_grid: Модель отвечает на вопросы по регламентам и инструкциям.; При отсутствии ответа вопрос передаётся специалисту с контекстом.; Сотрудник сразу получает подтверждённый ответ и ссылку на документ."/>
+          <p:cNvPr id="2" name="BrandDeck Diagram pyramid" descr="pyramid: 2 подразделения География пилотного запуска; 150 сотрудников Общее число участников"/>
           <p:cNvGrpSpPr/>
           <p:nvPr/>
         </p:nvGrpSpPr>
         <p:grpSpPr>
           <a:xfrm>
-            <a:off x="585216" y="1144312"/>
-            <a:ext cx="5129783" cy="3583136"/>
-            <a:chOff x="585216" y="1144312"/>
-            <a:chExt cx="5129783" cy="3583136"/>
+            <a:off x="3155145" y="1691542"/>
+            <a:ext cx="4308644" cy="2134226"/>
+            <a:chOff x="3155145" y="1691542"/>
+            <a:chExt cx="4308644" cy="2134226"/>
           </a:xfrm>
         </p:grpSpPr>
         <p:sp>
           <p:nvSpPr>
-            <p:cNvPr id="1051" name="BrandDeck Diagram Card 1"/>
+            <p:cNvPr id="2256" name="BrandDeck Diagram Level 1"/>
             <p:cNvSpPr/>
             <p:nvPr/>
           </p:nvSpPr>
           <p:spPr>
             <a:xfrm>
-              <a:off x="585216" y="1144312"/>
-              <a:ext cx="2510027" cy="1736704"/>
-            </a:xfrm>
-            <a:prstGeom prst="roundRect">
-              <a:avLst>
-                <a:gd name="adj" fmla="val 8000"/>
-              </a:avLst>
-            </a:prstGeom>
-            <a:solidFill>
-              <a:srgbClr val="E8F3FF"/>
-            </a:solidFill>
-            <a:ln>
-              <a:noFill/>
-            </a:ln>
-          </p:spPr>
-          <p:txBody>
-            <a:bodyPr rtlCol="0" anchor="ctr"/>
-            <a:lstStyle/>
-            <a:p>
-              <a:pPr algn="ctr"/>
-            </a:p>
-          </p:txBody>
-        </p:sp>
-        <p:sp>
-          <p:nvSpPr>
-            <p:cNvPr id="1052" name="BrandDeck Diagram Icon 1 Badge"/>
-            <p:cNvSpPr/>
-            <p:nvPr/>
-          </p:nvSpPr>
-          <p:spPr>
-            <a:xfrm>
-              <a:off x="760917" y="1320013"/>
-              <a:ext cx="486277" cy="486277"/>
-            </a:xfrm>
-            <a:prstGeom prst="ellipse">
-              <a:avLst/>
-            </a:prstGeom>
-            <a:solidFill>
-              <a:srgbClr val="006DEB"/>
-            </a:solidFill>
-            <a:ln>
-              <a:noFill/>
-            </a:ln>
-          </p:spPr>
-          <p:txBody>
-            <a:bodyPr rtlCol="0" anchor="ctr"/>
-            <a:lstStyle/>
-            <a:p>
-              <a:pPr algn="ctr"/>
-            </a:p>
-          </p:txBody>
-        </p:sp>
-        <p:sp>
-          <p:nvSpPr>
-            <p:cNvPr id="1053" name="BrandDeck Icon file-text"/>
-            <p:cNvSpPr/>
-            <p:nvPr/>
-          </p:nvSpPr>
-          <p:spPr>
-            <a:xfrm>
-              <a:off x="867898" y="1426994"/>
-              <a:ext cx="272315" cy="272315"/>
+              <a:off x="3630406" y="1691542"/>
+              <a:ext cx="926699" cy="1039682"/>
             </a:xfrm>
             <a:custGeom>
               <a:avLst/>
@@ -12085,107 +11216,63 @@
               <a:cxnLst/>
               <a:rect l="l" t="t" r="r" b="b"/>
               <a:pathLst>
-                <a:path w="24000" h="24000" fill="none">
+                <a:path w="1013" h="1137" stroke="0">
                   <a:moveTo>
-                    <a:pt x="15000" y="2000"/>
+                    <a:pt x="482" y="0"/>
                   </a:moveTo>
                   <a:lnTo>
-                    <a:pt x="6000" y="2000"/>
+                    <a:pt x="532" y="0"/>
                   </a:lnTo>
-                  <a:cubicBezTo>
-                    <a:pt x="4895" y="2000"/>
-                    <a:pt x="4000" y="2895"/>
-                    <a:pt x="4000" y="4000"/>
-                  </a:cubicBezTo>
                   <a:lnTo>
-                    <a:pt x="4000" y="20000"/>
+                    <a:pt x="1013" y="1137"/>
                   </a:lnTo>
-                  <a:cubicBezTo>
-                    <a:pt x="4000" y="21105"/>
-                    <a:pt x="4895" y="22000"/>
-                    <a:pt x="6000" y="22000"/>
-                  </a:cubicBezTo>
                   <a:lnTo>
-                    <a:pt x="18000" y="22000"/>
-                  </a:lnTo>
-                  <a:cubicBezTo>
-                    <a:pt x="19105" y="22000"/>
-                    <a:pt x="20000" y="21105"/>
-                    <a:pt x="20000" y="20000"/>
-                  </a:cubicBezTo>
-                  <a:lnTo>
-                    <a:pt x="20000" y="7000"/>
+                    <a:pt x="0" y="1137"/>
                   </a:lnTo>
                   <a:close/>
                 </a:path>
-                <a:path w="24000" h="24000" fill="none">
-                  <a:moveTo>
-                    <a:pt x="14000" y="2000"/>
-                  </a:moveTo>
-                  <a:lnTo>
-                    <a:pt x="14000" y="6000"/>
-                  </a:lnTo>
-                  <a:cubicBezTo>
-                    <a:pt x="14000" y="7105"/>
-                    <a:pt x="14895" y="8000"/>
-                    <a:pt x="16000" y="8000"/>
-                  </a:cubicBezTo>
-                  <a:lnTo>
-                    <a:pt x="20000" y="8000"/>
-                  </a:lnTo>
-                </a:path>
-                <a:path w="24000" h="24000" fill="none">
-                  <a:moveTo>
-                    <a:pt x="10000" y="9000"/>
-                  </a:moveTo>
-                  <a:lnTo>
-                    <a:pt x="8000" y="9000"/>
-                  </a:lnTo>
-                </a:path>
-                <a:path w="24000" h="24000" fill="none">
-                  <a:moveTo>
-                    <a:pt x="16000" y="13000"/>
-                  </a:moveTo>
-                  <a:lnTo>
-                    <a:pt x="8000" y="13000"/>
-                  </a:lnTo>
-                </a:path>
-                <a:path w="24000" h="24000" fill="none">
-                  <a:moveTo>
-                    <a:pt x="16000" y="17000"/>
-                  </a:moveTo>
-                  <a:lnTo>
-                    <a:pt x="8000" y="17000"/>
-                  </a:lnTo>
-                </a:path>
               </a:pathLst>
             </a:custGeom>
-            <a:noFill/>
-            <a:ln w="22692" cap="rnd">
-              <a:solidFill>
-                <a:srgbClr val="FFFFFF"/>
-              </a:solidFill>
-              <a:round/>
+            <a:solidFill>
+              <a:srgbClr val="006DEB"/>
+            </a:solidFill>
+            <a:ln w="0">
+              <a:noFill/>
             </a:ln>
           </p:spPr>
           <p:txBody>
-            <a:bodyPr rtlCol="0" anchor="ctr"/>
+            <a:bodyPr rtlCol="0" anchor="b" wrap="square" lIns="18288" tIns="0" rIns="18288" bIns="73152">
+              <a:noAutofit/>
+            </a:bodyPr>
             <a:lstStyle/>
             <a:p>
-              <a:pPr algn="ctr"/>
+              <a:pPr algn="ctr">
+                <a:lnSpc>
+                  <a:spcPct val="110000"/>
+                </a:lnSpc>
+              </a:pPr>
+              <a:r>
+                <a:rPr sz="1410" b="1">
+                  <a:solidFill>
+                    <a:srgbClr val="FFFFFF"/>
+                  </a:solidFill>
+                  <a:latin typeface="Play"/>
+                </a:rPr>
+                <a:t>01</a:t>
+              </a:r>
             </a:p>
           </p:txBody>
         </p:sp>
         <p:sp>
           <p:nvSpPr>
-            <p:cNvPr id="1054" name="BrandDeck Diagram Text 1"/>
+            <p:cNvPr id="2257" name="BrandDeck Diagram Text 1"/>
             <p:cNvSpPr txBox="1"/>
             <p:nvPr/>
           </p:nvSpPr>
           <p:spPr>
             <a:xfrm>
-              <a:off x="708207" y="1929282"/>
-              <a:ext cx="2264045" cy="863882"/>
+              <a:off x="5318598" y="1691542"/>
+              <a:ext cx="2145191" cy="1039682"/>
             </a:xfrm>
             <a:prstGeom prst="rect">
               <a:avLst/>
@@ -12193,7 +11280,7 @@
             <a:noFill/>
           </p:spPr>
           <p:txBody>
-            <a:bodyPr wrap="square" anchor="t" lIns="36576" tIns="18288" rIns="36576" bIns="18288">
+            <a:bodyPr wrap="square" anchor="ctr" lIns="36576" tIns="18288" rIns="36576" bIns="18288">
               <a:noAutofit/>
             </a:bodyPr>
             <a:lstStyle/>
@@ -12204,87 +11291,46 @@
                 </a:lnSpc>
               </a:pPr>
               <a:r>
-                <a:rPr sz="1200" b="0">
+                <a:rPr sz="1410" b="1">
                   <a:solidFill>
                     <a:srgbClr val="000000"/>
                   </a:solidFill>
                   <a:latin typeface="Play"/>
                 </a:rPr>
-                <a:t>Модель отвечает на вопросы по регламентам и инструкциям.</a:t>
+                <a:t>2 подразделения</a:t>
+              </a:r>
+            </a:p>
+            <a:p>
+              <a:pPr algn="l">
+                <a:lnSpc>
+                  <a:spcPct val="110000"/>
+                </a:lnSpc>
+                <a:spcBef>
+                  <a:spcPts val="352"/>
+                </a:spcBef>
+              </a:pPr>
+              <a:r>
+                <a:rPr sz="1410" b="0">
+                  <a:solidFill>
+                    <a:srgbClr val="000000"/>
+                  </a:solidFill>
+                  <a:latin typeface="Play"/>
+                </a:rPr>
+                <a:t>География пилотного запуска</a:t>
               </a:r>
             </a:p>
           </p:txBody>
         </p:sp>
         <p:sp>
           <p:nvSpPr>
-            <p:cNvPr id="1055" name="BrandDeck Diagram Card 2"/>
+            <p:cNvPr id="2258" name="BrandDeck Diagram Level 2"/>
             <p:cNvSpPr/>
             <p:nvPr/>
           </p:nvSpPr>
           <p:spPr>
             <a:xfrm>
-              <a:off x="3204972" y="1144312"/>
-              <a:ext cx="2510027" cy="1736704"/>
-            </a:xfrm>
-            <a:prstGeom prst="roundRect">
-              <a:avLst>
-                <a:gd name="adj" fmla="val 8000"/>
-              </a:avLst>
-            </a:prstGeom>
-            <a:solidFill>
-              <a:srgbClr val="E8F3FF"/>
-            </a:solidFill>
-            <a:ln>
-              <a:noFill/>
-            </a:ln>
-          </p:spPr>
-          <p:txBody>
-            <a:bodyPr rtlCol="0" anchor="ctr"/>
-            <a:lstStyle/>
-            <a:p>
-              <a:pPr algn="ctr"/>
-            </a:p>
-          </p:txBody>
-        </p:sp>
-        <p:sp>
-          <p:nvSpPr>
-            <p:cNvPr id="1056" name="BrandDeck Diagram Icon 2 Badge"/>
-            <p:cNvSpPr/>
-            <p:nvPr/>
-          </p:nvSpPr>
-          <p:spPr>
-            <a:xfrm>
-              <a:off x="3380673" y="1320013"/>
-              <a:ext cx="486277" cy="486277"/>
-            </a:xfrm>
-            <a:prstGeom prst="ellipse">
-              <a:avLst/>
-            </a:prstGeom>
-            <a:solidFill>
-              <a:srgbClr val="006DEB"/>
-            </a:solidFill>
-            <a:ln>
-              <a:noFill/>
-            </a:ln>
-          </p:spPr>
-          <p:txBody>
-            <a:bodyPr rtlCol="0" anchor="ctr"/>
-            <a:lstStyle/>
-            <a:p>
-              <a:pPr algn="ctr"/>
-            </a:p>
-          </p:txBody>
-        </p:sp>
-        <p:sp>
-          <p:nvSpPr>
-            <p:cNvPr id="1057" name="BrandDeck Icon circle-help"/>
-            <p:cNvSpPr/>
-            <p:nvPr/>
-          </p:nvSpPr>
-          <p:spPr>
-            <a:xfrm>
-              <a:off x="3487654" y="1426994"/>
-              <a:ext cx="272315" cy="272315"/>
+              <a:off x="3155145" y="2786087"/>
+              <a:ext cx="1877222" cy="1039681"/>
             </a:xfrm>
             <a:custGeom>
               <a:avLst/>
@@ -12293,88 +11339,63 @@
               <a:cxnLst/>
               <a:rect l="l" t="t" r="r" b="b"/>
               <a:pathLst>
-                <a:path w="24000" h="24000" fill="none">
+                <a:path w="2053" h="1137" stroke="0">
                   <a:moveTo>
-                    <a:pt x="22000" y="12000"/>
-                  </a:moveTo>
-                  <a:cubicBezTo>
-                    <a:pt x="22000" y="17523"/>
-                    <a:pt x="17523" y="22000"/>
-                    <a:pt x="12000" y="22000"/>
-                  </a:cubicBezTo>
-                  <a:cubicBezTo>
-                    <a:pt x="6477" y="22000"/>
-                    <a:pt x="2000" y="17523"/>
-                    <a:pt x="2000" y="12000"/>
-                  </a:cubicBezTo>
-                  <a:cubicBezTo>
-                    <a:pt x="2000" y="6477"/>
-                    <a:pt x="6477" y="2000"/>
-                    <a:pt x="12000" y="2000"/>
-                  </a:cubicBezTo>
-                  <a:cubicBezTo>
-                    <a:pt x="17523" y="2000"/>
-                    <a:pt x="22000" y="6477"/>
-                    <a:pt x="22000" y="12000"/>
-                  </a:cubicBezTo>
-                  <a:close/>
-                </a:path>
-                <a:path w="24000" h="24000" fill="none">
-                  <a:moveTo>
-                    <a:pt x="9090" y="9000"/>
-                  </a:moveTo>
-                  <a:cubicBezTo>
-                    <a:pt x="9575" y="7620"/>
-                    <a:pt x="10985" y="6791"/>
-                    <a:pt x="12427" y="7039"/>
-                  </a:cubicBezTo>
-                  <a:cubicBezTo>
-                    <a:pt x="13869" y="7286"/>
-                    <a:pt x="14922" y="8537"/>
-                    <a:pt x="14920" y="10000"/>
-                  </a:cubicBezTo>
-                  <a:cubicBezTo>
-                    <a:pt x="14920" y="12000"/>
-                    <a:pt x="11920" y="13000"/>
-                    <a:pt x="11920" y="13000"/>
-                  </a:cubicBezTo>
-                </a:path>
-                <a:path w="24000" h="24000" fill="none">
-                  <a:moveTo>
-                    <a:pt x="12000" y="17000"/>
+                    <a:pt x="494" y="0"/>
                   </a:moveTo>
                   <a:lnTo>
-                    <a:pt x="12010" y="17000"/>
+                    <a:pt x="1559" y="0"/>
                   </a:lnTo>
+                  <a:lnTo>
+                    <a:pt x="2053" y="1137"/>
+                  </a:lnTo>
+                  <a:lnTo>
+                    <a:pt x="0" y="1137"/>
+                  </a:lnTo>
+                  <a:close/>
                 </a:path>
               </a:pathLst>
             </a:custGeom>
-            <a:noFill/>
-            <a:ln w="22692" cap="rnd">
-              <a:solidFill>
-                <a:srgbClr val="FFFFFF"/>
-              </a:solidFill>
-              <a:round/>
+            <a:solidFill>
+              <a:srgbClr val="7DB4F5"/>
+            </a:solidFill>
+            <a:ln w="0">
+              <a:noFill/>
             </a:ln>
           </p:spPr>
           <p:txBody>
-            <a:bodyPr rtlCol="0" anchor="ctr"/>
+            <a:bodyPr rtlCol="0" anchor="ctr" wrap="square" lIns="18288" tIns="0" rIns="18288" bIns="0">
+              <a:noAutofit/>
+            </a:bodyPr>
             <a:lstStyle/>
             <a:p>
-              <a:pPr algn="ctr"/>
+              <a:pPr algn="ctr">
+                <a:lnSpc>
+                  <a:spcPct val="110000"/>
+                </a:lnSpc>
+              </a:pPr>
+              <a:r>
+                <a:rPr sz="1410" b="1">
+                  <a:solidFill>
+                    <a:srgbClr val="000000"/>
+                  </a:solidFill>
+                  <a:latin typeface="Play"/>
+                </a:rPr>
+                <a:t>02</a:t>
+              </a:r>
             </a:p>
           </p:txBody>
         </p:sp>
         <p:sp>
           <p:nvSpPr>
-            <p:cNvPr id="1058" name="BrandDeck Diagram Text 2"/>
+            <p:cNvPr id="2259" name="BrandDeck Diagram Text 2"/>
             <p:cNvSpPr txBox="1"/>
             <p:nvPr/>
           </p:nvSpPr>
           <p:spPr>
             <a:xfrm>
-              <a:off x="3327963" y="1929282"/>
-              <a:ext cx="2264045" cy="863882"/>
+              <a:off x="5318598" y="2786087"/>
+              <a:ext cx="2145191" cy="1039681"/>
             </a:xfrm>
             <a:prstGeom prst="rect">
               <a:avLst/>
@@ -12382,7 +11403,7 @@
             <a:noFill/>
           </p:spPr>
           <p:txBody>
-            <a:bodyPr wrap="square" anchor="t" lIns="36576" tIns="18288" rIns="36576" bIns="18288">
+            <a:bodyPr wrap="square" anchor="ctr" lIns="36576" tIns="18288" rIns="36576" bIns="18288">
               <a:noAutofit/>
             </a:bodyPr>
             <a:lstStyle/>
@@ -12393,226 +11414,32 @@
                 </a:lnSpc>
               </a:pPr>
               <a:r>
-                <a:rPr sz="1200" b="0">
+                <a:rPr sz="1600" b="1">
                   <a:solidFill>
                     <a:srgbClr val="000000"/>
                   </a:solidFill>
                   <a:latin typeface="Play"/>
                 </a:rPr>
-                <a:t>При отсутствии ответа вопрос передаётся специалисту с контекстом.</a:t>
+                <a:t>150 сотрудников</a:t>
               </a:r>
             </a:p>
-          </p:txBody>
-        </p:sp>
-        <p:sp>
-          <p:nvSpPr>
-            <p:cNvPr id="1059" name="BrandDeck Diagram Card 3"/>
-            <p:cNvSpPr/>
-            <p:nvPr/>
-          </p:nvSpPr>
-          <p:spPr>
-            <a:xfrm>
-              <a:off x="585216" y="2990744"/>
-              <a:ext cx="2510027" cy="1736704"/>
-            </a:xfrm>
-            <a:prstGeom prst="roundRect">
-              <a:avLst>
-                <a:gd name="adj" fmla="val 8000"/>
-              </a:avLst>
-            </a:prstGeom>
-            <a:solidFill>
-              <a:srgbClr val="E8F3FF"/>
-            </a:solidFill>
-            <a:ln>
-              <a:noFill/>
-            </a:ln>
-          </p:spPr>
-          <p:txBody>
-            <a:bodyPr rtlCol="0" anchor="ctr"/>
-            <a:lstStyle/>
-            <a:p>
-              <a:pPr algn="ctr"/>
-            </a:p>
-          </p:txBody>
-        </p:sp>
-        <p:sp>
-          <p:nvSpPr>
-            <p:cNvPr id="1060" name="BrandDeck Diagram Icon 3 Badge"/>
-            <p:cNvSpPr/>
-            <p:nvPr/>
-          </p:nvSpPr>
-          <p:spPr>
-            <a:xfrm>
-              <a:off x="760917" y="3166445"/>
-              <a:ext cx="486277" cy="486277"/>
-            </a:xfrm>
-            <a:prstGeom prst="ellipse">
-              <a:avLst/>
-            </a:prstGeom>
-            <a:solidFill>
-              <a:srgbClr val="006DEB"/>
-            </a:solidFill>
-            <a:ln>
-              <a:noFill/>
-            </a:ln>
-          </p:spPr>
-          <p:txBody>
-            <a:bodyPr rtlCol="0" anchor="ctr"/>
-            <a:lstStyle/>
-            <a:p>
-              <a:pPr algn="ctr"/>
-            </a:p>
-          </p:txBody>
-        </p:sp>
-        <p:sp>
-          <p:nvSpPr>
-            <p:cNvPr id="1061" name="BrandDeck Icon users"/>
-            <p:cNvSpPr/>
-            <p:nvPr/>
-          </p:nvSpPr>
-          <p:spPr>
-            <a:xfrm>
-              <a:off x="867898" y="3273426"/>
-              <a:ext cx="272315" cy="272315"/>
-            </a:xfrm>
-            <a:custGeom>
-              <a:avLst/>
-              <a:gdLst/>
-              <a:ahLst/>
-              <a:cxnLst/>
-              <a:rect l="l" t="t" r="r" b="b"/>
-              <a:pathLst>
-                <a:path w="24000" h="24000" fill="none">
-                  <a:moveTo>
-                    <a:pt x="16000" y="21000"/>
-                  </a:moveTo>
-                  <a:lnTo>
-                    <a:pt x="16000" y="19000"/>
-                  </a:lnTo>
-                  <a:cubicBezTo>
-                    <a:pt x="16000" y="16791"/>
-                    <a:pt x="14209" y="15000"/>
-                    <a:pt x="12000" y="15000"/>
-                  </a:cubicBezTo>
-                  <a:lnTo>
-                    <a:pt x="6000" y="15000"/>
-                  </a:lnTo>
-                  <a:cubicBezTo>
-                    <a:pt x="3791" y="15000"/>
-                    <a:pt x="2000" y="16791"/>
-                    <a:pt x="2000" y="19000"/>
-                  </a:cubicBezTo>
-                  <a:lnTo>
-                    <a:pt x="2000" y="21000"/>
-                  </a:lnTo>
-                </a:path>
-                <a:path w="24000" h="24000" fill="none">
-                  <a:moveTo>
-                    <a:pt x="13000" y="7000"/>
-                  </a:moveTo>
-                  <a:cubicBezTo>
-                    <a:pt x="13000" y="9209"/>
-                    <a:pt x="11209" y="11000"/>
-                    <a:pt x="9000" y="11000"/>
-                  </a:cubicBezTo>
-                  <a:cubicBezTo>
-                    <a:pt x="6791" y="11000"/>
-                    <a:pt x="5000" y="9209"/>
-                    <a:pt x="5000" y="7000"/>
-                  </a:cubicBezTo>
-                  <a:cubicBezTo>
-                    <a:pt x="5000" y="4791"/>
-                    <a:pt x="6791" y="3000"/>
-                    <a:pt x="9000" y="3000"/>
-                  </a:cubicBezTo>
-                  <a:cubicBezTo>
-                    <a:pt x="11209" y="3000"/>
-                    <a:pt x="13000" y="4791"/>
-                    <a:pt x="13000" y="7000"/>
-                  </a:cubicBezTo>
-                  <a:close/>
-                </a:path>
-                <a:path w="24000" h="24000" fill="none">
-                  <a:moveTo>
-                    <a:pt x="22000" y="21000"/>
-                  </a:moveTo>
-                  <a:lnTo>
-                    <a:pt x="22000" y="19000"/>
-                  </a:lnTo>
-                  <a:cubicBezTo>
-                    <a:pt x="21999" y="17177"/>
-                    <a:pt x="20765" y="15586"/>
-                    <a:pt x="19000" y="15130"/>
-                  </a:cubicBezTo>
-                </a:path>
-                <a:path w="24000" h="24000" fill="none">
-                  <a:moveTo>
-                    <a:pt x="16000" y="3130"/>
-                  </a:moveTo>
-                  <a:cubicBezTo>
-                    <a:pt x="17770" y="3583"/>
-                    <a:pt x="19008" y="5178"/>
-                    <a:pt x="19008" y="7005"/>
-                  </a:cubicBezTo>
-                  <a:cubicBezTo>
-                    <a:pt x="19008" y="8832"/>
-                    <a:pt x="17770" y="10427"/>
-                    <a:pt x="16000" y="10880"/>
-                  </a:cubicBezTo>
-                </a:path>
-              </a:pathLst>
-            </a:custGeom>
-            <a:noFill/>
-            <a:ln w="22692" cap="rnd">
-              <a:solidFill>
-                <a:srgbClr val="FFFFFF"/>
-              </a:solidFill>
-              <a:round/>
-            </a:ln>
-          </p:spPr>
-          <p:txBody>
-            <a:bodyPr rtlCol="0" anchor="ctr"/>
-            <a:lstStyle/>
-            <a:p>
-              <a:pPr algn="ctr"/>
-            </a:p>
-          </p:txBody>
-        </p:sp>
-        <p:sp>
-          <p:nvSpPr>
-            <p:cNvPr id="1062" name="BrandDeck Diagram Text 3"/>
-            <p:cNvSpPr txBox="1"/>
-            <p:nvPr/>
-          </p:nvSpPr>
-          <p:spPr>
-            <a:xfrm>
-              <a:off x="708207" y="3775714"/>
-              <a:ext cx="2264045" cy="863882"/>
-            </a:xfrm>
-            <a:prstGeom prst="rect">
-              <a:avLst/>
-            </a:prstGeom>
-            <a:noFill/>
-          </p:spPr>
-          <p:txBody>
-            <a:bodyPr wrap="square" anchor="t" lIns="36576" tIns="18288" rIns="36576" bIns="18288">
-              <a:noAutofit/>
-            </a:bodyPr>
-            <a:lstStyle/>
             <a:p>
               <a:pPr algn="l">
                 <a:lnSpc>
                   <a:spcPct val="110000"/>
                 </a:lnSpc>
+                <a:spcBef>
+                  <a:spcPts val="400"/>
+                </a:spcBef>
               </a:pPr>
               <a:r>
-                <a:rPr sz="1200" b="0">
+                <a:rPr sz="1600" b="0">
                   <a:solidFill>
                     <a:srgbClr val="000000"/>
                   </a:solidFill>
                   <a:latin typeface="Play"/>
                 </a:rPr>
-                <a:t>Сотрудник сразу получает подтверждённый ответ и ссылку на документ.</a:t>
+                <a:t>Общее число участников</a:t>
               </a:r>
             </a:p>
           </p:txBody>
@@ -12671,7 +11498,7 @@
                 <a:spcPts val="0"/>
               </a:spcBef>
               <a:spcAft>
-                <a:spcPts val="211"/>
+                <a:spcPts val="270"/>
               </a:spcAft>
               <a:buClr>
                 <a:schemeClr val="dk1"/>
@@ -12681,8 +11508,8 @@
               <a:buNone/>
             </a:pPr>
             <a:r>
-              <a:rPr sz="1410"/>
-              <a:t>Пилот охватывает 2 подразделения и 150 сотрудников</a:t>
+              <a:rPr sz="1800"/>
+              <a:t>Срок пилота составляет 6 недель</a:t>
             </a:r>
             <a:endParaRPr/>
           </a:p>
@@ -12690,57 +11517,65 @@
       </p:sp>
       <p:grpSp>
         <p:nvGrpSpPr>
-          <p:cNvPr id="2" name="BrandDeck Diagram pyramid" descr="pyramid: 150 сотрудников Пользователи пилотной группы; 2 подразделения Охват тестирования; 6 недель Срок проведения пилота"/>
+          <p:cNvPr id="2" name="BrandDeck Diagram cycle" descr="cycle: Старт Запуск в 2 подразделениях; Процесс Сбор данных 6 недель; Финал Анализ метрик эффективности"/>
           <p:cNvGrpSpPr/>
           <p:nvPr/>
         </p:nvGrpSpPr>
         <p:grpSpPr>
           <a:xfrm>
-            <a:off x="4643624" y="768667"/>
-            <a:ext cx="3855850" cy="3511296"/>
-            <a:chOff x="4643624" y="768667"/>
-            <a:chExt cx="3855850" cy="3511296"/>
+            <a:off x="4708141" y="711456"/>
+            <a:ext cx="3791333" cy="3666745"/>
+            <a:chOff x="4708141" y="711456"/>
+            <a:chExt cx="3791333" cy="3666745"/>
           </a:xfrm>
         </p:grpSpPr>
         <p:sp>
           <p:nvSpPr>
-            <p:cNvPr id="508" name="BrandDeck Diagram Level 1"/>
+            <p:cNvPr id="508" name="BrandDeck Diagram Ring"/>
             <p:cNvSpPr/>
             <p:nvPr/>
           </p:nvSpPr>
           <p:spPr>
             <a:xfrm>
-              <a:off x="5210107" y="768667"/>
-              <a:ext cx="553410" cy="1133856"/>
+              <a:off x="4838256" y="2014477"/>
+              <a:ext cx="1060704" cy="1060704"/>
             </a:xfrm>
-            <a:custGeom>
+            <a:prstGeom prst="ellipse">
               <a:avLst/>
-              <a:gdLst/>
-              <a:ahLst/>
-              <a:cxnLst/>
-              <a:rect l="l" t="t" r="r" b="b"/>
-              <a:pathLst>
-                <a:path w="605" h="1240" stroke="0">
-                  <a:moveTo>
-                    <a:pt x="278" y="0"/>
-                  </a:moveTo>
-                  <a:lnTo>
-                    <a:pt x="328" y="0"/>
-                  </a:lnTo>
-                  <a:lnTo>
-                    <a:pt x="605" y="1240"/>
-                  </a:lnTo>
-                  <a:lnTo>
-                    <a:pt x="0" y="1240"/>
-                  </a:lnTo>
-                  <a:close/>
-                </a:path>
-              </a:pathLst>
-            </a:custGeom>
+            </a:prstGeom>
+            <a:noFill/>
+            <a:ln w="28575">
+              <a:solidFill>
+                <a:srgbClr val="58A6FF"/>
+              </a:solidFill>
+            </a:ln>
+          </p:spPr>
+          <p:txBody>
+            <a:bodyPr rtlCol="0" anchor="ctr"/>
+            <a:lstStyle/>
+            <a:p>
+              <a:pPr algn="ctr"/>
+            </a:p>
+          </p:txBody>
+        </p:sp>
+        <p:sp>
+          <p:nvSpPr>
+            <p:cNvPr id="509" name="BrandDeck Diagram Arrow 1"/>
+            <p:cNvSpPr/>
+            <p:nvPr/>
+          </p:nvSpPr>
+          <p:spPr>
+            <a:xfrm rot="9000000">
+              <a:off x="5755485" y="2207232"/>
+              <a:ext cx="144840" cy="144840"/>
+            </a:xfrm>
+            <a:prstGeom prst="triangle">
+              <a:avLst/>
+            </a:prstGeom>
             <a:solidFill>
-              <a:srgbClr val="006DEB"/>
+              <a:srgbClr val="58A6FF"/>
             </a:solidFill>
-            <a:ln w="0">
+            <a:ln>
               <a:noFill/>
             </a:ln>
           </p:spPr>
@@ -12754,14 +11589,248 @@
         </p:sp>
         <p:sp>
           <p:nvSpPr>
-            <p:cNvPr id="509" name="BrandDeck Diagram Text 1"/>
+            <p:cNvPr id="510" name="BrandDeck Diagram Arrow 2"/>
+            <p:cNvSpPr/>
+            <p:nvPr/>
+          </p:nvSpPr>
+          <p:spPr>
+            <a:xfrm rot="16200000">
+              <a:off x="5296187" y="3002760"/>
+              <a:ext cx="144840" cy="144840"/>
+            </a:xfrm>
+            <a:prstGeom prst="triangle">
+              <a:avLst/>
+            </a:prstGeom>
+            <a:solidFill>
+              <a:srgbClr val="58A6FF"/>
+            </a:solidFill>
+            <a:ln>
+              <a:noFill/>
+            </a:ln>
+          </p:spPr>
+          <p:txBody>
+            <a:bodyPr rtlCol="0" anchor="ctr"/>
+            <a:lstStyle/>
+            <a:p>
+              <a:pPr algn="ctr"/>
+            </a:p>
+          </p:txBody>
+        </p:sp>
+        <p:sp>
+          <p:nvSpPr>
+            <p:cNvPr id="511" name="BrandDeck Diagram Arrow 3"/>
+            <p:cNvSpPr/>
+            <p:nvPr/>
+          </p:nvSpPr>
+          <p:spPr>
+            <a:xfrm rot="1800000">
+              <a:off x="4836889" y="2207232"/>
+              <a:ext cx="144840" cy="144840"/>
+            </a:xfrm>
+            <a:prstGeom prst="triangle">
+              <a:avLst/>
+            </a:prstGeom>
+            <a:solidFill>
+              <a:srgbClr val="58A6FF"/>
+            </a:solidFill>
+            <a:ln>
+              <a:noFill/>
+            </a:ln>
+          </p:spPr>
+          <p:txBody>
+            <a:bodyPr rtlCol="0" anchor="ctr"/>
+            <a:lstStyle/>
+            <a:p>
+              <a:pPr algn="ctr"/>
+            </a:p>
+          </p:txBody>
+        </p:sp>
+        <p:sp>
+          <p:nvSpPr>
+            <p:cNvPr id="512" name="BrandDeck Diagram Node 1 Badge"/>
+            <p:cNvSpPr/>
+            <p:nvPr/>
+          </p:nvSpPr>
+          <p:spPr>
+            <a:xfrm>
+              <a:off x="5167440" y="1813309"/>
+              <a:ext cx="402336" cy="402336"/>
+            </a:xfrm>
+            <a:prstGeom prst="ellipse">
+              <a:avLst/>
+            </a:prstGeom>
+            <a:solidFill>
+              <a:srgbClr val="006DEB"/>
+            </a:solidFill>
+            <a:ln>
+              <a:noFill/>
+            </a:ln>
+          </p:spPr>
+          <p:txBody>
+            <a:bodyPr rtlCol="0" anchor="ctr" wrap="square" lIns="0" tIns="0" rIns="0" bIns="0">
+              <a:noAutofit/>
+            </a:bodyPr>
+            <a:lstStyle/>
+            <a:p>
+              <a:pPr algn="ctr">
+                <a:lnSpc>
+                  <a:spcPct val="110000"/>
+                </a:lnSpc>
+              </a:pPr>
+              <a:r>
+                <a:rPr sz="1100" b="1">
+                  <a:solidFill>
+                    <a:srgbClr val="FFFFFF"/>
+                  </a:solidFill>
+                  <a:latin typeface="Play"/>
+                </a:rPr>
+                <a:t>01</a:t>
+              </a:r>
+            </a:p>
+          </p:txBody>
+        </p:sp>
+        <p:sp>
+          <p:nvSpPr>
+            <p:cNvPr id="513" name="BrandDeck Diagram Node 2 Badge"/>
+            <p:cNvSpPr/>
+            <p:nvPr/>
+          </p:nvSpPr>
+          <p:spPr>
+            <a:xfrm>
+              <a:off x="5626738" y="2608837"/>
+              <a:ext cx="402336" cy="402336"/>
+            </a:xfrm>
+            <a:prstGeom prst="ellipse">
+              <a:avLst/>
+            </a:prstGeom>
+            <a:solidFill>
+              <a:srgbClr val="006DEB"/>
+            </a:solidFill>
+            <a:ln>
+              <a:noFill/>
+            </a:ln>
+          </p:spPr>
+          <p:txBody>
+            <a:bodyPr rtlCol="0" anchor="ctr" wrap="square" lIns="0" tIns="0" rIns="0" bIns="0">
+              <a:noAutofit/>
+            </a:bodyPr>
+            <a:lstStyle/>
+            <a:p>
+              <a:pPr algn="ctr">
+                <a:lnSpc>
+                  <a:spcPct val="110000"/>
+                </a:lnSpc>
+              </a:pPr>
+              <a:r>
+                <a:rPr sz="1100" b="1">
+                  <a:solidFill>
+                    <a:srgbClr val="FFFFFF"/>
+                  </a:solidFill>
+                  <a:latin typeface="Play"/>
+                </a:rPr>
+                <a:t>02</a:t>
+              </a:r>
+            </a:p>
+          </p:txBody>
+        </p:sp>
+        <p:sp>
+          <p:nvSpPr>
+            <p:cNvPr id="514" name="BrandDeck Diagram Node 3 Badge"/>
+            <p:cNvSpPr/>
+            <p:nvPr/>
+          </p:nvSpPr>
+          <p:spPr>
+            <a:xfrm>
+              <a:off x="4708141" y="2608837"/>
+              <a:ext cx="402336" cy="402336"/>
+            </a:xfrm>
+            <a:prstGeom prst="ellipse">
+              <a:avLst/>
+            </a:prstGeom>
+            <a:solidFill>
+              <a:srgbClr val="006DEB"/>
+            </a:solidFill>
+            <a:ln>
+              <a:noFill/>
+            </a:ln>
+          </p:spPr>
+          <p:txBody>
+            <a:bodyPr rtlCol="0" anchor="ctr" wrap="square" lIns="0" tIns="0" rIns="0" bIns="0">
+              <a:noAutofit/>
+            </a:bodyPr>
+            <a:lstStyle/>
+            <a:p>
+              <a:pPr algn="ctr">
+                <a:lnSpc>
+                  <a:spcPct val="110000"/>
+                </a:lnSpc>
+              </a:pPr>
+              <a:r>
+                <a:rPr sz="1100" b="1">
+                  <a:solidFill>
+                    <a:srgbClr val="FFFFFF"/>
+                  </a:solidFill>
+                  <a:latin typeface="Play"/>
+                </a:rPr>
+                <a:t>03</a:t>
+              </a:r>
+            </a:p>
+          </p:txBody>
+        </p:sp>
+        <p:sp>
+          <p:nvSpPr>
+            <p:cNvPr id="515" name="BrandDeck Diagram Legend 1 Badge"/>
+            <p:cNvSpPr/>
+            <p:nvPr/>
+          </p:nvSpPr>
+          <p:spPr>
+            <a:xfrm>
+              <a:off x="6420168" y="1154941"/>
+              <a:ext cx="310896" cy="310896"/>
+            </a:xfrm>
+            <a:prstGeom prst="ellipse">
+              <a:avLst/>
+            </a:prstGeom>
+            <a:solidFill>
+              <a:srgbClr val="006DEB"/>
+            </a:solidFill>
+            <a:ln>
+              <a:noFill/>
+            </a:ln>
+          </p:spPr>
+          <p:txBody>
+            <a:bodyPr rtlCol="0" anchor="ctr" wrap="square" lIns="0" tIns="0" rIns="0" bIns="0">
+              <a:noAutofit/>
+            </a:bodyPr>
+            <a:lstStyle/>
+            <a:p>
+              <a:pPr algn="ctr">
+                <a:lnSpc>
+                  <a:spcPct val="110000"/>
+                </a:lnSpc>
+              </a:pPr>
+              <a:r>
+                <a:rPr sz="1000" b="1">
+                  <a:solidFill>
+                    <a:srgbClr val="FFFFFF"/>
+                  </a:solidFill>
+                  <a:latin typeface="Play"/>
+                </a:rPr>
+                <a:t>01</a:t>
+              </a:r>
+            </a:p>
+          </p:txBody>
+        </p:sp>
+        <p:sp>
+          <p:nvSpPr>
+            <p:cNvPr id="516" name="BrandDeck Diagram Text 1"/>
             <p:cNvSpPr txBox="1"/>
             <p:nvPr/>
           </p:nvSpPr>
           <p:spPr>
             <a:xfrm>
-              <a:off x="6610858" y="768667"/>
-              <a:ext cx="1888616" cy="1133856"/>
+              <a:off x="6877368" y="711456"/>
+              <a:ext cx="1622106" cy="1197864"/>
             </a:xfrm>
             <a:prstGeom prst="rect">
               <a:avLst/>
@@ -12786,7 +11855,7 @@
                   </a:solidFill>
                   <a:latin typeface="Play"/>
                 </a:rPr>
-                <a:t>150 сотрудников</a:t>
+                <a:t>Старт</a:t>
               </a:r>
             </a:p>
             <a:p>
@@ -12805,55 +11874,34 @@
                   </a:solidFill>
                   <a:latin typeface="Play"/>
                 </a:rPr>
-                <a:t>Пользователи пилотной группы</a:t>
+                <a:t>Запуск в 2 подразделениях</a:t>
               </a:r>
             </a:p>
           </p:txBody>
         </p:sp>
         <p:sp>
           <p:nvSpPr>
-            <p:cNvPr id="510" name="BrandDeck Diagram Level 2"/>
+            <p:cNvPr id="517" name="BrandDeck Diagram Legend 2 Badge"/>
             <p:cNvSpPr/>
             <p:nvPr/>
           </p:nvSpPr>
           <p:spPr>
             <a:xfrm>
-              <a:off x="4926866" y="1957387"/>
-              <a:ext cx="1119894" cy="1133856"/>
+              <a:off x="6420168" y="2389381"/>
+              <a:ext cx="310896" cy="310896"/>
             </a:xfrm>
-            <a:custGeom>
+            <a:prstGeom prst="ellipse">
               <a:avLst/>
-              <a:gdLst/>
-              <a:ahLst/>
-              <a:cxnLst/>
-              <a:rect l="l" t="t" r="r" b="b"/>
-              <a:pathLst>
-                <a:path w="1225" h="1240" stroke="0">
-                  <a:moveTo>
-                    <a:pt x="295" y="0"/>
-                  </a:moveTo>
-                  <a:lnTo>
-                    <a:pt x="929" y="0"/>
-                  </a:lnTo>
-                  <a:lnTo>
-                    <a:pt x="1225" y="1240"/>
-                  </a:lnTo>
-                  <a:lnTo>
-                    <a:pt x="0" y="1240"/>
-                  </a:lnTo>
-                  <a:close/>
-                </a:path>
-              </a:pathLst>
-            </a:custGeom>
+            </a:prstGeom>
             <a:solidFill>
-              <a:srgbClr val="3E91F0"/>
+              <a:srgbClr val="006DEB"/>
             </a:solidFill>
-            <a:ln w="0">
+            <a:ln>
               <a:noFill/>
             </a:ln>
           </p:spPr>
           <p:txBody>
-            <a:bodyPr rtlCol="0" anchor="ctr" wrap="square" lIns="18288" tIns="0" rIns="18288" bIns="0">
+            <a:bodyPr rtlCol="0" anchor="ctr" wrap="square" lIns="0" tIns="0" rIns="0" bIns="0">
               <a:noAutofit/>
             </a:bodyPr>
             <a:lstStyle/>
@@ -12864,9 +11912,9 @@
                 </a:lnSpc>
               </a:pPr>
               <a:r>
-                <a:rPr sz="1410" b="1">
+                <a:rPr sz="1000" b="1">
                   <a:solidFill>
-                    <a:srgbClr val="000000"/>
+                    <a:srgbClr val="FFFFFF"/>
                   </a:solidFill>
                   <a:latin typeface="Play"/>
                 </a:rPr>
@@ -12877,14 +11925,14 @@
         </p:sp>
         <p:sp>
           <p:nvSpPr>
-            <p:cNvPr id="511" name="BrandDeck Diagram Text 2"/>
+            <p:cNvPr id="518" name="BrandDeck Diagram Text 2"/>
             <p:cNvSpPr txBox="1"/>
             <p:nvPr/>
           </p:nvSpPr>
           <p:spPr>
             <a:xfrm>
-              <a:off x="6610858" y="1957387"/>
-              <a:ext cx="1888616" cy="1133856"/>
+              <a:off x="6877368" y="1945897"/>
+              <a:ext cx="1622106" cy="1197864"/>
             </a:xfrm>
             <a:prstGeom prst="rect">
               <a:avLst/>
@@ -12909,7 +11957,7 @@
                   </a:solidFill>
                   <a:latin typeface="Play"/>
                 </a:rPr>
-                <a:t>2 подразделения</a:t>
+                <a:t>Процесс</a:t>
               </a:r>
             </a:p>
             <a:p>
@@ -12928,55 +11976,34 @@
                   </a:solidFill>
                   <a:latin typeface="Play"/>
                 </a:rPr>
-                <a:t>Охват тестирования</a:t>
+                <a:t>Сбор данных 6 недель</a:t>
               </a:r>
             </a:p>
           </p:txBody>
         </p:sp>
         <p:sp>
           <p:nvSpPr>
-            <p:cNvPr id="512" name="BrandDeck Diagram Level 3"/>
+            <p:cNvPr id="519" name="BrandDeck Diagram Legend 3 Badge"/>
             <p:cNvSpPr/>
             <p:nvPr/>
           </p:nvSpPr>
           <p:spPr>
             <a:xfrm>
-              <a:off x="4643624" y="3146107"/>
-              <a:ext cx="1686377" cy="1133856"/>
+              <a:off x="6420168" y="3623821"/>
+              <a:ext cx="310896" cy="310896"/>
             </a:xfrm>
-            <a:custGeom>
+            <a:prstGeom prst="ellipse">
               <a:avLst/>
-              <a:gdLst/>
-              <a:ahLst/>
-              <a:cxnLst/>
-              <a:rect l="l" t="t" r="r" b="b"/>
-              <a:pathLst>
-                <a:path w="1844" h="1240" stroke="0">
-                  <a:moveTo>
-                    <a:pt x="295" y="0"/>
-                  </a:moveTo>
-                  <a:lnTo>
-                    <a:pt x="1549" y="0"/>
-                  </a:lnTo>
-                  <a:lnTo>
-                    <a:pt x="1844" y="1240"/>
-                  </a:lnTo>
-                  <a:lnTo>
-                    <a:pt x="0" y="1240"/>
-                  </a:lnTo>
-                  <a:close/>
-                </a:path>
-              </a:pathLst>
-            </a:custGeom>
+            </a:prstGeom>
             <a:solidFill>
-              <a:srgbClr val="7DB4F5"/>
+              <a:srgbClr val="006DEB"/>
             </a:solidFill>
-            <a:ln w="0">
+            <a:ln>
               <a:noFill/>
             </a:ln>
           </p:spPr>
           <p:txBody>
-            <a:bodyPr rtlCol="0" anchor="ctr" wrap="square" lIns="18288" tIns="0" rIns="18288" bIns="0">
+            <a:bodyPr rtlCol="0" anchor="ctr" wrap="square" lIns="0" tIns="0" rIns="0" bIns="0">
               <a:noAutofit/>
             </a:bodyPr>
             <a:lstStyle/>
@@ -12987,9 +12014,9 @@
                 </a:lnSpc>
               </a:pPr>
               <a:r>
-                <a:rPr sz="1410" b="1">
+                <a:rPr sz="1000" b="1">
                   <a:solidFill>
-                    <a:srgbClr val="000000"/>
+                    <a:srgbClr val="FFFFFF"/>
                   </a:solidFill>
                   <a:latin typeface="Play"/>
                 </a:rPr>
@@ -13000,14 +12027,14 @@
         </p:sp>
         <p:sp>
           <p:nvSpPr>
-            <p:cNvPr id="513" name="BrandDeck Diagram Text 3"/>
+            <p:cNvPr id="520" name="BrandDeck Diagram Text 3"/>
             <p:cNvSpPr txBox="1"/>
             <p:nvPr/>
           </p:nvSpPr>
           <p:spPr>
             <a:xfrm>
-              <a:off x="6610858" y="3146107"/>
-              <a:ext cx="1888616" cy="1133856"/>
+              <a:off x="6877368" y="3180337"/>
+              <a:ext cx="1622106" cy="1197864"/>
             </a:xfrm>
             <a:prstGeom prst="rect">
               <a:avLst/>
@@ -13032,7 +12059,7 @@
                   </a:solidFill>
                   <a:latin typeface="Play"/>
                 </a:rPr>
-                <a:t>6 недель</a:t>
+                <a:t>Финал</a:t>
               </a:r>
             </a:p>
             <a:p>
@@ -13051,7 +12078,7 @@
                   </a:solidFill>
                   <a:latin typeface="Play"/>
                 </a:rPr>
-                <a:t>Срок проведения пилота</a:t>
+                <a:t>Анализ метрик эффективности</a:t>
               </a:r>
             </a:p>
           </p:txBody>

--- a/deliverables/vk-tech-columns.pptx
+++ b/deliverables/vk-tech-columns.pptx
@@ -19,8 +19,6 @@
     <p:sldId id="317" r:id="rId69"/>
     <p:sldId id="318" r:id="rId70"/>
     <p:sldId id="319" r:id="rId71"/>
-    <p:sldId id="320" r:id="rId72"/>
-    <p:sldId id="321" r:id="rId73"/>
   </p:sldIdLst>
   <p:sldSz cy="5143500" cx="9144000"/>
   <p:notesSz cx="6858000" cy="9144000"/>
@@ -1476,7 +1474,7 @@
           <a:lstStyle/>
           <a:p>
             <a:r>
-              <a:t>Слайд представляет инициативу по внедрению ИИ-помощника для ускорения работы сотрудников и снижения нагрузки на поддержку.</a:t>
+              <a:t>Слайд вводит тему проекта по внедрению ИИ-помощника во внутренний портал.</a:t>
             </a:r>
           </a:p>
         </p:txBody>
@@ -1546,7 +1544,7 @@
           <a:lstStyle/>
           <a:p>
             <a:r>
-              <a:t>Сейчас сотрудникам требуется до 30 минут, чтобы найти нужную инструкцию, что замедляет их работу и снижает общую эффективность отдела.</a:t>
+              <a:t>Треть обращений в поддержку приходится на повторяющиеся вопросы, что перегружает команду специалистов.</a:t>
             </a:r>
           </a:p>
         </p:txBody>
@@ -1616,7 +1614,7 @@
           <a:lstStyle/>
           <a:p>
             <a:r>
-              <a:t>Сейчас треть обращений в поддержку — это повторяющиеся вопросы, которые занимают время и ресурсы.</a:t>
+              <a:t>Сейчас поиск инструкции занимает до 30 минут, что тормозит работу. Мы будем измерять сокращение этого времени в ходе пилота.</a:t>
             </a:r>
           </a:p>
         </p:txBody>
@@ -1686,7 +1684,7 @@
           <a:lstStyle/>
           <a:p>
             <a:r>
-              <a:t>ИИ-помощник одновременно ускоряет работу сотрудников и разгружает команду поддержки за счет автоматизации типовых запросов.</a:t>
+              <a:t>ИИ-помощник автоматически отвечает на вопросы сотрудников по регламентам и предоставляет ссылку на исходный документ.</a:t>
             </a:r>
           </a:p>
         </p:txBody>
@@ -1756,7 +1754,7 @@
           <a:lstStyle/>
           <a:p>
             <a:r>
-              <a:t>ИИ-помощник автоматически отвечает на вопросы сотрудников и предоставляет ссылку на исходный документ.</a:t>
+              <a:t>Модель функционирует внутри корпоративного контура, обеспечивая локальность работы и не выводя документы наружу.</a:t>
             </a:r>
           </a:p>
         </p:txBody>
@@ -1826,7 +1824,7 @@
           <a:lstStyle/>
           <a:p>
             <a:r>
-              <a:t>Модель работает внутри корпоративного контура, поэтому документы не покидают сеть компании, что исключает утечку данных при обучении или обработке запросов. Это обеспечивает безопасность внутренней информации сотрудников и регламентов. Мы используем только факты из брифа, чтобы избежать необоснованных заявлений о безопасности, так как в исходных данных сделан акцент именно на том, что документы не</a:t>
+              <a:t>Если ИИ не находит ответ, вопрос автоматически передаётся специалисту вместе с контекстом.</a:t>
             </a:r>
           </a:p>
         </p:txBody>
@@ -1896,7 +1894,7 @@
           <a:lstStyle/>
           <a:p>
             <a:r>
-              <a:t>Если ИИ не находит подтверждённый ответ, вопрос автоматически перенаправляется специалисту с полным контекстом.</a:t>
+              <a:t>В рамках пилота модель будет тестироваться на двух подразделениях с общим числом сотрудников 150 человек.</a:t>
             </a:r>
           </a:p>
         </p:txBody>
@@ -1966,7 +1964,7 @@
           <a:lstStyle/>
           <a:p>
             <a:r>
-              <a:t>Пилотный запуск охватывает два подразделения с общим количеством сотрудников 150 человек.</a:t>
+              <a:t>Для оценки эффективности пилота мы будем отслеживать время поиска ответа и долю обращений, закрытых без участия специалиста.</a:t>
             </a:r>
           </a:p>
         </p:txBody>
@@ -2036,7 +2034,7 @@
           <a:lstStyle/>
           <a:p>
             <a:r>
-              <a:t>Срок пилота фиксирован на шесть недель для сбора достаточной статистики.</a:t>
+              <a:t>Пилот пройдет в течение 6 недель с командой из трех человек, оценивая время поиска и долю закрытых обращений.</a:t>
             </a:r>
           </a:p>
         </p:txBody>
@@ -2106,147 +2104,7 @@
           <a:lstStyle/>
           <a:p>
             <a:r>
-              <a:t>Для оценки успеха пилота мы будем измерять время поиска ответа и долю обращений, закрытых без участия специалиста.</a:t>
-            </a:r>
-          </a:p>
-        </p:txBody>
-      </p:sp>
-      <p:sp>
-        <p:nvSpPr>
-          <p:cNvPr id="4" name="Slide Number Placeholder 3"/>
-          <p:cNvSpPr>
-            <a:spLocks noGrp="1"/>
-          </p:cNvSpPr>
-          <p:nvPr>
-            <p:ph type="sldNum" idx="12"/>
-          </p:nvPr>
-        </p:nvSpPr>
-        <p:spPr/>
-      </p:sp>
-    </p:spTree>
-  </p:cSld>
-  <p:clrMapOvr>
-    <a:masterClrMapping/>
-  </p:clrMapOvr>
-</p:notes>
-</file>
-
-<file path=ppt/notesSlides/notesSlide65.xml><?xml version="1.0" encoding="utf-8"?>
-<p:notes xmlns:a="http://schemas.openxmlformats.org/drawingml/2006/main" xmlns:p="http://schemas.openxmlformats.org/presentationml/2006/main" xmlns:r="http://schemas.openxmlformats.org/officeDocument/2006/relationships">
-  <p:cSld>
-    <p:spTree>
-      <p:nvGrpSpPr>
-        <p:cNvPr id="1" name=""/>
-        <p:cNvGrpSpPr/>
-        <p:nvPr/>
-      </p:nvGrpSpPr>
-      <p:grpSpPr>
-        <a:xfrm>
-          <a:off x="0" y="0"/>
-          <a:ext cx="0" cy="0"/>
-          <a:chOff x="0" y="0"/>
-          <a:chExt cx="0" cy="0"/>
-        </a:xfrm>
-      </p:grpSpPr>
-      <p:sp>
-        <p:nvSpPr>
-          <p:cNvPr id="2" name="Slide Image Placeholder 1"/>
-          <p:cNvSpPr>
-            <a:spLocks noGrp="1"/>
-          </p:cNvSpPr>
-          <p:nvPr>
-            <p:ph type="sldImg" idx="3"/>
-          </p:nvPr>
-        </p:nvSpPr>
-        <p:spPr/>
-      </p:sp>
-      <p:sp>
-        <p:nvSpPr>
-          <p:cNvPr id="3" name="Notes Placeholder 2"/>
-          <p:cNvSpPr>
-            <a:spLocks noGrp="1"/>
-          </p:cNvSpPr>
-          <p:nvPr>
-            <p:ph type="body" idx="1"/>
-          </p:nvPr>
-        </p:nvSpPr>
-        <p:spPr/>
-        <p:txBody>
-          <a:bodyPr/>
-          <a:lstStyle/>
-          <a:p>
-            <a:r>
-              <a:t>Для реализации пилота необходимо выделить команду из трех человек.</a:t>
-            </a:r>
-          </a:p>
-        </p:txBody>
-      </p:sp>
-      <p:sp>
-        <p:nvSpPr>
-          <p:cNvPr id="4" name="Slide Number Placeholder 3"/>
-          <p:cNvSpPr>
-            <a:spLocks noGrp="1"/>
-          </p:cNvSpPr>
-          <p:nvPr>
-            <p:ph type="sldNum" idx="12"/>
-          </p:nvPr>
-        </p:nvSpPr>
-        <p:spPr/>
-      </p:sp>
-    </p:spTree>
-  </p:cSld>
-  <p:clrMapOvr>
-    <a:masterClrMapping/>
-  </p:clrMapOvr>
-</p:notes>
-</file>
-
-<file path=ppt/notesSlides/notesSlide66.xml><?xml version="1.0" encoding="utf-8"?>
-<p:notes xmlns:a="http://schemas.openxmlformats.org/drawingml/2006/main" xmlns:p="http://schemas.openxmlformats.org/presentationml/2006/main" xmlns:r="http://schemas.openxmlformats.org/officeDocument/2006/relationships">
-  <p:cSld>
-    <p:spTree>
-      <p:nvGrpSpPr>
-        <p:cNvPr id="1" name=""/>
-        <p:cNvGrpSpPr/>
-        <p:nvPr/>
-      </p:nvGrpSpPr>
-      <p:grpSpPr>
-        <a:xfrm>
-          <a:off x="0" y="0"/>
-          <a:ext cx="0" cy="0"/>
-          <a:chOff x="0" y="0"/>
-          <a:chExt cx="0" cy="0"/>
-        </a:xfrm>
-      </p:grpSpPr>
-      <p:sp>
-        <p:nvSpPr>
-          <p:cNvPr id="2" name="Slide Image Placeholder 1"/>
-          <p:cNvSpPr>
-            <a:spLocks noGrp="1"/>
-          </p:cNvSpPr>
-          <p:nvPr>
-            <p:ph type="sldImg" idx="3"/>
-          </p:nvPr>
-        </p:nvSpPr>
-        <p:spPr/>
-      </p:sp>
-      <p:sp>
-        <p:nvSpPr>
-          <p:cNvPr id="3" name="Notes Placeholder 2"/>
-          <p:cNvSpPr>
-            <a:spLocks noGrp="1"/>
-          </p:cNvSpPr>
-          <p:nvPr>
-            <p:ph type="body" idx="1"/>
-          </p:nvPr>
-        </p:nvSpPr>
-        <p:spPr/>
-        <p:txBody>
-          <a:bodyPr/>
-          <a:lstStyle/>
-          <a:p>
-            <a:r>
-              <a:t>После одобрения мы сразу начнем работу с двумя подразделениями и сформируем команду для реализации пилота.</a:t>
+              <a:t>Для реализации пилота необходимо одобрить команду из трёх человек и запустить проект на шесть недель.</a:t>
             </a:r>
           </a:p>
         </p:txBody>
@@ -3679,6 +3537,888 @@
           </p:spPr>
         </p:pic>
       </p:grpSp>
+    </p:spTree>
+  </p:cSld>
+  <p:clrMapOvr>
+    <a:masterClrMapping/>
+  </p:clrMapOvr>
+</p:sldLayout>
+</file>
+
+<file path=ppt/slideLayouts/slideLayout28.xml><?xml version="1.0" encoding="utf-8"?>
+<p:sldLayout xmlns:a="http://schemas.openxmlformats.org/drawingml/2006/main" xmlns:r="http://schemas.openxmlformats.org/officeDocument/2006/relationships" xmlns:mc="http://schemas.openxmlformats.org/markup-compatibility/2006" xmlns:mv="urn:schemas-microsoft-com:mac:vml" xmlns:p="http://schemas.openxmlformats.org/presentationml/2006/main" xmlns:c="http://schemas.openxmlformats.org/drawingml/2006/chart" xmlns:dgm="http://schemas.openxmlformats.org/drawingml/2006/diagram" xmlns:o="urn:schemas-microsoft-com:office:office" xmlns:v="urn:schemas-microsoft-com:vml" xmlns:pvml="urn:schemas-microsoft-com:office:powerpoint" xmlns:com="http://schemas.openxmlformats.org/drawingml/2006/compatibility" xmlns:p14="http://schemas.microsoft.com/office/powerpoint/2010/main" xmlns:p15="http://schemas.microsoft.com/office/powerpoint/2012/main" xmlns:ahyp="http://schemas.microsoft.com/office/drawing/2018/hyperlinkcolor" matchingName="4_Содержание">
+  <p:cSld name="4_Содержание">
+    <p:bg>
+      <p:bgPr>
+        <a:solidFill>
+          <a:schemeClr val="dk1"/>
+        </a:solidFill>
+      </p:bgPr>
+    </p:bg>
+    <p:spTree>
+      <p:nvGrpSpPr>
+        <p:cNvPr id="305" name="Shape 305"/>
+        <p:cNvGrpSpPr/>
+        <p:nvPr/>
+      </p:nvGrpSpPr>
+      <p:grpSpPr>
+        <a:xfrm>
+          <a:off x="0" y="0"/>
+          <a:ext cx="0" cy="0"/>
+          <a:chOff x="0" y="0"/>
+          <a:chExt cx="0" cy="0"/>
+        </a:xfrm>
+      </p:grpSpPr>
+      <p:pic>
+        <p:nvPicPr>
+          <p:cNvPr id="306" name="Google Shape;306;p30"/>
+          <p:cNvPicPr preferRelativeResize="0"/>
+          <p:nvPr/>
+        </p:nvPicPr>
+        <p:blipFill rotWithShape="1">
+          <a:blip r:embed="rId2">
+            <a:alphaModFix/>
+          </a:blip>
+          <a:srcRect b="0" l="0" r="0" t="0"/>
+          <a:stretch/>
+        </p:blipFill>
+        <p:spPr>
+          <a:xfrm>
+            <a:off x="0" y="0"/>
+            <a:ext cx="9144000" cy="5143500"/>
+          </a:xfrm>
+          <a:prstGeom prst="rect">
+            <a:avLst/>
+          </a:prstGeom>
+          <a:noFill/>
+          <a:ln>
+            <a:noFill/>
+          </a:ln>
+        </p:spPr>
+      </p:pic>
+      <p:sp>
+        <p:nvSpPr>
+          <p:cNvPr id="307" name="Google Shape;307;p30"/>
+          <p:cNvSpPr txBox="1"/>
+          <p:nvPr>
+            <p:ph type="title"/>
+          </p:nvPr>
+        </p:nvSpPr>
+        <p:spPr>
+          <a:xfrm>
+            <a:off x="430360" y="338829"/>
+            <a:ext cx="3945697" cy="753371"/>
+          </a:xfrm>
+          <a:prstGeom prst="rect">
+            <a:avLst/>
+          </a:prstGeom>
+          <a:noFill/>
+          <a:ln>
+            <a:noFill/>
+          </a:ln>
+        </p:spPr>
+        <p:txBody>
+          <a:bodyPr anchorCtr="0" anchor="t" bIns="45700" lIns="91425" spcFirstLastPara="1" rIns="91425" wrap="square" tIns="45700">
+            <a:noAutofit/>
+          </a:bodyPr>
+          <a:lstStyle>
+            <a:lvl1pPr lvl="0" marR="0" rtl="0" algn="l">
+              <a:lnSpc>
+                <a:spcPct val="90000"/>
+              </a:lnSpc>
+              <a:spcBef>
+                <a:spcPts val="0"/>
+              </a:spcBef>
+              <a:spcAft>
+                <a:spcPts val="0"/>
+              </a:spcAft>
+              <a:buClr>
+                <a:schemeClr val="lt1"/>
+              </a:buClr>
+              <a:buSzPts val="2400"/>
+              <a:buFont typeface="Play"/>
+              <a:buNone/>
+              <a:defRPr b="0" i="0" sz="2400" u="none" cap="none" strike="noStrike">
+                <a:solidFill>
+                  <a:schemeClr val="lt1"/>
+                </a:solidFill>
+                <a:latin typeface="Play"/>
+                <a:ea typeface="Play"/>
+                <a:cs typeface="Play"/>
+                <a:sym typeface="Play"/>
+              </a:defRPr>
+            </a:lvl1pPr>
+            <a:lvl2pPr lvl="1">
+              <a:spcBef>
+                <a:spcPts val="0"/>
+              </a:spcBef>
+              <a:spcAft>
+                <a:spcPts val="0"/>
+              </a:spcAft>
+              <a:buSzPts val="1400"/>
+              <a:buNone/>
+              <a:defRPr sz="1800"/>
+            </a:lvl2pPr>
+            <a:lvl3pPr lvl="2">
+              <a:spcBef>
+                <a:spcPts val="0"/>
+              </a:spcBef>
+              <a:spcAft>
+                <a:spcPts val="0"/>
+              </a:spcAft>
+              <a:buSzPts val="1400"/>
+              <a:buNone/>
+              <a:defRPr sz="1800"/>
+            </a:lvl3pPr>
+            <a:lvl4pPr lvl="3">
+              <a:spcBef>
+                <a:spcPts val="0"/>
+              </a:spcBef>
+              <a:spcAft>
+                <a:spcPts val="0"/>
+              </a:spcAft>
+              <a:buSzPts val="1400"/>
+              <a:buNone/>
+              <a:defRPr sz="1800"/>
+            </a:lvl4pPr>
+            <a:lvl5pPr lvl="4">
+              <a:spcBef>
+                <a:spcPts val="0"/>
+              </a:spcBef>
+              <a:spcAft>
+                <a:spcPts val="0"/>
+              </a:spcAft>
+              <a:buSzPts val="1400"/>
+              <a:buNone/>
+              <a:defRPr sz="1800"/>
+            </a:lvl5pPr>
+            <a:lvl6pPr lvl="5">
+              <a:spcBef>
+                <a:spcPts val="0"/>
+              </a:spcBef>
+              <a:spcAft>
+                <a:spcPts val="0"/>
+              </a:spcAft>
+              <a:buSzPts val="1400"/>
+              <a:buNone/>
+              <a:defRPr sz="1800"/>
+            </a:lvl6pPr>
+            <a:lvl7pPr lvl="6">
+              <a:spcBef>
+                <a:spcPts val="0"/>
+              </a:spcBef>
+              <a:spcAft>
+                <a:spcPts val="0"/>
+              </a:spcAft>
+              <a:buSzPts val="1400"/>
+              <a:buNone/>
+              <a:defRPr sz="1800"/>
+            </a:lvl7pPr>
+            <a:lvl8pPr lvl="7">
+              <a:spcBef>
+                <a:spcPts val="0"/>
+              </a:spcBef>
+              <a:spcAft>
+                <a:spcPts val="0"/>
+              </a:spcAft>
+              <a:buSzPts val="1400"/>
+              <a:buNone/>
+              <a:defRPr sz="1800"/>
+            </a:lvl8pPr>
+            <a:lvl9pPr lvl="8">
+              <a:spcBef>
+                <a:spcPts val="0"/>
+              </a:spcBef>
+              <a:spcAft>
+                <a:spcPts val="0"/>
+              </a:spcAft>
+              <a:buSzPts val="1400"/>
+              <a:buNone/>
+              <a:defRPr sz="1800"/>
+            </a:lvl9pPr>
+          </a:lstStyle>
+          <a:p/>
+        </p:txBody>
+      </p:sp>
+      <p:grpSp>
+        <p:nvGrpSpPr>
+          <p:cNvPr id="308" name="Google Shape;308;p30"/>
+          <p:cNvGrpSpPr/>
+          <p:nvPr/>
+        </p:nvGrpSpPr>
+        <p:grpSpPr>
+          <a:xfrm>
+            <a:off x="283721" y="4713930"/>
+            <a:ext cx="474349" cy="146621"/>
+            <a:chOff x="762095" y="12573000"/>
+            <a:chExt cx="1232613" cy="381000"/>
+          </a:xfrm>
+        </p:grpSpPr>
+        <p:sp>
+          <p:nvSpPr>
+            <p:cNvPr id="309" name="Google Shape;309;p30"/>
+            <p:cNvSpPr/>
+            <p:nvPr/>
+          </p:nvSpPr>
+          <p:spPr>
+            <a:xfrm>
+              <a:off x="762095" y="12573000"/>
+              <a:ext cx="1232613" cy="381000"/>
+            </a:xfrm>
+            <a:prstGeom prst="rect">
+              <a:avLst/>
+            </a:prstGeom>
+            <a:noFill/>
+            <a:ln>
+              <a:noFill/>
+            </a:ln>
+          </p:spPr>
+          <p:txBody>
+            <a:bodyPr anchorCtr="0" anchor="ctr" bIns="91425" lIns="91425" spcFirstLastPara="1" rIns="91425" wrap="square" tIns="91425">
+              <a:noAutofit/>
+            </a:bodyPr>
+            <a:lstStyle/>
+            <a:p>
+              <a:pPr indent="0" lvl="0" marL="0" rtl="0" algn="l">
+                <a:spcBef>
+                  <a:spcPts val="0"/>
+                </a:spcBef>
+                <a:spcAft>
+                  <a:spcPts val="0"/>
+                </a:spcAft>
+                <a:buNone/>
+              </a:pPr>
+              <a:r>
+                <a:t/>
+              </a:r>
+              <a:endParaRPr/>
+            </a:p>
+          </p:txBody>
+        </p:sp>
+        <p:pic>
+          <p:nvPicPr>
+            <p:cNvPr descr=" " id="310" name="Google Shape;310;p30"/>
+            <p:cNvPicPr preferRelativeResize="0"/>
+            <p:nvPr/>
+          </p:nvPicPr>
+          <p:blipFill rotWithShape="1">
+            <a:blip r:embed="rId3">
+              <a:alphaModFix/>
+            </a:blip>
+            <a:srcRect b="0" l="0" r="0" t="0"/>
+            <a:stretch/>
+          </p:blipFill>
+          <p:spPr>
+            <a:xfrm>
+              <a:off x="1270270" y="12621921"/>
+              <a:ext cx="700659" cy="240190"/>
+            </a:xfrm>
+            <a:prstGeom prst="rect">
+              <a:avLst/>
+            </a:prstGeom>
+            <a:noFill/>
+            <a:ln>
+              <a:noFill/>
+            </a:ln>
+          </p:spPr>
+        </p:pic>
+        <p:pic>
+          <p:nvPicPr>
+            <p:cNvPr descr=" " id="311" name="Google Shape;311;p30"/>
+            <p:cNvPicPr preferRelativeResize="0"/>
+            <p:nvPr/>
+          </p:nvPicPr>
+          <p:blipFill rotWithShape="1">
+            <a:blip r:embed="rId4">
+              <a:alphaModFix/>
+            </a:blip>
+            <a:srcRect b="0" l="0" r="0" t="0"/>
+            <a:stretch/>
+          </p:blipFill>
+          <p:spPr>
+            <a:xfrm>
+              <a:off x="762095" y="12573000"/>
+              <a:ext cx="381048" cy="381000"/>
+            </a:xfrm>
+            <a:prstGeom prst="rect">
+              <a:avLst/>
+            </a:prstGeom>
+            <a:noFill/>
+            <a:ln>
+              <a:noFill/>
+            </a:ln>
+          </p:spPr>
+        </p:pic>
+      </p:grpSp>
+      <p:sp>
+        <p:nvSpPr>
+          <p:cNvPr id="312" name="Google Shape;312;p30"/>
+          <p:cNvSpPr/>
+          <p:nvPr/>
+        </p:nvSpPr>
+        <p:spPr>
+          <a:xfrm>
+            <a:off x="1270160" y="1092200"/>
+            <a:ext cx="2781410" cy="257153"/>
+          </a:xfrm>
+          <a:prstGeom prst="rect">
+            <a:avLst/>
+          </a:prstGeom>
+          <a:noFill/>
+          <a:ln>
+            <a:noFill/>
+          </a:ln>
+        </p:spPr>
+        <p:txBody>
+          <a:bodyPr anchorCtr="0" anchor="ctr" bIns="91425" lIns="91425" spcFirstLastPara="1" rIns="91425" wrap="square" tIns="91425">
+            <a:noAutofit/>
+          </a:bodyPr>
+          <a:lstStyle/>
+          <a:p>
+            <a:pPr indent="0" lvl="0" marL="0" rtl="0" algn="l">
+              <a:spcBef>
+                <a:spcPts val="0"/>
+              </a:spcBef>
+              <a:spcAft>
+                <a:spcPts val="0"/>
+              </a:spcAft>
+              <a:buNone/>
+            </a:pPr>
+            <a:r>
+              <a:t/>
+            </a:r>
+            <a:endParaRPr/>
+          </a:p>
+        </p:txBody>
+      </p:sp>
+      <p:sp>
+        <p:nvSpPr>
+          <p:cNvPr id="313" name="Google Shape;313;p30"/>
+          <p:cNvSpPr txBox="1"/>
+          <p:nvPr>
+            <p:ph idx="1" type="body"/>
+          </p:nvPr>
+        </p:nvSpPr>
+        <p:spPr>
+          <a:xfrm>
+            <a:off x="4637088" y="338139"/>
+            <a:ext cx="3862387" cy="246062"/>
+          </a:xfrm>
+          <a:prstGeom prst="rect">
+            <a:avLst/>
+          </a:prstGeom>
+          <a:noFill/>
+          <a:ln>
+            <a:noFill/>
+          </a:ln>
+        </p:spPr>
+        <p:txBody>
+          <a:bodyPr anchorCtr="0" anchor="t" bIns="45700" lIns="91425" spcFirstLastPara="1" rIns="91425" wrap="square" tIns="45700">
+            <a:noAutofit/>
+          </a:bodyPr>
+          <a:lstStyle>
+            <a:lvl1pPr indent="-228600" lvl="0" marL="457200" marR="0" rtl="0" algn="l">
+              <a:lnSpc>
+                <a:spcPct val="90000"/>
+              </a:lnSpc>
+              <a:spcBef>
+                <a:spcPts val="750"/>
+              </a:spcBef>
+              <a:spcAft>
+                <a:spcPts val="0"/>
+              </a:spcAft>
+              <a:buClr>
+                <a:schemeClr val="accent1"/>
+              </a:buClr>
+              <a:buSzPts val="1200"/>
+              <a:buFont typeface="Arial"/>
+              <a:buNone/>
+              <a:defRPr b="0" i="0" sz="1200" u="none" cap="none" strike="noStrike">
+                <a:solidFill>
+                  <a:schemeClr val="accent1"/>
+                </a:solidFill>
+                <a:latin typeface="Play"/>
+                <a:ea typeface="Play"/>
+                <a:cs typeface="Play"/>
+                <a:sym typeface="Play"/>
+              </a:defRPr>
+            </a:lvl1pPr>
+            <a:lvl2pPr indent="-342900" lvl="1" marL="914400" marR="0" rtl="0" algn="l">
+              <a:lnSpc>
+                <a:spcPct val="90000"/>
+              </a:lnSpc>
+              <a:spcBef>
+                <a:spcPts val="375"/>
+              </a:spcBef>
+              <a:spcAft>
+                <a:spcPts val="0"/>
+              </a:spcAft>
+              <a:buClr>
+                <a:schemeClr val="lt1"/>
+              </a:buClr>
+              <a:buSzPts val="1800"/>
+              <a:buFont typeface="Arial"/>
+              <a:buChar char="•"/>
+              <a:defRPr b="0" i="0" sz="1800" u="none" cap="none" strike="noStrike">
+                <a:solidFill>
+                  <a:schemeClr val="lt1"/>
+                </a:solidFill>
+                <a:latin typeface="Calibri"/>
+                <a:ea typeface="Calibri"/>
+                <a:cs typeface="Calibri"/>
+                <a:sym typeface="Calibri"/>
+              </a:defRPr>
+            </a:lvl2pPr>
+            <a:lvl3pPr indent="-323850" lvl="2" marL="1371600" marR="0" rtl="0" algn="l">
+              <a:lnSpc>
+                <a:spcPct val="90000"/>
+              </a:lnSpc>
+              <a:spcBef>
+                <a:spcPts val="375"/>
+              </a:spcBef>
+              <a:spcAft>
+                <a:spcPts val="0"/>
+              </a:spcAft>
+              <a:buClr>
+                <a:schemeClr val="lt1"/>
+              </a:buClr>
+              <a:buSzPts val="1500"/>
+              <a:buFont typeface="Arial"/>
+              <a:buChar char="•"/>
+              <a:defRPr b="0" i="0" sz="1500" u="none" cap="none" strike="noStrike">
+                <a:solidFill>
+                  <a:schemeClr val="lt1"/>
+                </a:solidFill>
+                <a:latin typeface="Calibri"/>
+                <a:ea typeface="Calibri"/>
+                <a:cs typeface="Calibri"/>
+                <a:sym typeface="Calibri"/>
+              </a:defRPr>
+            </a:lvl3pPr>
+            <a:lvl4pPr indent="-314325" lvl="3" marL="1828800" marR="0" rtl="0" algn="l">
+              <a:lnSpc>
+                <a:spcPct val="90000"/>
+              </a:lnSpc>
+              <a:spcBef>
+                <a:spcPts val="375"/>
+              </a:spcBef>
+              <a:spcAft>
+                <a:spcPts val="0"/>
+              </a:spcAft>
+              <a:buClr>
+                <a:schemeClr val="lt1"/>
+              </a:buClr>
+              <a:buSzPts val="1350"/>
+              <a:buFont typeface="Arial"/>
+              <a:buChar char="•"/>
+              <a:defRPr b="0" i="0" sz="1350" u="none" cap="none" strike="noStrike">
+                <a:solidFill>
+                  <a:schemeClr val="lt1"/>
+                </a:solidFill>
+                <a:latin typeface="Calibri"/>
+                <a:ea typeface="Calibri"/>
+                <a:cs typeface="Calibri"/>
+                <a:sym typeface="Calibri"/>
+              </a:defRPr>
+            </a:lvl4pPr>
+            <a:lvl5pPr indent="-314325" lvl="4" marL="2286000" marR="0" rtl="0" algn="l">
+              <a:lnSpc>
+                <a:spcPct val="90000"/>
+              </a:lnSpc>
+              <a:spcBef>
+                <a:spcPts val="375"/>
+              </a:spcBef>
+              <a:spcAft>
+                <a:spcPts val="0"/>
+              </a:spcAft>
+              <a:buClr>
+                <a:schemeClr val="lt1"/>
+              </a:buClr>
+              <a:buSzPts val="1350"/>
+              <a:buFont typeface="Arial"/>
+              <a:buChar char="•"/>
+              <a:defRPr b="0" i="0" sz="1350" u="none" cap="none" strike="noStrike">
+                <a:solidFill>
+                  <a:schemeClr val="lt1"/>
+                </a:solidFill>
+                <a:latin typeface="Calibri"/>
+                <a:ea typeface="Calibri"/>
+                <a:cs typeface="Calibri"/>
+                <a:sym typeface="Calibri"/>
+              </a:defRPr>
+            </a:lvl5pPr>
+            <a:lvl6pPr indent="-314325" lvl="5" marL="2743200" marR="0" rtl="0" algn="l">
+              <a:lnSpc>
+                <a:spcPct val="90000"/>
+              </a:lnSpc>
+              <a:spcBef>
+                <a:spcPts val="375"/>
+              </a:spcBef>
+              <a:spcAft>
+                <a:spcPts val="0"/>
+              </a:spcAft>
+              <a:buClr>
+                <a:schemeClr val="lt1"/>
+              </a:buClr>
+              <a:buSzPts val="1350"/>
+              <a:buFont typeface="Arial"/>
+              <a:buChar char="•"/>
+              <a:defRPr b="0" i="0" sz="1350" u="none" cap="none" strike="noStrike">
+                <a:solidFill>
+                  <a:schemeClr val="lt1"/>
+                </a:solidFill>
+                <a:latin typeface="Calibri"/>
+                <a:ea typeface="Calibri"/>
+                <a:cs typeface="Calibri"/>
+                <a:sym typeface="Calibri"/>
+              </a:defRPr>
+            </a:lvl6pPr>
+            <a:lvl7pPr indent="-314325" lvl="6" marL="3200400" marR="0" rtl="0" algn="l">
+              <a:lnSpc>
+                <a:spcPct val="90000"/>
+              </a:lnSpc>
+              <a:spcBef>
+                <a:spcPts val="375"/>
+              </a:spcBef>
+              <a:spcAft>
+                <a:spcPts val="0"/>
+              </a:spcAft>
+              <a:buClr>
+                <a:schemeClr val="lt1"/>
+              </a:buClr>
+              <a:buSzPts val="1350"/>
+              <a:buFont typeface="Arial"/>
+              <a:buChar char="•"/>
+              <a:defRPr b="0" i="0" sz="1350" u="none" cap="none" strike="noStrike">
+                <a:solidFill>
+                  <a:schemeClr val="lt1"/>
+                </a:solidFill>
+                <a:latin typeface="Calibri"/>
+                <a:ea typeface="Calibri"/>
+                <a:cs typeface="Calibri"/>
+                <a:sym typeface="Calibri"/>
+              </a:defRPr>
+            </a:lvl7pPr>
+            <a:lvl8pPr indent="-314325" lvl="7" marL="3657600" marR="0" rtl="0" algn="l">
+              <a:lnSpc>
+                <a:spcPct val="90000"/>
+              </a:lnSpc>
+              <a:spcBef>
+                <a:spcPts val="375"/>
+              </a:spcBef>
+              <a:spcAft>
+                <a:spcPts val="0"/>
+              </a:spcAft>
+              <a:buClr>
+                <a:schemeClr val="lt1"/>
+              </a:buClr>
+              <a:buSzPts val="1350"/>
+              <a:buFont typeface="Arial"/>
+              <a:buChar char="•"/>
+              <a:defRPr b="0" i="0" sz="1350" u="none" cap="none" strike="noStrike">
+                <a:solidFill>
+                  <a:schemeClr val="lt1"/>
+                </a:solidFill>
+                <a:latin typeface="Calibri"/>
+                <a:ea typeface="Calibri"/>
+                <a:cs typeface="Calibri"/>
+                <a:sym typeface="Calibri"/>
+              </a:defRPr>
+            </a:lvl8pPr>
+            <a:lvl9pPr indent="-314325" lvl="8" marL="4114800" marR="0" rtl="0" algn="l">
+              <a:lnSpc>
+                <a:spcPct val="90000"/>
+              </a:lnSpc>
+              <a:spcBef>
+                <a:spcPts val="375"/>
+              </a:spcBef>
+              <a:spcAft>
+                <a:spcPts val="0"/>
+              </a:spcAft>
+              <a:buClr>
+                <a:schemeClr val="lt1"/>
+              </a:buClr>
+              <a:buSzPts val="1350"/>
+              <a:buFont typeface="Arial"/>
+              <a:buChar char="•"/>
+              <a:defRPr b="0" i="0" sz="1350" u="none" cap="none" strike="noStrike">
+                <a:solidFill>
+                  <a:schemeClr val="lt1"/>
+                </a:solidFill>
+                <a:latin typeface="Calibri"/>
+                <a:ea typeface="Calibri"/>
+                <a:cs typeface="Calibri"/>
+                <a:sym typeface="Calibri"/>
+              </a:defRPr>
+            </a:lvl9pPr>
+          </a:lstStyle>
+          <a:p/>
+        </p:txBody>
+      </p:sp>
+      <p:sp>
+        <p:nvSpPr>
+          <p:cNvPr id="314" name="Google Shape;314;p30"/>
+          <p:cNvSpPr txBox="1"/>
+          <p:nvPr>
+            <p:ph idx="2" type="body"/>
+          </p:nvPr>
+        </p:nvSpPr>
+        <p:spPr>
+          <a:xfrm>
+            <a:off x="4637088" y="676278"/>
+            <a:ext cx="3862387" cy="3737102"/>
+          </a:xfrm>
+          <a:prstGeom prst="rect">
+            <a:avLst/>
+          </a:prstGeom>
+          <a:noFill/>
+          <a:ln>
+            <a:noFill/>
+          </a:ln>
+        </p:spPr>
+        <p:txBody>
+          <a:bodyPr anchorCtr="0" anchor="t" bIns="45700" lIns="91425" spcFirstLastPara="1" rIns="91425" wrap="square" tIns="45700">
+            <a:noAutofit/>
+          </a:bodyPr>
+          <a:lstStyle>
+            <a:lvl1pPr indent="-292100" lvl="0" marL="457200" marR="0" rtl="0" algn="l">
+              <a:lnSpc>
+                <a:spcPct val="90000"/>
+              </a:lnSpc>
+              <a:spcBef>
+                <a:spcPts val="750"/>
+              </a:spcBef>
+              <a:spcAft>
+                <a:spcPts val="0"/>
+              </a:spcAft>
+              <a:buClr>
+                <a:schemeClr val="lt1"/>
+              </a:buClr>
+              <a:buSzPts val="1000"/>
+              <a:buFont typeface="Arial"/>
+              <a:buChar char="•"/>
+              <a:defRPr b="0" i="0" sz="1000" u="none" cap="none" strike="noStrike">
+                <a:solidFill>
+                  <a:schemeClr val="lt1"/>
+                </a:solidFill>
+                <a:latin typeface="Play"/>
+                <a:ea typeface="Play"/>
+                <a:cs typeface="Play"/>
+                <a:sym typeface="Play"/>
+              </a:defRPr>
+            </a:lvl1pPr>
+            <a:lvl2pPr indent="-342900" lvl="1" marL="914400" marR="0" rtl="0" algn="l">
+              <a:lnSpc>
+                <a:spcPct val="90000"/>
+              </a:lnSpc>
+              <a:spcBef>
+                <a:spcPts val="375"/>
+              </a:spcBef>
+              <a:spcAft>
+                <a:spcPts val="0"/>
+              </a:spcAft>
+              <a:buClr>
+                <a:schemeClr val="lt1"/>
+              </a:buClr>
+              <a:buSzPts val="1800"/>
+              <a:buFont typeface="Arial"/>
+              <a:buChar char="•"/>
+              <a:defRPr b="0" i="0" sz="1800" u="none" cap="none" strike="noStrike">
+                <a:solidFill>
+                  <a:schemeClr val="lt1"/>
+                </a:solidFill>
+                <a:latin typeface="Calibri"/>
+                <a:ea typeface="Calibri"/>
+                <a:cs typeface="Calibri"/>
+                <a:sym typeface="Calibri"/>
+              </a:defRPr>
+            </a:lvl2pPr>
+            <a:lvl3pPr indent="-323850" lvl="2" marL="1371600" marR="0" rtl="0" algn="l">
+              <a:lnSpc>
+                <a:spcPct val="90000"/>
+              </a:lnSpc>
+              <a:spcBef>
+                <a:spcPts val="375"/>
+              </a:spcBef>
+              <a:spcAft>
+                <a:spcPts val="0"/>
+              </a:spcAft>
+              <a:buClr>
+                <a:schemeClr val="lt1"/>
+              </a:buClr>
+              <a:buSzPts val="1500"/>
+              <a:buFont typeface="Arial"/>
+              <a:buChar char="•"/>
+              <a:defRPr b="0" i="0" sz="1500" u="none" cap="none" strike="noStrike">
+                <a:solidFill>
+                  <a:schemeClr val="lt1"/>
+                </a:solidFill>
+                <a:latin typeface="Calibri"/>
+                <a:ea typeface="Calibri"/>
+                <a:cs typeface="Calibri"/>
+                <a:sym typeface="Calibri"/>
+              </a:defRPr>
+            </a:lvl3pPr>
+            <a:lvl4pPr indent="-314325" lvl="3" marL="1828800" marR="0" rtl="0" algn="l">
+              <a:lnSpc>
+                <a:spcPct val="90000"/>
+              </a:lnSpc>
+              <a:spcBef>
+                <a:spcPts val="375"/>
+              </a:spcBef>
+              <a:spcAft>
+                <a:spcPts val="0"/>
+              </a:spcAft>
+              <a:buClr>
+                <a:schemeClr val="lt1"/>
+              </a:buClr>
+              <a:buSzPts val="1350"/>
+              <a:buFont typeface="Arial"/>
+              <a:buChar char="•"/>
+              <a:defRPr b="0" i="0" sz="1350" u="none" cap="none" strike="noStrike">
+                <a:solidFill>
+                  <a:schemeClr val="lt1"/>
+                </a:solidFill>
+                <a:latin typeface="Calibri"/>
+                <a:ea typeface="Calibri"/>
+                <a:cs typeface="Calibri"/>
+                <a:sym typeface="Calibri"/>
+              </a:defRPr>
+            </a:lvl4pPr>
+            <a:lvl5pPr indent="-314325" lvl="4" marL="2286000" marR="0" rtl="0" algn="l">
+              <a:lnSpc>
+                <a:spcPct val="90000"/>
+              </a:lnSpc>
+              <a:spcBef>
+                <a:spcPts val="375"/>
+              </a:spcBef>
+              <a:spcAft>
+                <a:spcPts val="0"/>
+              </a:spcAft>
+              <a:buClr>
+                <a:schemeClr val="lt1"/>
+              </a:buClr>
+              <a:buSzPts val="1350"/>
+              <a:buFont typeface="Arial"/>
+              <a:buChar char="•"/>
+              <a:defRPr b="0" i="0" sz="1350" u="none" cap="none" strike="noStrike">
+                <a:solidFill>
+                  <a:schemeClr val="lt1"/>
+                </a:solidFill>
+                <a:latin typeface="Calibri"/>
+                <a:ea typeface="Calibri"/>
+                <a:cs typeface="Calibri"/>
+                <a:sym typeface="Calibri"/>
+              </a:defRPr>
+            </a:lvl5pPr>
+            <a:lvl6pPr indent="-314325" lvl="5" marL="2743200" marR="0" rtl="0" algn="l">
+              <a:lnSpc>
+                <a:spcPct val="90000"/>
+              </a:lnSpc>
+              <a:spcBef>
+                <a:spcPts val="375"/>
+              </a:spcBef>
+              <a:spcAft>
+                <a:spcPts val="0"/>
+              </a:spcAft>
+              <a:buClr>
+                <a:schemeClr val="lt1"/>
+              </a:buClr>
+              <a:buSzPts val="1350"/>
+              <a:buFont typeface="Arial"/>
+              <a:buChar char="•"/>
+              <a:defRPr b="0" i="0" sz="1350" u="none" cap="none" strike="noStrike">
+                <a:solidFill>
+                  <a:schemeClr val="lt1"/>
+                </a:solidFill>
+                <a:latin typeface="Calibri"/>
+                <a:ea typeface="Calibri"/>
+                <a:cs typeface="Calibri"/>
+                <a:sym typeface="Calibri"/>
+              </a:defRPr>
+            </a:lvl6pPr>
+            <a:lvl7pPr indent="-314325" lvl="6" marL="3200400" marR="0" rtl="0" algn="l">
+              <a:lnSpc>
+                <a:spcPct val="90000"/>
+              </a:lnSpc>
+              <a:spcBef>
+                <a:spcPts val="375"/>
+              </a:spcBef>
+              <a:spcAft>
+                <a:spcPts val="0"/>
+              </a:spcAft>
+              <a:buClr>
+                <a:schemeClr val="lt1"/>
+              </a:buClr>
+              <a:buSzPts val="1350"/>
+              <a:buFont typeface="Arial"/>
+              <a:buChar char="•"/>
+              <a:defRPr b="0" i="0" sz="1350" u="none" cap="none" strike="noStrike">
+                <a:solidFill>
+                  <a:schemeClr val="lt1"/>
+                </a:solidFill>
+                <a:latin typeface="Calibri"/>
+                <a:ea typeface="Calibri"/>
+                <a:cs typeface="Calibri"/>
+                <a:sym typeface="Calibri"/>
+              </a:defRPr>
+            </a:lvl7pPr>
+            <a:lvl8pPr indent="-314325" lvl="7" marL="3657600" marR="0" rtl="0" algn="l">
+              <a:lnSpc>
+                <a:spcPct val="90000"/>
+              </a:lnSpc>
+              <a:spcBef>
+                <a:spcPts val="375"/>
+              </a:spcBef>
+              <a:spcAft>
+                <a:spcPts val="0"/>
+              </a:spcAft>
+              <a:buClr>
+                <a:schemeClr val="lt1"/>
+              </a:buClr>
+              <a:buSzPts val="1350"/>
+              <a:buFont typeface="Arial"/>
+              <a:buChar char="•"/>
+              <a:defRPr b="0" i="0" sz="1350" u="none" cap="none" strike="noStrike">
+                <a:solidFill>
+                  <a:schemeClr val="lt1"/>
+                </a:solidFill>
+                <a:latin typeface="Calibri"/>
+                <a:ea typeface="Calibri"/>
+                <a:cs typeface="Calibri"/>
+                <a:sym typeface="Calibri"/>
+              </a:defRPr>
+            </a:lvl8pPr>
+            <a:lvl9pPr indent="-314325" lvl="8" marL="4114800" marR="0" rtl="0" algn="l">
+              <a:lnSpc>
+                <a:spcPct val="90000"/>
+              </a:lnSpc>
+              <a:spcBef>
+                <a:spcPts val="375"/>
+              </a:spcBef>
+              <a:spcAft>
+                <a:spcPts val="0"/>
+              </a:spcAft>
+              <a:buClr>
+                <a:schemeClr val="lt1"/>
+              </a:buClr>
+              <a:buSzPts val="1350"/>
+              <a:buFont typeface="Arial"/>
+              <a:buChar char="•"/>
+              <a:defRPr b="0" i="0" sz="1350" u="none" cap="none" strike="noStrike">
+                <a:solidFill>
+                  <a:schemeClr val="lt1"/>
+                </a:solidFill>
+                <a:latin typeface="Calibri"/>
+                <a:ea typeface="Calibri"/>
+                <a:cs typeface="Calibri"/>
+                <a:sym typeface="Calibri"/>
+              </a:defRPr>
+            </a:lvl9pPr>
+          </a:lstStyle>
+          <a:p/>
+        </p:txBody>
+      </p:sp>
     </p:spTree>
   </p:cSld>
   <p:clrMapOvr>
@@ -5316,6 +6056,7 @@
     <p:sldLayoutId id="2147483655" r:id="rId5"/>
     <p:sldLayoutId id="2147483658" r:id="rId8"/>
     <p:sldLayoutId id="2147483659" r:id="rId9"/>
+    <p:sldLayoutId id="2147483675" r:id="rId25"/>
   </p:sldLayoutIdLst>
   <p:hf dt="0" ftr="0" hdr="0" sldNum="0"/>
   <p:txStyles>
@@ -6030,8 +6771,8 @@
         </p:nvSpPr>
         <p:spPr>
           <a:xfrm>
-            <a:off x="2473771" y="1370481"/>
-            <a:ext cx="4288279" cy="800046"/>
+            <a:off x="1143190" y="1190618"/>
+            <a:ext cx="6949440" cy="544950"/>
           </a:xfrm>
           <a:prstGeom prst="rect">
             <a:avLst/>
@@ -6042,7 +6783,7 @@
           </a:ln>
         </p:spPr>
         <p:txBody>
-          <a:bodyPr anchorCtr="0" anchor="t" bIns="45700" lIns="91425" spcFirstLastPara="1" rIns="91425" wrap="square" tIns="45700">
+          <a:bodyPr anchorCtr="0" anchor="t" bIns="45700" lIns="91425" spcFirstLastPara="1" rIns="91425" wrap="square" tIns="45700" vert="horz">
             <a:normAutofit/>
           </a:bodyPr>
           <a:lstStyle/>
@@ -6055,7 +6796,7 @@
                 <a:spcPts val="0"/>
               </a:spcBef>
               <a:spcAft>
-                <a:spcPts val="270"/>
+                <a:spcPts val="359"/>
               </a:spcAft>
               <a:buClr>
                 <a:schemeClr val="lt1"/>
@@ -6065,8 +6806,8 @@
               <a:buNone/>
             </a:pPr>
             <a:r>
-              <a:rPr sz="1800"/>
-              <a:t>Ускорение работы сотрудников через ИИ</a:t>
+              <a:rPr sz="2400"/>
+              <a:t>Поиск инструкции занимает до 30 минут</a:t>
             </a:r>
             <a:endParaRPr/>
           </a:p>
@@ -6082,8 +6823,8 @@
         </p:nvSpPr>
         <p:spPr>
           <a:xfrm>
-            <a:off x="2473770" y="2199720"/>
-            <a:ext cx="4288279" cy="502920"/>
+            <a:off x="1143190" y="1836152"/>
+            <a:ext cx="6949440" cy="384048"/>
           </a:xfrm>
           <a:prstGeom prst="rect">
             <a:avLst/>
@@ -6094,7 +6835,7 @@
           </a:ln>
         </p:spPr>
         <p:txBody>
-          <a:bodyPr anchorCtr="0" anchor="t" bIns="45700" lIns="91425" spcFirstLastPara="1" rIns="91425" wrap="square" tIns="45700">
+          <a:bodyPr anchorCtr="0" anchor="t" bIns="45700" lIns="91425" spcFirstLastPara="1" rIns="91425" wrap="square" tIns="45700" vert="horz">
             <a:normAutofit/>
           </a:bodyPr>
           <a:lstStyle/>
@@ -6107,7 +6848,7 @@
                 <a:spcPts val="0"/>
               </a:spcBef>
               <a:spcAft>
-                <a:spcPts val="165"/>
+                <a:spcPts val="182"/>
               </a:spcAft>
               <a:buClr>
                 <a:schemeClr val="lt1"/>
@@ -6116,8 +6857,8 @@
               <a:buNone/>
             </a:pPr>
             <a:r>
-              <a:rPr sz="1100"/>
-              <a:t>Инициатива по внедрению ИИ-помощника во внутренний портал</a:t>
+              <a:rPr sz="1220"/>
+              <a:t>Инициатива по внедрению ИИ-помощника для ускорения работы сотрудников</a:t>
             </a:r>
             <a:endParaRPr/>
           </a:p>
@@ -6132,369 +6873,6 @@
 </file>
 
 <file path=ppt/slides/slide10.xml><?xml version="1.0" encoding="utf-8"?>
-<p:sld xmlns:a="http://schemas.openxmlformats.org/drawingml/2006/main" xmlns:p="http://schemas.openxmlformats.org/presentationml/2006/main" xmlns:r="http://schemas.openxmlformats.org/officeDocument/2006/relationships">
-  <p:cSld>
-    <p:spTree>
-      <p:nvGrpSpPr>
-        <p:cNvPr id="1" name=""/>
-        <p:cNvGrpSpPr/>
-        <p:nvPr/>
-      </p:nvGrpSpPr>
-      <p:grpSpPr/>
-      <p:sp>
-        <p:nvSpPr>
-          <p:cNvPr id="851" name="Google Shape;851;p60"/>
-          <p:cNvSpPr/>
-          <p:nvPr/>
-        </p:nvSpPr>
-        <p:spPr>
-          <a:xfrm>
-            <a:off x="8667705" y="4666977"/>
-            <a:ext cx="190499" cy="190475"/>
-          </a:xfrm>
-          <a:prstGeom prst="rect">
-            <a:avLst/>
-          </a:prstGeom>
-          <a:noFill/>
-          <a:ln>
-            <a:noFill/>
-          </a:ln>
-        </p:spPr>
-        <p:txBody>
-          <a:bodyPr anchorCtr="0" anchor="ctr" bIns="91425" lIns="91425" spcFirstLastPara="1" rIns="91425" wrap="square" tIns="91425">
-            <a:noAutofit/>
-          </a:bodyPr>
-          <a:lstStyle/>
-          <a:p>
-            <a:pPr indent="0" lvl="0" marL="0" rtl="0" algn="l">
-              <a:spcBef>
-                <a:spcPts val="0"/>
-              </a:spcBef>
-              <a:spcAft>
-                <a:spcPts val="0"/>
-              </a:spcAft>
-              <a:buNone/>
-            </a:pPr>
-            <a:r>
-              <a:t/>
-            </a:r>
-            <a:endParaRPr/>
-          </a:p>
-        </p:txBody>
-      </p:sp>
-      <p:sp>
-        <p:nvSpPr>
-          <p:cNvPr id="852" name="Google Shape;852;p60"/>
-          <p:cNvSpPr/>
-          <p:nvPr/>
-        </p:nvSpPr>
-        <p:spPr>
-          <a:xfrm>
-            <a:off x="285748" y="286047"/>
-            <a:ext cx="8572456" cy="4176169"/>
-          </a:xfrm>
-          <a:prstGeom prst="rect">
-            <a:avLst/>
-          </a:prstGeom>
-          <a:noFill/>
-          <a:ln>
-            <a:noFill/>
-          </a:ln>
-        </p:spPr>
-        <p:txBody>
-          <a:bodyPr anchorCtr="0" anchor="ctr" bIns="91425" lIns="91425" spcFirstLastPara="1" rIns="91425" wrap="square" tIns="91425">
-            <a:noAutofit/>
-          </a:bodyPr>
-          <a:lstStyle/>
-          <a:p>
-            <a:pPr indent="0" lvl="0" marL="0" rtl="0" algn="l">
-              <a:spcBef>
-                <a:spcPts val="0"/>
-              </a:spcBef>
-              <a:spcAft>
-                <a:spcPts val="0"/>
-              </a:spcAft>
-              <a:buNone/>
-            </a:pPr>
-            <a:r>
-              <a:t/>
-            </a:r>
-            <a:endParaRPr/>
-          </a:p>
-        </p:txBody>
-      </p:sp>
-      <p:sp>
-        <p:nvSpPr>
-          <p:cNvPr id="853" name="Google Shape;853;p60"/>
-          <p:cNvSpPr/>
-          <p:nvPr/>
-        </p:nvSpPr>
-        <p:spPr>
-          <a:xfrm>
-            <a:off x="285749" y="1209852"/>
-            <a:ext cx="6648415" cy="3252364"/>
-          </a:xfrm>
-          <a:prstGeom prst="rect">
-            <a:avLst/>
-          </a:prstGeom>
-          <a:noFill/>
-          <a:ln>
-            <a:noFill/>
-          </a:ln>
-        </p:spPr>
-        <p:txBody>
-          <a:bodyPr anchorCtr="0" anchor="ctr" bIns="91425" lIns="91425" spcFirstLastPara="1" rIns="91425" wrap="square" tIns="91425">
-            <a:noAutofit/>
-          </a:bodyPr>
-          <a:lstStyle/>
-          <a:p>
-            <a:pPr indent="0" lvl="0" marL="0" rtl="0" algn="l">
-              <a:spcBef>
-                <a:spcPts val="0"/>
-              </a:spcBef>
-              <a:spcAft>
-                <a:spcPts val="0"/>
-              </a:spcAft>
-              <a:buNone/>
-            </a:pPr>
-            <a:r>
-              <a:t/>
-            </a:r>
-            <a:endParaRPr/>
-          </a:p>
-        </p:txBody>
-      </p:sp>
-      <p:sp>
-        <p:nvSpPr>
-          <p:cNvPr id="872" name="BrandDeck Text 872"/>
-          <p:cNvSpPr txBox="1"/>
-          <p:nvPr>
-            <p:ph type="title"/>
-          </p:nvPr>
-        </p:nvSpPr>
-        <p:spPr>
-          <a:xfrm>
-            <a:off x="177971" y="282949"/>
-            <a:ext cx="5025400" cy="753371"/>
-          </a:xfrm>
-          <a:prstGeom prst="rect">
-            <a:avLst/>
-          </a:prstGeom>
-          <a:noFill/>
-          <a:ln>
-            <a:noFill/>
-          </a:ln>
-        </p:spPr>
-        <p:txBody>
-          <a:bodyPr anchorCtr="0" anchor="t" bIns="45700" lIns="91425" spcFirstLastPara="1" rIns="91425" wrap="square" tIns="45700">
-            <a:normAutofit/>
-          </a:bodyPr>
-          <a:lstStyle/>
-          <a:p>
-            <a:pPr indent="0" marL="0" rtl="0" algn="l">
-              <a:lnSpc>
-                <a:spcPct val="115000"/>
-              </a:lnSpc>
-              <a:spcBef>
-                <a:spcPts val="0"/>
-              </a:spcBef>
-              <a:spcAft>
-                <a:spcPts val="270"/>
-              </a:spcAft>
-              <a:buClr>
-                <a:schemeClr val="dk1"/>
-              </a:buClr>
-              <a:buSzPts val="2400"/>
-              <a:buFont typeface="Play"/>
-              <a:buNone/>
-            </a:pPr>
-            <a:r>
-              <a:rPr sz="1800"/>
-              <a:t>Измеряем время поиска и долю закрытых обращений без специалиста</a:t>
-            </a:r>
-            <a:endParaRPr/>
-          </a:p>
-        </p:txBody>
-      </p:sp>
-      <p:graphicFrame>
-        <p:nvGraphicFramePr>
-          <p:cNvPr id="873" name="BrandDeck Table"/>
-          <p:cNvGraphicFramePr>
-            <a:graphicFrameLocks noGrp="1"/>
-          </p:cNvGraphicFramePr>
-          <p:nvPr/>
-        </p:nvGraphicFramePr>
-        <p:xfrm>
-          <a:off x="438148" y="1819373"/>
-          <a:ext cx="6381717" cy="2528556"/>
-        </p:xfrm>
-        <a:graphic>
-          <a:graphicData uri="http://schemas.openxmlformats.org/drawingml/2006/table">
-            <a:tbl>
-              <a:tblPr firstRow="1" bandRow="1">
-                <a:tableStyleId>{5C22544A-7EE6-4342-B048-85BDC9FD1C3A}</a:tableStyleId>
-              </a:tblPr>
-              <a:tblGrid>
-                <a:gridCol w="3190858"/>
-                <a:gridCol w="3190859"/>
-              </a:tblGrid>
-              <a:tr h="697564">
-                <a:tc>
-                  <a:txBody>
-                    <a:bodyPr/>
-                    <a:lstStyle/>
-                    <a:p>
-                      <a:pPr algn="l"/>
-                      <a:r>
-                        <a:rPr sz="1320" b="1">
-                          <a:solidFill>
-                            <a:srgbClr val="FFFFFF"/>
-                          </a:solidFill>
-                          <a:latin typeface="Play"/>
-                        </a:rPr>
-                        <a:t>Метрика</a:t>
-                      </a:r>
-                    </a:p>
-                  </a:txBody>
-                  <a:tcPr marL="54864" marR="54864" anchor="ctr">
-                    <a:solidFill>
-                      <a:srgbClr val="006DEB"/>
-                    </a:solidFill>
-                  </a:tcPr>
-                </a:tc>
-                <a:tc>
-                  <a:txBody>
-                    <a:bodyPr/>
-                    <a:lstStyle/>
-                    <a:p>
-                      <a:pPr algn="l"/>
-                      <a:r>
-                        <a:rPr sz="1320" b="1">
-                          <a:solidFill>
-                            <a:srgbClr val="FFFFFF"/>
-                          </a:solidFill>
-                          <a:latin typeface="Play"/>
-                        </a:rPr>
-                        <a:t>Что измеряем</a:t>
-                      </a:r>
-                    </a:p>
-                  </a:txBody>
-                  <a:tcPr marL="54864" marR="54864" anchor="ctr">
-                    <a:solidFill>
-                      <a:srgbClr val="006DEB"/>
-                    </a:solidFill>
-                  </a:tcPr>
-                </a:tc>
-              </a:tr>
-              <a:tr h="915496">
-                <a:tc>
-                  <a:txBody>
-                    <a:bodyPr/>
-                    <a:lstStyle/>
-                    <a:p>
-                      <a:pPr algn="l"/>
-                      <a:r>
-                        <a:rPr sz="1320" b="0">
-                          <a:solidFill>
-                            <a:srgbClr val="111111"/>
-                          </a:solidFill>
-                          <a:latin typeface="Play"/>
-                        </a:rPr>
-                        <a:t>Время поиска ответа</a:t>
-                      </a:r>
-                    </a:p>
-                  </a:txBody>
-                  <a:tcPr marL="54864" marR="54864" anchor="ctr">
-                    <a:solidFill>
-                      <a:srgbClr val="FEFFFF"/>
-                    </a:solidFill>
-                  </a:tcPr>
-                </a:tc>
-                <a:tc>
-                  <a:txBody>
-                    <a:bodyPr/>
-                    <a:lstStyle/>
-                    <a:p>
-                      <a:pPr algn="l"/>
-                      <a:r>
-                        <a:rPr sz="1320" b="0">
-                          <a:solidFill>
-                            <a:srgbClr val="111111"/>
-                          </a:solidFill>
-                          <a:latin typeface="Play"/>
-                        </a:rPr>
-                        <a:t>Сколько минут тратит сотрудник на инструкцию</a:t>
-                      </a:r>
-                    </a:p>
-                  </a:txBody>
-                  <a:tcPr marL="54864" marR="54864" anchor="ctr">
-                    <a:solidFill>
-                      <a:srgbClr val="FEFFFF"/>
-                    </a:solidFill>
-                  </a:tcPr>
-                </a:tc>
-              </a:tr>
-              <a:tr h="915496">
-                <a:tc>
-                  <a:txBody>
-                    <a:bodyPr/>
-                    <a:lstStyle/>
-                    <a:p>
-                      <a:pPr algn="l"/>
-                      <a:r>
-                        <a:rPr sz="1320" b="0">
-                          <a:solidFill>
-                            <a:srgbClr val="111111"/>
-                          </a:solidFill>
-                          <a:latin typeface="Play"/>
-                        </a:rPr>
-                        <a:t>Доля закрытых обращений</a:t>
-                      </a:r>
-                    </a:p>
-                  </a:txBody>
-                  <a:tcPr marL="54864" marR="54864" anchor="ctr">
-                    <a:solidFill>
-                      <a:srgbClr val="FEFFFF"/>
-                    </a:solidFill>
-                  </a:tcPr>
-                </a:tc>
-                <a:tc>
-                  <a:txBody>
-                    <a:bodyPr/>
-                    <a:lstStyle/>
-                    <a:p>
-                      <a:pPr algn="l"/>
-                      <a:r>
-                        <a:rPr sz="1320" b="0">
-                          <a:solidFill>
-                            <a:srgbClr val="111111"/>
-                          </a:solidFill>
-                          <a:latin typeface="Play"/>
-                        </a:rPr>
-                        <a:t>Процент вопросов, решенных без специалиста</a:t>
-                      </a:r>
-                    </a:p>
-                  </a:txBody>
-                  <a:tcPr marL="54864" marR="54864" anchor="ctr">
-                    <a:solidFill>
-                      <a:srgbClr val="FEFFFF"/>
-                    </a:solidFill>
-                  </a:tcPr>
-                </a:tc>
-              </a:tr>
-            </a:tbl>
-          </a:graphicData>
-        </a:graphic>
-      </p:graphicFrame>
-    </p:spTree>
-  </p:cSld>
-  <p:clrMapOvr>
-    <a:masterClrMapping/>
-  </p:clrMapOvr>
-</p:sld>
-</file>
-
-<file path=ppt/slides/slide11.xml><?xml version="1.0" encoding="utf-8"?>
 <p:sld xmlns:a="http://schemas.openxmlformats.org/drawingml/2006/main" xmlns:p="http://schemas.openxmlformats.org/presentationml/2006/main" xmlns:r="http://schemas.openxmlformats.org/officeDocument/2006/relationships">
   <p:cSld>
     <p:spTree>
@@ -6521,7 +6899,7 @@
           </a:xfrm>
         </p:spPr>
         <p:txBody>
-          <a:bodyPr wrap="square" anchor="t">
+          <a:bodyPr vert="horz" wrap="square" anchor="t">
             <a:normAutofit/>
           </a:bodyPr>
           <a:lstStyle/>
@@ -6534,453 +6912,151 @@
                 <a:spcPts val="0"/>
               </a:spcBef>
               <a:spcAft>
-                <a:spcPts val="270"/>
+                <a:spcPts val="253"/>
               </a:spcAft>
             </a:pPr>
             <a:r>
-              <a:rPr sz="1800"/>
-              <a:t>Требуется команда из 3 человек для реализации</a:t>
+              <a:rPr sz="1689"/>
+              <a:t>Просим одобрить пилот и выделить команду из 3 человек</a:t>
             </a:r>
           </a:p>
         </p:txBody>
       </p:sp>
-      <p:grpSp>
-        <p:nvGrpSpPr>
-          <p:cNvPr id="3" name="BrandDeck Diagram hierarchy" descr="hierarchy: Команда 3 специалиста для реализации пилота; Задача Выделение ресурсов для запуска проекта"/>
-          <p:cNvGrpSpPr/>
+      <p:sp>
+        <p:nvSpPr>
+          <p:cNvPr id="3" name="Text Placeholder 2"/>
+          <p:cNvSpPr>
+            <a:spLocks noGrp="1"/>
+          </p:cNvSpPr>
+          <p:nvPr>
+            <p:ph type="body" idx="1"/>
+          </p:nvPr>
+        </p:nvSpPr>
+        <p:spPr/>
+        <p:txBody>
+          <a:bodyPr wrap="square" anchor="t">
+            <a:normAutofit/>
+          </a:bodyPr>
+          <a:lstStyle/>
+          <a:p>
+            <a:pPr/>
+          </a:p>
+        </p:txBody>
+      </p:sp>
+      <p:sp>
+        <p:nvSpPr>
+          <p:cNvPr id="4" name="BrandDeck Text 4"/>
+          <p:cNvSpPr>
+            <a:spLocks noGrp="1"/>
+          </p:cNvSpPr>
+          <p:nvPr>
+            <p:ph type="body" idx="2"/>
+          </p:nvPr>
+        </p:nvSpPr>
+        <p:spPr/>
+        <p:txBody>
+          <a:bodyPr vert="horz" wrap="square" anchor="t">
+            <a:normAutofit/>
+          </a:bodyPr>
+          <a:lstStyle/>
+          <a:p>
+            <a:pPr>
+              <a:lnSpc>
+                <a:spcPct val="115000"/>
+              </a:lnSpc>
+              <a:spcBef>
+                <a:spcPts val="0"/>
+              </a:spcBef>
+              <a:spcAft>
+                <a:spcPts val="240"/>
+              </a:spcAft>
+            </a:pPr>
+            <a:r>
+              <a:rPr sz="1600"/>
+              <a:t>Одобрить запуск пилота с 2 подразделениями и 150 сотрудниками.</a:t>
+            </a:r>
+          </a:p>
+          <a:p>
+            <a:pPr>
+              <a:lnSpc>
+                <a:spcPct val="115000"/>
+              </a:lnSpc>
+              <a:spcBef>
+                <a:spcPts val="0"/>
+              </a:spcBef>
+              <a:spcAft>
+                <a:spcPts val="240"/>
+              </a:spcAft>
+            </a:pPr>
+            <a:r>
+              <a:rPr sz="1600"/>
+              <a:t>Выделить команду из 3 человек для работы в течение 6 недель.</a:t>
+            </a:r>
+          </a:p>
+          <a:p>
+            <a:pPr>
+              <a:lnSpc>
+                <a:spcPct val="115000"/>
+              </a:lnSpc>
+              <a:spcBef>
+                <a:spcPts val="0"/>
+              </a:spcBef>
+              <a:spcAft>
+                <a:spcPts val="240"/>
+              </a:spcAft>
+            </a:pPr>
+            <a:r>
+              <a:rPr sz="1600"/>
+              <a:t>Зафиксировать метрики успеха: время поиска и долю закрытых обращений.</a:t>
+            </a:r>
+          </a:p>
+        </p:txBody>
+      </p:sp>
+      <p:sp>
+        <p:nvSpPr>
+          <p:cNvPr id="5" name="BrandDeck Subtitle"/>
+          <p:cNvSpPr txBox="1"/>
           <p:nvPr/>
-        </p:nvGrpSpPr>
-        <p:grpSpPr>
+        </p:nvSpPr>
+        <p:spPr>
           <a:xfrm>
-            <a:off x="4637088" y="955527"/>
-            <a:ext cx="3862386" cy="3002234"/>
-            <a:chOff x="4637088" y="955527"/>
-            <a:chExt cx="3862386" cy="3002234"/>
+            <a:off x="430360" y="1137920"/>
+            <a:ext cx="3945696" cy="457200"/>
           </a:xfrm>
-        </p:grpSpPr>
-        <p:sp>
-          <p:nvSpPr>
-            <p:cNvPr id="4" name="BrandDeck Diagram Root"/>
-            <p:cNvSpPr/>
-            <p:nvPr/>
-          </p:nvSpPr>
-          <p:spPr>
-            <a:xfrm>
-              <a:off x="5757180" y="955527"/>
-              <a:ext cx="1622202" cy="731520"/>
-            </a:xfrm>
-            <a:prstGeom prst="roundRect">
-              <a:avLst>
-                <a:gd name="adj" fmla="val 18000"/>
-              </a:avLst>
-            </a:prstGeom>
-            <a:solidFill>
-              <a:srgbClr val="006DEB"/>
-            </a:solidFill>
-            <a:ln>
-              <a:noFill/>
-            </a:ln>
-          </p:spPr>
-          <p:txBody>
-            <a:bodyPr rtlCol="0" anchor="ctr" wrap="square" lIns="109728" tIns="36576" rIns="109728" bIns="36576">
-              <a:noAutofit/>
-            </a:bodyPr>
-            <a:lstStyle/>
-            <a:p>
-              <a:pPr algn="ctr">
-                <a:lnSpc>
-                  <a:spcPct val="110000"/>
-                </a:lnSpc>
-              </a:pPr>
-              <a:r>
-                <a:rPr sz="1600" b="1">
-                  <a:solidFill>
-                    <a:srgbClr val="FFFFFF"/>
-                  </a:solidFill>
-                  <a:latin typeface="Play"/>
-                </a:rPr>
-                <a:t>Команда из 3 человек</a:t>
-              </a:r>
-            </a:p>
-          </p:txBody>
-        </p:sp>
-        <p:cxnSp>
-          <p:nvCxnSpPr>
-            <p:cNvPr id="5" name="BrandDeck Diagram Link Root"/>
-            <p:cNvCxnSpPr/>
-            <p:nvPr/>
-          </p:nvCxnSpPr>
-          <p:spPr>
-            <a:xfrm>
-              <a:off x="6568281" y="1687047"/>
-              <a:ext cx="0" cy="261597"/>
-            </a:xfrm>
-            <a:prstGeom prst="line">
-              <a:avLst/>
-            </a:prstGeom>
-            <a:ln w="19050">
-              <a:solidFill>
-                <a:srgbClr val="58A6FF"/>
-              </a:solidFill>
-            </a:ln>
-          </p:spPr>
-          <p:style>
-            <a:lnRef idx="2">
-              <a:schemeClr val="accent1"/>
-            </a:lnRef>
-            <a:fillRef idx="0">
-              <a:schemeClr val="accent1"/>
-            </a:fillRef>
-            <a:effectRef idx="1">
-              <a:schemeClr val="accent1"/>
-            </a:effectRef>
-            <a:fontRef idx="minor">
-              <a:schemeClr val="tx1"/>
-            </a:fontRef>
-          </p:style>
-        </p:cxnSp>
-        <p:cxnSp>
-          <p:nvCxnSpPr>
-            <p:cNvPr id="6" name="BrandDeck Diagram Link Bus"/>
-            <p:cNvCxnSpPr/>
-            <p:nvPr/>
-          </p:nvCxnSpPr>
-          <p:spPr>
-            <a:xfrm>
-              <a:off x="5575252" y="1948644"/>
-              <a:ext cx="1986058" cy="0"/>
-            </a:xfrm>
-            <a:prstGeom prst="line">
-              <a:avLst/>
-            </a:prstGeom>
-            <a:ln w="19050">
-              <a:solidFill>
-                <a:srgbClr val="58A6FF"/>
-              </a:solidFill>
-            </a:ln>
-          </p:spPr>
-          <p:style>
-            <a:lnRef idx="2">
-              <a:schemeClr val="accent1"/>
-            </a:lnRef>
-            <a:fillRef idx="0">
-              <a:schemeClr val="accent1"/>
-            </a:fillRef>
-            <a:effectRef idx="1">
-              <a:schemeClr val="accent1"/>
-            </a:effectRef>
-            <a:fontRef idx="minor">
-              <a:schemeClr val="tx1"/>
-            </a:fontRef>
-          </p:style>
-        </p:cxnSp>
-        <p:cxnSp>
-          <p:nvCxnSpPr>
-            <p:cNvPr id="7" name="BrandDeck Diagram Link 1"/>
-            <p:cNvCxnSpPr/>
-            <p:nvPr/>
-          </p:nvCxnSpPr>
-          <p:spPr>
-            <a:xfrm>
-              <a:off x="5575252" y="1948644"/>
-              <a:ext cx="0" cy="261598"/>
-            </a:xfrm>
-            <a:prstGeom prst="line">
-              <a:avLst/>
-            </a:prstGeom>
-            <a:ln w="19050">
-              <a:solidFill>
-                <a:srgbClr val="58A6FF"/>
-              </a:solidFill>
-            </a:ln>
-          </p:spPr>
-          <p:style>
-            <a:lnRef idx="2">
-              <a:schemeClr val="accent1"/>
-            </a:lnRef>
-            <a:fillRef idx="0">
-              <a:schemeClr val="accent1"/>
-            </a:fillRef>
-            <a:effectRef idx="1">
-              <a:schemeClr val="accent1"/>
-            </a:effectRef>
-            <a:fontRef idx="minor">
-              <a:schemeClr val="tx1"/>
-            </a:fontRef>
-          </p:style>
-        </p:cxnSp>
-        <p:sp>
-          <p:nvSpPr>
-            <p:cNvPr id="8" name="BrandDeck Diagram Card 1"/>
-            <p:cNvSpPr/>
-            <p:nvPr/>
-          </p:nvSpPr>
-          <p:spPr>
-            <a:xfrm>
-              <a:off x="4637088" y="2210242"/>
-              <a:ext cx="1876329" cy="1747519"/>
-            </a:xfrm>
-            <a:prstGeom prst="roundRect">
-              <a:avLst>
-                <a:gd name="adj" fmla="val 6000"/>
-              </a:avLst>
-            </a:prstGeom>
-            <a:solidFill>
-              <a:srgbClr val="E8F3FF"/>
-            </a:solidFill>
-            <a:ln>
-              <a:noFill/>
-            </a:ln>
-          </p:spPr>
-          <p:txBody>
-            <a:bodyPr rtlCol="0" anchor="ctr"/>
-            <a:lstStyle/>
-            <a:p>
-              <a:pPr algn="ctr"/>
-            </a:p>
-          </p:txBody>
-        </p:sp>
-        <p:sp>
-          <p:nvSpPr>
-            <p:cNvPr id="9" name="BrandDeck Diagram Marker 1"/>
-            <p:cNvSpPr/>
-            <p:nvPr/>
-          </p:nvSpPr>
-          <p:spPr>
-            <a:xfrm>
-              <a:off x="4765104" y="2319970"/>
-              <a:ext cx="548640" cy="45720"/>
-            </a:xfrm>
-            <a:prstGeom prst="rect">
-              <a:avLst/>
-            </a:prstGeom>
-            <a:solidFill>
-              <a:srgbClr val="0077FF"/>
-            </a:solidFill>
-            <a:ln>
-              <a:noFill/>
-            </a:ln>
-          </p:spPr>
-          <p:txBody>
-            <a:bodyPr rtlCol="0" anchor="ctr"/>
-            <a:lstStyle/>
-            <a:p>
-              <a:pPr algn="ctr"/>
-            </a:p>
-          </p:txBody>
-        </p:sp>
-        <p:sp>
-          <p:nvSpPr>
-            <p:cNvPr id="10" name="BrandDeck Diagram Text 1"/>
-            <p:cNvSpPr txBox="1"/>
-            <p:nvPr/>
-          </p:nvSpPr>
-          <p:spPr>
-            <a:xfrm>
-              <a:off x="4728528" y="2447986"/>
-              <a:ext cx="1693449" cy="1418336"/>
-            </a:xfrm>
-            <a:prstGeom prst="rect">
-              <a:avLst/>
-            </a:prstGeom>
-            <a:noFill/>
-          </p:spPr>
-          <p:txBody>
-            <a:bodyPr wrap="square" anchor="t" lIns="36576" tIns="18288" rIns="36576" bIns="18288">
-              <a:noAutofit/>
-            </a:bodyPr>
-            <a:lstStyle/>
-            <a:p>
-              <a:pPr algn="l">
-                <a:lnSpc>
-                  <a:spcPct val="110000"/>
-                </a:lnSpc>
-              </a:pPr>
-              <a:r>
-                <a:rPr sz="1600" b="1">
-                  <a:solidFill>
-                    <a:srgbClr val="000000"/>
-                  </a:solidFill>
-                  <a:latin typeface="Play"/>
-                </a:rPr>
-                <a:t>Команда</a:t>
-              </a:r>
-            </a:p>
-            <a:p>
-              <a:pPr algn="l">
-                <a:lnSpc>
-                  <a:spcPct val="110000"/>
-                </a:lnSpc>
-                <a:spcBef>
-                  <a:spcPts val="400"/>
-                </a:spcBef>
-              </a:pPr>
-              <a:r>
-                <a:rPr sz="1600" b="0">
-                  <a:solidFill>
-                    <a:srgbClr val="000000"/>
-                  </a:solidFill>
-                  <a:latin typeface="Play"/>
-                </a:rPr>
-                <a:t>3 специалиста для реализации пилота</a:t>
-              </a:r>
-            </a:p>
-          </p:txBody>
-        </p:sp>
-        <p:cxnSp>
-          <p:nvCxnSpPr>
-            <p:cNvPr id="11" name="BrandDeck Diagram Link 2"/>
-            <p:cNvCxnSpPr/>
-            <p:nvPr/>
-          </p:nvCxnSpPr>
-          <p:spPr>
-            <a:xfrm>
-              <a:off x="7561310" y="1948644"/>
-              <a:ext cx="0" cy="261598"/>
-            </a:xfrm>
-            <a:prstGeom prst="line">
-              <a:avLst/>
-            </a:prstGeom>
-            <a:ln w="19050">
-              <a:solidFill>
-                <a:srgbClr val="58A6FF"/>
-              </a:solidFill>
-            </a:ln>
-          </p:spPr>
-          <p:style>
-            <a:lnRef idx="2">
-              <a:schemeClr val="accent1"/>
-            </a:lnRef>
-            <a:fillRef idx="0">
-              <a:schemeClr val="accent1"/>
-            </a:fillRef>
-            <a:effectRef idx="1">
-              <a:schemeClr val="accent1"/>
-            </a:effectRef>
-            <a:fontRef idx="minor">
-              <a:schemeClr val="tx1"/>
-            </a:fontRef>
-          </p:style>
-        </p:cxnSp>
-        <p:sp>
-          <p:nvSpPr>
-            <p:cNvPr id="12" name="BrandDeck Diagram Card 2"/>
-            <p:cNvSpPr/>
-            <p:nvPr/>
-          </p:nvSpPr>
-          <p:spPr>
-            <a:xfrm>
-              <a:off x="6623145" y="2210242"/>
-              <a:ext cx="1876329" cy="1747519"/>
-            </a:xfrm>
-            <a:prstGeom prst="roundRect">
-              <a:avLst>
-                <a:gd name="adj" fmla="val 6000"/>
-              </a:avLst>
-            </a:prstGeom>
-            <a:solidFill>
-              <a:srgbClr val="E8F3FF"/>
-            </a:solidFill>
-            <a:ln>
-              <a:noFill/>
-            </a:ln>
-          </p:spPr>
-          <p:txBody>
-            <a:bodyPr rtlCol="0" anchor="ctr"/>
-            <a:lstStyle/>
-            <a:p>
-              <a:pPr algn="ctr"/>
-            </a:p>
-          </p:txBody>
-        </p:sp>
-        <p:sp>
-          <p:nvSpPr>
-            <p:cNvPr id="13" name="BrandDeck Diagram Marker 2"/>
-            <p:cNvSpPr/>
-            <p:nvPr/>
-          </p:nvSpPr>
-          <p:spPr>
-            <a:xfrm>
-              <a:off x="6751161" y="2319970"/>
-              <a:ext cx="548640" cy="45720"/>
-            </a:xfrm>
-            <a:prstGeom prst="rect">
-              <a:avLst/>
-            </a:prstGeom>
-            <a:solidFill>
-              <a:srgbClr val="0077FF"/>
-            </a:solidFill>
-            <a:ln>
-              <a:noFill/>
-            </a:ln>
-          </p:spPr>
-          <p:txBody>
-            <a:bodyPr rtlCol="0" anchor="ctr"/>
-            <a:lstStyle/>
-            <a:p>
-              <a:pPr algn="ctr"/>
-            </a:p>
-          </p:txBody>
-        </p:sp>
-        <p:sp>
-          <p:nvSpPr>
-            <p:cNvPr id="14" name="BrandDeck Diagram Text 2"/>
-            <p:cNvSpPr txBox="1"/>
-            <p:nvPr/>
-          </p:nvSpPr>
-          <p:spPr>
-            <a:xfrm>
-              <a:off x="6714585" y="2447986"/>
-              <a:ext cx="1693449" cy="1418336"/>
-            </a:xfrm>
-            <a:prstGeom prst="rect">
-              <a:avLst/>
-            </a:prstGeom>
-            <a:noFill/>
-          </p:spPr>
-          <p:txBody>
-            <a:bodyPr wrap="square" anchor="t" lIns="36576" tIns="18288" rIns="36576" bIns="18288">
-              <a:noAutofit/>
-            </a:bodyPr>
-            <a:lstStyle/>
-            <a:p>
-              <a:pPr algn="l">
-                <a:lnSpc>
-                  <a:spcPct val="110000"/>
-                </a:lnSpc>
-              </a:pPr>
-              <a:r>
-                <a:rPr sz="1600" b="1">
-                  <a:solidFill>
-                    <a:srgbClr val="000000"/>
-                  </a:solidFill>
-                  <a:latin typeface="Play"/>
-                </a:rPr>
-                <a:t>Задача</a:t>
-              </a:r>
-            </a:p>
-            <a:p>
-              <a:pPr algn="l">
-                <a:lnSpc>
-                  <a:spcPct val="110000"/>
-                </a:lnSpc>
-                <a:spcBef>
-                  <a:spcPts val="400"/>
-                </a:spcBef>
-              </a:pPr>
-              <a:r>
-                <a:rPr sz="1600" b="0">
-                  <a:solidFill>
-                    <a:srgbClr val="000000"/>
-                  </a:solidFill>
-                  <a:latin typeface="Play"/>
-                </a:rPr>
-                <a:t>Выделение ресурсов для запуска проекта</a:t>
-              </a:r>
-            </a:p>
-          </p:txBody>
-        </p:sp>
-      </p:grpSp>
+          <a:prstGeom prst="rect">
+            <a:avLst/>
+          </a:prstGeom>
+          <a:noFill/>
+        </p:spPr>
+        <p:txBody>
+          <a:bodyPr wrap="square" vert="horz" anchor="t" lIns="36576" rIns="36576" tIns="18288" bIns="18288">
+            <a:normAutofit/>
+          </a:bodyPr>
+          <a:lstStyle/>
+          <a:p>
+            <a:pPr algn="l">
+              <a:lnSpc>
+                <a:spcPct val="115000"/>
+              </a:lnSpc>
+              <a:spcBef>
+                <a:spcPts val="0"/>
+              </a:spcBef>
+              <a:spcAft>
+                <a:spcPts val="165"/>
+              </a:spcAft>
+            </a:pPr>
+            <a:r>
+              <a:rPr sz="1100">
+                <a:solidFill>
+                  <a:srgbClr val="FAFCFF"/>
+                </a:solidFill>
+                <a:latin typeface="Play"/>
+              </a:rPr>
+              <a:t>Решение о старте пилота и выделении команды</a:t>
+            </a:r>
+          </a:p>
+        </p:txBody>
+      </p:sp>
     </p:spTree>
   </p:cSld>
   <p:clrMapOvr>
@@ -6989,7 +7065,7 @@
 </p:sld>
 </file>
 
-<file path=ppt/slides/slide12.xml><?xml version="1.0" encoding="utf-8"?>
+<file path=ppt/slides/slide2.xml><?xml version="1.0" encoding="utf-8"?>
 <p:sld xmlns:a="http://schemas.openxmlformats.org/drawingml/2006/main" xmlns:p="http://schemas.openxmlformats.org/presentationml/2006/main" xmlns:r="http://schemas.openxmlformats.org/officeDocument/2006/relationships">
   <p:cSld>
     <p:spTree>
@@ -7001,23 +7077,19 @@
       <p:grpSpPr/>
       <p:sp>
         <p:nvSpPr>
-          <p:cNvPr id="1027" name="Google Shape;1027;p65"/>
+          <p:cNvPr id="1119" name="Google Shape;1119;p69"/>
           <p:cNvSpPr/>
           <p:nvPr/>
         </p:nvSpPr>
         <p:spPr>
           <a:xfrm>
-            <a:off x="6064222" y="1209852"/>
-            <a:ext cx="2793985" cy="3014270"/>
+            <a:off x="285748" y="286047"/>
+            <a:ext cx="8572456" cy="4176169"/>
           </a:xfrm>
-          <a:prstGeom prst="roundRect">
-            <a:avLst>
-              <a:gd fmla="val 3436" name="adj"/>
-            </a:avLst>
+          <a:prstGeom prst="rect">
+            <a:avLst/>
           </a:prstGeom>
-          <a:solidFill>
-            <a:schemeClr val="lt2"/>
-          </a:solidFill>
+          <a:noFill/>
           <a:ln>
             <a:noFill/>
           </a:ln>
@@ -7046,23 +7118,19 @@
       </p:sp>
       <p:sp>
         <p:nvSpPr>
-          <p:cNvPr id="1029" name="Google Shape;1029;p65"/>
+          <p:cNvPr id="1120" name="Google Shape;1120;p69"/>
           <p:cNvSpPr/>
           <p:nvPr/>
         </p:nvSpPr>
         <p:spPr>
           <a:xfrm>
-            <a:off x="3174981" y="1209852"/>
-            <a:ext cx="2793985" cy="3014270"/>
+            <a:off x="285748" y="1209852"/>
+            <a:ext cx="8572456" cy="3252364"/>
           </a:xfrm>
-          <a:prstGeom prst="roundRect">
-            <a:avLst>
-              <a:gd fmla="val 3436" name="adj"/>
-            </a:avLst>
+          <a:prstGeom prst="rect">
+            <a:avLst/>
           </a:prstGeom>
-          <a:solidFill>
-            <a:schemeClr val="lt2"/>
-          </a:solidFill>
+          <a:noFill/>
           <a:ln>
             <a:noFill/>
           </a:ln>
@@ -7091,23 +7159,19 @@
       </p:sp>
       <p:sp>
         <p:nvSpPr>
-          <p:cNvPr id="1031" name="Google Shape;1031;p65"/>
+          <p:cNvPr id="1121" name="Google Shape;1121;p69"/>
           <p:cNvSpPr/>
           <p:nvPr/>
         </p:nvSpPr>
         <p:spPr>
           <a:xfrm>
-            <a:off x="285749" y="1209852"/>
-            <a:ext cx="2793985" cy="3014270"/>
+            <a:off x="285748" y="1209852"/>
+            <a:ext cx="8572456" cy="3252364"/>
           </a:xfrm>
-          <a:prstGeom prst="roundRect">
-            <a:avLst>
-              <a:gd fmla="val 3436" name="adj"/>
-            </a:avLst>
+          <a:prstGeom prst="rect">
+            <a:avLst/>
           </a:prstGeom>
-          <a:solidFill>
-            <a:schemeClr val="lt2"/>
-          </a:solidFill>
+          <a:noFill/>
           <a:ln>
             <a:noFill/>
           </a:ln>
@@ -7136,7 +7200,300 @@
       </p:sp>
       <p:sp>
         <p:nvSpPr>
-          <p:cNvPr id="1032" name="Google Shape;1032;p65"/>
+          <p:cNvPr id="1123" name="Google Shape;1123;p69"/>
+          <p:cNvSpPr/>
+          <p:nvPr/>
+        </p:nvSpPr>
+        <p:spPr>
+          <a:xfrm>
+            <a:off x="500061" y="1424137"/>
+            <a:ext cx="2919397" cy="2895223"/>
+          </a:xfrm>
+          <a:prstGeom prst="rect">
+            <a:avLst/>
+          </a:prstGeom>
+          <a:noFill/>
+          <a:ln>
+            <a:noFill/>
+          </a:ln>
+        </p:spPr>
+        <p:txBody>
+          <a:bodyPr anchorCtr="0" anchor="t" bIns="0" lIns="0" spcFirstLastPara="1" rIns="0" wrap="square" tIns="0">
+            <a:normAutofit/>
+          </a:bodyPr>
+          <a:lstStyle/>
+          <a:p>
+            <a:pPr indent="0" lvl="0" marL="0" marR="0" rtl="0" algn="l">
+              <a:lnSpc>
+                <a:spcPct val="139988"/>
+              </a:lnSpc>
+              <a:spcBef>
+                <a:spcPts val="0"/>
+              </a:spcBef>
+              <a:spcAft>
+                <a:spcPts val="0"/>
+              </a:spcAft>
+              <a:buNone/>
+            </a:pPr>
+            <a:endParaRPr b="0" i="0" sz="1688" u="none" cap="none" strike="noStrike">
+              <a:solidFill>
+                <a:schemeClr val="dk1"/>
+              </a:solidFill>
+              <a:latin typeface="Calibri"/>
+              <a:ea typeface="Calibri"/>
+              <a:cs typeface="Calibri"/>
+              <a:sym typeface="Calibri"/>
+            </a:endParaRPr>
+          </a:p>
+        </p:txBody>
+      </p:sp>
+      <p:sp>
+        <p:nvSpPr>
+          <p:cNvPr id="1124" name="Google Shape;1124;p69"/>
+          <p:cNvSpPr/>
+          <p:nvPr/>
+        </p:nvSpPr>
+        <p:spPr>
+          <a:xfrm>
+            <a:off x="3657581" y="1209852"/>
+            <a:ext cx="5200623" cy="3252364"/>
+          </a:xfrm>
+          <a:prstGeom prst="rect">
+            <a:avLst/>
+          </a:prstGeom>
+          <a:noFill/>
+          <a:ln>
+            <a:noFill/>
+          </a:ln>
+        </p:spPr>
+        <p:txBody>
+          <a:bodyPr anchorCtr="0" anchor="ctr" bIns="91425" lIns="91425" spcFirstLastPara="1" rIns="91425" wrap="square" tIns="91425">
+            <a:noAutofit/>
+          </a:bodyPr>
+          <a:lstStyle/>
+          <a:p>
+            <a:pPr indent="0" lvl="0" marL="0" rtl="0" algn="l">
+              <a:spcBef>
+                <a:spcPts val="0"/>
+              </a:spcBef>
+              <a:spcAft>
+                <a:spcPts val="0"/>
+              </a:spcAft>
+              <a:buNone/>
+            </a:pPr>
+            <a:r>
+              <a:t/>
+            </a:r>
+            <a:endParaRPr/>
+          </a:p>
+        </p:txBody>
+      </p:sp>
+      <p:sp>
+        <p:nvSpPr>
+          <p:cNvPr id="1132" name="BrandDeck Text 1132"/>
+          <p:cNvSpPr txBox="1"/>
+          <p:nvPr>
+            <p:ph type="title"/>
+          </p:nvPr>
+        </p:nvSpPr>
+        <p:spPr>
+          <a:xfrm>
+            <a:off x="177970" y="282949"/>
+            <a:ext cx="6792985" cy="724203"/>
+          </a:xfrm>
+          <a:prstGeom prst="rect">
+            <a:avLst/>
+          </a:prstGeom>
+          <a:noFill/>
+          <a:ln>
+            <a:noFill/>
+          </a:ln>
+        </p:spPr>
+        <p:txBody>
+          <a:bodyPr anchorCtr="0" anchor="t" bIns="45700" lIns="91425" spcFirstLastPara="1" rIns="91425" wrap="square" tIns="45700" vert="horz">
+            <a:normAutofit/>
+          </a:bodyPr>
+          <a:lstStyle/>
+          <a:p>
+            <a:pPr indent="0" marL="0" rtl="0" algn="l">
+              <a:lnSpc>
+                <a:spcPct val="115000"/>
+              </a:lnSpc>
+              <a:spcBef>
+                <a:spcPts val="0"/>
+              </a:spcBef>
+              <a:spcAft>
+                <a:spcPts val="270"/>
+              </a:spcAft>
+              <a:buClr>
+                <a:schemeClr val="dk1"/>
+              </a:buClr>
+              <a:buSzPts val="2400"/>
+              <a:buFont typeface="Play"/>
+              <a:buNone/>
+            </a:pPr>
+            <a:r>
+              <a:rPr sz="1800"/>
+              <a:t>Треть обращений в поддержку — повторяющиеся вопросы</a:t>
+            </a:r>
+            <a:endParaRPr/>
+          </a:p>
+        </p:txBody>
+      </p:sp>
+      <p:sp>
+        <p:nvSpPr>
+          <p:cNvPr id="1133" name="BrandDeck Body"/>
+          <p:cNvSpPr txBox="1"/>
+          <p:nvPr/>
+        </p:nvSpPr>
+        <p:spPr>
+          <a:xfrm>
+            <a:off x="500060" y="1424137"/>
+            <a:ext cx="2558400" cy="2895223"/>
+          </a:xfrm>
+          <a:prstGeom prst="rect">
+            <a:avLst/>
+          </a:prstGeom>
+          <a:noFill/>
+        </p:spPr>
+        <p:txBody>
+          <a:bodyPr wrap="square" vert="horz" anchor="t" lIns="36576" rIns="36576" tIns="18288" bIns="18288">
+            <a:normAutofit/>
+          </a:bodyPr>
+          <a:lstStyle/>
+          <a:p>
+            <a:pPr algn="l">
+              <a:lnSpc>
+                <a:spcPct val="115000"/>
+              </a:lnSpc>
+              <a:spcBef>
+                <a:spcPts val="0"/>
+              </a:spcBef>
+              <a:spcAft>
+                <a:spcPts val="253"/>
+              </a:spcAft>
+            </a:pPr>
+            <a:r>
+              <a:rPr sz="1689">
+                <a:solidFill>
+                  <a:srgbClr val="000000"/>
+                </a:solidFill>
+                <a:latin typeface="Play"/>
+              </a:rPr>
+              <a:t>• Треть обращений в поддержку — повторяющиеся вопросы.</a:t>
+            </a:r>
+          </a:p>
+          <a:p>
+            <a:pPr algn="l">
+              <a:lnSpc>
+                <a:spcPct val="115000"/>
+              </a:lnSpc>
+              <a:spcBef>
+                <a:spcPts val="0"/>
+              </a:spcBef>
+              <a:spcAft>
+                <a:spcPts val="253"/>
+              </a:spcAft>
+            </a:pPr>
+            <a:r>
+              <a:rPr sz="1689">
+                <a:solidFill>
+                  <a:srgbClr val="000000"/>
+                </a:solidFill>
+                <a:latin typeface="Play"/>
+              </a:rPr>
+              <a:t>• Это создает лишнюю нагрузку на службу поддержки.</a:t>
+            </a:r>
+          </a:p>
+        </p:txBody>
+      </p:sp>
+      <p:pic>
+        <p:nvPicPr>
+          <p:cNvPr id="1134" name="BrandDeck Image" descr="сотрудник специалист поддержки"/>
+          <p:cNvPicPr>
+            <a:picLocks noChangeAspect="1"/>
+          </p:cNvPicPr>
+          <p:nvPr/>
+        </p:nvPicPr>
+        <p:blipFill>
+          <a:blip r:embed="rId7"/>
+          <a:srcRect l="25938" r="10087"/>
+          <a:stretch>
+            <a:fillRect/>
+          </a:stretch>
+        </p:blipFill>
+        <p:spPr>
+          <a:xfrm>
+            <a:off x="3314493" y="1424137"/>
+            <a:ext cx="3291060" cy="2895223"/>
+          </a:xfrm>
+          <a:prstGeom prst="rect">
+            <a:avLst/>
+          </a:prstGeom>
+        </p:spPr>
+      </p:pic>
+    </p:spTree>
+  </p:cSld>
+  <p:clrMapOvr>
+    <a:masterClrMapping/>
+  </p:clrMapOvr>
+</p:sld>
+</file>
+
+<file path=ppt/slides/slide3.xml><?xml version="1.0" encoding="utf-8"?>
+<p:sld xmlns:a="http://schemas.openxmlformats.org/drawingml/2006/main" xmlns:p="http://schemas.openxmlformats.org/presentationml/2006/main" xmlns:r="http://schemas.openxmlformats.org/officeDocument/2006/relationships">
+  <p:cSld>
+    <p:spTree>
+      <p:nvGrpSpPr>
+        <p:cNvPr id="1" name=""/>
+        <p:cNvGrpSpPr/>
+        <p:nvPr/>
+      </p:nvGrpSpPr>
+      <p:grpSpPr/>
+      <p:sp>
+        <p:nvSpPr>
+          <p:cNvPr id="662" name="Google Shape;662;p55"/>
+          <p:cNvSpPr/>
+          <p:nvPr/>
+        </p:nvSpPr>
+        <p:spPr>
+          <a:xfrm>
+            <a:off x="8667705" y="4666977"/>
+            <a:ext cx="190499" cy="190475"/>
+          </a:xfrm>
+          <a:prstGeom prst="rect">
+            <a:avLst/>
+          </a:prstGeom>
+          <a:noFill/>
+          <a:ln>
+            <a:noFill/>
+          </a:ln>
+        </p:spPr>
+        <p:txBody>
+          <a:bodyPr anchorCtr="0" anchor="ctr" bIns="91425" lIns="91425" spcFirstLastPara="1" rIns="91425" wrap="square" tIns="91425">
+            <a:noAutofit/>
+          </a:bodyPr>
+          <a:lstStyle/>
+          <a:p>
+            <a:pPr indent="0" lvl="0" marL="0" rtl="0" algn="l">
+              <a:spcBef>
+                <a:spcPts val="0"/>
+              </a:spcBef>
+              <a:spcAft>
+                <a:spcPts val="0"/>
+              </a:spcAft>
+              <a:buNone/>
+            </a:pPr>
+            <a:r>
+              <a:t/>
+            </a:r>
+            <a:endParaRPr/>
+          </a:p>
+        </p:txBody>
+      </p:sp>
+      <p:sp>
+        <p:nvSpPr>
+          <p:cNvPr id="663" name="Google Shape;663;p55"/>
           <p:cNvSpPr/>
           <p:nvPr/>
         </p:nvSpPr>
@@ -7177,7 +7534,7 @@
       </p:sp>
       <p:sp>
         <p:nvSpPr>
-          <p:cNvPr id="1033" name="Google Shape;1033;p65"/>
+          <p:cNvPr id="664" name="Google Shape;664;p55"/>
           <p:cNvSpPr/>
           <p:nvPr/>
         </p:nvSpPr>
@@ -7218,585 +7575,7 @@
       </p:sp>
       <p:sp>
         <p:nvSpPr>
-          <p:cNvPr id="1034" name="Google Shape;1034;p65"/>
-          <p:cNvSpPr/>
-          <p:nvPr/>
-        </p:nvSpPr>
-        <p:spPr>
-          <a:xfrm>
-            <a:off x="476248" y="1400327"/>
-            <a:ext cx="2412987" cy="1009519"/>
-          </a:xfrm>
-          <a:prstGeom prst="rect">
-            <a:avLst/>
-          </a:prstGeom>
-          <a:noFill/>
-          <a:ln>
-            <a:noFill/>
-          </a:ln>
-        </p:spPr>
-        <p:txBody>
-          <a:bodyPr anchorCtr="0" anchor="ctr" bIns="91425" lIns="91425" spcFirstLastPara="1" rIns="91425" wrap="square" tIns="91425">
-            <a:noAutofit/>
-          </a:bodyPr>
-          <a:lstStyle/>
-          <a:p>
-            <a:pPr indent="0" lvl="0" marL="0" rtl="0" algn="l">
-              <a:spcBef>
-                <a:spcPts val="0"/>
-              </a:spcBef>
-              <a:spcAft>
-                <a:spcPts val="0"/>
-              </a:spcAft>
-              <a:buNone/>
-            </a:pPr>
-            <a:r>
-              <a:t/>
-            </a:r>
-            <a:endParaRPr/>
-          </a:p>
-        </p:txBody>
-      </p:sp>
-      <p:sp>
-        <p:nvSpPr>
-          <p:cNvPr id="1035" name="Google Shape;1035;p65"/>
-          <p:cNvSpPr/>
-          <p:nvPr/>
-        </p:nvSpPr>
-        <p:spPr>
-          <a:xfrm>
-            <a:off x="476248" y="1400328"/>
-            <a:ext cx="76199" cy="76190"/>
-          </a:xfrm>
-          <a:prstGeom prst="roundRect">
-            <a:avLst>
-              <a:gd fmla="val 31500" name="adj"/>
-            </a:avLst>
-          </a:prstGeom>
-          <a:solidFill>
-            <a:srgbClr val="0077FF"/>
-          </a:solidFill>
-          <a:ln>
-            <a:noFill/>
-          </a:ln>
-        </p:spPr>
-        <p:txBody>
-          <a:bodyPr anchorCtr="0" anchor="ctr" bIns="91425" lIns="91425" spcFirstLastPara="1" rIns="91425" wrap="square" tIns="91425">
-            <a:noAutofit/>
-          </a:bodyPr>
-          <a:lstStyle/>
-          <a:p>
-            <a:pPr indent="0" lvl="0" marL="0" rtl="0" algn="l">
-              <a:spcBef>
-                <a:spcPts val="0"/>
-              </a:spcBef>
-              <a:spcAft>
-                <a:spcPts val="0"/>
-              </a:spcAft>
-              <a:buNone/>
-            </a:pPr>
-            <a:r>
-              <a:t/>
-            </a:r>
-            <a:endParaRPr/>
-          </a:p>
-        </p:txBody>
-      </p:sp>
-      <p:sp>
-        <p:nvSpPr>
-          <p:cNvPr id="1036" name="BrandDeck Text 1036"/>
-          <p:cNvSpPr/>
-          <p:nvPr/>
-        </p:nvSpPr>
-        <p:spPr>
-          <a:xfrm>
-            <a:off x="476248" y="1628898"/>
-            <a:ext cx="2463787" cy="831742"/>
-          </a:xfrm>
-          <a:prstGeom prst="rect">
-            <a:avLst/>
-          </a:prstGeom>
-          <a:noFill/>
-          <a:ln>
-            <a:noFill/>
-          </a:ln>
-        </p:spPr>
-        <p:txBody>
-          <a:bodyPr anchorCtr="0" anchor="t" bIns="0" lIns="0" spcFirstLastPara="1" rIns="0" wrap="square" tIns="0">
-            <a:normAutofit/>
-          </a:bodyPr>
-          <a:lstStyle/>
-          <a:p>
-            <a:pPr indent="0" marL="0" marR="0" rtl="0" algn="l">
-              <a:lnSpc>
-                <a:spcPct val="115000"/>
-              </a:lnSpc>
-              <a:spcBef>
-                <a:spcPts val="0"/>
-              </a:spcBef>
-              <a:spcAft>
-                <a:spcPts val="179"/>
-              </a:spcAft>
-              <a:buNone/>
-            </a:pPr>
-            <a:r>
-              <a:rPr sz="1200" b="0">
-                <a:latin typeface="Play"/>
-                <a:solidFill>
-                  <a:schemeClr val="dk1"/>
-                </a:solidFill>
-              </a:rPr>
-              <a:t>Следующие шаги после утверждения</a:t>
-            </a:r>
-            <a:endParaRPr b="0" i="0" sz="1200" u="none" cap="none" strike="noStrike">
-              <a:solidFill>
-                <a:schemeClr val="dk1"/>
-              </a:solidFill>
-              <a:latin typeface="Calibri"/>
-              <a:ea typeface="Calibri"/>
-              <a:cs typeface="Calibri"/>
-              <a:sym typeface="Calibri"/>
-            </a:endParaRPr>
-          </a:p>
-        </p:txBody>
-      </p:sp>
-      <p:sp>
-        <p:nvSpPr>
-          <p:cNvPr id="1037" name="Google Shape;1037;p65"/>
-          <p:cNvSpPr/>
-          <p:nvPr/>
-        </p:nvSpPr>
-        <p:spPr>
-          <a:xfrm>
-            <a:off x="2422509" y="3566983"/>
-            <a:ext cx="466723" cy="466664"/>
-          </a:xfrm>
-          <a:prstGeom prst="rect">
-            <a:avLst/>
-          </a:prstGeom>
-          <a:noFill/>
-          <a:ln>
-            <a:noFill/>
-          </a:ln>
-        </p:spPr>
-        <p:txBody>
-          <a:bodyPr anchorCtr="0" anchor="ctr" bIns="91425" lIns="91425" spcFirstLastPara="1" rIns="91425" wrap="square" tIns="91425">
-            <a:noAutofit/>
-          </a:bodyPr>
-          <a:lstStyle/>
-          <a:p>
-            <a:pPr indent="0" lvl="0" marL="0" rtl="0" algn="l">
-              <a:spcBef>
-                <a:spcPts val="0"/>
-              </a:spcBef>
-              <a:spcAft>
-                <a:spcPts val="0"/>
-              </a:spcAft>
-              <a:buNone/>
-            </a:pPr>
-            <a:r>
-              <a:t/>
-            </a:r>
-            <a:endParaRPr/>
-          </a:p>
-        </p:txBody>
-      </p:sp>
-      <p:sp>
-        <p:nvSpPr>
-          <p:cNvPr id="1040" name="Google Shape;1040;p65"/>
-          <p:cNvSpPr/>
-          <p:nvPr/>
-        </p:nvSpPr>
-        <p:spPr>
-          <a:xfrm>
-            <a:off x="3365480" y="1400327"/>
-            <a:ext cx="2412987" cy="1009519"/>
-          </a:xfrm>
-          <a:prstGeom prst="rect">
-            <a:avLst/>
-          </a:prstGeom>
-          <a:noFill/>
-          <a:ln>
-            <a:noFill/>
-          </a:ln>
-        </p:spPr>
-        <p:txBody>
-          <a:bodyPr anchorCtr="0" anchor="ctr" bIns="91425" lIns="91425" spcFirstLastPara="1" rIns="91425" wrap="square" tIns="91425">
-            <a:noAutofit/>
-          </a:bodyPr>
-          <a:lstStyle/>
-          <a:p>
-            <a:pPr indent="0" lvl="0" marL="0" rtl="0" algn="l">
-              <a:spcBef>
-                <a:spcPts val="0"/>
-              </a:spcBef>
-              <a:spcAft>
-                <a:spcPts val="0"/>
-              </a:spcAft>
-              <a:buNone/>
-            </a:pPr>
-            <a:r>
-              <a:t/>
-            </a:r>
-            <a:endParaRPr/>
-          </a:p>
-        </p:txBody>
-      </p:sp>
-      <p:sp>
-        <p:nvSpPr>
-          <p:cNvPr id="1041" name="Google Shape;1041;p65"/>
-          <p:cNvSpPr/>
-          <p:nvPr/>
-        </p:nvSpPr>
-        <p:spPr>
-          <a:xfrm>
-            <a:off x="3365480" y="1400328"/>
-            <a:ext cx="76199" cy="76190"/>
-          </a:xfrm>
-          <a:prstGeom prst="roundRect">
-            <a:avLst>
-              <a:gd fmla="val 31500" name="adj"/>
-            </a:avLst>
-          </a:prstGeom>
-          <a:solidFill>
-            <a:srgbClr val="0077FF"/>
-          </a:solidFill>
-          <a:ln>
-            <a:noFill/>
-          </a:ln>
-        </p:spPr>
-        <p:txBody>
-          <a:bodyPr anchorCtr="0" anchor="ctr" bIns="91425" lIns="91425" spcFirstLastPara="1" rIns="91425" wrap="square" tIns="91425">
-            <a:noAutofit/>
-          </a:bodyPr>
-          <a:lstStyle/>
-          <a:p>
-            <a:pPr indent="0" lvl="0" marL="0" rtl="0" algn="l">
-              <a:spcBef>
-                <a:spcPts val="0"/>
-              </a:spcBef>
-              <a:spcAft>
-                <a:spcPts val="0"/>
-              </a:spcAft>
-              <a:buNone/>
-            </a:pPr>
-            <a:r>
-              <a:t/>
-            </a:r>
-            <a:endParaRPr/>
-          </a:p>
-        </p:txBody>
-      </p:sp>
-      <p:sp>
-        <p:nvSpPr>
-          <p:cNvPr id="1042" name="BrandDeck Text 1042"/>
-          <p:cNvSpPr/>
-          <p:nvPr/>
-        </p:nvSpPr>
-        <p:spPr>
-          <a:xfrm>
-            <a:off x="3365479" y="1628898"/>
-            <a:ext cx="2463787" cy="831742"/>
-          </a:xfrm>
-          <a:prstGeom prst="rect">
-            <a:avLst/>
-          </a:prstGeom>
-          <a:noFill/>
-          <a:ln>
-            <a:noFill/>
-          </a:ln>
-        </p:spPr>
-        <p:txBody>
-          <a:bodyPr anchorCtr="0" anchor="t" bIns="0" lIns="0" spcFirstLastPara="1" rIns="0" wrap="square" tIns="0">
-            <a:normAutofit/>
-          </a:bodyPr>
-          <a:lstStyle/>
-          <a:p>
-            <a:pPr indent="0" marL="0" marR="0" rtl="0" algn="l">
-              <a:lnSpc>
-                <a:spcPct val="115000"/>
-              </a:lnSpc>
-              <a:spcBef>
-                <a:spcPts val="0"/>
-              </a:spcBef>
-              <a:spcAft>
-                <a:spcPts val="240"/>
-              </a:spcAft>
-              <a:buNone/>
-            </a:pPr>
-            <a:r>
-              <a:rPr sz="1600" b="0">
-                <a:latin typeface="Play"/>
-                <a:solidFill>
-                  <a:schemeClr val="dk1"/>
-                </a:solidFill>
-              </a:rPr>
-              <a:t>Запустить пилот в двух подразделениях.</a:t>
-            </a:r>
-            <a:endParaRPr b="0" i="0" sz="1200" u="none" cap="none" strike="noStrike">
-              <a:solidFill>
-                <a:schemeClr val="dk1"/>
-              </a:solidFill>
-              <a:latin typeface="Calibri"/>
-              <a:ea typeface="Calibri"/>
-              <a:cs typeface="Calibri"/>
-              <a:sym typeface="Calibri"/>
-            </a:endParaRPr>
-          </a:p>
-        </p:txBody>
-      </p:sp>
-      <p:sp>
-        <p:nvSpPr>
-          <p:cNvPr id="1043" name="Google Shape;1043;p65"/>
-          <p:cNvSpPr/>
-          <p:nvPr/>
-        </p:nvSpPr>
-        <p:spPr>
-          <a:xfrm>
-            <a:off x="5311741" y="3566983"/>
-            <a:ext cx="466723" cy="466664"/>
-          </a:xfrm>
-          <a:prstGeom prst="rect">
-            <a:avLst/>
-          </a:prstGeom>
-          <a:noFill/>
-          <a:ln>
-            <a:noFill/>
-          </a:ln>
-        </p:spPr>
-        <p:txBody>
-          <a:bodyPr anchorCtr="0" anchor="ctr" bIns="91425" lIns="91425" spcFirstLastPara="1" rIns="91425" wrap="square" tIns="91425">
-            <a:noAutofit/>
-          </a:bodyPr>
-          <a:lstStyle/>
-          <a:p>
-            <a:pPr indent="0" lvl="0" marL="0" rtl="0" algn="l">
-              <a:spcBef>
-                <a:spcPts val="0"/>
-              </a:spcBef>
-              <a:spcAft>
-                <a:spcPts val="0"/>
-              </a:spcAft>
-              <a:buNone/>
-            </a:pPr>
-            <a:r>
-              <a:t/>
-            </a:r>
-            <a:endParaRPr/>
-          </a:p>
-        </p:txBody>
-      </p:sp>
-      <p:sp>
-        <p:nvSpPr>
-          <p:cNvPr id="1045" name="Google Shape;1045;p65"/>
-          <p:cNvSpPr/>
-          <p:nvPr/>
-        </p:nvSpPr>
-        <p:spPr>
-          <a:xfrm>
-            <a:off x="6254721" y="1400327"/>
-            <a:ext cx="2412987" cy="1009519"/>
-          </a:xfrm>
-          <a:prstGeom prst="rect">
-            <a:avLst/>
-          </a:prstGeom>
-          <a:noFill/>
-          <a:ln>
-            <a:noFill/>
-          </a:ln>
-        </p:spPr>
-        <p:txBody>
-          <a:bodyPr anchorCtr="0" anchor="ctr" bIns="91425" lIns="91425" spcFirstLastPara="1" rIns="91425" wrap="square" tIns="91425">
-            <a:noAutofit/>
-          </a:bodyPr>
-          <a:lstStyle/>
-          <a:p>
-            <a:pPr indent="0" lvl="0" marL="0" rtl="0" algn="l">
-              <a:spcBef>
-                <a:spcPts val="0"/>
-              </a:spcBef>
-              <a:spcAft>
-                <a:spcPts val="0"/>
-              </a:spcAft>
-              <a:buNone/>
-            </a:pPr>
-            <a:r>
-              <a:t/>
-            </a:r>
-            <a:endParaRPr/>
-          </a:p>
-        </p:txBody>
-      </p:sp>
-      <p:sp>
-        <p:nvSpPr>
-          <p:cNvPr id="1046" name="Google Shape;1046;p65"/>
-          <p:cNvSpPr/>
-          <p:nvPr/>
-        </p:nvSpPr>
-        <p:spPr>
-          <a:xfrm>
-            <a:off x="6254721" y="1400328"/>
-            <a:ext cx="76199" cy="76190"/>
-          </a:xfrm>
-          <a:prstGeom prst="roundRect">
-            <a:avLst>
-              <a:gd fmla="val 31500" name="adj"/>
-            </a:avLst>
-          </a:prstGeom>
-          <a:solidFill>
-            <a:srgbClr val="0077FF"/>
-          </a:solidFill>
-          <a:ln>
-            <a:noFill/>
-          </a:ln>
-        </p:spPr>
-        <p:txBody>
-          <a:bodyPr anchorCtr="0" anchor="ctr" bIns="91425" lIns="91425" spcFirstLastPara="1" rIns="91425" wrap="square" tIns="91425">
-            <a:noAutofit/>
-          </a:bodyPr>
-          <a:lstStyle/>
-          <a:p>
-            <a:pPr indent="0" lvl="0" marL="0" rtl="0" algn="l">
-              <a:spcBef>
-                <a:spcPts val="0"/>
-              </a:spcBef>
-              <a:spcAft>
-                <a:spcPts val="0"/>
-              </a:spcAft>
-              <a:buNone/>
-            </a:pPr>
-            <a:r>
-              <a:t/>
-            </a:r>
-            <a:endParaRPr/>
-          </a:p>
-        </p:txBody>
-      </p:sp>
-      <p:sp>
-        <p:nvSpPr>
-          <p:cNvPr id="1047" name="BrandDeck Text 1047"/>
-          <p:cNvSpPr/>
-          <p:nvPr/>
-        </p:nvSpPr>
-        <p:spPr>
-          <a:xfrm>
-            <a:off x="6254721" y="1628898"/>
-            <a:ext cx="2463787" cy="831742"/>
-          </a:xfrm>
-          <a:prstGeom prst="rect">
-            <a:avLst/>
-          </a:prstGeom>
-          <a:noFill/>
-          <a:ln>
-            <a:noFill/>
-          </a:ln>
-        </p:spPr>
-        <p:txBody>
-          <a:bodyPr anchorCtr="0" anchor="t" bIns="0" lIns="0" spcFirstLastPara="1" rIns="0" wrap="square" tIns="0">
-            <a:normAutofit/>
-          </a:bodyPr>
-          <a:lstStyle/>
-          <a:p>
-            <a:pPr indent="0" marL="0" marR="0" rtl="0" algn="l">
-              <a:lnSpc>
-                <a:spcPct val="115000"/>
-              </a:lnSpc>
-              <a:spcBef>
-                <a:spcPts val="0"/>
-              </a:spcBef>
-              <a:spcAft>
-                <a:spcPts val="179"/>
-              </a:spcAft>
-              <a:buNone/>
-            </a:pPr>
-            <a:r>
-              <a:rPr sz="1200" b="0">
-                <a:latin typeface="Play"/>
-                <a:solidFill>
-                  <a:schemeClr val="dk1"/>
-                </a:solidFill>
-              </a:rPr>
-              <a:t>Назначить команду из трех человек.</a:t>
-            </a:r>
-            <a:endParaRPr b="0" i="0" sz="1200" u="none" cap="none" strike="noStrike">
-              <a:solidFill>
-                <a:schemeClr val="dk1"/>
-              </a:solidFill>
-              <a:latin typeface="Calibri"/>
-              <a:ea typeface="Calibri"/>
-              <a:cs typeface="Calibri"/>
-              <a:sym typeface="Calibri"/>
-            </a:endParaRPr>
-          </a:p>
-          <a:p>
-            <a:pPr indent="0" marL="0" marR="0" rtl="0" algn="l">
-              <a:lnSpc>
-                <a:spcPct val="115000"/>
-              </a:lnSpc>
-              <a:spcBef>
-                <a:spcPts val="0"/>
-              </a:spcBef>
-              <a:spcAft>
-                <a:spcPts val="179"/>
-              </a:spcAft>
-              <a:buNone/>
-            </a:pPr>
-            <a:r>
-              <a:rPr sz="1200" b="0">
-                <a:latin typeface="Play"/>
-                <a:solidFill>
-                  <a:schemeClr val="dk1"/>
-                </a:solidFill>
-              </a:rPr>
-              <a:t>Измерить время поиска и долю закрытых обращений.</a:t>
-            </a:r>
-          </a:p>
-        </p:txBody>
-      </p:sp>
-      <p:sp>
-        <p:nvSpPr>
-          <p:cNvPr id="1048" name="Google Shape;1048;p65"/>
-          <p:cNvSpPr/>
-          <p:nvPr/>
-        </p:nvSpPr>
-        <p:spPr>
-          <a:xfrm>
-            <a:off x="8200982" y="3566983"/>
-            <a:ext cx="466723" cy="466664"/>
-          </a:xfrm>
-          <a:prstGeom prst="rect">
-            <a:avLst/>
-          </a:prstGeom>
-          <a:noFill/>
-          <a:ln>
-            <a:noFill/>
-          </a:ln>
-        </p:spPr>
-        <p:txBody>
-          <a:bodyPr anchorCtr="0" anchor="ctr" bIns="91425" lIns="91425" spcFirstLastPara="1" rIns="91425" wrap="square" tIns="91425">
-            <a:noAutofit/>
-          </a:bodyPr>
-          <a:lstStyle/>
-          <a:p>
-            <a:pPr indent="0" lvl="0" marL="0" rtl="0" algn="l">
-              <a:spcBef>
-                <a:spcPts val="0"/>
-              </a:spcBef>
-              <a:spcAft>
-                <a:spcPts val="0"/>
-              </a:spcAft>
-              <a:buNone/>
-            </a:pPr>
-            <a:r>
-              <a:t/>
-            </a:r>
-            <a:endParaRPr/>
-          </a:p>
-        </p:txBody>
-      </p:sp>
-      <p:sp>
-        <p:nvSpPr>
-          <p:cNvPr id="1050" name="BrandDeck Text 1050"/>
+          <p:cNvPr id="685" name="BrandDeck Text 685"/>
           <p:cNvSpPr txBox="1"/>
           <p:nvPr>
             <p:ph type="title"/>
@@ -7816,7 +7595,7 @@
           </a:ln>
         </p:spPr>
         <p:txBody>
-          <a:bodyPr anchorCtr="0" anchor="t" bIns="45700" lIns="91425" spcFirstLastPara="1" rIns="91425" wrap="square" tIns="45700">
+          <a:bodyPr anchorCtr="0" anchor="t" bIns="45700" lIns="91425" spcFirstLastPara="1" rIns="91425" wrap="square" tIns="45700" vert="horz">
             <a:normAutofit/>
           </a:bodyPr>
           <a:lstStyle/>
@@ -7840,77 +7619,7 @@
             </a:pPr>
             <a:r>
               <a:rPr sz="1800"/>
-              <a:t>Одобрить пилот и выделить команду из 3 человек</a:t>
-            </a:r>
-            <a:endParaRPr/>
-          </a:p>
-        </p:txBody>
-      </p:sp>
-    </p:spTree>
-  </p:cSld>
-  <p:clrMapOvr>
-    <a:masterClrMapping/>
-  </p:clrMapOvr>
-</p:sld>
-</file>
-
-<file path=ppt/slides/slide2.xml><?xml version="1.0" encoding="utf-8"?>
-<p:sld xmlns:a="http://schemas.openxmlformats.org/drawingml/2006/main" xmlns:p="http://schemas.openxmlformats.org/presentationml/2006/main" xmlns:r="http://schemas.openxmlformats.org/officeDocument/2006/relationships">
-  <p:cSld>
-    <p:spTree>
-      <p:nvGrpSpPr>
-        <p:cNvPr id="1" name=""/>
-        <p:cNvGrpSpPr/>
-        <p:nvPr/>
-      </p:nvGrpSpPr>
-      <p:grpSpPr/>
-      <p:sp>
-        <p:nvSpPr>
-          <p:cNvPr id="2251" name="BrandDeck Text 2251"/>
-          <p:cNvSpPr txBox="1"/>
-          <p:nvPr>
-            <p:ph type="title"/>
-          </p:nvPr>
-        </p:nvSpPr>
-        <p:spPr>
-          <a:xfrm>
-            <a:off x="177970" y="282949"/>
-            <a:ext cx="6792985" cy="724203"/>
-          </a:xfrm>
-          <a:prstGeom prst="rect">
-            <a:avLst/>
-          </a:prstGeom>
-          <a:noFill/>
-          <a:ln>
-            <a:noFill/>
-          </a:ln>
-        </p:spPr>
-        <p:txBody>
-          <a:bodyPr anchorCtr="0" anchor="t" bIns="45700" lIns="91425" spcFirstLastPara="1" rIns="91425" wrap="square" tIns="45700">
-            <a:normAutofit/>
-          </a:bodyPr>
-          <a:lstStyle/>
-          <a:p>
-            <a:pPr indent="0" marL="0" rtl="0" algn="l">
-              <a:lnSpc>
-                <a:spcPct val="115000"/>
-              </a:lnSpc>
-              <a:spcBef>
-                <a:spcPts val="0"/>
-              </a:spcBef>
-              <a:spcAft>
-                <a:spcPts val="270"/>
-              </a:spcAft>
-              <a:buClr>
-                <a:schemeClr val="dk1"/>
-              </a:buClr>
-              <a:buSzPts val="2400"/>
-              <a:buFont typeface="Play"/>
-              <a:buNone/>
-            </a:pPr>
-            <a:r>
-              <a:rPr sz="1800"/>
-              <a:t>Поиск инструкции занимает до 30 минут</a:t>
+              <a:t>Сотрудники тратят до 30 минут на поиск нужной инструкции</a:t>
             </a:r>
             <a:endParaRPr/>
           </a:p>
@@ -7918,28 +7627,28 @@
       </p:sp>
       <p:grpSp>
         <p:nvGrpSpPr>
-          <p:cNvPr id="2" name="BrandDeck Diagram icon_grid" descr="icon_grid: Сотрудники тратят до 30 минут на поиск нужной инструкции.; Время поиска напрямую влияет на общую эффективность отдела."/>
+          <p:cNvPr id="2" name="BrandDeck Diagram icon_grid" descr="icon_grid: Сотрудник тратит до 30 минут на поиск нужной инструкции.; Долгий поиск снижает продуктивность при работе с регламентами.; Текущее время поиска является базой для оценки эффекта пилота."/>
           <p:cNvGrpSpPr/>
           <p:nvPr/>
         </p:nvGrpSpPr>
         <p:grpSpPr>
           <a:xfrm>
-            <a:off x="177970" y="1695736"/>
-            <a:ext cx="7285819" cy="2105863"/>
-            <a:chOff x="177970" y="1695736"/>
-            <a:chExt cx="7285819" cy="2105863"/>
+            <a:off x="438148" y="1819373"/>
+            <a:ext cx="8305756" cy="2290463"/>
+            <a:chOff x="438148" y="1819373"/>
+            <a:chExt cx="8305756" cy="2290463"/>
           </a:xfrm>
         </p:grpSpPr>
         <p:sp>
           <p:nvSpPr>
-            <p:cNvPr id="2256" name="BrandDeck Diagram Card 1"/>
+            <p:cNvPr id="686" name="BrandDeck Diagram Card 1"/>
             <p:cNvSpPr/>
             <p:nvPr/>
           </p:nvSpPr>
           <p:spPr>
             <a:xfrm>
-              <a:off x="177970" y="1695736"/>
-              <a:ext cx="3570051" cy="2105863"/>
+              <a:off x="438148" y="1819373"/>
+              <a:ext cx="4069820" cy="1062174"/>
             </a:xfrm>
             <a:prstGeom prst="roundRect">
               <a:avLst>
@@ -7963,14 +7672,14 @@
         </p:sp>
         <p:sp>
           <p:nvSpPr>
-            <p:cNvPr id="2257" name="BrandDeck Diagram Icon 1 Badge"/>
+            <p:cNvPr id="687" name="BrandDeck Diagram Icon 1 Badge"/>
             <p:cNvSpPr/>
             <p:nvPr/>
           </p:nvSpPr>
           <p:spPr>
             <a:xfrm>
-              <a:off x="397426" y="1915192"/>
-              <a:ext cx="603504" cy="603504"/>
+              <a:off x="657604" y="2167580"/>
+              <a:ext cx="365760" cy="365760"/>
             </a:xfrm>
             <a:prstGeom prst="ellipse">
               <a:avLst/>
@@ -7992,14 +7701,14 @@
         </p:sp>
         <p:sp>
           <p:nvSpPr>
-            <p:cNvPr id="2258" name="BrandDeck Icon users"/>
+            <p:cNvPr id="688" name="BrandDeck Icon users"/>
             <p:cNvSpPr/>
             <p:nvPr/>
           </p:nvSpPr>
           <p:spPr>
             <a:xfrm>
-              <a:off x="530196" y="2047963"/>
-              <a:ext cx="337962" cy="337962"/>
+              <a:off x="738071" y="2248047"/>
+              <a:ext cx="204825" cy="204825"/>
             </a:xfrm>
             <a:custGeom>
               <a:avLst/>
@@ -8089,614 +7798,6 @@
               </a:pathLst>
             </a:custGeom>
             <a:noFill/>
-            <a:ln w="28163" cap="rnd">
-              <a:solidFill>
-                <a:srgbClr val="FFFFFF"/>
-              </a:solidFill>
-              <a:round/>
-            </a:ln>
-          </p:spPr>
-          <p:txBody>
-            <a:bodyPr rtlCol="0" anchor="ctr"/>
-            <a:lstStyle/>
-            <a:p>
-              <a:pPr algn="ctr"/>
-            </a:p>
-          </p:txBody>
-        </p:sp>
-        <p:sp>
-          <p:nvSpPr>
-            <p:cNvPr id="2259" name="BrandDeck Diagram Text 1"/>
-            <p:cNvSpPr txBox="1"/>
-            <p:nvPr/>
-          </p:nvSpPr>
-          <p:spPr>
-            <a:xfrm>
-              <a:off x="331589" y="2672316"/>
-              <a:ext cx="3262813" cy="1019555"/>
-            </a:xfrm>
-            <a:prstGeom prst="rect">
-              <a:avLst/>
-            </a:prstGeom>
-            <a:noFill/>
-          </p:spPr>
-          <p:txBody>
-            <a:bodyPr wrap="square" anchor="t" lIns="36576" tIns="18288" rIns="36576" bIns="18288">
-              <a:noAutofit/>
-            </a:bodyPr>
-            <a:lstStyle/>
-            <a:p>
-              <a:pPr algn="l">
-                <a:lnSpc>
-                  <a:spcPct val="110000"/>
-                </a:lnSpc>
-              </a:pPr>
-              <a:r>
-                <a:rPr sz="1800" b="0">
-                  <a:solidFill>
-                    <a:srgbClr val="000000"/>
-                  </a:solidFill>
-                  <a:latin typeface="Play"/>
-                </a:rPr>
-                <a:t>Сотрудники тратят до 30 минут на поиск нужной инструкции.</a:t>
-              </a:r>
-            </a:p>
-          </p:txBody>
-        </p:sp>
-        <p:sp>
-          <p:nvSpPr>
-            <p:cNvPr id="2260" name="BrandDeck Diagram Card 2"/>
-            <p:cNvSpPr/>
-            <p:nvPr/>
-          </p:nvSpPr>
-          <p:spPr>
-            <a:xfrm>
-              <a:off x="3893738" y="1695736"/>
-              <a:ext cx="3570051" cy="2105863"/>
-            </a:xfrm>
-            <a:prstGeom prst="roundRect">
-              <a:avLst>
-                <a:gd name="adj" fmla="val 8000"/>
-              </a:avLst>
-            </a:prstGeom>
-            <a:solidFill>
-              <a:srgbClr val="E8F3FF"/>
-            </a:solidFill>
-            <a:ln>
-              <a:noFill/>
-            </a:ln>
-          </p:spPr>
-          <p:txBody>
-            <a:bodyPr rtlCol="0" anchor="ctr"/>
-            <a:lstStyle/>
-            <a:p>
-              <a:pPr algn="ctr"/>
-            </a:p>
-          </p:txBody>
-        </p:sp>
-        <p:sp>
-          <p:nvSpPr>
-            <p:cNvPr id="2261" name="BrandDeck Diagram Icon 2 Badge"/>
-            <p:cNvSpPr/>
-            <p:nvPr/>
-          </p:nvSpPr>
-          <p:spPr>
-            <a:xfrm>
-              <a:off x="4113194" y="1915192"/>
-              <a:ext cx="603504" cy="603504"/>
-            </a:xfrm>
-            <a:prstGeom prst="ellipse">
-              <a:avLst/>
-            </a:prstGeom>
-            <a:solidFill>
-              <a:srgbClr val="006DEB"/>
-            </a:solidFill>
-            <a:ln>
-              <a:noFill/>
-            </a:ln>
-          </p:spPr>
-          <p:txBody>
-            <a:bodyPr rtlCol="0" anchor="ctr"/>
-            <a:lstStyle/>
-            <a:p>
-              <a:pPr algn="ctr"/>
-            </a:p>
-          </p:txBody>
-        </p:sp>
-        <p:sp>
-          <p:nvSpPr>
-            <p:cNvPr id="2262" name="BrandDeck Icon clock"/>
-            <p:cNvSpPr/>
-            <p:nvPr/>
-          </p:nvSpPr>
-          <p:spPr>
-            <a:xfrm>
-              <a:off x="4245965" y="2047963"/>
-              <a:ext cx="337962" cy="337962"/>
-            </a:xfrm>
-            <a:custGeom>
-              <a:avLst/>
-              <a:gdLst/>
-              <a:ahLst/>
-              <a:cxnLst/>
-              <a:rect l="l" t="t" r="r" b="b"/>
-              <a:pathLst>
-                <a:path w="24000" h="24000" fill="none">
-                  <a:moveTo>
-                    <a:pt x="22000" y="12000"/>
-                  </a:moveTo>
-                  <a:cubicBezTo>
-                    <a:pt x="22000" y="17523"/>
-                    <a:pt x="17523" y="22000"/>
-                    <a:pt x="12000" y="22000"/>
-                  </a:cubicBezTo>
-                  <a:cubicBezTo>
-                    <a:pt x="6477" y="22000"/>
-                    <a:pt x="2000" y="17523"/>
-                    <a:pt x="2000" y="12000"/>
-                  </a:cubicBezTo>
-                  <a:cubicBezTo>
-                    <a:pt x="2000" y="6477"/>
-                    <a:pt x="6477" y="2000"/>
-                    <a:pt x="12000" y="2000"/>
-                  </a:cubicBezTo>
-                  <a:cubicBezTo>
-                    <a:pt x="17523" y="2000"/>
-                    <a:pt x="22000" y="6477"/>
-                    <a:pt x="22000" y="12000"/>
-                  </a:cubicBezTo>
-                  <a:close/>
-                </a:path>
-                <a:path w="24000" h="24000" fill="none">
-                  <a:moveTo>
-                    <a:pt x="12000" y="6000"/>
-                  </a:moveTo>
-                  <a:lnTo>
-                    <a:pt x="12000" y="12000"/>
-                  </a:lnTo>
-                  <a:lnTo>
-                    <a:pt x="16000" y="14000"/>
-                  </a:lnTo>
-                </a:path>
-              </a:pathLst>
-            </a:custGeom>
-            <a:noFill/>
-            <a:ln w="28163" cap="rnd">
-              <a:solidFill>
-                <a:srgbClr val="FFFFFF"/>
-              </a:solidFill>
-              <a:round/>
-            </a:ln>
-          </p:spPr>
-          <p:txBody>
-            <a:bodyPr rtlCol="0" anchor="ctr"/>
-            <a:lstStyle/>
-            <a:p>
-              <a:pPr algn="ctr"/>
-            </a:p>
-          </p:txBody>
-        </p:sp>
-        <p:sp>
-          <p:nvSpPr>
-            <p:cNvPr id="2263" name="BrandDeck Diagram Text 2"/>
-            <p:cNvSpPr txBox="1"/>
-            <p:nvPr/>
-          </p:nvSpPr>
-          <p:spPr>
-            <a:xfrm>
-              <a:off x="4047357" y="2672316"/>
-              <a:ext cx="3262813" cy="1019555"/>
-            </a:xfrm>
-            <a:prstGeom prst="rect">
-              <a:avLst/>
-            </a:prstGeom>
-            <a:noFill/>
-          </p:spPr>
-          <p:txBody>
-            <a:bodyPr wrap="square" anchor="t" lIns="36576" tIns="18288" rIns="36576" bIns="18288">
-              <a:noAutofit/>
-            </a:bodyPr>
-            <a:lstStyle/>
-            <a:p>
-              <a:pPr algn="l">
-                <a:lnSpc>
-                  <a:spcPct val="110000"/>
-                </a:lnSpc>
-              </a:pPr>
-              <a:r>
-                <a:rPr sz="1800" b="0">
-                  <a:solidFill>
-                    <a:srgbClr val="000000"/>
-                  </a:solidFill>
-                  <a:latin typeface="Play"/>
-                </a:rPr>
-                <a:t>Время поиска напрямую влияет на общую эффективность отдела.</a:t>
-              </a:r>
-            </a:p>
-          </p:txBody>
-        </p:sp>
-      </p:grpSp>
-    </p:spTree>
-  </p:cSld>
-  <p:clrMapOvr>
-    <a:masterClrMapping/>
-  </p:clrMapOvr>
-</p:sld>
-</file>
-
-<file path=ppt/slides/slide3.xml><?xml version="1.0" encoding="utf-8"?>
-<p:sld xmlns:a="http://schemas.openxmlformats.org/drawingml/2006/main" xmlns:p="http://schemas.openxmlformats.org/presentationml/2006/main" xmlns:r="http://schemas.openxmlformats.org/officeDocument/2006/relationships">
-  <p:cSld>
-    <p:spTree>
-      <p:nvGrpSpPr>
-        <p:cNvPr id="1" name=""/>
-        <p:cNvGrpSpPr/>
-        <p:nvPr/>
-      </p:nvGrpSpPr>
-      <p:grpSpPr/>
-      <p:sp>
-        <p:nvSpPr>
-          <p:cNvPr id="662" name="Google Shape;662;p55"/>
-          <p:cNvSpPr/>
-          <p:nvPr/>
-        </p:nvSpPr>
-        <p:spPr>
-          <a:xfrm>
-            <a:off x="8667705" y="4666977"/>
-            <a:ext cx="190499" cy="190475"/>
-          </a:xfrm>
-          <a:prstGeom prst="rect">
-            <a:avLst/>
-          </a:prstGeom>
-          <a:noFill/>
-          <a:ln>
-            <a:noFill/>
-          </a:ln>
-        </p:spPr>
-        <p:txBody>
-          <a:bodyPr anchorCtr="0" anchor="ctr" bIns="91425" lIns="91425" spcFirstLastPara="1" rIns="91425" wrap="square" tIns="91425">
-            <a:noAutofit/>
-          </a:bodyPr>
-          <a:lstStyle/>
-          <a:p>
-            <a:pPr indent="0" lvl="0" marL="0" rtl="0" algn="l">
-              <a:spcBef>
-                <a:spcPts val="0"/>
-              </a:spcBef>
-              <a:spcAft>
-                <a:spcPts val="0"/>
-              </a:spcAft>
-              <a:buNone/>
-            </a:pPr>
-            <a:r>
-              <a:t/>
-            </a:r>
-            <a:endParaRPr/>
-          </a:p>
-        </p:txBody>
-      </p:sp>
-      <p:sp>
-        <p:nvSpPr>
-          <p:cNvPr id="663" name="Google Shape;663;p55"/>
-          <p:cNvSpPr/>
-          <p:nvPr/>
-        </p:nvSpPr>
-        <p:spPr>
-          <a:xfrm>
-            <a:off x="285748" y="286047"/>
-            <a:ext cx="8572456" cy="3938075"/>
-          </a:xfrm>
-          <a:prstGeom prst="rect">
-            <a:avLst/>
-          </a:prstGeom>
-          <a:noFill/>
-          <a:ln>
-            <a:noFill/>
-          </a:ln>
-        </p:spPr>
-        <p:txBody>
-          <a:bodyPr anchorCtr="0" anchor="ctr" bIns="91425" lIns="91425" spcFirstLastPara="1" rIns="91425" wrap="square" tIns="91425">
-            <a:noAutofit/>
-          </a:bodyPr>
-          <a:lstStyle/>
-          <a:p>
-            <a:pPr indent="0" lvl="0" marL="0" rtl="0" algn="l">
-              <a:spcBef>
-                <a:spcPts val="0"/>
-              </a:spcBef>
-              <a:spcAft>
-                <a:spcPts val="0"/>
-              </a:spcAft>
-              <a:buNone/>
-            </a:pPr>
-            <a:r>
-              <a:t/>
-            </a:r>
-            <a:endParaRPr/>
-          </a:p>
-        </p:txBody>
-      </p:sp>
-      <p:sp>
-        <p:nvSpPr>
-          <p:cNvPr id="664" name="Google Shape;664;p55"/>
-          <p:cNvSpPr/>
-          <p:nvPr/>
-        </p:nvSpPr>
-        <p:spPr>
-          <a:xfrm>
-            <a:off x="285748" y="1209852"/>
-            <a:ext cx="8572456" cy="3014270"/>
-          </a:xfrm>
-          <a:prstGeom prst="rect">
-            <a:avLst/>
-          </a:prstGeom>
-          <a:noFill/>
-          <a:ln>
-            <a:noFill/>
-          </a:ln>
-        </p:spPr>
-        <p:txBody>
-          <a:bodyPr anchorCtr="0" anchor="ctr" bIns="91425" lIns="91425" spcFirstLastPara="1" rIns="91425" wrap="square" tIns="91425">
-            <a:noAutofit/>
-          </a:bodyPr>
-          <a:lstStyle/>
-          <a:p>
-            <a:pPr indent="0" lvl="0" marL="0" rtl="0" algn="l">
-              <a:spcBef>
-                <a:spcPts val="0"/>
-              </a:spcBef>
-              <a:spcAft>
-                <a:spcPts val="0"/>
-              </a:spcAft>
-              <a:buNone/>
-            </a:pPr>
-            <a:r>
-              <a:t/>
-            </a:r>
-            <a:endParaRPr/>
-          </a:p>
-        </p:txBody>
-      </p:sp>
-      <p:sp>
-        <p:nvSpPr>
-          <p:cNvPr id="685" name="BrandDeck Text 685"/>
-          <p:cNvSpPr txBox="1"/>
-          <p:nvPr>
-            <p:ph type="title"/>
-          </p:nvPr>
-        </p:nvSpPr>
-        <p:spPr>
-          <a:xfrm>
-            <a:off x="177970" y="282949"/>
-            <a:ext cx="6792985" cy="724203"/>
-          </a:xfrm>
-          <a:prstGeom prst="rect">
-            <a:avLst/>
-          </a:prstGeom>
-          <a:noFill/>
-          <a:ln>
-            <a:noFill/>
-          </a:ln>
-        </p:spPr>
-        <p:txBody>
-          <a:bodyPr anchorCtr="0" anchor="t" bIns="45700" lIns="91425" spcFirstLastPara="1" rIns="91425" wrap="square" tIns="45700">
-            <a:normAutofit/>
-          </a:bodyPr>
-          <a:lstStyle/>
-          <a:p>
-            <a:pPr indent="0" marL="0" rtl="0" algn="l">
-              <a:lnSpc>
-                <a:spcPct val="115000"/>
-              </a:lnSpc>
-              <a:spcBef>
-                <a:spcPts val="0"/>
-              </a:spcBef>
-              <a:spcAft>
-                <a:spcPts val="270"/>
-              </a:spcAft>
-              <a:buClr>
-                <a:schemeClr val="dk1"/>
-              </a:buClr>
-              <a:buSzPts val="2400"/>
-              <a:buFont typeface="Play"/>
-              <a:buNone/>
-            </a:pPr>
-            <a:r>
-              <a:rPr sz="1800"/>
-              <a:t>Треть обращений — повторяющиеся вопросы</a:t>
-            </a:r>
-            <a:endParaRPr/>
-          </a:p>
-        </p:txBody>
-      </p:sp>
-      <p:grpSp>
-        <p:nvGrpSpPr>
-          <p:cNvPr id="2" name="BrandDeck Diagram icon_grid" descr="icon_grid: Треть всех обращений в поддержку — повторяющиеся вопросы.; Эти запросы требуют времени на поиск инструкций.; Рутинные вопросы отвлекают специалистов от сложных задач."/>
-          <p:cNvGrpSpPr/>
-          <p:nvPr/>
-        </p:nvGrpSpPr>
-        <p:grpSpPr>
-          <a:xfrm>
-            <a:off x="438148" y="1819373"/>
-            <a:ext cx="8305756" cy="2290463"/>
-            <a:chOff x="438148" y="1819373"/>
-            <a:chExt cx="8305756" cy="2290463"/>
-          </a:xfrm>
-        </p:grpSpPr>
-        <p:sp>
-          <p:nvSpPr>
-            <p:cNvPr id="686" name="BrandDeck Diagram Card 1"/>
-            <p:cNvSpPr/>
-            <p:nvPr/>
-          </p:nvSpPr>
-          <p:spPr>
-            <a:xfrm>
-              <a:off x="438148" y="1819373"/>
-              <a:ext cx="4069820" cy="1062174"/>
-            </a:xfrm>
-            <a:prstGeom prst="roundRect">
-              <a:avLst>
-                <a:gd name="adj" fmla="val 8000"/>
-              </a:avLst>
-            </a:prstGeom>
-            <a:solidFill>
-              <a:srgbClr val="E8F3FF"/>
-            </a:solidFill>
-            <a:ln>
-              <a:noFill/>
-            </a:ln>
-          </p:spPr>
-          <p:txBody>
-            <a:bodyPr rtlCol="0" anchor="ctr"/>
-            <a:lstStyle/>
-            <a:p>
-              <a:pPr algn="ctr"/>
-            </a:p>
-          </p:txBody>
-        </p:sp>
-        <p:sp>
-          <p:nvSpPr>
-            <p:cNvPr id="687" name="BrandDeck Diagram Icon 1 Badge"/>
-            <p:cNvSpPr/>
-            <p:nvPr/>
-          </p:nvSpPr>
-          <p:spPr>
-            <a:xfrm>
-              <a:off x="657604" y="2167580"/>
-              <a:ext cx="365760" cy="365760"/>
-            </a:xfrm>
-            <a:prstGeom prst="ellipse">
-              <a:avLst/>
-            </a:prstGeom>
-            <a:solidFill>
-              <a:srgbClr val="006DEB"/>
-            </a:solidFill>
-            <a:ln>
-              <a:noFill/>
-            </a:ln>
-          </p:spPr>
-          <p:txBody>
-            <a:bodyPr rtlCol="0" anchor="ctr"/>
-            <a:lstStyle/>
-            <a:p>
-              <a:pPr algn="ctr"/>
-            </a:p>
-          </p:txBody>
-        </p:sp>
-        <p:sp>
-          <p:nvSpPr>
-            <p:cNvPr id="688" name="BrandDeck Icon headset"/>
-            <p:cNvSpPr/>
-            <p:nvPr/>
-          </p:nvSpPr>
-          <p:spPr>
-            <a:xfrm>
-              <a:off x="738071" y="2248047"/>
-              <a:ext cx="204825" cy="204825"/>
-            </a:xfrm>
-            <a:custGeom>
-              <a:avLst/>
-              <a:gdLst/>
-              <a:ahLst/>
-              <a:cxnLst/>
-              <a:rect l="l" t="t" r="r" b="b"/>
-              <a:pathLst>
-                <a:path w="24000" h="24000" fill="none">
-                  <a:moveTo>
-                    <a:pt x="3000" y="11000"/>
-                  </a:moveTo>
-                  <a:lnTo>
-                    <a:pt x="6000" y="11000"/>
-                  </a:lnTo>
-                  <a:cubicBezTo>
-                    <a:pt x="7105" y="11000"/>
-                    <a:pt x="8000" y="11895"/>
-                    <a:pt x="8000" y="13000"/>
-                  </a:cubicBezTo>
-                  <a:lnTo>
-                    <a:pt x="8000" y="16000"/>
-                  </a:lnTo>
-                  <a:cubicBezTo>
-                    <a:pt x="8000" y="17105"/>
-                    <a:pt x="7105" y="18000"/>
-                    <a:pt x="6000" y="18000"/>
-                  </a:cubicBezTo>
-                  <a:lnTo>
-                    <a:pt x="5000" y="18000"/>
-                  </a:lnTo>
-                  <a:cubicBezTo>
-                    <a:pt x="3895" y="18000"/>
-                    <a:pt x="3000" y="17105"/>
-                    <a:pt x="3000" y="16000"/>
-                  </a:cubicBezTo>
-                  <a:lnTo>
-                    <a:pt x="3000" y="11000"/>
-                  </a:lnTo>
-                  <a:close/>
-                  <a:moveTo>
-                    <a:pt x="3000" y="11000"/>
-                  </a:moveTo>
-                  <a:cubicBezTo>
-                    <a:pt x="3000" y="6029"/>
-                    <a:pt x="7029" y="2000"/>
-                    <a:pt x="12000" y="2000"/>
-                  </a:cubicBezTo>
-                  <a:cubicBezTo>
-                    <a:pt x="16971" y="2000"/>
-                    <a:pt x="21000" y="6029"/>
-                    <a:pt x="21000" y="11000"/>
-                  </a:cubicBezTo>
-                  <a:moveTo>
-                    <a:pt x="21000" y="11000"/>
-                  </a:moveTo>
-                  <a:lnTo>
-                    <a:pt x="21000" y="16000"/>
-                  </a:lnTo>
-                  <a:cubicBezTo>
-                    <a:pt x="21000" y="17105"/>
-                    <a:pt x="20105" y="18000"/>
-                    <a:pt x="19000" y="18000"/>
-                  </a:cubicBezTo>
-                  <a:lnTo>
-                    <a:pt x="18000" y="18000"/>
-                  </a:lnTo>
-                  <a:cubicBezTo>
-                    <a:pt x="16895" y="18000"/>
-                    <a:pt x="16000" y="17105"/>
-                    <a:pt x="16000" y="16000"/>
-                  </a:cubicBezTo>
-                  <a:lnTo>
-                    <a:pt x="16000" y="13000"/>
-                  </a:lnTo>
-                  <a:cubicBezTo>
-                    <a:pt x="16000" y="11895"/>
-                    <a:pt x="16895" y="11000"/>
-                    <a:pt x="18000" y="11000"/>
-                  </a:cubicBezTo>
-                  <a:lnTo>
-                    <a:pt x="21000" y="11000"/>
-                  </a:lnTo>
-                  <a:close/>
-                </a:path>
-                <a:path w="24000" h="24000" fill="none">
-                  <a:moveTo>
-                    <a:pt x="21000" y="16000"/>
-                  </a:moveTo>
-                  <a:lnTo>
-                    <a:pt x="21000" y="18000"/>
-                  </a:lnTo>
-                  <a:cubicBezTo>
-                    <a:pt x="21000" y="20209"/>
-                    <a:pt x="19209" y="22000"/>
-                    <a:pt x="17000" y="22000"/>
-                  </a:cubicBezTo>
-                  <a:lnTo>
-                    <a:pt x="12000" y="22000"/>
-                  </a:lnTo>
-                </a:path>
-              </a:pathLst>
-            </a:custGeom>
-            <a:noFill/>
             <a:ln w="17068" cap="rnd">
               <a:solidFill>
                 <a:srgbClr val="FFFFFF"/>
@@ -8740,22 +7841,13 @@
                 </a:lnSpc>
               </a:pPr>
               <a:r>
-                <a:rPr sz="1410" b="1">
-                  <a:solidFill>
-                    <a:srgbClr val="000000"/>
-                  </a:solidFill>
-                  <a:latin typeface="Play"/>
-                </a:rPr>
-                <a:t>Треть всех обращений в поддержку —</a:t>
-              </a:r>
-              <a:r>
                 <a:rPr sz="1410" b="0">
                   <a:solidFill>
                     <a:srgbClr val="000000"/>
                   </a:solidFill>
                   <a:latin typeface="Play"/>
                 </a:rPr>
-                <a:t> повторяющиеся вопросы.</a:t>
+                <a:t>Сотрудник тратит до 30 минут на поиск нужной инструкции.</a:t>
               </a:r>
             </a:p>
           </p:txBody>
@@ -8822,13 +7914,182 @@
         </p:sp>
         <p:sp>
           <p:nvSpPr>
-            <p:cNvPr id="692" name="BrandDeck Icon clock"/>
+            <p:cNvPr id="692" name="BrandDeck Icon search"/>
             <p:cNvSpPr/>
             <p:nvPr/>
           </p:nvSpPr>
           <p:spPr>
             <a:xfrm>
               <a:off x="4974007" y="2248047"/>
+              <a:ext cx="204825" cy="204825"/>
+            </a:xfrm>
+            <a:custGeom>
+              <a:avLst/>
+              <a:gdLst/>
+              <a:ahLst/>
+              <a:cxnLst/>
+              <a:rect l="l" t="t" r="r" b="b"/>
+              <a:pathLst>
+                <a:path w="24000" h="24000" fill="none">
+                  <a:moveTo>
+                    <a:pt x="19000" y="11000"/>
+                  </a:moveTo>
+                  <a:cubicBezTo>
+                    <a:pt x="19000" y="15418"/>
+                    <a:pt x="15418" y="19000"/>
+                    <a:pt x="11000" y="19000"/>
+                  </a:cubicBezTo>
+                  <a:cubicBezTo>
+                    <a:pt x="6582" y="19000"/>
+                    <a:pt x="3000" y="15418"/>
+                    <a:pt x="3000" y="11000"/>
+                  </a:cubicBezTo>
+                  <a:cubicBezTo>
+                    <a:pt x="3000" y="6582"/>
+                    <a:pt x="6582" y="3000"/>
+                    <a:pt x="11000" y="3000"/>
+                  </a:cubicBezTo>
+                  <a:cubicBezTo>
+                    <a:pt x="15418" y="3000"/>
+                    <a:pt x="19000" y="6582"/>
+                    <a:pt x="19000" y="11000"/>
+                  </a:cubicBezTo>
+                  <a:close/>
+                </a:path>
+                <a:path w="24000" h="24000" fill="none">
+                  <a:moveTo>
+                    <a:pt x="21000" y="21000"/>
+                  </a:moveTo>
+                  <a:lnTo>
+                    <a:pt x="16700" y="16700"/>
+                  </a:lnTo>
+                </a:path>
+              </a:pathLst>
+            </a:custGeom>
+            <a:noFill/>
+            <a:ln w="17068" cap="rnd">
+              <a:solidFill>
+                <a:srgbClr val="FFFFFF"/>
+              </a:solidFill>
+              <a:round/>
+            </a:ln>
+          </p:spPr>
+          <p:txBody>
+            <a:bodyPr rtlCol="0" anchor="ctr"/>
+            <a:lstStyle/>
+            <a:p>
+              <a:pPr algn="ctr"/>
+            </a:p>
+          </p:txBody>
+        </p:sp>
+        <p:sp>
+          <p:nvSpPr>
+            <p:cNvPr id="693" name="BrandDeck Diagram Text 2"/>
+            <p:cNvSpPr txBox="1"/>
+            <p:nvPr/>
+          </p:nvSpPr>
+          <p:spPr>
+            <a:xfrm>
+              <a:off x="5390973" y="1951046"/>
+              <a:ext cx="3133475" cy="798827"/>
+            </a:xfrm>
+            <a:prstGeom prst="rect">
+              <a:avLst/>
+            </a:prstGeom>
+            <a:noFill/>
+          </p:spPr>
+          <p:txBody>
+            <a:bodyPr wrap="square" anchor="ctr" lIns="36576" tIns="18288" rIns="36576" bIns="18288">
+              <a:noAutofit/>
+            </a:bodyPr>
+            <a:lstStyle/>
+            <a:p>
+              <a:pPr algn="l">
+                <a:lnSpc>
+                  <a:spcPct val="110000"/>
+                </a:lnSpc>
+              </a:pPr>
+              <a:r>
+                <a:rPr sz="1410" b="0">
+                  <a:solidFill>
+                    <a:srgbClr val="000000"/>
+                  </a:solidFill>
+                  <a:latin typeface="Play"/>
+                </a:rPr>
+                <a:t>Долгий поиск снижает продуктивность при работе с регламентами.</a:t>
+              </a:r>
+            </a:p>
+          </p:txBody>
+        </p:sp>
+        <p:sp>
+          <p:nvSpPr>
+            <p:cNvPr id="694" name="BrandDeck Diagram Card 3"/>
+            <p:cNvSpPr/>
+            <p:nvPr/>
+          </p:nvSpPr>
+          <p:spPr>
+            <a:xfrm>
+              <a:off x="438148" y="3047662"/>
+              <a:ext cx="4069820" cy="1062174"/>
+            </a:xfrm>
+            <a:prstGeom prst="roundRect">
+              <a:avLst>
+                <a:gd name="adj" fmla="val 8000"/>
+              </a:avLst>
+            </a:prstGeom>
+            <a:solidFill>
+              <a:srgbClr val="E8F3FF"/>
+            </a:solidFill>
+            <a:ln>
+              <a:noFill/>
+            </a:ln>
+          </p:spPr>
+          <p:txBody>
+            <a:bodyPr rtlCol="0" anchor="ctr"/>
+            <a:lstStyle/>
+            <a:p>
+              <a:pPr algn="ctr"/>
+            </a:p>
+          </p:txBody>
+        </p:sp>
+        <p:sp>
+          <p:nvSpPr>
+            <p:cNvPr id="695" name="BrandDeck Diagram Icon 3 Badge"/>
+            <p:cNvSpPr/>
+            <p:nvPr/>
+          </p:nvSpPr>
+          <p:spPr>
+            <a:xfrm>
+              <a:off x="657604" y="3395869"/>
+              <a:ext cx="365760" cy="365760"/>
+            </a:xfrm>
+            <a:prstGeom prst="ellipse">
+              <a:avLst/>
+            </a:prstGeom>
+            <a:solidFill>
+              <a:srgbClr val="006DEB"/>
+            </a:solidFill>
+            <a:ln>
+              <a:noFill/>
+            </a:ln>
+          </p:spPr>
+          <p:txBody>
+            <a:bodyPr rtlCol="0" anchor="ctr"/>
+            <a:lstStyle/>
+            <a:p>
+              <a:pPr algn="ctr"/>
+            </a:p>
+          </p:txBody>
+        </p:sp>
+        <p:sp>
+          <p:nvSpPr>
+            <p:cNvPr id="696" name="BrandDeck Icon clock"/>
+            <p:cNvSpPr/>
+            <p:nvPr/>
+          </p:nvSpPr>
+          <p:spPr>
+            <a:xfrm>
+              <a:off x="738071" y="3476336"/>
               <a:ext cx="204825" cy="204825"/>
             </a:xfrm>
             <a:custGeom>
@@ -8895,195 +8156,6 @@
         </p:sp>
         <p:sp>
           <p:nvSpPr>
-            <p:cNvPr id="693" name="BrandDeck Diagram Text 2"/>
-            <p:cNvSpPr txBox="1"/>
-            <p:nvPr/>
-          </p:nvSpPr>
-          <p:spPr>
-            <a:xfrm>
-              <a:off x="5390973" y="1951046"/>
-              <a:ext cx="3133475" cy="798827"/>
-            </a:xfrm>
-            <a:prstGeom prst="rect">
-              <a:avLst/>
-            </a:prstGeom>
-            <a:noFill/>
-          </p:spPr>
-          <p:txBody>
-            <a:bodyPr wrap="square" anchor="ctr" lIns="36576" tIns="18288" rIns="36576" bIns="18288">
-              <a:noAutofit/>
-            </a:bodyPr>
-            <a:lstStyle/>
-            <a:p>
-              <a:pPr algn="l">
-                <a:lnSpc>
-                  <a:spcPct val="110000"/>
-                </a:lnSpc>
-              </a:pPr>
-              <a:r>
-                <a:rPr sz="1410" b="0">
-                  <a:solidFill>
-                    <a:srgbClr val="000000"/>
-                  </a:solidFill>
-                  <a:latin typeface="Play"/>
-                </a:rPr>
-                <a:t>Эти запросы требуют времени на поиск инструкций.</a:t>
-              </a:r>
-            </a:p>
-          </p:txBody>
-        </p:sp>
-        <p:sp>
-          <p:nvSpPr>
-            <p:cNvPr id="694" name="BrandDeck Diagram Card 3"/>
-            <p:cNvSpPr/>
-            <p:nvPr/>
-          </p:nvSpPr>
-          <p:spPr>
-            <a:xfrm>
-              <a:off x="438148" y="3047662"/>
-              <a:ext cx="4069820" cy="1062174"/>
-            </a:xfrm>
-            <a:prstGeom prst="roundRect">
-              <a:avLst>
-                <a:gd name="adj" fmla="val 8000"/>
-              </a:avLst>
-            </a:prstGeom>
-            <a:solidFill>
-              <a:srgbClr val="E8F3FF"/>
-            </a:solidFill>
-            <a:ln>
-              <a:noFill/>
-            </a:ln>
-          </p:spPr>
-          <p:txBody>
-            <a:bodyPr rtlCol="0" anchor="ctr"/>
-            <a:lstStyle/>
-            <a:p>
-              <a:pPr algn="ctr"/>
-            </a:p>
-          </p:txBody>
-        </p:sp>
-        <p:sp>
-          <p:nvSpPr>
-            <p:cNvPr id="695" name="BrandDeck Diagram Icon 3 Badge"/>
-            <p:cNvSpPr/>
-            <p:nvPr/>
-          </p:nvSpPr>
-          <p:spPr>
-            <a:xfrm>
-              <a:off x="657604" y="3395869"/>
-              <a:ext cx="365760" cy="365760"/>
-            </a:xfrm>
-            <a:prstGeom prst="ellipse">
-              <a:avLst/>
-            </a:prstGeom>
-            <a:solidFill>
-              <a:srgbClr val="006DEB"/>
-            </a:solidFill>
-            <a:ln>
-              <a:noFill/>
-            </a:ln>
-          </p:spPr>
-          <p:txBody>
-            <a:bodyPr rtlCol="0" anchor="ctr"/>
-            <a:lstStyle/>
-            <a:p>
-              <a:pPr algn="ctr"/>
-            </a:p>
-          </p:txBody>
-        </p:sp>
-        <p:sp>
-          <p:nvSpPr>
-            <p:cNvPr id="696" name="BrandDeck Icon circle-help"/>
-            <p:cNvSpPr/>
-            <p:nvPr/>
-          </p:nvSpPr>
-          <p:spPr>
-            <a:xfrm>
-              <a:off x="738071" y="3476336"/>
-              <a:ext cx="204825" cy="204825"/>
-            </a:xfrm>
-            <a:custGeom>
-              <a:avLst/>
-              <a:gdLst/>
-              <a:ahLst/>
-              <a:cxnLst/>
-              <a:rect l="l" t="t" r="r" b="b"/>
-              <a:pathLst>
-                <a:path w="24000" h="24000" fill="none">
-                  <a:moveTo>
-                    <a:pt x="22000" y="12000"/>
-                  </a:moveTo>
-                  <a:cubicBezTo>
-                    <a:pt x="22000" y="17523"/>
-                    <a:pt x="17523" y="22000"/>
-                    <a:pt x="12000" y="22000"/>
-                  </a:cubicBezTo>
-                  <a:cubicBezTo>
-                    <a:pt x="6477" y="22000"/>
-                    <a:pt x="2000" y="17523"/>
-                    <a:pt x="2000" y="12000"/>
-                  </a:cubicBezTo>
-                  <a:cubicBezTo>
-                    <a:pt x="2000" y="6477"/>
-                    <a:pt x="6477" y="2000"/>
-                    <a:pt x="12000" y="2000"/>
-                  </a:cubicBezTo>
-                  <a:cubicBezTo>
-                    <a:pt x="17523" y="2000"/>
-                    <a:pt x="22000" y="6477"/>
-                    <a:pt x="22000" y="12000"/>
-                  </a:cubicBezTo>
-                  <a:close/>
-                </a:path>
-                <a:path w="24000" h="24000" fill="none">
-                  <a:moveTo>
-                    <a:pt x="9090" y="9000"/>
-                  </a:moveTo>
-                  <a:cubicBezTo>
-                    <a:pt x="9575" y="7620"/>
-                    <a:pt x="10985" y="6791"/>
-                    <a:pt x="12427" y="7039"/>
-                  </a:cubicBezTo>
-                  <a:cubicBezTo>
-                    <a:pt x="13869" y="7286"/>
-                    <a:pt x="14922" y="8537"/>
-                    <a:pt x="14920" y="10000"/>
-                  </a:cubicBezTo>
-                  <a:cubicBezTo>
-                    <a:pt x="14920" y="12000"/>
-                    <a:pt x="11920" y="13000"/>
-                    <a:pt x="11920" y="13000"/>
-                  </a:cubicBezTo>
-                </a:path>
-                <a:path w="24000" h="24000" fill="none">
-                  <a:moveTo>
-                    <a:pt x="12000" y="17000"/>
-                  </a:moveTo>
-                  <a:lnTo>
-                    <a:pt x="12010" y="17000"/>
-                  </a:lnTo>
-                </a:path>
-              </a:pathLst>
-            </a:custGeom>
-            <a:noFill/>
-            <a:ln w="17068" cap="rnd">
-              <a:solidFill>
-                <a:srgbClr val="FFFFFF"/>
-              </a:solidFill>
-              <a:round/>
-            </a:ln>
-          </p:spPr>
-          <p:txBody>
-            <a:bodyPr rtlCol="0" anchor="ctr"/>
-            <a:lstStyle/>
-            <a:p>
-              <a:pPr algn="ctr"/>
-            </a:p>
-          </p:txBody>
-        </p:sp>
-        <p:sp>
-          <p:nvSpPr>
             <p:cNvPr id="697" name="BrandDeck Diagram Text 3"/>
             <p:cNvSpPr txBox="1"/>
             <p:nvPr/>
@@ -9116,7 +8188,7 @@
                   </a:solidFill>
                   <a:latin typeface="Play"/>
                 </a:rPr>
-                <a:t>Рутинные вопросы отвлекают специалистов от сложных задач.</a:t>
+                <a:t>Текущее время поиска является базой для оценки эффекта пилота.</a:t>
               </a:r>
             </a:p>
           </p:txBody>
@@ -9131,403 +8203,6 @@
 </file>
 
 <file path=ppt/slides/slide4.xml><?xml version="1.0" encoding="utf-8"?>
-<p:sld xmlns:a="http://schemas.openxmlformats.org/drawingml/2006/main" xmlns:p="http://schemas.openxmlformats.org/presentationml/2006/main" xmlns:r="http://schemas.openxmlformats.org/officeDocument/2006/relationships">
-  <p:cSld>
-    <p:spTree>
-      <p:nvGrpSpPr>
-        <p:cNvPr id="1" name=""/>
-        <p:cNvGrpSpPr/>
-        <p:nvPr/>
-      </p:nvGrpSpPr>
-      <p:grpSpPr/>
-      <p:sp>
-        <p:nvSpPr>
-          <p:cNvPr id="1119" name="Google Shape;1119;p69"/>
-          <p:cNvSpPr/>
-          <p:nvPr/>
-        </p:nvSpPr>
-        <p:spPr>
-          <a:xfrm>
-            <a:off x="285748" y="286047"/>
-            <a:ext cx="8572456" cy="4176169"/>
-          </a:xfrm>
-          <a:prstGeom prst="rect">
-            <a:avLst/>
-          </a:prstGeom>
-          <a:noFill/>
-          <a:ln>
-            <a:noFill/>
-          </a:ln>
-        </p:spPr>
-        <p:txBody>
-          <a:bodyPr anchorCtr="0" anchor="ctr" bIns="91425" lIns="91425" spcFirstLastPara="1" rIns="91425" wrap="square" tIns="91425">
-            <a:noAutofit/>
-          </a:bodyPr>
-          <a:lstStyle/>
-          <a:p>
-            <a:pPr indent="0" lvl="0" marL="0" rtl="0" algn="l">
-              <a:spcBef>
-                <a:spcPts val="0"/>
-              </a:spcBef>
-              <a:spcAft>
-                <a:spcPts val="0"/>
-              </a:spcAft>
-              <a:buNone/>
-            </a:pPr>
-            <a:r>
-              <a:t/>
-            </a:r>
-            <a:endParaRPr/>
-          </a:p>
-        </p:txBody>
-      </p:sp>
-      <p:sp>
-        <p:nvSpPr>
-          <p:cNvPr id="1120" name="Google Shape;1120;p69"/>
-          <p:cNvSpPr/>
-          <p:nvPr/>
-        </p:nvSpPr>
-        <p:spPr>
-          <a:xfrm>
-            <a:off x="285748" y="1209852"/>
-            <a:ext cx="8572456" cy="3252364"/>
-          </a:xfrm>
-          <a:prstGeom prst="rect">
-            <a:avLst/>
-          </a:prstGeom>
-          <a:noFill/>
-          <a:ln>
-            <a:noFill/>
-          </a:ln>
-        </p:spPr>
-        <p:txBody>
-          <a:bodyPr anchorCtr="0" anchor="ctr" bIns="91425" lIns="91425" spcFirstLastPara="1" rIns="91425" wrap="square" tIns="91425">
-            <a:noAutofit/>
-          </a:bodyPr>
-          <a:lstStyle/>
-          <a:p>
-            <a:pPr indent="0" lvl="0" marL="0" rtl="0" algn="l">
-              <a:spcBef>
-                <a:spcPts val="0"/>
-              </a:spcBef>
-              <a:spcAft>
-                <a:spcPts val="0"/>
-              </a:spcAft>
-              <a:buNone/>
-            </a:pPr>
-            <a:r>
-              <a:t/>
-            </a:r>
-            <a:endParaRPr/>
-          </a:p>
-        </p:txBody>
-      </p:sp>
-      <p:sp>
-        <p:nvSpPr>
-          <p:cNvPr id="1121" name="Google Shape;1121;p69"/>
-          <p:cNvSpPr/>
-          <p:nvPr/>
-        </p:nvSpPr>
-        <p:spPr>
-          <a:xfrm>
-            <a:off x="285748" y="1209852"/>
-            <a:ext cx="8572456" cy="3252364"/>
-          </a:xfrm>
-          <a:prstGeom prst="rect">
-            <a:avLst/>
-          </a:prstGeom>
-          <a:noFill/>
-          <a:ln>
-            <a:noFill/>
-          </a:ln>
-        </p:spPr>
-        <p:txBody>
-          <a:bodyPr anchorCtr="0" anchor="ctr" bIns="91425" lIns="91425" spcFirstLastPara="1" rIns="91425" wrap="square" tIns="91425">
-            <a:noAutofit/>
-          </a:bodyPr>
-          <a:lstStyle/>
-          <a:p>
-            <a:pPr indent="0" lvl="0" marL="0" rtl="0" algn="l">
-              <a:spcBef>
-                <a:spcPts val="0"/>
-              </a:spcBef>
-              <a:spcAft>
-                <a:spcPts val="0"/>
-              </a:spcAft>
-              <a:buNone/>
-            </a:pPr>
-            <a:r>
-              <a:t/>
-            </a:r>
-            <a:endParaRPr/>
-          </a:p>
-        </p:txBody>
-      </p:sp>
-      <p:sp>
-        <p:nvSpPr>
-          <p:cNvPr id="1123" name="Google Shape;1123;p69"/>
-          <p:cNvSpPr/>
-          <p:nvPr/>
-        </p:nvSpPr>
-        <p:spPr>
-          <a:xfrm>
-            <a:off x="500061" y="1424137"/>
-            <a:ext cx="2919397" cy="2895223"/>
-          </a:xfrm>
-          <a:prstGeom prst="rect">
-            <a:avLst/>
-          </a:prstGeom>
-          <a:noFill/>
-          <a:ln>
-            <a:noFill/>
-          </a:ln>
-        </p:spPr>
-        <p:txBody>
-          <a:bodyPr anchorCtr="0" anchor="t" bIns="0" lIns="0" spcFirstLastPara="1" rIns="0" wrap="square" tIns="0">
-            <a:normAutofit/>
-          </a:bodyPr>
-          <a:lstStyle/>
-          <a:p>
-            <a:pPr indent="0" lvl="0" marL="0" marR="0" rtl="0" algn="l">
-              <a:lnSpc>
-                <a:spcPct val="139988"/>
-              </a:lnSpc>
-              <a:spcBef>
-                <a:spcPts val="0"/>
-              </a:spcBef>
-              <a:spcAft>
-                <a:spcPts val="0"/>
-              </a:spcAft>
-              <a:buNone/>
-            </a:pPr>
-            <a:endParaRPr b="0" i="0" sz="1688" u="none" cap="none" strike="noStrike">
-              <a:solidFill>
-                <a:schemeClr val="dk1"/>
-              </a:solidFill>
-              <a:latin typeface="Calibri"/>
-              <a:ea typeface="Calibri"/>
-              <a:cs typeface="Calibri"/>
-              <a:sym typeface="Calibri"/>
-            </a:endParaRPr>
-          </a:p>
-        </p:txBody>
-      </p:sp>
-      <p:sp>
-        <p:nvSpPr>
-          <p:cNvPr id="1124" name="Google Shape;1124;p69"/>
-          <p:cNvSpPr/>
-          <p:nvPr/>
-        </p:nvSpPr>
-        <p:spPr>
-          <a:xfrm>
-            <a:off x="3657581" y="1209852"/>
-            <a:ext cx="5200623" cy="3252364"/>
-          </a:xfrm>
-          <a:prstGeom prst="rect">
-            <a:avLst/>
-          </a:prstGeom>
-          <a:noFill/>
-          <a:ln>
-            <a:noFill/>
-          </a:ln>
-        </p:spPr>
-        <p:txBody>
-          <a:bodyPr anchorCtr="0" anchor="ctr" bIns="91425" lIns="91425" spcFirstLastPara="1" rIns="91425" wrap="square" tIns="91425">
-            <a:noAutofit/>
-          </a:bodyPr>
-          <a:lstStyle/>
-          <a:p>
-            <a:pPr indent="0" lvl="0" marL="0" rtl="0" algn="l">
-              <a:spcBef>
-                <a:spcPts val="0"/>
-              </a:spcBef>
-              <a:spcAft>
-                <a:spcPts val="0"/>
-              </a:spcAft>
-              <a:buNone/>
-            </a:pPr>
-            <a:r>
-              <a:t/>
-            </a:r>
-            <a:endParaRPr/>
-          </a:p>
-        </p:txBody>
-      </p:sp>
-      <p:sp>
-        <p:nvSpPr>
-          <p:cNvPr id="1132" name="BrandDeck Text 1132"/>
-          <p:cNvSpPr txBox="1"/>
-          <p:nvPr>
-            <p:ph type="title"/>
-          </p:nvPr>
-        </p:nvSpPr>
-        <p:spPr>
-          <a:xfrm>
-            <a:off x="177970" y="282949"/>
-            <a:ext cx="6792985" cy="724203"/>
-          </a:xfrm>
-          <a:prstGeom prst="rect">
-            <a:avLst/>
-          </a:prstGeom>
-          <a:noFill/>
-          <a:ln>
-            <a:noFill/>
-          </a:ln>
-        </p:spPr>
-        <p:txBody>
-          <a:bodyPr anchorCtr="0" anchor="t" bIns="45700" lIns="91425" spcFirstLastPara="1" rIns="91425" wrap="square" tIns="45700">
-            <a:normAutofit/>
-          </a:bodyPr>
-          <a:lstStyle/>
-          <a:p>
-            <a:pPr indent="0" marL="0" rtl="0" algn="l">
-              <a:lnSpc>
-                <a:spcPct val="115000"/>
-              </a:lnSpc>
-              <a:spcBef>
-                <a:spcPts val="0"/>
-              </a:spcBef>
-              <a:spcAft>
-                <a:spcPts val="270"/>
-              </a:spcAft>
-              <a:buClr>
-                <a:schemeClr val="dk1"/>
-              </a:buClr>
-              <a:buSzPts val="2400"/>
-              <a:buFont typeface="Play"/>
-              <a:buNone/>
-            </a:pPr>
-            <a:r>
-              <a:rPr sz="1800"/>
-              <a:t>Влияет на всех сотрудников и специалистов поддержки</a:t>
-            </a:r>
-            <a:endParaRPr/>
-          </a:p>
-        </p:txBody>
-      </p:sp>
-      <p:sp>
-        <p:nvSpPr>
-          <p:cNvPr id="1133" name="BrandDeck Body"/>
-          <p:cNvSpPr txBox="1"/>
-          <p:nvPr/>
-        </p:nvSpPr>
-        <p:spPr>
-          <a:xfrm>
-            <a:off x="500060" y="1424137"/>
-            <a:ext cx="2558400" cy="2895223"/>
-          </a:xfrm>
-          <a:prstGeom prst="rect">
-            <a:avLst/>
-          </a:prstGeom>
-          <a:noFill/>
-        </p:spPr>
-        <p:txBody>
-          <a:bodyPr wrap="square" anchor="t" lIns="36576" rIns="36576" tIns="18288" bIns="18288">
-            <a:normAutofit/>
-          </a:bodyPr>
-          <a:lstStyle/>
-          <a:p>
-            <a:pPr algn="l">
-              <a:lnSpc>
-                <a:spcPct val="115000"/>
-              </a:lnSpc>
-              <a:spcBef>
-                <a:spcPts val="0"/>
-              </a:spcBef>
-              <a:spcAft>
-                <a:spcPts val="253"/>
-              </a:spcAft>
-            </a:pPr>
-            <a:r>
-              <a:rPr sz="1689">
-                <a:solidFill>
-                  <a:srgbClr val="000000"/>
-                </a:solidFill>
-                <a:latin typeface="Play"/>
-              </a:rPr>
-              <a:t>• Сокращает время поиска инструкций для сотрудников.</a:t>
-            </a:r>
-          </a:p>
-          <a:p>
-            <a:pPr algn="l">
-              <a:lnSpc>
-                <a:spcPct val="115000"/>
-              </a:lnSpc>
-              <a:spcBef>
-                <a:spcPts val="0"/>
-              </a:spcBef>
-              <a:spcAft>
-                <a:spcPts val="253"/>
-              </a:spcAft>
-            </a:pPr>
-            <a:r>
-              <a:rPr sz="1689">
-                <a:solidFill>
-                  <a:srgbClr val="000000"/>
-                </a:solidFill>
-                <a:latin typeface="Play"/>
-              </a:rPr>
-              <a:t>• Снижает нагрузку на специалистов поддержки.</a:t>
-            </a:r>
-          </a:p>
-          <a:p>
-            <a:pPr algn="l">
-              <a:lnSpc>
-                <a:spcPct val="115000"/>
-              </a:lnSpc>
-              <a:spcBef>
-                <a:spcPts val="0"/>
-              </a:spcBef>
-              <a:spcAft>
-                <a:spcPts val="253"/>
-              </a:spcAft>
-            </a:pPr>
-            <a:r>
-              <a:rPr sz="1689">
-                <a:solidFill>
-                  <a:srgbClr val="000000"/>
-                </a:solidFill>
-                <a:latin typeface="Play"/>
-              </a:rPr>
-              <a:t>• Обеспечивает быстрый доступ к актуальным регламентам.</a:t>
-            </a:r>
-          </a:p>
-        </p:txBody>
-      </p:sp>
-      <p:pic>
-        <p:nvPicPr>
-          <p:cNvPr id="1134" name="BrandDeck Image" descr="сотрудник специалист поддержки"/>
-          <p:cNvPicPr>
-            <a:picLocks noChangeAspect="1"/>
-          </p:cNvPicPr>
-          <p:nvPr/>
-        </p:nvPicPr>
-        <p:blipFill>
-          <a:blip r:embed="rId7"/>
-          <a:srcRect l="18013" r="18013"/>
-          <a:stretch>
-            <a:fillRect/>
-          </a:stretch>
-        </p:blipFill>
-        <p:spPr>
-          <a:xfrm>
-            <a:off x="3314493" y="1424137"/>
-            <a:ext cx="3291060" cy="2895223"/>
-          </a:xfrm>
-          <a:prstGeom prst="rect">
-            <a:avLst/>
-          </a:prstGeom>
-        </p:spPr>
-      </p:pic>
-    </p:spTree>
-  </p:cSld>
-  <p:clrMapOvr>
-    <a:masterClrMapping/>
-  </p:clrMapOvr>
-</p:sld>
-</file>
-
-<file path=ppt/slides/slide5.xml><?xml version="1.0" encoding="utf-8"?>
 <p:sld xmlns:a="http://schemas.openxmlformats.org/drawingml/2006/main" xmlns:p="http://schemas.openxmlformats.org/presentationml/2006/main" xmlns:r="http://schemas.openxmlformats.org/officeDocument/2006/relationships">
   <p:cSld>
     <p:spTree>
@@ -9682,7 +8357,7 @@
           </a:ln>
         </p:spPr>
         <p:txBody>
-          <a:bodyPr anchorCtr="0" anchor="t" bIns="45700" lIns="91425" spcFirstLastPara="1" rIns="91425" wrap="square" tIns="45700">
+          <a:bodyPr anchorCtr="0" anchor="t" bIns="45700" lIns="91425" spcFirstLastPara="1" rIns="91425" wrap="square" tIns="45700" vert="horz">
             <a:normAutofit/>
           </a:bodyPr>
           <a:lstStyle/>
@@ -9706,7 +8381,7 @@
             </a:pPr>
             <a:r>
               <a:rPr sz="1800"/>
-              <a:t>ИИ отвечает на вопросы и дает ссылку на документ</a:t>
+              <a:t>ИИ-помощник отвечает на вопросы по регламентам и дает ссылку на документ</a:t>
             </a:r>
             <a:endParaRPr/>
           </a:p>
@@ -9714,7 +8389,7 @@
       </p:sp>
       <p:grpSp>
         <p:nvGrpSpPr>
-          <p:cNvPr id="2" name="BrandDeck Diagram icon_grid" descr="icon_grid: ИИ отвечает на вопросы по регламентам и инструкциям.; Система автоматически добавляет ссылку на документ-источник.; Ответ формируется на основе внутренних знаний компании."/>
+          <p:cNvPr id="2" name="BrandDeck Diagram icon_grid" descr="icon_grid: ИИ-помощник отвечает на вопросы по регламентам и инструкциям.; Система автоматически дает ссылку на документ-источник.; Ответ формируется на основе внутренних правил компании."/>
           <p:cNvGrpSpPr/>
           <p:nvPr/>
         </p:nvGrpSpPr>
@@ -9929,7 +8604,7 @@
                   </a:solidFill>
                   <a:latin typeface="Play"/>
                 </a:rPr>
-                <a:t>ИИ отвечает на вопросы по регламентам и инструкциям.</a:t>
+                <a:t>ИИ-помощник отвечает на вопросы по регламентам и инструкциям.</a:t>
               </a:r>
             </a:p>
           </p:txBody>
@@ -10126,7 +8801,7 @@
                   </a:solidFill>
                   <a:latin typeface="Play"/>
                 </a:rPr>
-                <a:t>Система автоматически добавляет ссылку на документ-источник.</a:t>
+                <a:t>Система автоматически дает ссылку на документ-источник.</a:t>
               </a:r>
             </a:p>
           </p:txBody>
@@ -10193,7 +8868,7 @@
         </p:sp>
         <p:sp>
           <p:nvSpPr>
-            <p:cNvPr id="696" name="BrandDeck Icon book-open"/>
+            <p:cNvPr id="696" name="BrandDeck Icon scroll-text"/>
             <p:cNvSpPr/>
             <p:nvPr/>
           </p:nvSpPr>
@@ -10211,72 +8886,101 @@
               <a:pathLst>
                 <a:path w="24000" h="24000" fill="none">
                   <a:moveTo>
-                    <a:pt x="12000" y="7000"/>
+                    <a:pt x="15000" y="12000"/>
                   </a:moveTo>
                   <a:lnTo>
-                    <a:pt x="12000" y="21000"/>
+                    <a:pt x="10000" y="12000"/>
                   </a:lnTo>
                 </a:path>
                 <a:path w="24000" h="24000" fill="none">
                   <a:moveTo>
-                    <a:pt x="3000" y="18000"/>
+                    <a:pt x="15000" y="8000"/>
                   </a:moveTo>
+                  <a:lnTo>
+                    <a:pt x="10000" y="8000"/>
+                  </a:lnTo>
+                </a:path>
+                <a:path w="24000" h="24000" fill="none">
+                  <a:moveTo>
+                    <a:pt x="19000" y="17000"/>
+                  </a:moveTo>
+                  <a:lnTo>
+                    <a:pt x="19000" y="5000"/>
+                  </a:lnTo>
                   <a:cubicBezTo>
-                    <a:pt x="2448" y="18000"/>
-                    <a:pt x="2000" y="17552"/>
-                    <a:pt x="2000" y="17000"/>
+                    <a:pt x="19000" y="3895"/>
+                    <a:pt x="18105" y="3000"/>
+                    <a:pt x="17000" y="3000"/>
                   </a:cubicBezTo>
                   <a:lnTo>
-                    <a:pt x="2000" y="4000"/>
+                    <a:pt x="4000" y="3000"/>
+                  </a:lnTo>
+                </a:path>
+                <a:path w="24000" h="24000" fill="none">
+                  <a:moveTo>
+                    <a:pt x="8000" y="21000"/>
+                  </a:moveTo>
+                  <a:lnTo>
+                    <a:pt x="20000" y="21000"/>
                   </a:lnTo>
                   <a:cubicBezTo>
-                    <a:pt x="2000" y="3448"/>
-                    <a:pt x="2448" y="3000"/>
-                    <a:pt x="3000" y="3000"/>
+                    <a:pt x="21105" y="21000"/>
+                    <a:pt x="22000" y="20105"/>
+                    <a:pt x="22000" y="19000"/>
                   </a:cubicBezTo>
                   <a:lnTo>
-                    <a:pt x="8000" y="3000"/>
+                    <a:pt x="22000" y="18000"/>
                   </a:lnTo>
                   <a:cubicBezTo>
-                    <a:pt x="10209" y="3000"/>
-                    <a:pt x="12000" y="4791"/>
-                    <a:pt x="12000" y="7000"/>
+                    <a:pt x="22000" y="17448"/>
+                    <a:pt x="21552" y="17000"/>
+                    <a:pt x="21000" y="17000"/>
+                  </a:cubicBezTo>
+                  <a:lnTo>
+                    <a:pt x="11000" y="17000"/>
+                  </a:lnTo>
+                  <a:cubicBezTo>
+                    <a:pt x="10448" y="17000"/>
+                    <a:pt x="10000" y="17448"/>
+                    <a:pt x="10000" y="18000"/>
+                  </a:cubicBezTo>
+                  <a:lnTo>
+                    <a:pt x="10000" y="19000"/>
+                  </a:lnTo>
+                  <a:cubicBezTo>
+                    <a:pt x="10000" y="20105"/>
+                    <a:pt x="9105" y="21000"/>
+                    <a:pt x="8000" y="21000"/>
                   </a:cubicBezTo>
                   <a:cubicBezTo>
-                    <a:pt x="12000" y="4791"/>
-                    <a:pt x="13791" y="3000"/>
-                    <a:pt x="16000" y="3000"/>
+                    <a:pt x="6895" y="21000"/>
+                    <a:pt x="6000" y="20105"/>
+                    <a:pt x="6000" y="19000"/>
                   </a:cubicBezTo>
                   <a:lnTo>
-                    <a:pt x="21000" y="3000"/>
+                    <a:pt x="6000" y="5000"/>
                   </a:lnTo>
                   <a:cubicBezTo>
-                    <a:pt x="21552" y="3000"/>
-                    <a:pt x="22000" y="3448"/>
-                    <a:pt x="22000" y="4000"/>
+                    <a:pt x="6000" y="3895"/>
+                    <a:pt x="5105" y="3000"/>
+                    <a:pt x="4000" y="3000"/>
+                  </a:cubicBezTo>
+                  <a:cubicBezTo>
+                    <a:pt x="2895" y="3000"/>
+                    <a:pt x="2000" y="3895"/>
+                    <a:pt x="2000" y="5000"/>
                   </a:cubicBezTo>
                   <a:lnTo>
-                    <a:pt x="22000" y="17000"/>
+                    <a:pt x="2000" y="7000"/>
                   </a:lnTo>
                   <a:cubicBezTo>
-                    <a:pt x="22000" y="17552"/>
-                    <a:pt x="21552" y="18000"/>
-                    <a:pt x="21000" y="18000"/>
+                    <a:pt x="2000" y="7552"/>
+                    <a:pt x="2448" y="8000"/>
+                    <a:pt x="3000" y="8000"/>
                   </a:cubicBezTo>
                   <a:lnTo>
-                    <a:pt x="15000" y="18000"/>
+                    <a:pt x="6000" y="8000"/>
                   </a:lnTo>
-                  <a:cubicBezTo>
-                    <a:pt x="13343" y="18000"/>
-                    <a:pt x="12000" y="19343"/>
-                    <a:pt x="12000" y="21000"/>
-                  </a:cubicBezTo>
-                  <a:cubicBezTo>
-                    <a:pt x="12000" y="19343"/>
-                    <a:pt x="10657" y="18000"/>
-                    <a:pt x="9000" y="18000"/>
-                  </a:cubicBezTo>
-                  <a:close/>
                 </a:path>
               </a:pathLst>
             </a:custGeom>
@@ -10330,12 +9034,409 @@
                   </a:solidFill>
                   <a:latin typeface="Play"/>
                 </a:rPr>
-                <a:t>Ответ формируется на основе внутренних знаний компании.</a:t>
+                <a:t>Ответ формируется на основе внутренних правил компании.</a:t>
               </a:r>
             </a:p>
           </p:txBody>
         </p:sp>
       </p:grpSp>
+    </p:spTree>
+  </p:cSld>
+  <p:clrMapOvr>
+    <a:masterClrMapping/>
+  </p:clrMapOvr>
+</p:sld>
+</file>
+
+<file path=ppt/slides/slide5.xml><?xml version="1.0" encoding="utf-8"?>
+<p:sld xmlns:a="http://schemas.openxmlformats.org/drawingml/2006/main" xmlns:p="http://schemas.openxmlformats.org/presentationml/2006/main" xmlns:r="http://schemas.openxmlformats.org/officeDocument/2006/relationships">
+  <p:cSld>
+    <p:spTree>
+      <p:nvGrpSpPr>
+        <p:cNvPr id="1" name=""/>
+        <p:cNvGrpSpPr/>
+        <p:nvPr/>
+      </p:nvGrpSpPr>
+      <p:grpSpPr/>
+      <p:sp>
+        <p:nvSpPr>
+          <p:cNvPr id="1119" name="Google Shape;1119;p69"/>
+          <p:cNvSpPr/>
+          <p:nvPr/>
+        </p:nvSpPr>
+        <p:spPr>
+          <a:xfrm>
+            <a:off x="285748" y="286047"/>
+            <a:ext cx="8572456" cy="4176169"/>
+          </a:xfrm>
+          <a:prstGeom prst="rect">
+            <a:avLst/>
+          </a:prstGeom>
+          <a:noFill/>
+          <a:ln>
+            <a:noFill/>
+          </a:ln>
+        </p:spPr>
+        <p:txBody>
+          <a:bodyPr anchorCtr="0" anchor="ctr" bIns="91425" lIns="91425" spcFirstLastPara="1" rIns="91425" wrap="square" tIns="91425">
+            <a:noAutofit/>
+          </a:bodyPr>
+          <a:lstStyle/>
+          <a:p>
+            <a:pPr indent="0" lvl="0" marL="0" rtl="0" algn="l">
+              <a:spcBef>
+                <a:spcPts val="0"/>
+              </a:spcBef>
+              <a:spcAft>
+                <a:spcPts val="0"/>
+              </a:spcAft>
+              <a:buNone/>
+            </a:pPr>
+            <a:r>
+              <a:t/>
+            </a:r>
+            <a:endParaRPr/>
+          </a:p>
+        </p:txBody>
+      </p:sp>
+      <p:sp>
+        <p:nvSpPr>
+          <p:cNvPr id="1120" name="Google Shape;1120;p69"/>
+          <p:cNvSpPr/>
+          <p:nvPr/>
+        </p:nvSpPr>
+        <p:spPr>
+          <a:xfrm>
+            <a:off x="285748" y="1209852"/>
+            <a:ext cx="8572456" cy="3252364"/>
+          </a:xfrm>
+          <a:prstGeom prst="rect">
+            <a:avLst/>
+          </a:prstGeom>
+          <a:noFill/>
+          <a:ln>
+            <a:noFill/>
+          </a:ln>
+        </p:spPr>
+        <p:txBody>
+          <a:bodyPr anchorCtr="0" anchor="ctr" bIns="91425" lIns="91425" spcFirstLastPara="1" rIns="91425" wrap="square" tIns="91425">
+            <a:noAutofit/>
+          </a:bodyPr>
+          <a:lstStyle/>
+          <a:p>
+            <a:pPr indent="0" lvl="0" marL="0" rtl="0" algn="l">
+              <a:spcBef>
+                <a:spcPts val="0"/>
+              </a:spcBef>
+              <a:spcAft>
+                <a:spcPts val="0"/>
+              </a:spcAft>
+              <a:buNone/>
+            </a:pPr>
+            <a:r>
+              <a:t/>
+            </a:r>
+            <a:endParaRPr/>
+          </a:p>
+        </p:txBody>
+      </p:sp>
+      <p:sp>
+        <p:nvSpPr>
+          <p:cNvPr id="1121" name="Google Shape;1121;p69"/>
+          <p:cNvSpPr/>
+          <p:nvPr/>
+        </p:nvSpPr>
+        <p:spPr>
+          <a:xfrm>
+            <a:off x="285748" y="1209852"/>
+            <a:ext cx="8572456" cy="3252364"/>
+          </a:xfrm>
+          <a:prstGeom prst="rect">
+            <a:avLst/>
+          </a:prstGeom>
+          <a:noFill/>
+          <a:ln>
+            <a:noFill/>
+          </a:ln>
+        </p:spPr>
+        <p:txBody>
+          <a:bodyPr anchorCtr="0" anchor="ctr" bIns="91425" lIns="91425" spcFirstLastPara="1" rIns="91425" wrap="square" tIns="91425">
+            <a:noAutofit/>
+          </a:bodyPr>
+          <a:lstStyle/>
+          <a:p>
+            <a:pPr indent="0" lvl="0" marL="0" rtl="0" algn="l">
+              <a:spcBef>
+                <a:spcPts val="0"/>
+              </a:spcBef>
+              <a:spcAft>
+                <a:spcPts val="0"/>
+              </a:spcAft>
+              <a:buNone/>
+            </a:pPr>
+            <a:r>
+              <a:t/>
+            </a:r>
+            <a:endParaRPr/>
+          </a:p>
+        </p:txBody>
+      </p:sp>
+      <p:sp>
+        <p:nvSpPr>
+          <p:cNvPr id="1123" name="Google Shape;1123;p69"/>
+          <p:cNvSpPr/>
+          <p:nvPr/>
+        </p:nvSpPr>
+        <p:spPr>
+          <a:xfrm>
+            <a:off x="500061" y="1424137"/>
+            <a:ext cx="2919397" cy="2895223"/>
+          </a:xfrm>
+          <a:prstGeom prst="rect">
+            <a:avLst/>
+          </a:prstGeom>
+          <a:noFill/>
+          <a:ln>
+            <a:noFill/>
+          </a:ln>
+        </p:spPr>
+        <p:txBody>
+          <a:bodyPr anchorCtr="0" anchor="t" bIns="0" lIns="0" spcFirstLastPara="1" rIns="0" wrap="square" tIns="0">
+            <a:normAutofit/>
+          </a:bodyPr>
+          <a:lstStyle/>
+          <a:p>
+            <a:pPr indent="0" lvl="0" marL="0" marR="0" rtl="0" algn="l">
+              <a:lnSpc>
+                <a:spcPct val="139988"/>
+              </a:lnSpc>
+              <a:spcBef>
+                <a:spcPts val="0"/>
+              </a:spcBef>
+              <a:spcAft>
+                <a:spcPts val="0"/>
+              </a:spcAft>
+              <a:buNone/>
+            </a:pPr>
+            <a:endParaRPr b="0" i="0" sz="1688" u="none" cap="none" strike="noStrike">
+              <a:solidFill>
+                <a:schemeClr val="dk1"/>
+              </a:solidFill>
+              <a:latin typeface="Calibri"/>
+              <a:ea typeface="Calibri"/>
+              <a:cs typeface="Calibri"/>
+              <a:sym typeface="Calibri"/>
+            </a:endParaRPr>
+          </a:p>
+        </p:txBody>
+      </p:sp>
+      <p:sp>
+        <p:nvSpPr>
+          <p:cNvPr id="1124" name="Google Shape;1124;p69"/>
+          <p:cNvSpPr/>
+          <p:nvPr/>
+        </p:nvSpPr>
+        <p:spPr>
+          <a:xfrm>
+            <a:off x="3657581" y="1209852"/>
+            <a:ext cx="5200623" cy="3252364"/>
+          </a:xfrm>
+          <a:prstGeom prst="rect">
+            <a:avLst/>
+          </a:prstGeom>
+          <a:noFill/>
+          <a:ln>
+            <a:noFill/>
+          </a:ln>
+        </p:spPr>
+        <p:txBody>
+          <a:bodyPr anchorCtr="0" anchor="ctr" bIns="91425" lIns="91425" spcFirstLastPara="1" rIns="91425" wrap="square" tIns="91425">
+            <a:noAutofit/>
+          </a:bodyPr>
+          <a:lstStyle/>
+          <a:p>
+            <a:pPr indent="0" lvl="0" marL="0" rtl="0" algn="l">
+              <a:spcBef>
+                <a:spcPts val="0"/>
+              </a:spcBef>
+              <a:spcAft>
+                <a:spcPts val="0"/>
+              </a:spcAft>
+              <a:buNone/>
+            </a:pPr>
+            <a:r>
+              <a:t/>
+            </a:r>
+            <a:endParaRPr/>
+          </a:p>
+        </p:txBody>
+      </p:sp>
+      <p:sp>
+        <p:nvSpPr>
+          <p:cNvPr id="1132" name="BrandDeck Text 1132"/>
+          <p:cNvSpPr txBox="1"/>
+          <p:nvPr>
+            <p:ph type="title"/>
+          </p:nvPr>
+        </p:nvSpPr>
+        <p:spPr>
+          <a:xfrm>
+            <a:off x="177970" y="282949"/>
+            <a:ext cx="6792985" cy="724203"/>
+          </a:xfrm>
+          <a:prstGeom prst="rect">
+            <a:avLst/>
+          </a:prstGeom>
+          <a:noFill/>
+          <a:ln>
+            <a:noFill/>
+          </a:ln>
+        </p:spPr>
+        <p:txBody>
+          <a:bodyPr anchorCtr="0" anchor="t" bIns="45700" lIns="91425" spcFirstLastPara="1" rIns="91425" wrap="square" tIns="45700" vert="horz">
+            <a:normAutofit/>
+          </a:bodyPr>
+          <a:lstStyle/>
+          <a:p>
+            <a:pPr indent="0" marL="0" rtl="0" algn="l">
+              <a:lnSpc>
+                <a:spcPct val="115000"/>
+              </a:lnSpc>
+              <a:spcBef>
+                <a:spcPts val="0"/>
+              </a:spcBef>
+              <a:spcAft>
+                <a:spcPts val="270"/>
+              </a:spcAft>
+              <a:buClr>
+                <a:schemeClr val="dk1"/>
+              </a:buClr>
+              <a:buSzPts val="2400"/>
+              <a:buFont typeface="Play"/>
+              <a:buNone/>
+            </a:pPr>
+            <a:r>
+              <a:rPr sz="1800"/>
+              <a:t>Модель работает внутри контура компании, документы не уходят наружу</a:t>
+            </a:r>
+            <a:endParaRPr/>
+          </a:p>
+        </p:txBody>
+      </p:sp>
+      <p:sp>
+        <p:nvSpPr>
+          <p:cNvPr id="1133" name="BrandDeck Body"/>
+          <p:cNvSpPr txBox="1"/>
+          <p:nvPr/>
+        </p:nvSpPr>
+        <p:spPr>
+          <a:xfrm>
+            <a:off x="500060" y="1424137"/>
+            <a:ext cx="2558400" cy="2895223"/>
+          </a:xfrm>
+          <a:prstGeom prst="rect">
+            <a:avLst/>
+          </a:prstGeom>
+          <a:noFill/>
+        </p:spPr>
+        <p:txBody>
+          <a:bodyPr wrap="square" vert="horz" anchor="t" lIns="36576" rIns="36576" tIns="18288" bIns="18288">
+            <a:normAutofit/>
+          </a:bodyPr>
+          <a:lstStyle/>
+          <a:p>
+            <a:pPr algn="l">
+              <a:lnSpc>
+                <a:spcPct val="115000"/>
+              </a:lnSpc>
+              <a:spcBef>
+                <a:spcPts val="0"/>
+              </a:spcBef>
+              <a:spcAft>
+                <a:spcPts val="211"/>
+              </a:spcAft>
+            </a:pPr>
+            <a:r>
+              <a:rPr sz="1410">
+                <a:solidFill>
+                  <a:srgbClr val="000000"/>
+                </a:solidFill>
+                <a:latin typeface="Play"/>
+              </a:rPr>
+              <a:t>• Модель с открытыми весами работает внутри контура компании.</a:t>
+            </a:r>
+          </a:p>
+          <a:p>
+            <a:pPr algn="l">
+              <a:lnSpc>
+                <a:spcPct val="115000"/>
+              </a:lnSpc>
+              <a:spcBef>
+                <a:spcPts val="0"/>
+              </a:spcBef>
+              <a:spcAft>
+                <a:spcPts val="211"/>
+              </a:spcAft>
+            </a:pPr>
+            <a:r>
+              <a:rPr sz="1410">
+                <a:solidFill>
+                  <a:srgbClr val="000000"/>
+                </a:solidFill>
+                <a:latin typeface="Play"/>
+              </a:rPr>
+              <a:t>• Документы не уходят наружу при обработке запросов.</a:t>
+            </a:r>
+          </a:p>
+          <a:p>
+            <a:pPr algn="l">
+              <a:lnSpc>
+                <a:spcPct val="115000"/>
+              </a:lnSpc>
+              <a:spcBef>
+                <a:spcPts val="0"/>
+              </a:spcBef>
+              <a:spcAft>
+                <a:spcPts val="211"/>
+              </a:spcAft>
+            </a:pPr>
+            <a:r>
+              <a:rPr sz="1410">
+                <a:solidFill>
+                  <a:srgbClr val="000000"/>
+                </a:solidFill>
+                <a:latin typeface="Play"/>
+              </a:rPr>
+              <a:t>• Если подтверждённого ответа нет, вопрос уходит специалисту.</a:t>
+            </a:r>
+          </a:p>
+        </p:txBody>
+      </p:sp>
+      <p:pic>
+        <p:nvPicPr>
+          <p:cNvPr id="1134" name="BrandDeck Image" descr="внутренний контур серверная"/>
+          <p:cNvPicPr>
+            <a:picLocks noChangeAspect="1"/>
+          </p:cNvPicPr>
+          <p:nvPr/>
+        </p:nvPicPr>
+        <p:blipFill>
+          <a:blip r:embed="rId7"/>
+          <a:srcRect l="18013" r="18013"/>
+          <a:stretch>
+            <a:fillRect/>
+          </a:stretch>
+        </p:blipFill>
+        <p:spPr>
+          <a:xfrm>
+            <a:off x="3314493" y="1424137"/>
+            <a:ext cx="3291060" cy="2895223"/>
+          </a:xfrm>
+          <a:prstGeom prst="rect">
+            <a:avLst/>
+          </a:prstGeom>
+        </p:spPr>
+      </p:pic>
     </p:spTree>
   </p:cSld>
   <p:clrMapOvr>
@@ -10356,7 +9457,7 @@
       <p:grpSpPr/>
       <p:sp>
         <p:nvSpPr>
-          <p:cNvPr id="1351" name="BrandDeck Text 1351"/>
+          <p:cNvPr id="503" name="BrandDeck Text 503"/>
           <p:cNvSpPr txBox="1"/>
           <p:nvPr>
             <p:ph type="title"/>
@@ -10364,8 +9465,8 @@
         </p:nvSpPr>
         <p:spPr>
           <a:xfrm>
-            <a:off x="177970" y="282949"/>
-            <a:ext cx="6792985" cy="724203"/>
+            <a:off x="430360" y="338829"/>
+            <a:ext cx="3945697" cy="753371"/>
           </a:xfrm>
           <a:prstGeom prst="rect">
             <a:avLst/>
@@ -10376,7 +9477,7 @@
           </a:ln>
         </p:spPr>
         <p:txBody>
-          <a:bodyPr anchorCtr="0" anchor="t" bIns="45700" lIns="91425" spcFirstLastPara="1" rIns="91425" wrap="square" tIns="45700">
+          <a:bodyPr anchorCtr="0" anchor="t" bIns="45700" lIns="91425" spcFirstLastPara="1" rIns="91425" wrap="square" tIns="45700" vert="horz">
             <a:normAutofit/>
           </a:bodyPr>
           <a:lstStyle/>
@@ -10389,7 +9490,7 @@
                 <a:spcPts val="0"/>
               </a:spcBef>
               <a:spcAft>
-                <a:spcPts val="270"/>
+                <a:spcPts val="182"/>
               </a:spcAft>
               <a:buClr>
                 <a:schemeClr val="dk1"/>
@@ -10399,107 +9500,456 @@
               <a:buNone/>
             </a:pPr>
             <a:r>
-              <a:rPr sz="1800">
-                <a:latin typeface="Play"/>
-              </a:rPr>
-              <a:t>Модель с открытыми весами работает внутри контура</a:t>
+              <a:rPr sz="1220"/>
+              <a:t>Если подтвержденного ответа нет, вопрос уходит специалисту с контекстом</a:t>
             </a:r>
             <a:endParaRPr/>
           </a:p>
         </p:txBody>
       </p:sp>
-      <p:sp>
-        <p:nvSpPr>
-          <p:cNvPr id="1469" name="BrandDeck Body"/>
-          <p:cNvSpPr txBox="1"/>
+      <p:grpSp>
+        <p:nvGrpSpPr>
+          <p:cNvPr id="2" name="BrandDeck Diagram process" descr="process: Нет ответа Система не нашла подтверждённый ответ; Передача Вопрос уходит специалисту с деталями; Решение Сотрудник отвечает вручную"/>
+          <p:cNvGrpSpPr/>
           <p:nvPr/>
-        </p:nvSpPr>
-        <p:spPr>
+        </p:nvGrpSpPr>
+        <p:grpSpPr>
           <a:xfrm>
-            <a:off x="181435" y="1144312"/>
-            <a:ext cx="2375238" cy="1659436"/>
+            <a:off x="4637088" y="703710"/>
+            <a:ext cx="3862387" cy="3682237"/>
+            <a:chOff x="4637088" y="703710"/>
+            <a:chExt cx="3862387" cy="3682237"/>
           </a:xfrm>
-          <a:prstGeom prst="rect">
-            <a:avLst/>
-          </a:prstGeom>
-          <a:noFill/>
-        </p:spPr>
-        <p:txBody>
-          <a:bodyPr wrap="square" anchor="t" lIns="36576" rIns="36576" tIns="18288" bIns="18288">
-            <a:normAutofit/>
-          </a:bodyPr>
-          <a:lstStyle/>
-          <a:p>
-            <a:pPr algn="l">
-              <a:lnSpc>
-                <a:spcPct val="115000"/>
-              </a:lnSpc>
-              <a:spcBef>
-                <a:spcPts val="0"/>
-              </a:spcBef>
-              <a:spcAft>
-                <a:spcPts val="210"/>
-              </a:spcAft>
-            </a:pPr>
-            <a:r>
-              <a:rPr sz="1400">
-                <a:solidFill>
-                  <a:srgbClr val="000000"/>
-                </a:solidFill>
-                <a:latin typeface="Play"/>
-              </a:rPr>
-              <a:t>• Модель с открытыми весами работает внутри контура компании.</a:t>
-            </a:r>
-          </a:p>
-          <a:p>
-            <a:pPr algn="l">
-              <a:lnSpc>
-                <a:spcPct val="115000"/>
-              </a:lnSpc>
-              <a:spcBef>
-                <a:spcPts val="0"/>
-              </a:spcBef>
-              <a:spcAft>
-                <a:spcPts val="210"/>
-              </a:spcAft>
-            </a:pPr>
-            <a:r>
-              <a:rPr sz="1400">
-                <a:solidFill>
-                  <a:srgbClr val="000000"/>
-                </a:solidFill>
-                <a:latin typeface="Play"/>
-              </a:rPr>
-              <a:t>• Документы не уходят наружу при обработке запросов.</a:t>
-            </a:r>
-          </a:p>
-        </p:txBody>
-      </p:sp>
-      <p:pic>
-        <p:nvPicPr>
-          <p:cNvPr id="1470" name="BrandDeck Image" descr="внутренний контур серверная"/>
-          <p:cNvPicPr>
-            <a:picLocks noChangeAspect="1"/>
-          </p:cNvPicPr>
-          <p:nvPr/>
-        </p:nvPicPr>
-        <p:blipFill>
-          <a:blip r:embed="rId4"/>
-          <a:srcRect l="2791" r="2791"/>
-          <a:stretch>
-            <a:fillRect/>
-          </a:stretch>
-        </p:blipFill>
-        <p:spPr>
-          <a:xfrm>
-            <a:off x="2812705" y="1144312"/>
-            <a:ext cx="6011254" cy="3583136"/>
-          </a:xfrm>
-          <a:prstGeom prst="rect">
-            <a:avLst/>
-          </a:prstGeom>
-        </p:spPr>
-      </p:pic>
+        </p:grpSpPr>
+        <p:sp>
+          <p:nvSpPr>
+            <p:cNvPr id="508" name="BrandDeck Diagram Connector"/>
+            <p:cNvSpPr/>
+            <p:nvPr/>
+          </p:nvSpPr>
+          <p:spPr>
+            <a:xfrm>
+              <a:off x="4876660" y="1299128"/>
+              <a:ext cx="32918" cy="2491401"/>
+            </a:xfrm>
+            <a:prstGeom prst="rect">
+              <a:avLst/>
+            </a:prstGeom>
+            <a:solidFill>
+              <a:srgbClr val="58A6FF"/>
+            </a:solidFill>
+            <a:ln>
+              <a:noFill/>
+            </a:ln>
+          </p:spPr>
+          <p:txBody>
+            <a:bodyPr rtlCol="0" anchor="ctr"/>
+            <a:lstStyle/>
+            <a:p>
+              <a:pPr algn="ctr"/>
+            </a:p>
+          </p:txBody>
+        </p:sp>
+        <p:sp>
+          <p:nvSpPr>
+            <p:cNvPr id="509" name="BrandDeck Diagram Step 1 Badge"/>
+            <p:cNvSpPr/>
+            <p:nvPr/>
+          </p:nvSpPr>
+          <p:spPr>
+            <a:xfrm>
+              <a:off x="4637088" y="1043096"/>
+              <a:ext cx="512064" cy="512064"/>
+            </a:xfrm>
+            <a:prstGeom prst="ellipse">
+              <a:avLst/>
+            </a:prstGeom>
+            <a:solidFill>
+              <a:srgbClr val="006DEB"/>
+            </a:solidFill>
+            <a:ln>
+              <a:noFill/>
+            </a:ln>
+          </p:spPr>
+          <p:txBody>
+            <a:bodyPr rtlCol="0" anchor="ctr" wrap="square" lIns="0" tIns="0" rIns="0" bIns="0">
+              <a:noAutofit/>
+            </a:bodyPr>
+            <a:lstStyle/>
+            <a:p>
+              <a:pPr algn="ctr">
+                <a:lnSpc>
+                  <a:spcPct val="110000"/>
+                </a:lnSpc>
+              </a:pPr>
+              <a:r>
+                <a:rPr sz="1410" b="1">
+                  <a:solidFill>
+                    <a:srgbClr val="FFFFFF"/>
+                  </a:solidFill>
+                  <a:latin typeface="Play"/>
+                </a:rPr>
+                <a:t>01</a:t>
+              </a:r>
+            </a:p>
+          </p:txBody>
+        </p:sp>
+        <p:sp>
+          <p:nvSpPr>
+            <p:cNvPr id="510" name="BrandDeck Diagram Detail Card 1"/>
+            <p:cNvSpPr/>
+            <p:nvPr/>
+          </p:nvSpPr>
+          <p:spPr>
+            <a:xfrm>
+              <a:off x="5258880" y="703710"/>
+              <a:ext cx="3240595" cy="1190836"/>
+            </a:xfrm>
+            <a:prstGeom prst="roundRect">
+              <a:avLst>
+                <a:gd name="adj" fmla="val 12000"/>
+              </a:avLst>
+            </a:prstGeom>
+            <a:solidFill>
+              <a:srgbClr val="E8F3FF"/>
+            </a:solidFill>
+            <a:ln>
+              <a:noFill/>
+            </a:ln>
+          </p:spPr>
+          <p:txBody>
+            <a:bodyPr rtlCol="0" anchor="ctr"/>
+            <a:lstStyle/>
+            <a:p>
+              <a:pPr algn="ctr"/>
+            </a:p>
+          </p:txBody>
+        </p:sp>
+        <p:sp>
+          <p:nvSpPr>
+            <p:cNvPr id="511" name="BrandDeck Diagram Text 1"/>
+            <p:cNvSpPr txBox="1"/>
+            <p:nvPr/>
+          </p:nvSpPr>
+          <p:spPr>
+            <a:xfrm>
+              <a:off x="5350320" y="703710"/>
+              <a:ext cx="3149155" cy="1190836"/>
+            </a:xfrm>
+            <a:prstGeom prst="rect">
+              <a:avLst/>
+            </a:prstGeom>
+            <a:noFill/>
+          </p:spPr>
+          <p:txBody>
+            <a:bodyPr wrap="square" anchor="ctr" lIns="36576" tIns="18288" rIns="36576" bIns="18288">
+              <a:noAutofit/>
+            </a:bodyPr>
+            <a:lstStyle/>
+            <a:p>
+              <a:pPr algn="l">
+                <a:lnSpc>
+                  <a:spcPct val="110000"/>
+                </a:lnSpc>
+              </a:pPr>
+              <a:r>
+                <a:rPr sz="1600" b="1">
+                  <a:solidFill>
+                    <a:srgbClr val="000000"/>
+                  </a:solidFill>
+                  <a:latin typeface="Play"/>
+                </a:rPr>
+                <a:t>Нет ответа</a:t>
+              </a:r>
+            </a:p>
+            <a:p>
+              <a:pPr algn="l">
+                <a:lnSpc>
+                  <a:spcPct val="110000"/>
+                </a:lnSpc>
+                <a:spcBef>
+                  <a:spcPts val="400"/>
+                </a:spcBef>
+              </a:pPr>
+              <a:r>
+                <a:rPr sz="1600" b="0">
+                  <a:solidFill>
+                    <a:srgbClr val="000000"/>
+                  </a:solidFill>
+                  <a:latin typeface="Play"/>
+                </a:rPr>
+                <a:t>Система не нашла подтверждённый ответ</a:t>
+              </a:r>
+            </a:p>
+          </p:txBody>
+        </p:sp>
+        <p:sp>
+          <p:nvSpPr>
+            <p:cNvPr id="512" name="BrandDeck Diagram Step 2 Badge"/>
+            <p:cNvSpPr/>
+            <p:nvPr/>
+          </p:nvSpPr>
+          <p:spPr>
+            <a:xfrm>
+              <a:off x="4637088" y="2288797"/>
+              <a:ext cx="512064" cy="512064"/>
+            </a:xfrm>
+            <a:prstGeom prst="ellipse">
+              <a:avLst/>
+            </a:prstGeom>
+            <a:solidFill>
+              <a:srgbClr val="006DEB"/>
+            </a:solidFill>
+            <a:ln>
+              <a:noFill/>
+            </a:ln>
+          </p:spPr>
+          <p:txBody>
+            <a:bodyPr rtlCol="0" anchor="ctr" wrap="square" lIns="0" tIns="0" rIns="0" bIns="0">
+              <a:noAutofit/>
+            </a:bodyPr>
+            <a:lstStyle/>
+            <a:p>
+              <a:pPr algn="ctr">
+                <a:lnSpc>
+                  <a:spcPct val="110000"/>
+                </a:lnSpc>
+              </a:pPr>
+              <a:r>
+                <a:rPr sz="1410" b="1">
+                  <a:solidFill>
+                    <a:srgbClr val="FFFFFF"/>
+                  </a:solidFill>
+                  <a:latin typeface="Play"/>
+                </a:rPr>
+                <a:t>02</a:t>
+              </a:r>
+            </a:p>
+          </p:txBody>
+        </p:sp>
+        <p:sp>
+          <p:nvSpPr>
+            <p:cNvPr id="513" name="BrandDeck Diagram Detail Card 2"/>
+            <p:cNvSpPr/>
+            <p:nvPr/>
+          </p:nvSpPr>
+          <p:spPr>
+            <a:xfrm>
+              <a:off x="5258880" y="1949410"/>
+              <a:ext cx="3240595" cy="1190836"/>
+            </a:xfrm>
+            <a:prstGeom prst="roundRect">
+              <a:avLst>
+                <a:gd name="adj" fmla="val 12000"/>
+              </a:avLst>
+            </a:prstGeom>
+            <a:solidFill>
+              <a:srgbClr val="E8F3FF"/>
+            </a:solidFill>
+            <a:ln>
+              <a:noFill/>
+            </a:ln>
+          </p:spPr>
+          <p:txBody>
+            <a:bodyPr rtlCol="0" anchor="ctr"/>
+            <a:lstStyle/>
+            <a:p>
+              <a:pPr algn="ctr"/>
+            </a:p>
+          </p:txBody>
+        </p:sp>
+        <p:sp>
+          <p:nvSpPr>
+            <p:cNvPr id="514" name="BrandDeck Diagram Text 2"/>
+            <p:cNvSpPr txBox="1"/>
+            <p:nvPr/>
+          </p:nvSpPr>
+          <p:spPr>
+            <a:xfrm>
+              <a:off x="5350320" y="1949410"/>
+              <a:ext cx="3149155" cy="1190836"/>
+            </a:xfrm>
+            <a:prstGeom prst="rect">
+              <a:avLst/>
+            </a:prstGeom>
+            <a:noFill/>
+          </p:spPr>
+          <p:txBody>
+            <a:bodyPr wrap="square" anchor="ctr" lIns="36576" tIns="18288" rIns="36576" bIns="18288">
+              <a:noAutofit/>
+            </a:bodyPr>
+            <a:lstStyle/>
+            <a:p>
+              <a:pPr algn="l">
+                <a:lnSpc>
+                  <a:spcPct val="110000"/>
+                </a:lnSpc>
+              </a:pPr>
+              <a:r>
+                <a:rPr sz="1600" b="1">
+                  <a:solidFill>
+                    <a:srgbClr val="000000"/>
+                  </a:solidFill>
+                  <a:latin typeface="Play"/>
+                </a:rPr>
+                <a:t>Передача</a:t>
+              </a:r>
+            </a:p>
+            <a:p>
+              <a:pPr algn="l">
+                <a:lnSpc>
+                  <a:spcPct val="110000"/>
+                </a:lnSpc>
+                <a:spcBef>
+                  <a:spcPts val="400"/>
+                </a:spcBef>
+              </a:pPr>
+              <a:r>
+                <a:rPr sz="1600" b="0">
+                  <a:solidFill>
+                    <a:srgbClr val="000000"/>
+                  </a:solidFill>
+                  <a:latin typeface="Play"/>
+                </a:rPr>
+                <a:t>Вопрос уходит специалисту с деталями</a:t>
+              </a:r>
+            </a:p>
+          </p:txBody>
+        </p:sp>
+        <p:sp>
+          <p:nvSpPr>
+            <p:cNvPr id="515" name="BrandDeck Diagram Step 3 Badge"/>
+            <p:cNvSpPr/>
+            <p:nvPr/>
+          </p:nvSpPr>
+          <p:spPr>
+            <a:xfrm>
+              <a:off x="4637088" y="3534497"/>
+              <a:ext cx="512064" cy="512064"/>
+            </a:xfrm>
+            <a:prstGeom prst="ellipse">
+              <a:avLst/>
+            </a:prstGeom>
+            <a:solidFill>
+              <a:srgbClr val="006DEB"/>
+            </a:solidFill>
+            <a:ln>
+              <a:noFill/>
+            </a:ln>
+          </p:spPr>
+          <p:txBody>
+            <a:bodyPr rtlCol="0" anchor="ctr" wrap="square" lIns="0" tIns="0" rIns="0" bIns="0">
+              <a:noAutofit/>
+            </a:bodyPr>
+            <a:lstStyle/>
+            <a:p>
+              <a:pPr algn="ctr">
+                <a:lnSpc>
+                  <a:spcPct val="110000"/>
+                </a:lnSpc>
+              </a:pPr>
+              <a:r>
+                <a:rPr sz="1410" b="1">
+                  <a:solidFill>
+                    <a:srgbClr val="FFFFFF"/>
+                  </a:solidFill>
+                  <a:latin typeface="Play"/>
+                </a:rPr>
+                <a:t>03</a:t>
+              </a:r>
+            </a:p>
+          </p:txBody>
+        </p:sp>
+        <p:sp>
+          <p:nvSpPr>
+            <p:cNvPr id="516" name="BrandDeck Diagram Detail Card 3"/>
+            <p:cNvSpPr/>
+            <p:nvPr/>
+          </p:nvSpPr>
+          <p:spPr>
+            <a:xfrm>
+              <a:off x="5258880" y="3195111"/>
+              <a:ext cx="3240595" cy="1190836"/>
+            </a:xfrm>
+            <a:prstGeom prst="roundRect">
+              <a:avLst>
+                <a:gd name="adj" fmla="val 12000"/>
+              </a:avLst>
+            </a:prstGeom>
+            <a:solidFill>
+              <a:srgbClr val="E8F3FF"/>
+            </a:solidFill>
+            <a:ln>
+              <a:noFill/>
+            </a:ln>
+          </p:spPr>
+          <p:txBody>
+            <a:bodyPr rtlCol="0" anchor="ctr"/>
+            <a:lstStyle/>
+            <a:p>
+              <a:pPr algn="ctr"/>
+            </a:p>
+          </p:txBody>
+        </p:sp>
+        <p:sp>
+          <p:nvSpPr>
+            <p:cNvPr id="517" name="BrandDeck Diagram Text 3"/>
+            <p:cNvSpPr txBox="1"/>
+            <p:nvPr/>
+          </p:nvSpPr>
+          <p:spPr>
+            <a:xfrm>
+              <a:off x="5350320" y="3195111"/>
+              <a:ext cx="3149155" cy="1190836"/>
+            </a:xfrm>
+            <a:prstGeom prst="rect">
+              <a:avLst/>
+            </a:prstGeom>
+            <a:noFill/>
+          </p:spPr>
+          <p:txBody>
+            <a:bodyPr wrap="square" anchor="ctr" lIns="36576" tIns="18288" rIns="36576" bIns="18288">
+              <a:noAutofit/>
+            </a:bodyPr>
+            <a:lstStyle/>
+            <a:p>
+              <a:pPr algn="l">
+                <a:lnSpc>
+                  <a:spcPct val="110000"/>
+                </a:lnSpc>
+              </a:pPr>
+              <a:r>
+                <a:rPr sz="1600" b="1">
+                  <a:solidFill>
+                    <a:srgbClr val="000000"/>
+                  </a:solidFill>
+                  <a:latin typeface="Play"/>
+                </a:rPr>
+                <a:t>Решение</a:t>
+              </a:r>
+            </a:p>
+            <a:p>
+              <a:pPr algn="l">
+                <a:lnSpc>
+                  <a:spcPct val="110000"/>
+                </a:lnSpc>
+                <a:spcBef>
+                  <a:spcPts val="400"/>
+                </a:spcBef>
+              </a:pPr>
+              <a:r>
+                <a:rPr sz="1600" b="0">
+                  <a:solidFill>
+                    <a:srgbClr val="000000"/>
+                  </a:solidFill>
+                  <a:latin typeface="Play"/>
+                </a:rPr>
+                <a:t>Сотрудник отвечает вручную</a:t>
+              </a:r>
+            </a:p>
+          </p:txBody>
+        </p:sp>
+      </p:grpSp>
     </p:spTree>
   </p:cSld>
   <p:clrMapOvr>
@@ -10540,7 +9990,7 @@
           </a:ln>
         </p:spPr>
         <p:txBody>
-          <a:bodyPr anchorCtr="0" anchor="t" bIns="45700" lIns="91425" spcFirstLastPara="1" rIns="91425" wrap="square" tIns="45700">
+          <a:bodyPr anchorCtr="0" anchor="t" bIns="45700" lIns="91425" spcFirstLastPara="1" rIns="91425" wrap="square" tIns="45700" vert="horz">
             <a:normAutofit/>
           </a:bodyPr>
           <a:lstStyle/>
@@ -10564,230 +10014,40 @@
             </a:pPr>
             <a:r>
               <a:rPr sz="1800"/>
-              <a:t>Отсутствие подтвержденного ответа перенаправляет вопрос специалисту</a:t>
+              <a:t>Пилот охватывает 2 подразделения и 150 сотрудников</a:t>
             </a:r>
             <a:endParaRPr/>
           </a:p>
         </p:txBody>
       </p:sp>
-      <p:sp>
-        <p:nvSpPr>
-          <p:cNvPr id="2252" name="BrandDeck Text 2252"/>
-          <p:cNvSpPr txBox="1"/>
-          <p:nvPr/>
-        </p:nvSpPr>
-        <p:spPr>
-          <a:xfrm>
-            <a:off x="177970" y="1664110"/>
-            <a:ext cx="2381238" cy="2189092"/>
-          </a:xfrm>
-          <a:prstGeom prst="rect">
-            <a:avLst/>
-          </a:prstGeom>
-          <a:noFill/>
-          <a:ln>
-            <a:noFill/>
-          </a:ln>
-        </p:spPr>
-        <p:txBody>
-          <a:bodyPr anchorCtr="0" anchor="t" bIns="45700" lIns="91425" spcFirstLastPara="1" rIns="91425" wrap="square" tIns="45700">
-            <a:normAutofit/>
-          </a:bodyPr>
-          <a:lstStyle/>
-          <a:p>
-            <a:pPr indent="0" marL="0" marR="0" rtl="0" algn="l">
-              <a:lnSpc>
-                <a:spcPct val="115000"/>
-              </a:lnSpc>
-              <a:spcBef>
-                <a:spcPts val="0"/>
-              </a:spcBef>
-              <a:spcAft>
-                <a:spcPts val="406"/>
-              </a:spcAft>
-              <a:buClr>
-                <a:schemeClr val="accent1"/>
-              </a:buClr>
-              <a:buSzPts val="16600"/>
-              <a:buFont typeface="Play"/>
-              <a:buNone/>
-            </a:pPr>
-            <a:r>
-              <a:rPr sz="2710" b="1">
-                <a:latin typeface="Play"/>
-                <a:solidFill>
-                  <a:srgbClr val="001515"/>
-                </a:solidFill>
-              </a:rPr>
-              <a:t>Логика эскалации при неуверенности ИИ</a:t>
-            </a:r>
-            <a:endParaRPr b="1" i="0" sz="16600" u="none" cap="none" strike="noStrike">
-              <a:solidFill>
-                <a:schemeClr val="accent1"/>
-              </a:solidFill>
-              <a:latin typeface="Play"/>
-              <a:ea typeface="Play"/>
-              <a:cs typeface="Play"/>
-              <a:sym typeface="Play"/>
-            </a:endParaRPr>
-          </a:p>
-        </p:txBody>
-      </p:sp>
-      <p:sp>
-        <p:nvSpPr>
-          <p:cNvPr id="2253" name="Google Shape;2253;p83"/>
-          <p:cNvSpPr txBox="1"/>
-          <p:nvPr/>
-        </p:nvSpPr>
-        <p:spPr>
-          <a:xfrm>
-            <a:off x="3143234" y="1664110"/>
-            <a:ext cx="4320556" cy="2189092"/>
-          </a:xfrm>
-          <a:prstGeom prst="rect">
-            <a:avLst/>
-          </a:prstGeom>
-          <a:noFill/>
-          <a:ln>
-            <a:noFill/>
-          </a:ln>
-        </p:spPr>
-        <p:txBody>
-          <a:bodyPr anchorCtr="0" anchor="t" bIns="45700" lIns="91425" spcFirstLastPara="1" rIns="91425" wrap="square" tIns="45700">
-            <a:normAutofit/>
-          </a:bodyPr>
-          <a:lstStyle/>
-          <a:p>
-            <a:pPr indent="0" lvl="0" marL="0" marR="0" rtl="0" algn="l">
-              <a:lnSpc>
-                <a:spcPct val="16150"/>
-              </a:lnSpc>
-              <a:spcBef>
-                <a:spcPts val="0"/>
-              </a:spcBef>
-              <a:spcAft>
-                <a:spcPts val="0"/>
-              </a:spcAft>
-              <a:buClr>
-                <a:schemeClr val="accent1"/>
-              </a:buClr>
-              <a:buSzPts val="16600"/>
-              <a:buFont typeface="Play"/>
-              <a:buNone/>
-            </a:pPr>
-            <a:endParaRPr b="1" i="0" sz="16600" u="none" cap="none" strike="noStrike">
-              <a:solidFill>
-                <a:schemeClr val="accent1"/>
-              </a:solidFill>
-              <a:latin typeface="Play"/>
-              <a:ea typeface="Play"/>
-              <a:cs typeface="Play"/>
-              <a:sym typeface="Play"/>
-            </a:endParaRPr>
-          </a:p>
-        </p:txBody>
-      </p:sp>
       <p:grpSp>
         <p:nvGrpSpPr>
-          <p:cNvPr id="2" name="BrandDeck Diagram process" descr="process: Вопрос сотрудника Отправлен ИИ-помощнику; Ответ не найден Перенаправляется специалисту"/>
+          <p:cNvPr id="2" name="BrandDeck Diagram icon_grid" descr="icon_grid: Охват 2 подразделения, 150 сотрудников; Длительность 6 недель пилотного запуска"/>
           <p:cNvGrpSpPr/>
           <p:nvPr/>
         </p:nvGrpSpPr>
         <p:grpSpPr>
           <a:xfrm>
-            <a:off x="3143233" y="1691542"/>
-            <a:ext cx="4320556" cy="2134226"/>
-            <a:chOff x="3143233" y="1691542"/>
-            <a:chExt cx="4320556" cy="2134226"/>
+            <a:off x="177970" y="1664110"/>
+            <a:ext cx="7285820" cy="2189091"/>
+            <a:chOff x="177970" y="1664110"/>
+            <a:chExt cx="7285820" cy="2189091"/>
           </a:xfrm>
         </p:grpSpPr>
         <p:sp>
           <p:nvSpPr>
-            <p:cNvPr id="2256" name="BrandDeck Diagram Connector"/>
+            <p:cNvPr id="2256" name="BrandDeck Diagram Card 1"/>
             <p:cNvSpPr/>
             <p:nvPr/>
           </p:nvSpPr>
           <p:spPr>
             <a:xfrm>
-              <a:off x="3382806" y="2211383"/>
-              <a:ext cx="32918" cy="1094546"/>
-            </a:xfrm>
-            <a:prstGeom prst="rect">
-              <a:avLst/>
-            </a:prstGeom>
-            <a:solidFill>
-              <a:srgbClr val="58A6FF"/>
-            </a:solidFill>
-            <a:ln>
-              <a:noFill/>
-            </a:ln>
-          </p:spPr>
-          <p:txBody>
-            <a:bodyPr rtlCol="0" anchor="ctr"/>
-            <a:lstStyle/>
-            <a:p>
-              <a:pPr algn="ctr"/>
-            </a:p>
-          </p:txBody>
-        </p:sp>
-        <p:sp>
-          <p:nvSpPr>
-            <p:cNvPr id="2257" name="BrandDeck Diagram Step 1 Badge"/>
-            <p:cNvSpPr/>
-            <p:nvPr/>
-          </p:nvSpPr>
-          <p:spPr>
-            <a:xfrm>
-              <a:off x="3143233" y="1955350"/>
-              <a:ext cx="512064" cy="512064"/>
-            </a:xfrm>
-            <a:prstGeom prst="ellipse">
-              <a:avLst/>
-            </a:prstGeom>
-            <a:solidFill>
-              <a:srgbClr val="006DEB"/>
-            </a:solidFill>
-            <a:ln>
-              <a:noFill/>
-            </a:ln>
-          </p:spPr>
-          <p:txBody>
-            <a:bodyPr rtlCol="0" anchor="ctr" wrap="square" lIns="0" tIns="0" rIns="0" bIns="0">
-              <a:noAutofit/>
-            </a:bodyPr>
-            <a:lstStyle/>
-            <a:p>
-              <a:pPr algn="ctr">
-                <a:lnSpc>
-                  <a:spcPct val="110000"/>
-                </a:lnSpc>
-              </a:pPr>
-              <a:r>
-                <a:rPr sz="1410" b="1">
-                  <a:solidFill>
-                    <a:srgbClr val="FFFFFF"/>
-                  </a:solidFill>
-                  <a:latin typeface="Play"/>
-                </a:rPr>
-                <a:t>01</a:t>
-              </a:r>
-            </a:p>
-          </p:txBody>
-        </p:sp>
-        <p:sp>
-          <p:nvSpPr>
-            <p:cNvPr id="2258" name="BrandDeck Diagram Detail Card 1"/>
-            <p:cNvSpPr/>
-            <p:nvPr/>
-          </p:nvSpPr>
-          <p:spPr>
-            <a:xfrm>
-              <a:off x="3765026" y="1691542"/>
-              <a:ext cx="3698763" cy="1039681"/>
+              <a:off x="177970" y="1664110"/>
+              <a:ext cx="7285820" cy="1021687"/>
             </a:xfrm>
             <a:prstGeom prst="roundRect">
               <a:avLst>
-                <a:gd name="adj" fmla="val 12000"/>
+                <a:gd name="adj" fmla="val 8000"/>
               </a:avLst>
             </a:prstGeom>
             <a:solidFill>
@@ -10807,14 +10067,184 @@
         </p:sp>
         <p:sp>
           <p:nvSpPr>
+            <p:cNvPr id="2257" name="BrandDeck Diagram Icon 1 Badge"/>
+            <p:cNvSpPr/>
+            <p:nvPr/>
+          </p:nvSpPr>
+          <p:spPr>
+            <a:xfrm>
+              <a:off x="397425" y="1992073"/>
+              <a:ext cx="365760" cy="365760"/>
+            </a:xfrm>
+            <a:prstGeom prst="ellipse">
+              <a:avLst/>
+            </a:prstGeom>
+            <a:solidFill>
+              <a:srgbClr val="006DEB"/>
+            </a:solidFill>
+            <a:ln>
+              <a:noFill/>
+            </a:ln>
+          </p:spPr>
+          <p:txBody>
+            <a:bodyPr rtlCol="0" anchor="ctr"/>
+            <a:lstStyle/>
+            <a:p>
+              <a:pPr algn="ctr"/>
+            </a:p>
+          </p:txBody>
+        </p:sp>
+        <p:sp>
+          <p:nvSpPr>
+            <p:cNvPr id="2258" name="BrandDeck Icon building-2"/>
+            <p:cNvSpPr/>
+            <p:nvPr/>
+          </p:nvSpPr>
+          <p:spPr>
+            <a:xfrm>
+              <a:off x="477893" y="2072541"/>
+              <a:ext cx="204825" cy="204825"/>
+            </a:xfrm>
+            <a:custGeom>
+              <a:avLst/>
+              <a:gdLst/>
+              <a:ahLst/>
+              <a:cxnLst/>
+              <a:rect l="l" t="t" r="r" b="b"/>
+              <a:pathLst>
+                <a:path w="24000" h="24000" fill="none">
+                  <a:moveTo>
+                    <a:pt x="6000" y="22000"/>
+                  </a:moveTo>
+                  <a:lnTo>
+                    <a:pt x="6000" y="4000"/>
+                  </a:lnTo>
+                  <a:cubicBezTo>
+                    <a:pt x="6000" y="2895"/>
+                    <a:pt x="6895" y="2000"/>
+                    <a:pt x="8000" y="2000"/>
+                  </a:cubicBezTo>
+                  <a:lnTo>
+                    <a:pt x="16000" y="2000"/>
+                  </a:lnTo>
+                  <a:cubicBezTo>
+                    <a:pt x="17105" y="2000"/>
+                    <a:pt x="18000" y="2895"/>
+                    <a:pt x="18000" y="4000"/>
+                  </a:cubicBezTo>
+                  <a:lnTo>
+                    <a:pt x="18000" y="22000"/>
+                  </a:lnTo>
+                  <a:close/>
+                </a:path>
+                <a:path w="24000" h="24000" fill="none">
+                  <a:moveTo>
+                    <a:pt x="6000" y="12000"/>
+                  </a:moveTo>
+                  <a:lnTo>
+                    <a:pt x="4000" y="12000"/>
+                  </a:lnTo>
+                  <a:cubicBezTo>
+                    <a:pt x="2895" y="12000"/>
+                    <a:pt x="2000" y="12895"/>
+                    <a:pt x="2000" y="14000"/>
+                  </a:cubicBezTo>
+                  <a:lnTo>
+                    <a:pt x="2000" y="20000"/>
+                  </a:lnTo>
+                  <a:cubicBezTo>
+                    <a:pt x="2000" y="21105"/>
+                    <a:pt x="2895" y="22000"/>
+                    <a:pt x="4000" y="22000"/>
+                  </a:cubicBezTo>
+                  <a:lnTo>
+                    <a:pt x="6000" y="22000"/>
+                  </a:lnTo>
+                </a:path>
+                <a:path w="24000" h="24000" fill="none">
+                  <a:moveTo>
+                    <a:pt x="18000" y="9000"/>
+                  </a:moveTo>
+                  <a:lnTo>
+                    <a:pt x="20000" y="9000"/>
+                  </a:lnTo>
+                  <a:cubicBezTo>
+                    <a:pt x="21105" y="9000"/>
+                    <a:pt x="22000" y="9895"/>
+                    <a:pt x="22000" y="11000"/>
+                  </a:cubicBezTo>
+                  <a:lnTo>
+                    <a:pt x="22000" y="20000"/>
+                  </a:lnTo>
+                  <a:cubicBezTo>
+                    <a:pt x="22000" y="21105"/>
+                    <a:pt x="21105" y="22000"/>
+                    <a:pt x="20000" y="22000"/>
+                  </a:cubicBezTo>
+                  <a:lnTo>
+                    <a:pt x="18000" y="22000"/>
+                  </a:lnTo>
+                </a:path>
+                <a:path w="24000" h="24000" fill="none">
+                  <a:moveTo>
+                    <a:pt x="10000" y="6000"/>
+                  </a:moveTo>
+                  <a:lnTo>
+                    <a:pt x="14000" y="6000"/>
+                  </a:lnTo>
+                </a:path>
+                <a:path w="24000" h="24000" fill="none">
+                  <a:moveTo>
+                    <a:pt x="10000" y="10000"/>
+                  </a:moveTo>
+                  <a:lnTo>
+                    <a:pt x="14000" y="10000"/>
+                  </a:lnTo>
+                </a:path>
+                <a:path w="24000" h="24000" fill="none">
+                  <a:moveTo>
+                    <a:pt x="10000" y="14000"/>
+                  </a:moveTo>
+                  <a:lnTo>
+                    <a:pt x="14000" y="14000"/>
+                  </a:lnTo>
+                </a:path>
+                <a:path w="24000" h="24000" fill="none">
+                  <a:moveTo>
+                    <a:pt x="10000" y="18000"/>
+                  </a:moveTo>
+                  <a:lnTo>
+                    <a:pt x="14000" y="18000"/>
+                  </a:lnTo>
+                </a:path>
+              </a:pathLst>
+            </a:custGeom>
+            <a:noFill/>
+            <a:ln w="17068" cap="rnd">
+              <a:solidFill>
+                <a:srgbClr val="FFFFFF"/>
+              </a:solidFill>
+              <a:round/>
+            </a:ln>
+          </p:spPr>
+          <p:txBody>
+            <a:bodyPr rtlCol="0" anchor="ctr"/>
+            <a:lstStyle/>
+            <a:p>
+              <a:pPr algn="ctr"/>
+            </a:p>
+          </p:txBody>
+        </p:sp>
+        <p:sp>
+          <p:nvSpPr>
             <p:cNvPr id="2259" name="BrandDeck Diagram Text 1"/>
             <p:cNvSpPr txBox="1"/>
             <p:nvPr/>
           </p:nvSpPr>
           <p:spPr>
             <a:xfrm>
-              <a:off x="3856466" y="1691542"/>
-              <a:ext cx="3607323" cy="1039681"/>
+              <a:off x="894859" y="1795783"/>
+              <a:ext cx="6349474" cy="758340"/>
             </a:xfrm>
             <a:prstGeom prst="rect">
               <a:avLst/>
@@ -10833,13 +10263,13 @@
                 </a:lnSpc>
               </a:pPr>
               <a:r>
-                <a:rPr sz="1600" b="1">
+                <a:rPr sz="1800" b="1">
                   <a:solidFill>
                     <a:srgbClr val="000000"/>
                   </a:solidFill>
                   <a:latin typeface="Play"/>
                 </a:rPr>
-                <a:t>Вопрос сотрудника</a:t>
+                <a:t>Охват</a:t>
               </a:r>
             </a:p>
             <a:p>
@@ -10848,79 +10278,35 @@
                   <a:spcPct val="110000"/>
                 </a:lnSpc>
                 <a:spcBef>
-                  <a:spcPts val="400"/>
+                  <a:spcPts val="450"/>
                 </a:spcBef>
               </a:pPr>
               <a:r>
-                <a:rPr sz="1600" b="0">
+                <a:rPr sz="1800" b="0">
                   <a:solidFill>
                     <a:srgbClr val="000000"/>
                   </a:solidFill>
                   <a:latin typeface="Play"/>
                 </a:rPr>
-                <a:t>Отправлен ИИ-помощнику</a:t>
+                <a:t>2 подразделения, 150 сотрудников</a:t>
               </a:r>
             </a:p>
           </p:txBody>
         </p:sp>
         <p:sp>
           <p:nvSpPr>
-            <p:cNvPr id="2260" name="BrandDeck Diagram Step 2 Badge"/>
+            <p:cNvPr id="2260" name="BrandDeck Diagram Card 2"/>
             <p:cNvSpPr/>
             <p:nvPr/>
           </p:nvSpPr>
           <p:spPr>
             <a:xfrm>
-              <a:off x="3143233" y="3049896"/>
-              <a:ext cx="512064" cy="512064"/>
-            </a:xfrm>
-            <a:prstGeom prst="ellipse">
-              <a:avLst/>
-            </a:prstGeom>
-            <a:solidFill>
-              <a:srgbClr val="006DEB"/>
-            </a:solidFill>
-            <a:ln>
-              <a:noFill/>
-            </a:ln>
-          </p:spPr>
-          <p:txBody>
-            <a:bodyPr rtlCol="0" anchor="ctr" wrap="square" lIns="0" tIns="0" rIns="0" bIns="0">
-              <a:noAutofit/>
-            </a:bodyPr>
-            <a:lstStyle/>
-            <a:p>
-              <a:pPr algn="ctr">
-                <a:lnSpc>
-                  <a:spcPct val="110000"/>
-                </a:lnSpc>
-              </a:pPr>
-              <a:r>
-                <a:rPr sz="1410" b="1">
-                  <a:solidFill>
-                    <a:srgbClr val="FFFFFF"/>
-                  </a:solidFill>
-                  <a:latin typeface="Play"/>
-                </a:rPr>
-                <a:t>02</a:t>
-              </a:r>
-            </a:p>
-          </p:txBody>
-        </p:sp>
-        <p:sp>
-          <p:nvSpPr>
-            <p:cNvPr id="2261" name="BrandDeck Diagram Detail Card 2"/>
-            <p:cNvSpPr/>
-            <p:nvPr/>
-          </p:nvSpPr>
-          <p:spPr>
-            <a:xfrm>
-              <a:off x="3765026" y="2786087"/>
-              <a:ext cx="3698763" cy="1039681"/>
+              <a:off x="177970" y="2831514"/>
+              <a:ext cx="7285820" cy="1021687"/>
             </a:xfrm>
             <a:prstGeom prst="roundRect">
               <a:avLst>
-                <a:gd name="adj" fmla="val 12000"/>
+                <a:gd name="adj" fmla="val 8000"/>
               </a:avLst>
             </a:prstGeom>
             <a:solidFill>
@@ -10940,14 +10326,170 @@
         </p:sp>
         <p:sp>
           <p:nvSpPr>
-            <p:cNvPr id="2262" name="BrandDeck Diagram Text 2"/>
+            <p:cNvPr id="2261" name="BrandDeck Diagram Icon 2 Badge"/>
+            <p:cNvSpPr/>
+            <p:nvPr/>
+          </p:nvSpPr>
+          <p:spPr>
+            <a:xfrm>
+              <a:off x="397425" y="3159478"/>
+              <a:ext cx="365760" cy="365760"/>
+            </a:xfrm>
+            <a:prstGeom prst="ellipse">
+              <a:avLst/>
+            </a:prstGeom>
+            <a:solidFill>
+              <a:srgbClr val="006DEB"/>
+            </a:solidFill>
+            <a:ln>
+              <a:noFill/>
+            </a:ln>
+          </p:spPr>
+          <p:txBody>
+            <a:bodyPr rtlCol="0" anchor="ctr"/>
+            <a:lstStyle/>
+            <a:p>
+              <a:pPr algn="ctr"/>
+            </a:p>
+          </p:txBody>
+        </p:sp>
+        <p:sp>
+          <p:nvSpPr>
+            <p:cNvPr id="2262" name="BrandDeck Icon rocket"/>
+            <p:cNvSpPr/>
+            <p:nvPr/>
+          </p:nvSpPr>
+          <p:spPr>
+            <a:xfrm>
+              <a:off x="477893" y="3239945"/>
+              <a:ext cx="204825" cy="204825"/>
+            </a:xfrm>
+            <a:custGeom>
+              <a:avLst/>
+              <a:gdLst/>
+              <a:ahLst/>
+              <a:cxnLst/>
+              <a:rect l="l" t="t" r="r" b="b"/>
+              <a:pathLst>
+                <a:path w="24000" h="24000" fill="none">
+                  <a:moveTo>
+                    <a:pt x="4500" y="16500"/>
+                  </a:moveTo>
+                  <a:cubicBezTo>
+                    <a:pt x="3000" y="17760"/>
+                    <a:pt x="2500" y="21500"/>
+                    <a:pt x="2500" y="21500"/>
+                  </a:cubicBezTo>
+                  <a:cubicBezTo>
+                    <a:pt x="2500" y="21500"/>
+                    <a:pt x="6240" y="21000"/>
+                    <a:pt x="7500" y="19500"/>
+                  </a:cubicBezTo>
+                  <a:cubicBezTo>
+                    <a:pt x="8210" y="18660"/>
+                    <a:pt x="8200" y="17370"/>
+                    <a:pt x="7410" y="16590"/>
+                  </a:cubicBezTo>
+                  <a:cubicBezTo>
+                    <a:pt x="6605" y="15822"/>
+                    <a:pt x="5351" y="15783"/>
+                    <a:pt x="4500" y="16500"/>
+                  </a:cubicBezTo>
+                  <a:close/>
+                </a:path>
+                <a:path w="24000" h="24000" fill="none">
+                  <a:moveTo>
+                    <a:pt x="12000" y="15000"/>
+                  </a:moveTo>
+                  <a:lnTo>
+                    <a:pt x="9000" y="12000"/>
+                  </a:lnTo>
+                  <a:cubicBezTo>
+                    <a:pt x="9532" y="10619"/>
+                    <a:pt x="10202" y="9296"/>
+                    <a:pt x="11000" y="8050"/>
+                  </a:cubicBezTo>
+                  <a:cubicBezTo>
+                    <a:pt x="13369" y="4262"/>
+                    <a:pt x="17532" y="1972"/>
+                    <a:pt x="22000" y="2000"/>
+                  </a:cubicBezTo>
+                  <a:cubicBezTo>
+                    <a:pt x="22000" y="4720"/>
+                    <a:pt x="21220" y="9500"/>
+                    <a:pt x="16000" y="13000"/>
+                  </a:cubicBezTo>
+                  <a:cubicBezTo>
+                    <a:pt x="14737" y="13799"/>
+                    <a:pt x="13397" y="14469"/>
+                    <a:pt x="12000" y="15000"/>
+                  </a:cubicBezTo>
+                  <a:close/>
+                </a:path>
+                <a:path w="24000" h="24000" fill="none">
+                  <a:moveTo>
+                    <a:pt x="9000" y="12000"/>
+                  </a:moveTo>
+                  <a:lnTo>
+                    <a:pt x="4000" y="12000"/>
+                  </a:lnTo>
+                  <a:cubicBezTo>
+                    <a:pt x="4000" y="12000"/>
+                    <a:pt x="4550" y="8970"/>
+                    <a:pt x="6000" y="8000"/>
+                  </a:cubicBezTo>
+                  <a:cubicBezTo>
+                    <a:pt x="7620" y="6920"/>
+                    <a:pt x="11000" y="8000"/>
+                    <a:pt x="11000" y="8000"/>
+                  </a:cubicBezTo>
+                </a:path>
+                <a:path w="24000" h="24000" fill="none">
+                  <a:moveTo>
+                    <a:pt x="12000" y="15000"/>
+                  </a:moveTo>
+                  <a:lnTo>
+                    <a:pt x="12000" y="20000"/>
+                  </a:lnTo>
+                  <a:cubicBezTo>
+                    <a:pt x="12000" y="20000"/>
+                    <a:pt x="15030" y="19450"/>
+                    <a:pt x="16000" y="18000"/>
+                  </a:cubicBezTo>
+                  <a:cubicBezTo>
+                    <a:pt x="17080" y="16380"/>
+                    <a:pt x="16000" y="13000"/>
+                    <a:pt x="16000" y="13000"/>
+                  </a:cubicBezTo>
+                </a:path>
+              </a:pathLst>
+            </a:custGeom>
+            <a:noFill/>
+            <a:ln w="17068" cap="rnd">
+              <a:solidFill>
+                <a:srgbClr val="FFFFFF"/>
+              </a:solidFill>
+              <a:round/>
+            </a:ln>
+          </p:spPr>
+          <p:txBody>
+            <a:bodyPr rtlCol="0" anchor="ctr"/>
+            <a:lstStyle/>
+            <a:p>
+              <a:pPr algn="ctr"/>
+            </a:p>
+          </p:txBody>
+        </p:sp>
+        <p:sp>
+          <p:nvSpPr>
+            <p:cNvPr id="2263" name="BrandDeck Diagram Text 2"/>
             <p:cNvSpPr txBox="1"/>
             <p:nvPr/>
           </p:nvSpPr>
           <p:spPr>
             <a:xfrm>
-              <a:off x="3856466" y="2786087"/>
-              <a:ext cx="3607323" cy="1039681"/>
+              <a:off x="894859" y="2963187"/>
+              <a:ext cx="6349474" cy="758340"/>
             </a:xfrm>
             <a:prstGeom prst="rect">
               <a:avLst/>
@@ -10966,13 +10508,13 @@
                 </a:lnSpc>
               </a:pPr>
               <a:r>
-                <a:rPr sz="1600" b="1">
+                <a:rPr sz="1800" b="1">
                   <a:solidFill>
                     <a:srgbClr val="000000"/>
                   </a:solidFill>
                   <a:latin typeface="Play"/>
                 </a:rPr>
-                <a:t>Ответ не найден</a:t>
+                <a:t>Длительность</a:t>
               </a:r>
             </a:p>
             <a:p>
@@ -10981,17 +10523,17 @@
                   <a:spcPct val="110000"/>
                 </a:lnSpc>
                 <a:spcBef>
-                  <a:spcPts val="400"/>
+                  <a:spcPts val="450"/>
                 </a:spcBef>
               </a:pPr>
               <a:r>
-                <a:rPr sz="1600" b="0">
+                <a:rPr sz="1800" b="0">
                   <a:solidFill>
                     <a:srgbClr val="000000"/>
                   </a:solidFill>
                   <a:latin typeface="Play"/>
                 </a:rPr>
-                <a:t>Перенаправляется специалисту</a:t>
+                <a:t>6 недель пилотного запуска</a:t>
               </a:r>
             </a:p>
           </p:txBody>
@@ -11017,16 +10559,14 @@
       <p:grpSpPr/>
       <p:sp>
         <p:nvSpPr>
-          <p:cNvPr id="2251" name="BrandDeck Text 2251"/>
-          <p:cNvSpPr txBox="1"/>
-          <p:nvPr>
-            <p:ph type="title"/>
-          </p:nvPr>
+          <p:cNvPr id="851" name="Google Shape;851;p60"/>
+          <p:cNvSpPr/>
+          <p:nvPr/>
         </p:nvSpPr>
         <p:spPr>
           <a:xfrm>
-            <a:off x="177970" y="282949"/>
-            <a:ext cx="6792985" cy="724203"/>
+            <a:off x="8667705" y="4666977"/>
+            <a:ext cx="190499" cy="190475"/>
           </a:xfrm>
           <a:prstGeom prst="rect">
             <a:avLst/>
@@ -11037,31 +10577,22 @@
           </a:ln>
         </p:spPr>
         <p:txBody>
-          <a:bodyPr anchorCtr="0" anchor="t" bIns="45700" lIns="91425" spcFirstLastPara="1" rIns="91425" wrap="square" tIns="45700">
-            <a:normAutofit/>
+          <a:bodyPr anchorCtr="0" anchor="ctr" bIns="91425" lIns="91425" spcFirstLastPara="1" rIns="91425" wrap="square" tIns="91425">
+            <a:noAutofit/>
           </a:bodyPr>
           <a:lstStyle/>
           <a:p>
-            <a:pPr indent="0" marL="0" rtl="0" algn="l">
-              <a:lnSpc>
-                <a:spcPct val="115000"/>
-              </a:lnSpc>
-              <a:spcBef>
-                <a:spcPts val="0"/>
-              </a:spcBef>
-              <a:spcAft>
-                <a:spcPts val="270"/>
-              </a:spcAft>
-              <a:buClr>
-                <a:schemeClr val="dk1"/>
-              </a:buClr>
-              <a:buSzPts val="2400"/>
-              <a:buFont typeface="Play"/>
+            <a:pPr indent="0" lvl="0" marL="0" rtl="0" algn="l">
+              <a:spcBef>
+                <a:spcPts val="0"/>
+              </a:spcBef>
+              <a:spcAft>
+                <a:spcPts val="0"/>
+              </a:spcAft>
               <a:buNone/>
             </a:pPr>
             <a:r>
-              <a:rPr sz="1800"/>
-              <a:t>Пилот охватывает 2 подразделения и 150 сотрудников</a:t>
+              <a:t/>
             </a:r>
             <a:endParaRPr/>
           </a:p>
@@ -11069,14 +10600,14 @@
       </p:sp>
       <p:sp>
         <p:nvSpPr>
-          <p:cNvPr id="2252" name="BrandDeck Text 2252"/>
-          <p:cNvSpPr txBox="1"/>
+          <p:cNvPr id="852" name="Google Shape;852;p60"/>
+          <p:cNvSpPr/>
           <p:nvPr/>
         </p:nvSpPr>
         <p:spPr>
           <a:xfrm>
-            <a:off x="177970" y="1664110"/>
-            <a:ext cx="2381238" cy="2189092"/>
+            <a:off x="285748" y="286047"/>
+            <a:ext cx="8572456" cy="4176169"/>
           </a:xfrm>
           <a:prstGeom prst="rect">
             <a:avLst/>
@@ -11087,59 +10618,37 @@
           </a:ln>
         </p:spPr>
         <p:txBody>
-          <a:bodyPr anchorCtr="0" anchor="t" bIns="45700" lIns="91425" spcFirstLastPara="1" rIns="91425" wrap="square" tIns="45700">
-            <a:normAutofit/>
+          <a:bodyPr anchorCtr="0" anchor="ctr" bIns="91425" lIns="91425" spcFirstLastPara="1" rIns="91425" wrap="square" tIns="91425">
+            <a:noAutofit/>
           </a:bodyPr>
           <a:lstStyle/>
           <a:p>
-            <a:pPr indent="0" marL="0" marR="0" rtl="0" algn="l">
-              <a:lnSpc>
-                <a:spcPct val="115000"/>
-              </a:lnSpc>
-              <a:spcBef>
-                <a:spcPts val="0"/>
-              </a:spcBef>
-              <a:spcAft>
-                <a:spcPts val="480"/>
-              </a:spcAft>
-              <a:buClr>
-                <a:schemeClr val="accent1"/>
-              </a:buClr>
-              <a:buSzPts val="16600"/>
-              <a:buFont typeface="Play"/>
+            <a:pPr indent="0" lvl="0" marL="0" rtl="0" algn="l">
+              <a:spcBef>
+                <a:spcPts val="0"/>
+              </a:spcBef>
+              <a:spcAft>
+                <a:spcPts val="0"/>
+              </a:spcAft>
               <a:buNone/>
             </a:pPr>
             <a:r>
-              <a:rPr sz="3200" b="1">
-                <a:latin typeface="Play"/>
-                <a:solidFill>
-                  <a:srgbClr val="001515"/>
-                </a:solidFill>
-              </a:rPr>
-              <a:t>Границы пилотного запуска</a:t>
+              <a:t/>
             </a:r>
-            <a:endParaRPr b="1" i="0" sz="16600" u="none" cap="none" strike="noStrike">
-              <a:solidFill>
-                <a:schemeClr val="accent1"/>
-              </a:solidFill>
-              <a:latin typeface="Play"/>
-              <a:ea typeface="Play"/>
-              <a:cs typeface="Play"/>
-              <a:sym typeface="Play"/>
-            </a:endParaRPr>
+            <a:endParaRPr/>
           </a:p>
         </p:txBody>
       </p:sp>
       <p:sp>
         <p:nvSpPr>
-          <p:cNvPr id="2253" name="Google Shape;2253;p83"/>
-          <p:cNvSpPr txBox="1"/>
+          <p:cNvPr id="853" name="Google Shape;853;p60"/>
+          <p:cNvSpPr/>
           <p:nvPr/>
         </p:nvSpPr>
         <p:spPr>
           <a:xfrm>
-            <a:off x="3143234" y="1664110"/>
-            <a:ext cx="4320556" cy="2189092"/>
+            <a:off x="285749" y="1209852"/>
+            <a:ext cx="6648415" cy="3252364"/>
           </a:xfrm>
           <a:prstGeom prst="rect">
             <a:avLst/>
@@ -11150,301 +10659,249 @@
           </a:ln>
         </p:spPr>
         <p:txBody>
-          <a:bodyPr anchorCtr="0" anchor="t" bIns="45700" lIns="91425" spcFirstLastPara="1" rIns="91425" wrap="square" tIns="45700">
+          <a:bodyPr anchorCtr="0" anchor="ctr" bIns="91425" lIns="91425" spcFirstLastPara="1" rIns="91425" wrap="square" tIns="91425">
+            <a:noAutofit/>
+          </a:bodyPr>
+          <a:lstStyle/>
+          <a:p>
+            <a:pPr indent="0" lvl="0" marL="0" rtl="0" algn="l">
+              <a:spcBef>
+                <a:spcPts val="0"/>
+              </a:spcBef>
+              <a:spcAft>
+                <a:spcPts val="0"/>
+              </a:spcAft>
+              <a:buNone/>
+            </a:pPr>
+            <a:r>
+              <a:t/>
+            </a:r>
+            <a:endParaRPr/>
+          </a:p>
+        </p:txBody>
+      </p:sp>
+      <p:sp>
+        <p:nvSpPr>
+          <p:cNvPr id="872" name="BrandDeck Text 872"/>
+          <p:cNvSpPr txBox="1"/>
+          <p:nvPr>
+            <p:ph type="title"/>
+          </p:nvPr>
+        </p:nvSpPr>
+        <p:spPr>
+          <a:xfrm>
+            <a:off x="177971" y="282949"/>
+            <a:ext cx="5025400" cy="753371"/>
+          </a:xfrm>
+          <a:prstGeom prst="rect">
+            <a:avLst/>
+          </a:prstGeom>
+          <a:noFill/>
+          <a:ln>
+            <a:noFill/>
+          </a:ln>
+        </p:spPr>
+        <p:txBody>
+          <a:bodyPr anchorCtr="0" anchor="t" bIns="45700" lIns="91425" spcFirstLastPara="1" rIns="91425" wrap="square" tIns="45700" vert="horz">
             <a:normAutofit/>
           </a:bodyPr>
           <a:lstStyle/>
           <a:p>
-            <a:pPr indent="0" lvl="0" marL="0" marR="0" rtl="0" algn="l">
+            <a:pPr indent="0" marL="0" rtl="0" algn="l">
               <a:lnSpc>
-                <a:spcPct val="16150"/>
+                <a:spcPct val="115000"/>
               </a:lnSpc>
               <a:spcBef>
                 <a:spcPts val="0"/>
               </a:spcBef>
               <a:spcAft>
-                <a:spcPts val="0"/>
+                <a:spcPts val="197"/>
               </a:spcAft>
               <a:buClr>
-                <a:schemeClr val="accent1"/>
+                <a:schemeClr val="dk1"/>
               </a:buClr>
-              <a:buSzPts val="16600"/>
+              <a:buSzPts val="2400"/>
               <a:buFont typeface="Play"/>
               <a:buNone/>
             </a:pPr>
-            <a:endParaRPr b="1" i="0" sz="16600" u="none" cap="none" strike="noStrike">
-              <a:solidFill>
-                <a:schemeClr val="accent1"/>
-              </a:solidFill>
-              <a:latin typeface="Play"/>
-              <a:ea typeface="Play"/>
-              <a:cs typeface="Play"/>
-              <a:sym typeface="Play"/>
-            </a:endParaRPr>
+            <a:r>
+              <a:rPr sz="1320"/>
+              <a:t>Успех пилота измеряется временем поиска ответа и долей закрытых без специалиста обращений</a:t>
+            </a:r>
+            <a:endParaRPr/>
           </a:p>
         </p:txBody>
       </p:sp>
-      <p:grpSp>
-        <p:nvGrpSpPr>
-          <p:cNvPr id="2" name="BrandDeck Diagram pyramid" descr="pyramid: 2 подразделения География пилотного запуска; 150 сотрудников Общее число участников"/>
-          <p:cNvGrpSpPr/>
+      <p:graphicFrame>
+        <p:nvGraphicFramePr>
+          <p:cNvPr id="873" name="BrandDeck Table"/>
+          <p:cNvGraphicFramePr>
+            <a:graphicFrameLocks noGrp="1"/>
+          </p:cNvGraphicFramePr>
           <p:nvPr/>
-        </p:nvGrpSpPr>
-        <p:grpSpPr>
-          <a:xfrm>
-            <a:off x="3155145" y="1691542"/>
-            <a:ext cx="4308644" cy="2134226"/>
-            <a:chOff x="3155145" y="1691542"/>
-            <a:chExt cx="4308644" cy="2134226"/>
-          </a:xfrm>
-        </p:grpSpPr>
-        <p:sp>
-          <p:nvSpPr>
-            <p:cNvPr id="2256" name="BrandDeck Diagram Level 1"/>
-            <p:cNvSpPr/>
-            <p:nvPr/>
-          </p:nvSpPr>
-          <p:spPr>
-            <a:xfrm>
-              <a:off x="3630406" y="1691542"/>
-              <a:ext cx="926699" cy="1039682"/>
-            </a:xfrm>
-            <a:custGeom>
-              <a:avLst/>
-              <a:gdLst/>
-              <a:ahLst/>
-              <a:cxnLst/>
-              <a:rect l="l" t="t" r="r" b="b"/>
-              <a:pathLst>
-                <a:path w="1013" h="1137" stroke="0">
-                  <a:moveTo>
-                    <a:pt x="482" y="0"/>
-                  </a:moveTo>
-                  <a:lnTo>
-                    <a:pt x="532" y="0"/>
-                  </a:lnTo>
-                  <a:lnTo>
-                    <a:pt x="1013" y="1137"/>
-                  </a:lnTo>
-                  <a:lnTo>
-                    <a:pt x="0" y="1137"/>
-                  </a:lnTo>
-                  <a:close/>
-                </a:path>
-              </a:pathLst>
-            </a:custGeom>
-            <a:solidFill>
-              <a:srgbClr val="006DEB"/>
-            </a:solidFill>
-            <a:ln w="0">
-              <a:noFill/>
-            </a:ln>
-          </p:spPr>
-          <p:txBody>
-            <a:bodyPr rtlCol="0" anchor="b" wrap="square" lIns="18288" tIns="0" rIns="18288" bIns="73152">
-              <a:noAutofit/>
-            </a:bodyPr>
-            <a:lstStyle/>
-            <a:p>
-              <a:pPr algn="ctr">
-                <a:lnSpc>
-                  <a:spcPct val="110000"/>
-                </a:lnSpc>
-              </a:pPr>
-              <a:r>
-                <a:rPr sz="1410" b="1">
-                  <a:solidFill>
-                    <a:srgbClr val="FFFFFF"/>
-                  </a:solidFill>
-                  <a:latin typeface="Play"/>
-                </a:rPr>
-                <a:t>01</a:t>
-              </a:r>
-            </a:p>
-          </p:txBody>
-        </p:sp>
-        <p:sp>
-          <p:nvSpPr>
-            <p:cNvPr id="2257" name="BrandDeck Diagram Text 1"/>
-            <p:cNvSpPr txBox="1"/>
-            <p:nvPr/>
-          </p:nvSpPr>
-          <p:spPr>
-            <a:xfrm>
-              <a:off x="5318598" y="1691542"/>
-              <a:ext cx="2145191" cy="1039682"/>
-            </a:xfrm>
-            <a:prstGeom prst="rect">
-              <a:avLst/>
-            </a:prstGeom>
-            <a:noFill/>
-          </p:spPr>
-          <p:txBody>
-            <a:bodyPr wrap="square" anchor="ctr" lIns="36576" tIns="18288" rIns="36576" bIns="18288">
-              <a:noAutofit/>
-            </a:bodyPr>
-            <a:lstStyle/>
-            <a:p>
-              <a:pPr algn="l">
-                <a:lnSpc>
-                  <a:spcPct val="110000"/>
-                </a:lnSpc>
-              </a:pPr>
-              <a:r>
-                <a:rPr sz="1410" b="1">
-                  <a:solidFill>
-                    <a:srgbClr val="000000"/>
-                  </a:solidFill>
-                  <a:latin typeface="Play"/>
-                </a:rPr>
-                <a:t>2 подразделения</a:t>
-              </a:r>
-            </a:p>
-            <a:p>
-              <a:pPr algn="l">
-                <a:lnSpc>
-                  <a:spcPct val="110000"/>
-                </a:lnSpc>
-                <a:spcBef>
-                  <a:spcPts val="352"/>
-                </a:spcBef>
-              </a:pPr>
-              <a:r>
-                <a:rPr sz="1410" b="0">
-                  <a:solidFill>
-                    <a:srgbClr val="000000"/>
-                  </a:solidFill>
-                  <a:latin typeface="Play"/>
-                </a:rPr>
-                <a:t>География пилотного запуска</a:t>
-              </a:r>
-            </a:p>
-          </p:txBody>
-        </p:sp>
-        <p:sp>
-          <p:nvSpPr>
-            <p:cNvPr id="2258" name="BrandDeck Diagram Level 2"/>
-            <p:cNvSpPr/>
-            <p:nvPr/>
-          </p:nvSpPr>
-          <p:spPr>
-            <a:xfrm>
-              <a:off x="3155145" y="2786087"/>
-              <a:ext cx="1877222" cy="1039681"/>
-            </a:xfrm>
-            <a:custGeom>
-              <a:avLst/>
-              <a:gdLst/>
-              <a:ahLst/>
-              <a:cxnLst/>
-              <a:rect l="l" t="t" r="r" b="b"/>
-              <a:pathLst>
-                <a:path w="2053" h="1137" stroke="0">
-                  <a:moveTo>
-                    <a:pt x="494" y="0"/>
-                  </a:moveTo>
-                  <a:lnTo>
-                    <a:pt x="1559" y="0"/>
-                  </a:lnTo>
-                  <a:lnTo>
-                    <a:pt x="2053" y="1137"/>
-                  </a:lnTo>
-                  <a:lnTo>
-                    <a:pt x="0" y="1137"/>
-                  </a:lnTo>
-                  <a:close/>
-                </a:path>
-              </a:pathLst>
-            </a:custGeom>
-            <a:solidFill>
-              <a:srgbClr val="7DB4F5"/>
-            </a:solidFill>
-            <a:ln w="0">
-              <a:noFill/>
-            </a:ln>
-          </p:spPr>
-          <p:txBody>
-            <a:bodyPr rtlCol="0" anchor="ctr" wrap="square" lIns="18288" tIns="0" rIns="18288" bIns="0">
-              <a:noAutofit/>
-            </a:bodyPr>
-            <a:lstStyle/>
-            <a:p>
-              <a:pPr algn="ctr">
-                <a:lnSpc>
-                  <a:spcPct val="110000"/>
-                </a:lnSpc>
-              </a:pPr>
-              <a:r>
-                <a:rPr sz="1410" b="1">
-                  <a:solidFill>
-                    <a:srgbClr val="000000"/>
-                  </a:solidFill>
-                  <a:latin typeface="Play"/>
-                </a:rPr>
-                <a:t>02</a:t>
-              </a:r>
-            </a:p>
-          </p:txBody>
-        </p:sp>
-        <p:sp>
-          <p:nvSpPr>
-            <p:cNvPr id="2259" name="BrandDeck Diagram Text 2"/>
-            <p:cNvSpPr txBox="1"/>
-            <p:nvPr/>
-          </p:nvSpPr>
-          <p:spPr>
-            <a:xfrm>
-              <a:off x="5318598" y="2786087"/>
-              <a:ext cx="2145191" cy="1039681"/>
-            </a:xfrm>
-            <a:prstGeom prst="rect">
-              <a:avLst/>
-            </a:prstGeom>
-            <a:noFill/>
-          </p:spPr>
-          <p:txBody>
-            <a:bodyPr wrap="square" anchor="ctr" lIns="36576" tIns="18288" rIns="36576" bIns="18288">
-              <a:noAutofit/>
-            </a:bodyPr>
-            <a:lstStyle/>
-            <a:p>
-              <a:pPr algn="l">
-                <a:lnSpc>
-                  <a:spcPct val="110000"/>
-                </a:lnSpc>
-              </a:pPr>
-              <a:r>
-                <a:rPr sz="1600" b="1">
-                  <a:solidFill>
-                    <a:srgbClr val="000000"/>
-                  </a:solidFill>
-                  <a:latin typeface="Play"/>
-                </a:rPr>
-                <a:t>150 сотрудников</a:t>
-              </a:r>
-            </a:p>
-            <a:p>
-              <a:pPr algn="l">
-                <a:lnSpc>
-                  <a:spcPct val="110000"/>
-                </a:lnSpc>
-                <a:spcBef>
-                  <a:spcPts val="400"/>
-                </a:spcBef>
-              </a:pPr>
-              <a:r>
-                <a:rPr sz="1600" b="0">
-                  <a:solidFill>
-                    <a:srgbClr val="000000"/>
-                  </a:solidFill>
-                  <a:latin typeface="Play"/>
-                </a:rPr>
-                <a:t>Общее число участников</a:t>
-              </a:r>
-            </a:p>
-          </p:txBody>
-        </p:sp>
-      </p:grpSp>
+        </p:nvGraphicFramePr>
+        <p:xfrm>
+          <a:off x="438148" y="1819373"/>
+          <a:ext cx="6381717" cy="2528556"/>
+        </p:xfrm>
+        <a:graphic>
+          <a:graphicData uri="http://schemas.openxmlformats.org/drawingml/2006/table">
+            <a:tbl>
+              <a:tblPr firstRow="1" bandRow="1">
+                <a:tableStyleId>{5C22544A-7EE6-4342-B048-85BDC9FD1C3A}</a:tableStyleId>
+              </a:tblPr>
+              <a:tblGrid>
+                <a:gridCol w="3190858"/>
+                <a:gridCol w="3190859"/>
+              </a:tblGrid>
+              <a:tr h="624920">
+                <a:tc>
+                  <a:txBody>
+                    <a:bodyPr/>
+                    <a:lstStyle/>
+                    <a:p>
+                      <a:pPr algn="l"/>
+                      <a:r>
+                        <a:rPr sz="1320" b="1">
+                          <a:solidFill>
+                            <a:srgbClr val="FFFFFF"/>
+                          </a:solidFill>
+                          <a:latin typeface="Play"/>
+                        </a:rPr>
+                        <a:t>Метрика</a:t>
+                      </a:r>
+                    </a:p>
+                  </a:txBody>
+                  <a:tcPr marL="54864" marR="54864" anchor="ctr">
+                    <a:solidFill>
+                      <a:srgbClr val="006DEB"/>
+                    </a:solidFill>
+                  </a:tcPr>
+                </a:tc>
+                <a:tc>
+                  <a:txBody>
+                    <a:bodyPr/>
+                    <a:lstStyle/>
+                    <a:p>
+                      <a:pPr algn="l"/>
+                      <a:r>
+                        <a:rPr sz="1320" b="1">
+                          <a:solidFill>
+                            <a:srgbClr val="FFFFFF"/>
+                          </a:solidFill>
+                          <a:latin typeface="Play"/>
+                        </a:rPr>
+                        <a:t>Что измеряется</a:t>
+                      </a:r>
+                    </a:p>
+                  </a:txBody>
+                  <a:tcPr marL="54864" marR="54864" anchor="ctr">
+                    <a:solidFill>
+                      <a:srgbClr val="006DEB"/>
+                    </a:solidFill>
+                  </a:tcPr>
+                </a:tc>
+              </a:tr>
+              <a:tr h="1060784">
+                <a:tc>
+                  <a:txBody>
+                    <a:bodyPr/>
+                    <a:lstStyle/>
+                    <a:p>
+                      <a:pPr algn="l"/>
+                      <a:r>
+                        <a:rPr sz="1320" b="0">
+                          <a:solidFill>
+                            <a:srgbClr val="111111"/>
+                          </a:solidFill>
+                          <a:latin typeface="Play"/>
+                        </a:rPr>
+                        <a:t>Время поиска ответа</a:t>
+                      </a:r>
+                    </a:p>
+                  </a:txBody>
+                  <a:tcPr marL="54864" marR="54864" anchor="ctr">
+                    <a:solidFill>
+                      <a:srgbClr val="FEFFFF"/>
+                    </a:solidFill>
+                  </a:tcPr>
+                </a:tc>
+                <a:tc>
+                  <a:txBody>
+                    <a:bodyPr/>
+                    <a:lstStyle/>
+                    <a:p>
+                      <a:pPr algn="l"/>
+                      <a:r>
+                        <a:rPr sz="1320" b="0">
+                          <a:solidFill>
+                            <a:srgbClr val="111111"/>
+                          </a:solidFill>
+                          <a:latin typeface="Play"/>
+                        </a:rPr>
+                        <a:t>Сколько времени сотрудник тратит на поиск нужной инструкции</a:t>
+                      </a:r>
+                    </a:p>
+                  </a:txBody>
+                  <a:tcPr marL="54864" marR="54864" anchor="ctr">
+                    <a:solidFill>
+                      <a:srgbClr val="FEFFFF"/>
+                    </a:solidFill>
+                  </a:tcPr>
+                </a:tc>
+              </a:tr>
+              <a:tr h="842852">
+                <a:tc>
+                  <a:txBody>
+                    <a:bodyPr/>
+                    <a:lstStyle/>
+                    <a:p>
+                      <a:pPr algn="l"/>
+                      <a:r>
+                        <a:rPr sz="1320" b="0">
+                          <a:solidFill>
+                            <a:srgbClr val="111111"/>
+                          </a:solidFill>
+                          <a:latin typeface="Play"/>
+                        </a:rPr>
+                        <a:t>Доля закрытых обращений</a:t>
+                      </a:r>
+                    </a:p>
+                  </a:txBody>
+                  <a:tcPr marL="54864" marR="54864" anchor="ctr">
+                    <a:solidFill>
+                      <a:srgbClr val="FEFFFF"/>
+                    </a:solidFill>
+                  </a:tcPr>
+                </a:tc>
+                <a:tc>
+                  <a:txBody>
+                    <a:bodyPr/>
+                    <a:lstStyle/>
+                    <a:p>
+                      <a:pPr algn="l"/>
+                      <a:r>
+                        <a:rPr sz="1320" b="0">
+                          <a:solidFill>
+                            <a:srgbClr val="111111"/>
+                          </a:solidFill>
+                          <a:latin typeface="Play"/>
+                        </a:rPr>
+                        <a:t>Процент вопросов, решённых ИИ без участия специалиста</a:t>
+                      </a:r>
+                    </a:p>
+                  </a:txBody>
+                  <a:tcPr marL="54864" marR="54864" anchor="ctr">
+                    <a:solidFill>
+                      <a:srgbClr val="FEFFFF"/>
+                    </a:solidFill>
+                  </a:tcPr>
+                </a:tc>
+              </a:tr>
+            </a:tbl>
+          </a:graphicData>
+        </a:graphic>
+      </p:graphicFrame>
     </p:spTree>
   </p:cSld>
   <p:clrMapOvr>
@@ -11465,16 +10922,14 @@
       <p:grpSpPr/>
       <p:sp>
         <p:nvSpPr>
-          <p:cNvPr id="503" name="BrandDeck Text 503"/>
-          <p:cNvSpPr txBox="1"/>
-          <p:nvPr>
-            <p:ph type="title"/>
-          </p:nvPr>
+          <p:cNvPr id="1032" name="Google Shape;1032;p65"/>
+          <p:cNvSpPr/>
+          <p:nvPr/>
         </p:nvSpPr>
         <p:spPr>
           <a:xfrm>
-            <a:off x="430360" y="338829"/>
-            <a:ext cx="3945697" cy="753371"/>
+            <a:off x="285748" y="286047"/>
+            <a:ext cx="8572456" cy="3938075"/>
           </a:xfrm>
           <a:prstGeom prst="rect">
             <a:avLst/>
@@ -11485,7 +10940,91 @@
           </a:ln>
         </p:spPr>
         <p:txBody>
-          <a:bodyPr anchorCtr="0" anchor="t" bIns="45700" lIns="91425" spcFirstLastPara="1" rIns="91425" wrap="square" tIns="45700">
+          <a:bodyPr anchorCtr="0" anchor="ctr" bIns="91425" lIns="91425" spcFirstLastPara="1" rIns="91425" wrap="square" tIns="91425">
+            <a:noAutofit/>
+          </a:bodyPr>
+          <a:lstStyle/>
+          <a:p>
+            <a:pPr indent="0" lvl="0" marL="0" rtl="0" algn="l">
+              <a:spcBef>
+                <a:spcPts val="0"/>
+              </a:spcBef>
+              <a:spcAft>
+                <a:spcPts val="0"/>
+              </a:spcAft>
+              <a:buNone/>
+            </a:pPr>
+            <a:r>
+              <a:t/>
+            </a:r>
+            <a:endParaRPr/>
+          </a:p>
+        </p:txBody>
+      </p:sp>
+      <p:sp>
+        <p:nvSpPr>
+          <p:cNvPr id="1033" name="Google Shape;1033;p65"/>
+          <p:cNvSpPr/>
+          <p:nvPr/>
+        </p:nvSpPr>
+        <p:spPr>
+          <a:xfrm>
+            <a:off x="285748" y="1209852"/>
+            <a:ext cx="8572456" cy="3014270"/>
+          </a:xfrm>
+          <a:prstGeom prst="rect">
+            <a:avLst/>
+          </a:prstGeom>
+          <a:noFill/>
+          <a:ln>
+            <a:noFill/>
+          </a:ln>
+        </p:spPr>
+        <p:txBody>
+          <a:bodyPr anchorCtr="0" anchor="ctr" bIns="91425" lIns="91425" spcFirstLastPara="1" rIns="91425" wrap="square" tIns="91425">
+            <a:noAutofit/>
+          </a:bodyPr>
+          <a:lstStyle/>
+          <a:p>
+            <a:pPr indent="0" lvl="0" marL="0" rtl="0" algn="l">
+              <a:spcBef>
+                <a:spcPts val="0"/>
+              </a:spcBef>
+              <a:spcAft>
+                <a:spcPts val="0"/>
+              </a:spcAft>
+              <a:buNone/>
+            </a:pPr>
+            <a:r>
+              <a:t/>
+            </a:r>
+            <a:endParaRPr/>
+          </a:p>
+        </p:txBody>
+      </p:sp>
+      <p:sp>
+        <p:nvSpPr>
+          <p:cNvPr id="1050" name="BrandDeck Text 1050"/>
+          <p:cNvSpPr txBox="1"/>
+          <p:nvPr>
+            <p:ph type="title"/>
+          </p:nvPr>
+        </p:nvSpPr>
+        <p:spPr>
+          <a:xfrm>
+            <a:off x="177970" y="282949"/>
+            <a:ext cx="6792985" cy="724203"/>
+          </a:xfrm>
+          <a:prstGeom prst="rect">
+            <a:avLst/>
+          </a:prstGeom>
+          <a:noFill/>
+          <a:ln>
+            <a:noFill/>
+          </a:ln>
+        </p:spPr>
+        <p:txBody>
+          <a:bodyPr anchorCtr="0" anchor="t" bIns="45700" lIns="91425" spcFirstLastPara="1" rIns="91425" wrap="square" tIns="45700" vert="horz">
             <a:normAutofit/>
           </a:bodyPr>
           <a:lstStyle/>
@@ -11509,7 +11048,7 @@
             </a:pPr>
             <a:r>
               <a:rPr sz="1800"/>
-              <a:t>Срок пилота составляет 6 недель</a:t>
+              <a:t>Пилот длится 6 недель, требуется команда из 3 человек</a:t>
             </a:r>
             <a:endParaRPr/>
           </a:p>
@@ -11517,63 +11056,36 @@
       </p:sp>
       <p:grpSp>
         <p:nvGrpSpPr>
-          <p:cNvPr id="2" name="BrandDeck Diagram cycle" descr="cycle: Старт Запуск в 2 подразделениях; Процесс Сбор данных 6 недель; Финал Анализ метрик эффективности"/>
+          <p:cNvPr id="2" name="BrandDeck Diagram icon_grid" descr="icon_grid: Пилот длится 6 недель.; Требуется команда из 3 человек.; Успех измеряется временем поиска и долей закрытых обращений."/>
           <p:cNvGrpSpPr/>
           <p:nvPr/>
         </p:nvGrpSpPr>
         <p:grpSpPr>
           <a:xfrm>
-            <a:off x="4708141" y="711456"/>
-            <a:ext cx="3791333" cy="3666745"/>
-            <a:chOff x="4708141" y="711456"/>
-            <a:chExt cx="3791333" cy="3666745"/>
+            <a:off x="585216" y="1144312"/>
+            <a:ext cx="5129783" cy="3583135"/>
+            <a:chOff x="585216" y="1144312"/>
+            <a:chExt cx="5129783" cy="3583135"/>
           </a:xfrm>
         </p:grpSpPr>
         <p:sp>
           <p:nvSpPr>
-            <p:cNvPr id="508" name="BrandDeck Diagram Ring"/>
+            <p:cNvPr id="1051" name="BrandDeck Diagram Card 1"/>
             <p:cNvSpPr/>
             <p:nvPr/>
           </p:nvSpPr>
           <p:spPr>
             <a:xfrm>
-              <a:off x="4838256" y="2014477"/>
-              <a:ext cx="1060704" cy="1060704"/>
+              <a:off x="585216" y="1144312"/>
+              <a:ext cx="5129783" cy="1121226"/>
             </a:xfrm>
-            <a:prstGeom prst="ellipse">
-              <a:avLst/>
-            </a:prstGeom>
-            <a:noFill/>
-            <a:ln w="28575">
-              <a:solidFill>
-                <a:srgbClr val="58A6FF"/>
-              </a:solidFill>
-            </a:ln>
-          </p:spPr>
-          <p:txBody>
-            <a:bodyPr rtlCol="0" anchor="ctr"/>
-            <a:lstStyle/>
-            <a:p>
-              <a:pPr algn="ctr"/>
-            </a:p>
-          </p:txBody>
-        </p:sp>
-        <p:sp>
-          <p:nvSpPr>
-            <p:cNvPr id="509" name="BrandDeck Diagram Arrow 1"/>
-            <p:cNvSpPr/>
-            <p:nvPr/>
-          </p:nvSpPr>
-          <p:spPr>
-            <a:xfrm rot="9000000">
-              <a:off x="5755485" y="2207232"/>
-              <a:ext cx="144840" cy="144840"/>
-            </a:xfrm>
-            <a:prstGeom prst="triangle">
-              <a:avLst/>
+            <a:prstGeom prst="roundRect">
+              <a:avLst>
+                <a:gd name="adj" fmla="val 8000"/>
+              </a:avLst>
             </a:prstGeom>
             <a:solidFill>
-              <a:srgbClr val="58A6FF"/>
+              <a:srgbClr val="E8F3FF"/>
             </a:solidFill>
             <a:ln>
               <a:noFill/>
@@ -11589,20 +11101,20 @@
         </p:sp>
         <p:sp>
           <p:nvSpPr>
-            <p:cNvPr id="510" name="BrandDeck Diagram Arrow 2"/>
+            <p:cNvPr id="1052" name="BrandDeck Diagram Icon 1 Badge"/>
             <p:cNvSpPr/>
             <p:nvPr/>
           </p:nvSpPr>
           <p:spPr>
-            <a:xfrm rot="16200000">
-              <a:off x="5296187" y="3002760"/>
-              <a:ext cx="144840" cy="144840"/>
+            <a:xfrm>
+              <a:off x="804672" y="1522045"/>
+              <a:ext cx="365760" cy="365760"/>
             </a:xfrm>
-            <a:prstGeom prst="triangle">
+            <a:prstGeom prst="ellipse">
               <a:avLst/>
             </a:prstGeom>
             <a:solidFill>
-              <a:srgbClr val="58A6FF"/>
+              <a:srgbClr val="006DEB"/>
             </a:solidFill>
             <a:ln>
               <a:noFill/>
@@ -11618,23 +11130,121 @@
         </p:sp>
         <p:sp>
           <p:nvSpPr>
-            <p:cNvPr id="511" name="BrandDeck Diagram Arrow 3"/>
+            <p:cNvPr id="1053" name="BrandDeck Icon rocket"/>
             <p:cNvSpPr/>
             <p:nvPr/>
           </p:nvSpPr>
           <p:spPr>
-            <a:xfrm rot="1800000">
-              <a:off x="4836889" y="2207232"/>
-              <a:ext cx="144840" cy="144840"/>
+            <a:xfrm>
+              <a:off x="885139" y="1602512"/>
+              <a:ext cx="204825" cy="204825"/>
             </a:xfrm>
-            <a:prstGeom prst="triangle">
+            <a:custGeom>
               <a:avLst/>
-            </a:prstGeom>
-            <a:solidFill>
-              <a:srgbClr val="58A6FF"/>
-            </a:solidFill>
-            <a:ln>
-              <a:noFill/>
+              <a:gdLst/>
+              <a:ahLst/>
+              <a:cxnLst/>
+              <a:rect l="l" t="t" r="r" b="b"/>
+              <a:pathLst>
+                <a:path w="24000" h="24000" fill="none">
+                  <a:moveTo>
+                    <a:pt x="4500" y="16500"/>
+                  </a:moveTo>
+                  <a:cubicBezTo>
+                    <a:pt x="3000" y="17760"/>
+                    <a:pt x="2500" y="21500"/>
+                    <a:pt x="2500" y="21500"/>
+                  </a:cubicBezTo>
+                  <a:cubicBezTo>
+                    <a:pt x="2500" y="21500"/>
+                    <a:pt x="6240" y="21000"/>
+                    <a:pt x="7500" y="19500"/>
+                  </a:cubicBezTo>
+                  <a:cubicBezTo>
+                    <a:pt x="8210" y="18660"/>
+                    <a:pt x="8200" y="17370"/>
+                    <a:pt x="7410" y="16590"/>
+                  </a:cubicBezTo>
+                  <a:cubicBezTo>
+                    <a:pt x="6605" y="15822"/>
+                    <a:pt x="5351" y="15783"/>
+                    <a:pt x="4500" y="16500"/>
+                  </a:cubicBezTo>
+                  <a:close/>
+                </a:path>
+                <a:path w="24000" h="24000" fill="none">
+                  <a:moveTo>
+                    <a:pt x="12000" y="15000"/>
+                  </a:moveTo>
+                  <a:lnTo>
+                    <a:pt x="9000" y="12000"/>
+                  </a:lnTo>
+                  <a:cubicBezTo>
+                    <a:pt x="9532" y="10619"/>
+                    <a:pt x="10202" y="9296"/>
+                    <a:pt x="11000" y="8050"/>
+                  </a:cubicBezTo>
+                  <a:cubicBezTo>
+                    <a:pt x="13369" y="4262"/>
+                    <a:pt x="17532" y="1972"/>
+                    <a:pt x="22000" y="2000"/>
+                  </a:cubicBezTo>
+                  <a:cubicBezTo>
+                    <a:pt x="22000" y="4720"/>
+                    <a:pt x="21220" y="9500"/>
+                    <a:pt x="16000" y="13000"/>
+                  </a:cubicBezTo>
+                  <a:cubicBezTo>
+                    <a:pt x="14737" y="13799"/>
+                    <a:pt x="13397" y="14469"/>
+                    <a:pt x="12000" y="15000"/>
+                  </a:cubicBezTo>
+                  <a:close/>
+                </a:path>
+                <a:path w="24000" h="24000" fill="none">
+                  <a:moveTo>
+                    <a:pt x="9000" y="12000"/>
+                  </a:moveTo>
+                  <a:lnTo>
+                    <a:pt x="4000" y="12000"/>
+                  </a:lnTo>
+                  <a:cubicBezTo>
+                    <a:pt x="4000" y="12000"/>
+                    <a:pt x="4550" y="8970"/>
+                    <a:pt x="6000" y="8000"/>
+                  </a:cubicBezTo>
+                  <a:cubicBezTo>
+                    <a:pt x="7620" y="6920"/>
+                    <a:pt x="11000" y="8000"/>
+                    <a:pt x="11000" y="8000"/>
+                  </a:cubicBezTo>
+                </a:path>
+                <a:path w="24000" h="24000" fill="none">
+                  <a:moveTo>
+                    <a:pt x="12000" y="15000"/>
+                  </a:moveTo>
+                  <a:lnTo>
+                    <a:pt x="12000" y="20000"/>
+                  </a:lnTo>
+                  <a:cubicBezTo>
+                    <a:pt x="12000" y="20000"/>
+                    <a:pt x="15030" y="19450"/>
+                    <a:pt x="16000" y="18000"/>
+                  </a:cubicBezTo>
+                  <a:cubicBezTo>
+                    <a:pt x="17080" y="16380"/>
+                    <a:pt x="16000" y="13000"/>
+                    <a:pt x="16000" y="13000"/>
+                  </a:cubicBezTo>
+                </a:path>
+              </a:pathLst>
+            </a:custGeom>
+            <a:noFill/>
+            <a:ln w="17068" cap="rnd">
+              <a:solidFill>
+                <a:srgbClr val="FFFFFF"/>
+              </a:solidFill>
+              <a:round/>
             </a:ln>
           </p:spPr>
           <p:txBody>
@@ -11647,190 +11257,14 @@
         </p:sp>
         <p:sp>
           <p:nvSpPr>
-            <p:cNvPr id="512" name="BrandDeck Diagram Node 1 Badge"/>
-            <p:cNvSpPr/>
-            <p:nvPr/>
-          </p:nvSpPr>
-          <p:spPr>
-            <a:xfrm>
-              <a:off x="5167440" y="1813309"/>
-              <a:ext cx="402336" cy="402336"/>
-            </a:xfrm>
-            <a:prstGeom prst="ellipse">
-              <a:avLst/>
-            </a:prstGeom>
-            <a:solidFill>
-              <a:srgbClr val="006DEB"/>
-            </a:solidFill>
-            <a:ln>
-              <a:noFill/>
-            </a:ln>
-          </p:spPr>
-          <p:txBody>
-            <a:bodyPr rtlCol="0" anchor="ctr" wrap="square" lIns="0" tIns="0" rIns="0" bIns="0">
-              <a:noAutofit/>
-            </a:bodyPr>
-            <a:lstStyle/>
-            <a:p>
-              <a:pPr algn="ctr">
-                <a:lnSpc>
-                  <a:spcPct val="110000"/>
-                </a:lnSpc>
-              </a:pPr>
-              <a:r>
-                <a:rPr sz="1100" b="1">
-                  <a:solidFill>
-                    <a:srgbClr val="FFFFFF"/>
-                  </a:solidFill>
-                  <a:latin typeface="Play"/>
-                </a:rPr>
-                <a:t>01</a:t>
-              </a:r>
-            </a:p>
-          </p:txBody>
-        </p:sp>
-        <p:sp>
-          <p:nvSpPr>
-            <p:cNvPr id="513" name="BrandDeck Diagram Node 2 Badge"/>
-            <p:cNvSpPr/>
-            <p:nvPr/>
-          </p:nvSpPr>
-          <p:spPr>
-            <a:xfrm>
-              <a:off x="5626738" y="2608837"/>
-              <a:ext cx="402336" cy="402336"/>
-            </a:xfrm>
-            <a:prstGeom prst="ellipse">
-              <a:avLst/>
-            </a:prstGeom>
-            <a:solidFill>
-              <a:srgbClr val="006DEB"/>
-            </a:solidFill>
-            <a:ln>
-              <a:noFill/>
-            </a:ln>
-          </p:spPr>
-          <p:txBody>
-            <a:bodyPr rtlCol="0" anchor="ctr" wrap="square" lIns="0" tIns="0" rIns="0" bIns="0">
-              <a:noAutofit/>
-            </a:bodyPr>
-            <a:lstStyle/>
-            <a:p>
-              <a:pPr algn="ctr">
-                <a:lnSpc>
-                  <a:spcPct val="110000"/>
-                </a:lnSpc>
-              </a:pPr>
-              <a:r>
-                <a:rPr sz="1100" b="1">
-                  <a:solidFill>
-                    <a:srgbClr val="FFFFFF"/>
-                  </a:solidFill>
-                  <a:latin typeface="Play"/>
-                </a:rPr>
-                <a:t>02</a:t>
-              </a:r>
-            </a:p>
-          </p:txBody>
-        </p:sp>
-        <p:sp>
-          <p:nvSpPr>
-            <p:cNvPr id="514" name="BrandDeck Diagram Node 3 Badge"/>
-            <p:cNvSpPr/>
-            <p:nvPr/>
-          </p:nvSpPr>
-          <p:spPr>
-            <a:xfrm>
-              <a:off x="4708141" y="2608837"/>
-              <a:ext cx="402336" cy="402336"/>
-            </a:xfrm>
-            <a:prstGeom prst="ellipse">
-              <a:avLst/>
-            </a:prstGeom>
-            <a:solidFill>
-              <a:srgbClr val="006DEB"/>
-            </a:solidFill>
-            <a:ln>
-              <a:noFill/>
-            </a:ln>
-          </p:spPr>
-          <p:txBody>
-            <a:bodyPr rtlCol="0" anchor="ctr" wrap="square" lIns="0" tIns="0" rIns="0" bIns="0">
-              <a:noAutofit/>
-            </a:bodyPr>
-            <a:lstStyle/>
-            <a:p>
-              <a:pPr algn="ctr">
-                <a:lnSpc>
-                  <a:spcPct val="110000"/>
-                </a:lnSpc>
-              </a:pPr>
-              <a:r>
-                <a:rPr sz="1100" b="1">
-                  <a:solidFill>
-                    <a:srgbClr val="FFFFFF"/>
-                  </a:solidFill>
-                  <a:latin typeface="Play"/>
-                </a:rPr>
-                <a:t>03</a:t>
-              </a:r>
-            </a:p>
-          </p:txBody>
-        </p:sp>
-        <p:sp>
-          <p:nvSpPr>
-            <p:cNvPr id="515" name="BrandDeck Diagram Legend 1 Badge"/>
-            <p:cNvSpPr/>
-            <p:nvPr/>
-          </p:nvSpPr>
-          <p:spPr>
-            <a:xfrm>
-              <a:off x="6420168" y="1154941"/>
-              <a:ext cx="310896" cy="310896"/>
-            </a:xfrm>
-            <a:prstGeom prst="ellipse">
-              <a:avLst/>
-            </a:prstGeom>
-            <a:solidFill>
-              <a:srgbClr val="006DEB"/>
-            </a:solidFill>
-            <a:ln>
-              <a:noFill/>
-            </a:ln>
-          </p:spPr>
-          <p:txBody>
-            <a:bodyPr rtlCol="0" anchor="ctr" wrap="square" lIns="0" tIns="0" rIns="0" bIns="0">
-              <a:noAutofit/>
-            </a:bodyPr>
-            <a:lstStyle/>
-            <a:p>
-              <a:pPr algn="ctr">
-                <a:lnSpc>
-                  <a:spcPct val="110000"/>
-                </a:lnSpc>
-              </a:pPr>
-              <a:r>
-                <a:rPr sz="1000" b="1">
-                  <a:solidFill>
-                    <a:srgbClr val="FFFFFF"/>
-                  </a:solidFill>
-                  <a:latin typeface="Play"/>
-                </a:rPr>
-                <a:t>01</a:t>
-              </a:r>
-            </a:p>
-          </p:txBody>
-        </p:sp>
-        <p:sp>
-          <p:nvSpPr>
-            <p:cNvPr id="516" name="BrandDeck Diagram Text 1"/>
+            <p:cNvPr id="1054" name="BrandDeck Diagram Text 1"/>
             <p:cNvSpPr txBox="1"/>
             <p:nvPr/>
           </p:nvSpPr>
           <p:spPr>
             <a:xfrm>
-              <a:off x="6877368" y="711456"/>
-              <a:ext cx="1622106" cy="1197864"/>
+              <a:off x="1302105" y="1275985"/>
+              <a:ext cx="4193438" cy="857879"/>
             </a:xfrm>
             <a:prstGeom prst="rect">
               <a:avLst/>
@@ -11849,46 +11283,58 @@
                 </a:lnSpc>
               </a:pPr>
               <a:r>
-                <a:rPr sz="1410" b="1">
+                <a:rPr sz="1600" b="0">
                   <a:solidFill>
                     <a:srgbClr val="000000"/>
                   </a:solidFill>
                   <a:latin typeface="Play"/>
                 </a:rPr>
-                <a:t>Старт</a:t>
-              </a:r>
-            </a:p>
-            <a:p>
-              <a:pPr algn="l">
-                <a:lnSpc>
-                  <a:spcPct val="110000"/>
-                </a:lnSpc>
-                <a:spcBef>
-                  <a:spcPts val="352"/>
-                </a:spcBef>
-              </a:pPr>
-              <a:r>
-                <a:rPr sz="1410" b="0">
-                  <a:solidFill>
-                    <a:srgbClr val="000000"/>
-                  </a:solidFill>
-                  <a:latin typeface="Play"/>
-                </a:rPr>
-                <a:t>Запуск в 2 подразделениях</a:t>
+                <a:t>Пилот длится 6 недель.</a:t>
               </a:r>
             </a:p>
           </p:txBody>
         </p:sp>
         <p:sp>
           <p:nvSpPr>
-            <p:cNvPr id="517" name="BrandDeck Diagram Legend 2 Badge"/>
+            <p:cNvPr id="1055" name="BrandDeck Diagram Card 2"/>
             <p:cNvSpPr/>
             <p:nvPr/>
           </p:nvSpPr>
           <p:spPr>
             <a:xfrm>
-              <a:off x="6420168" y="2389381"/>
-              <a:ext cx="310896" cy="310896"/>
+              <a:off x="585216" y="2375266"/>
+              <a:ext cx="5129783" cy="1121226"/>
+            </a:xfrm>
+            <a:prstGeom prst="roundRect">
+              <a:avLst>
+                <a:gd name="adj" fmla="val 8000"/>
+              </a:avLst>
+            </a:prstGeom>
+            <a:solidFill>
+              <a:srgbClr val="E8F3FF"/>
+            </a:solidFill>
+            <a:ln>
+              <a:noFill/>
+            </a:ln>
+          </p:spPr>
+          <p:txBody>
+            <a:bodyPr rtlCol="0" anchor="ctr"/>
+            <a:lstStyle/>
+            <a:p>
+              <a:pPr algn="ctr"/>
+            </a:p>
+          </p:txBody>
+        </p:sp>
+        <p:sp>
+          <p:nvSpPr>
+            <p:cNvPr id="1056" name="BrandDeck Diagram Icon 2 Badge"/>
+            <p:cNvSpPr/>
+            <p:nvPr/>
+          </p:nvSpPr>
+          <p:spPr>
+            <a:xfrm>
+              <a:off x="804672" y="2752999"/>
+              <a:ext cx="365760" cy="365760"/>
             </a:xfrm>
             <a:prstGeom prst="ellipse">
               <a:avLst/>
@@ -11901,38 +11347,137 @@
             </a:ln>
           </p:spPr>
           <p:txBody>
-            <a:bodyPr rtlCol="0" anchor="ctr" wrap="square" lIns="0" tIns="0" rIns="0" bIns="0">
-              <a:noAutofit/>
-            </a:bodyPr>
+            <a:bodyPr rtlCol="0" anchor="ctr"/>
             <a:lstStyle/>
             <a:p>
-              <a:pPr algn="ctr">
-                <a:lnSpc>
-                  <a:spcPct val="110000"/>
-                </a:lnSpc>
-              </a:pPr>
-              <a:r>
-                <a:rPr sz="1000" b="1">
-                  <a:solidFill>
-                    <a:srgbClr val="FFFFFF"/>
-                  </a:solidFill>
-                  <a:latin typeface="Play"/>
-                </a:rPr>
-                <a:t>02</a:t>
-              </a:r>
+              <a:pPr algn="ctr"/>
             </a:p>
           </p:txBody>
         </p:sp>
         <p:sp>
           <p:nvSpPr>
-            <p:cNvPr id="518" name="BrandDeck Diagram Text 2"/>
+            <p:cNvPr id="1057" name="BrandDeck Icon users"/>
+            <p:cNvSpPr/>
+            <p:nvPr/>
+          </p:nvSpPr>
+          <p:spPr>
+            <a:xfrm>
+              <a:off x="885139" y="2833467"/>
+              <a:ext cx="204825" cy="204825"/>
+            </a:xfrm>
+            <a:custGeom>
+              <a:avLst/>
+              <a:gdLst/>
+              <a:ahLst/>
+              <a:cxnLst/>
+              <a:rect l="l" t="t" r="r" b="b"/>
+              <a:pathLst>
+                <a:path w="24000" h="24000" fill="none">
+                  <a:moveTo>
+                    <a:pt x="16000" y="21000"/>
+                  </a:moveTo>
+                  <a:lnTo>
+                    <a:pt x="16000" y="19000"/>
+                  </a:lnTo>
+                  <a:cubicBezTo>
+                    <a:pt x="16000" y="16791"/>
+                    <a:pt x="14209" y="15000"/>
+                    <a:pt x="12000" y="15000"/>
+                  </a:cubicBezTo>
+                  <a:lnTo>
+                    <a:pt x="6000" y="15000"/>
+                  </a:lnTo>
+                  <a:cubicBezTo>
+                    <a:pt x="3791" y="15000"/>
+                    <a:pt x="2000" y="16791"/>
+                    <a:pt x="2000" y="19000"/>
+                  </a:cubicBezTo>
+                  <a:lnTo>
+                    <a:pt x="2000" y="21000"/>
+                  </a:lnTo>
+                </a:path>
+                <a:path w="24000" h="24000" fill="none">
+                  <a:moveTo>
+                    <a:pt x="13000" y="7000"/>
+                  </a:moveTo>
+                  <a:cubicBezTo>
+                    <a:pt x="13000" y="9209"/>
+                    <a:pt x="11209" y="11000"/>
+                    <a:pt x="9000" y="11000"/>
+                  </a:cubicBezTo>
+                  <a:cubicBezTo>
+                    <a:pt x="6791" y="11000"/>
+                    <a:pt x="5000" y="9209"/>
+                    <a:pt x="5000" y="7000"/>
+                  </a:cubicBezTo>
+                  <a:cubicBezTo>
+                    <a:pt x="5000" y="4791"/>
+                    <a:pt x="6791" y="3000"/>
+                    <a:pt x="9000" y="3000"/>
+                  </a:cubicBezTo>
+                  <a:cubicBezTo>
+                    <a:pt x="11209" y="3000"/>
+                    <a:pt x="13000" y="4791"/>
+                    <a:pt x="13000" y="7000"/>
+                  </a:cubicBezTo>
+                  <a:close/>
+                </a:path>
+                <a:path w="24000" h="24000" fill="none">
+                  <a:moveTo>
+                    <a:pt x="22000" y="21000"/>
+                  </a:moveTo>
+                  <a:lnTo>
+                    <a:pt x="22000" y="19000"/>
+                  </a:lnTo>
+                  <a:cubicBezTo>
+                    <a:pt x="21999" y="17177"/>
+                    <a:pt x="20765" y="15586"/>
+                    <a:pt x="19000" y="15130"/>
+                  </a:cubicBezTo>
+                </a:path>
+                <a:path w="24000" h="24000" fill="none">
+                  <a:moveTo>
+                    <a:pt x="16000" y="3130"/>
+                  </a:moveTo>
+                  <a:cubicBezTo>
+                    <a:pt x="17770" y="3583"/>
+                    <a:pt x="19008" y="5178"/>
+                    <a:pt x="19008" y="7005"/>
+                  </a:cubicBezTo>
+                  <a:cubicBezTo>
+                    <a:pt x="19008" y="8832"/>
+                    <a:pt x="17770" y="10427"/>
+                    <a:pt x="16000" y="10880"/>
+                  </a:cubicBezTo>
+                </a:path>
+              </a:pathLst>
+            </a:custGeom>
+            <a:noFill/>
+            <a:ln w="17068" cap="rnd">
+              <a:solidFill>
+                <a:srgbClr val="FFFFFF"/>
+              </a:solidFill>
+              <a:round/>
+            </a:ln>
+          </p:spPr>
+          <p:txBody>
+            <a:bodyPr rtlCol="0" anchor="ctr"/>
+            <a:lstStyle/>
+            <a:p>
+              <a:pPr algn="ctr"/>
+            </a:p>
+          </p:txBody>
+        </p:sp>
+        <p:sp>
+          <p:nvSpPr>
+            <p:cNvPr id="1058" name="BrandDeck Diagram Text 2"/>
             <p:cNvSpPr txBox="1"/>
             <p:nvPr/>
           </p:nvSpPr>
           <p:spPr>
             <a:xfrm>
-              <a:off x="6877368" y="1945897"/>
-              <a:ext cx="1622106" cy="1197864"/>
+              <a:off x="1302105" y="2506940"/>
+              <a:ext cx="4193438" cy="857879"/>
             </a:xfrm>
             <a:prstGeom prst="rect">
               <a:avLst/>
@@ -11951,46 +11496,58 @@
                 </a:lnSpc>
               </a:pPr>
               <a:r>
-                <a:rPr sz="1410" b="1">
+                <a:rPr sz="1600" b="0">
                   <a:solidFill>
                     <a:srgbClr val="000000"/>
                   </a:solidFill>
                   <a:latin typeface="Play"/>
                 </a:rPr>
-                <a:t>Процесс</a:t>
-              </a:r>
-            </a:p>
-            <a:p>
-              <a:pPr algn="l">
-                <a:lnSpc>
-                  <a:spcPct val="110000"/>
-                </a:lnSpc>
-                <a:spcBef>
-                  <a:spcPts val="352"/>
-                </a:spcBef>
-              </a:pPr>
-              <a:r>
-                <a:rPr sz="1410" b="0">
-                  <a:solidFill>
-                    <a:srgbClr val="000000"/>
-                  </a:solidFill>
-                  <a:latin typeface="Play"/>
-                </a:rPr>
-                <a:t>Сбор данных 6 недель</a:t>
+                <a:t>Требуется команда из 3 человек.</a:t>
               </a:r>
             </a:p>
           </p:txBody>
         </p:sp>
         <p:sp>
           <p:nvSpPr>
-            <p:cNvPr id="519" name="BrandDeck Diagram Legend 3 Badge"/>
+            <p:cNvPr id="1059" name="BrandDeck Diagram Card 3"/>
             <p:cNvSpPr/>
             <p:nvPr/>
           </p:nvSpPr>
           <p:spPr>
             <a:xfrm>
-              <a:off x="6420168" y="3623821"/>
-              <a:ext cx="310896" cy="310896"/>
+              <a:off x="585216" y="3606221"/>
+              <a:ext cx="5129783" cy="1121226"/>
+            </a:xfrm>
+            <a:prstGeom prst="roundRect">
+              <a:avLst>
+                <a:gd name="adj" fmla="val 8000"/>
+              </a:avLst>
+            </a:prstGeom>
+            <a:solidFill>
+              <a:srgbClr val="E8F3FF"/>
+            </a:solidFill>
+            <a:ln>
+              <a:noFill/>
+            </a:ln>
+          </p:spPr>
+          <p:txBody>
+            <a:bodyPr rtlCol="0" anchor="ctr"/>
+            <a:lstStyle/>
+            <a:p>
+              <a:pPr algn="ctr"/>
+            </a:p>
+          </p:txBody>
+        </p:sp>
+        <p:sp>
+          <p:nvSpPr>
+            <p:cNvPr id="1060" name="BrandDeck Diagram Icon 3 Badge"/>
+            <p:cNvSpPr/>
+            <p:nvPr/>
+          </p:nvSpPr>
+          <p:spPr>
+            <a:xfrm>
+              <a:off x="804672" y="3983954"/>
+              <a:ext cx="365760" cy="365760"/>
             </a:xfrm>
             <a:prstGeom prst="ellipse">
               <a:avLst/>
@@ -12003,38 +11560,99 @@
             </a:ln>
           </p:spPr>
           <p:txBody>
-            <a:bodyPr rtlCol="0" anchor="ctr" wrap="square" lIns="0" tIns="0" rIns="0" bIns="0">
-              <a:noAutofit/>
-            </a:bodyPr>
+            <a:bodyPr rtlCol="0" anchor="ctr"/>
             <a:lstStyle/>
             <a:p>
-              <a:pPr algn="ctr">
-                <a:lnSpc>
-                  <a:spcPct val="110000"/>
-                </a:lnSpc>
-              </a:pPr>
-              <a:r>
-                <a:rPr sz="1000" b="1">
-                  <a:solidFill>
-                    <a:srgbClr val="FFFFFF"/>
-                  </a:solidFill>
-                  <a:latin typeface="Play"/>
-                </a:rPr>
-                <a:t>03</a:t>
-              </a:r>
+              <a:pPr algn="ctr"/>
             </a:p>
           </p:txBody>
         </p:sp>
         <p:sp>
           <p:nvSpPr>
-            <p:cNvPr id="520" name="BrandDeck Diagram Text 3"/>
+            <p:cNvPr id="1061" name="BrandDeck Icon chart-column"/>
+            <p:cNvSpPr/>
+            <p:nvPr/>
+          </p:nvSpPr>
+          <p:spPr>
+            <a:xfrm>
+              <a:off x="885139" y="4064421"/>
+              <a:ext cx="204825" cy="204825"/>
+            </a:xfrm>
+            <a:custGeom>
+              <a:avLst/>
+              <a:gdLst/>
+              <a:ahLst/>
+              <a:cxnLst/>
+              <a:rect l="l" t="t" r="r" b="b"/>
+              <a:pathLst>
+                <a:path w="24000" h="24000" fill="none">
+                  <a:moveTo>
+                    <a:pt x="3000" y="3000"/>
+                  </a:moveTo>
+                  <a:lnTo>
+                    <a:pt x="3000" y="19000"/>
+                  </a:lnTo>
+                  <a:cubicBezTo>
+                    <a:pt x="3000" y="20105"/>
+                    <a:pt x="3895" y="21000"/>
+                    <a:pt x="5000" y="21000"/>
+                  </a:cubicBezTo>
+                  <a:lnTo>
+                    <a:pt x="21000" y="21000"/>
+                  </a:lnTo>
+                </a:path>
+                <a:path w="24000" h="24000" fill="none">
+                  <a:moveTo>
+                    <a:pt x="18000" y="17000"/>
+                  </a:moveTo>
+                  <a:lnTo>
+                    <a:pt x="18000" y="9000"/>
+                  </a:lnTo>
+                </a:path>
+                <a:path w="24000" h="24000" fill="none">
+                  <a:moveTo>
+                    <a:pt x="13000" y="17000"/>
+                  </a:moveTo>
+                  <a:lnTo>
+                    <a:pt x="13000" y="5000"/>
+                  </a:lnTo>
+                </a:path>
+                <a:path w="24000" h="24000" fill="none">
+                  <a:moveTo>
+                    <a:pt x="8000" y="17000"/>
+                  </a:moveTo>
+                  <a:lnTo>
+                    <a:pt x="8000" y="14000"/>
+                  </a:lnTo>
+                </a:path>
+              </a:pathLst>
+            </a:custGeom>
+            <a:noFill/>
+            <a:ln w="17068" cap="rnd">
+              <a:solidFill>
+                <a:srgbClr val="FFFFFF"/>
+              </a:solidFill>
+              <a:round/>
+            </a:ln>
+          </p:spPr>
+          <p:txBody>
+            <a:bodyPr rtlCol="0" anchor="ctr"/>
+            <a:lstStyle/>
+            <a:p>
+              <a:pPr algn="ctr"/>
+            </a:p>
+          </p:txBody>
+        </p:sp>
+        <p:sp>
+          <p:nvSpPr>
+            <p:cNvPr id="1062" name="BrandDeck Diagram Text 3"/>
             <p:cNvSpPr txBox="1"/>
             <p:nvPr/>
           </p:nvSpPr>
           <p:spPr>
             <a:xfrm>
-              <a:off x="6877368" y="3180337"/>
-              <a:ext cx="1622106" cy="1197864"/>
+              <a:off x="1302105" y="3737894"/>
+              <a:ext cx="4193438" cy="857879"/>
             </a:xfrm>
             <a:prstGeom prst="rect">
               <a:avLst/>
@@ -12053,32 +11671,13 @@
                 </a:lnSpc>
               </a:pPr>
               <a:r>
-                <a:rPr sz="1410" b="1">
+                <a:rPr sz="1600" b="0">
                   <a:solidFill>
                     <a:srgbClr val="000000"/>
                   </a:solidFill>
                   <a:latin typeface="Play"/>
                 </a:rPr>
-                <a:t>Финал</a:t>
-              </a:r>
-            </a:p>
-            <a:p>
-              <a:pPr algn="l">
-                <a:lnSpc>
-                  <a:spcPct val="110000"/>
-                </a:lnSpc>
-                <a:spcBef>
-                  <a:spcPts val="352"/>
-                </a:spcBef>
-              </a:pPr>
-              <a:r>
-                <a:rPr sz="1410" b="0">
-                  <a:solidFill>
-                    <a:srgbClr val="000000"/>
-                  </a:solidFill>
-                  <a:latin typeface="Play"/>
-                </a:rPr>
-                <a:t>Анализ метрик эффективности</a:t>
+                <a:t>Успех измеряется временем поиска и долей закрытых обращений.</a:t>
               </a:r>
             </a:p>
           </p:txBody>
